--- a/outputs/019e93bf-5861-7ba2-af6a-d3677b8793cd/presentations/lab-tracker-research-group/output/lab-tracker-research-group-presentation.pptx
+++ b/outputs/019e93bf-5861-7ba2-af6a-d3677b8793cd/presentations/lab-tracker-research-group/output/lab-tracker-research-group-presentation.pptx
@@ -20,10 +20,8 @@
     <p:sldId xmlns:r="http://schemas.openxmlformats.org/officeDocument/2006/relationships" id="265" r:id="R7e4db9c68f134c70"/>
     <p:sldId xmlns:r="http://schemas.openxmlformats.org/officeDocument/2006/relationships" id="266" r:id="R0ab062100e8742e5"/>
     <p:sldId xmlns:r="http://schemas.openxmlformats.org/officeDocument/2006/relationships" id="267" r:id="Re46291e872aa4b27"/>
-    <p:sldId xmlns:r="http://schemas.openxmlformats.org/officeDocument/2006/relationships" id="268" r:id="R6cb179191c484854"/>
     <p:sldId xmlns:r="http://schemas.openxmlformats.org/officeDocument/2006/relationships" id="269" r:id="Rd891956bd4df4dfd"/>
     <p:sldId xmlns:r="http://schemas.openxmlformats.org/officeDocument/2006/relationships" id="270" r:id="Ra3dcef098af44e1b"/>
-    <p:sldId xmlns:r="http://schemas.openxmlformats.org/officeDocument/2006/relationships" id="271" r:id="R48a3847d1f6c4b98"/>
     <p:sldId xmlns:r="http://schemas.openxmlformats.org/officeDocument/2006/relationships" id="272" r:id="R3caa659d082a40db"/>
     <p:sldId xmlns:r="http://schemas.openxmlformats.org/officeDocument/2006/relationships" id="273" r:id="R62a17a1b879646f8"/>
     <p:sldId xmlns:r="http://schemas.openxmlformats.org/officeDocument/2006/relationships" id="274" r:id="R047b4bc82ebb4b21"/>
@@ -735,72 +733,6 @@
 </p:notes>
 </file>
 
-<file path=ppt/notesSlides/notesSlide13.xml><?xml version="1.0" encoding="utf-8"?>
-<p:notes xmlns:p="http://schemas.openxmlformats.org/presentationml/2006/main">
-  <p:cSld>
-    <p:spTree>
-      <p:nvGrpSpPr>
-        <p:cNvPr id="1" name=""/>
-        <p:cNvGrpSpPr/>
-        <p:nvPr/>
-      </p:nvGrpSpPr>
-      <p:grpSpPr>
-        <a:xfrm xmlns:a="http://schemas.openxmlformats.org/drawingml/2006/main"/>
-      </p:grpSpPr>
-      <p:sp>
-        <p:nvSpPr>
-          <p:cNvPr id="2" name="Slide Image Placeholder 1"/>
-          <p:cNvSpPr>
-            <a:spLocks xmlns:a="http://schemas.openxmlformats.org/drawingml/2006/main" noGrp="1"/>
-          </p:cNvSpPr>
-          <p:nvPr>
-            <p:ph type="sldImg" idx="0"/>
-          </p:nvPr>
-        </p:nvSpPr>
-        <p:spPr/>
-      </p:sp>
-      <p:sp>
-        <p:nvSpPr>
-          <p:cNvPr id="3" name="Notes Placeholder 2"/>
-          <p:cNvSpPr>
-            <a:spLocks xmlns:a="http://schemas.openxmlformats.org/drawingml/2006/main" noGrp="1"/>
-          </p:cNvSpPr>
-          <p:nvPr>
-            <p:ph type="body" idx="1"/>
-          </p:nvPr>
-        </p:nvSpPr>
-        <p:spPr/>
-        <p:txBody>
-          <a:bodyPr xmlns:a="http://schemas.openxmlformats.org/drawingml/2006/main"/>
-          <a:lstStyle xmlns:a="http://schemas.openxmlformats.org/drawingml/2006/main"/>
-          <a:p xmlns:a="http://schemas.openxmlformats.org/drawingml/2006/main"/>
-        </p:txBody>
-      </p:sp>
-      <p:sp>
-        <p:nvSpPr>
-          <p:cNvPr id="4" name="Slide Number Placeholder 3"/>
-          <p:cNvSpPr>
-            <a:spLocks xmlns:a="http://schemas.openxmlformats.org/drawingml/2006/main" noGrp="1"/>
-          </p:cNvSpPr>
-          <p:nvPr>
-            <p:ph type="sldNum" idx="5"/>
-          </p:nvPr>
-        </p:nvSpPr>
-        <p:spPr/>
-        <p:txBody>
-          <a:bodyPr xmlns:a="http://schemas.openxmlformats.org/drawingml/2006/main"/>
-          <a:lstStyle xmlns:a="http://schemas.openxmlformats.org/drawingml/2006/main"/>
-          <a:p xmlns:a="http://schemas.openxmlformats.org/drawingml/2006/main"/>
-        </p:txBody>
-      </p:sp>
-    </p:spTree>
-  </p:cSld>
-  <p:clrMapOvr>
-    <a:masterClrMapping xmlns:a="http://schemas.openxmlformats.org/drawingml/2006/main"/>
-  </p:clrMapOvr>
-</p:notes>
-</file>
-
 <file path=ppt/notesSlides/notesSlide14.xml><?xml version="1.0" encoding="utf-8"?>
 <p:notes xmlns:p="http://schemas.openxmlformats.org/presentationml/2006/main">
   <p:cSld>
@@ -868,72 +800,6 @@
 </file>
 
 <file path=ppt/notesSlides/notesSlide15.xml><?xml version="1.0" encoding="utf-8"?>
-<p:notes xmlns:p="http://schemas.openxmlformats.org/presentationml/2006/main">
-  <p:cSld>
-    <p:spTree>
-      <p:nvGrpSpPr>
-        <p:cNvPr id="1" name=""/>
-        <p:cNvGrpSpPr/>
-        <p:nvPr/>
-      </p:nvGrpSpPr>
-      <p:grpSpPr>
-        <a:xfrm xmlns:a="http://schemas.openxmlformats.org/drawingml/2006/main"/>
-      </p:grpSpPr>
-      <p:sp>
-        <p:nvSpPr>
-          <p:cNvPr id="2" name="Slide Image Placeholder 1"/>
-          <p:cNvSpPr>
-            <a:spLocks xmlns:a="http://schemas.openxmlformats.org/drawingml/2006/main" noGrp="1"/>
-          </p:cNvSpPr>
-          <p:nvPr>
-            <p:ph type="sldImg" idx="0"/>
-          </p:nvPr>
-        </p:nvSpPr>
-        <p:spPr/>
-      </p:sp>
-      <p:sp>
-        <p:nvSpPr>
-          <p:cNvPr id="3" name="Notes Placeholder 2"/>
-          <p:cNvSpPr>
-            <a:spLocks xmlns:a="http://schemas.openxmlformats.org/drawingml/2006/main" noGrp="1"/>
-          </p:cNvSpPr>
-          <p:nvPr>
-            <p:ph type="body" idx="1"/>
-          </p:nvPr>
-        </p:nvSpPr>
-        <p:spPr/>
-        <p:txBody>
-          <a:bodyPr xmlns:a="http://schemas.openxmlformats.org/drawingml/2006/main"/>
-          <a:lstStyle xmlns:a="http://schemas.openxmlformats.org/drawingml/2006/main"/>
-          <a:p xmlns:a="http://schemas.openxmlformats.org/drawingml/2006/main"/>
-        </p:txBody>
-      </p:sp>
-      <p:sp>
-        <p:nvSpPr>
-          <p:cNvPr id="4" name="Slide Number Placeholder 3"/>
-          <p:cNvSpPr>
-            <a:spLocks xmlns:a="http://schemas.openxmlformats.org/drawingml/2006/main" noGrp="1"/>
-          </p:cNvSpPr>
-          <p:nvPr>
-            <p:ph type="sldNum" idx="5"/>
-          </p:nvPr>
-        </p:nvSpPr>
-        <p:spPr/>
-        <p:txBody>
-          <a:bodyPr xmlns:a="http://schemas.openxmlformats.org/drawingml/2006/main"/>
-          <a:lstStyle xmlns:a="http://schemas.openxmlformats.org/drawingml/2006/main"/>
-          <a:p xmlns:a="http://schemas.openxmlformats.org/drawingml/2006/main"/>
-        </p:txBody>
-      </p:sp>
-    </p:spTree>
-  </p:cSld>
-  <p:clrMapOvr>
-    <a:masterClrMapping xmlns:a="http://schemas.openxmlformats.org/drawingml/2006/main"/>
-  </p:clrMapOvr>
-</p:notes>
-</file>
-
-<file path=ppt/notesSlides/notesSlide16.xml><?xml version="1.0" encoding="utf-8"?>
 <p:notes xmlns:p="http://schemas.openxmlformats.org/presentationml/2006/main">
   <p:cSld>
     <p:spTree>
@@ -4160,7 +4026,7 @@
           </a:ln>
         </p:spPr>
         <p:txBody>
-          <a:bodyPr xmlns:a="http://schemas.openxmlformats.org/drawingml/2006/main" lIns="0" tIns="0" rIns="0" bIns="0" anchor="ctr"/>
+          <a:bodyPr xmlns:a="http://schemas.openxmlformats.org/drawingml/2006/main" lIns="0" tIns="0" rIns="0" bIns="0" anchor="ctr" wrap="square"/>
           <a:lstStyle xmlns:a="http://schemas.openxmlformats.org/drawingml/2006/main"/>
           <a:p xmlns:a="http://schemas.openxmlformats.org/drawingml/2006/main">
             <a:pPr algn="r">
@@ -4179,8 +4045,6 @@
                   <a:srgbClr val="697277"/>
                 </a:solidFill>
                 <a:latin typeface="Aptos"/>
-                <a:ea typeface="Aptos"/>
-                <a:cs typeface="Aptos"/>
               </a:rPr>
               <a:t>01</a:t>
             </a:r>
@@ -4241,6 +4105,10 @@
             <a:prstDash val="solid"/>
           </a:ln>
         </p:spPr>
+        <p:txBody xmlns:a="http://schemas.openxmlformats.org/drawingml/2006/main">
+          <a:bodyPr/>
+          <a:p/>
+        </p:txBody>
       </p:sp>
       <p:sp>
         <p:nvSpPr>
@@ -4338,6 +4206,10 @@
             <a:prstDash val="solid"/>
           </a:ln>
         </p:spPr>
+        <p:txBody xmlns:a="http://schemas.openxmlformats.org/drawingml/2006/main">
+          <a:bodyPr/>
+          <a:p/>
+        </p:txBody>
       </p:sp>
       <p:sp>
         <p:nvSpPr>
@@ -4440,7 +4312,7 @@
           </a:ln>
         </p:spPr>
         <p:txBody>
-          <a:bodyPr xmlns:a="http://schemas.openxmlformats.org/drawingml/2006/main" lIns="0" tIns="0" rIns="0" bIns="0" anchor="t"/>
+          <a:bodyPr xmlns:a="http://schemas.openxmlformats.org/drawingml/2006/main" lIns="0" tIns="0" rIns="0" bIns="0" anchor="t" wrap="square"/>
           <a:lstStyle xmlns:a="http://schemas.openxmlformats.org/drawingml/2006/main"/>
           <a:p xmlns:a="http://schemas.openxmlformats.org/drawingml/2006/main">
             <a:pPr algn="r">
@@ -4459,8 +4331,6 @@
                   <a:srgbClr val="697277"/>
                 </a:solidFill>
                 <a:latin typeface="Aptos"/>
-                <a:ea typeface="Aptos"/>
-                <a:cs typeface="Aptos"/>
               </a:rPr>
               <a:t>10</a:t>
             </a:r>
@@ -4563,6 +4433,10 @@
             <a:prstDash val="solid"/>
           </a:ln>
         </p:spPr>
+        <p:txBody xmlns:a="http://schemas.openxmlformats.org/drawingml/2006/main">
+          <a:bodyPr/>
+          <a:p/>
+        </p:txBody>
       </p:sp>
       <p:sp>
         <p:nvSpPr>
@@ -4601,7 +4475,7 @@
           </a:ln>
         </p:spPr>
         <p:txBody>
-          <a:bodyPr xmlns:a="http://schemas.openxmlformats.org/drawingml/2006/main" lIns="0" tIns="0" rIns="0" bIns="0" anchor="ctr"/>
+          <a:bodyPr xmlns:a="http://schemas.openxmlformats.org/drawingml/2006/main" lIns="0" tIns="0" rIns="0" bIns="0" anchor="ctr" wrap="square"/>
           <a:lstStyle xmlns:a="http://schemas.openxmlformats.org/drawingml/2006/main"/>
           <a:p xmlns:a="http://schemas.openxmlformats.org/drawingml/2006/main">
             <a:pPr algn="ctr">
@@ -4620,10 +4494,8 @@
                   <a:srgbClr val="20262A"/>
                 </a:solidFill>
                 <a:latin typeface="Aptos"/>
-                <a:ea typeface="Aptos"/>
-                <a:cs typeface="Aptos"/>
               </a:rPr>
-              <a:t>ELN note</a:t>
+              <a:t>bench note (fly07)</a:t>
             </a:r>
           </a:p>
         </p:txBody>
@@ -4660,6 +4532,10 @@
             <a:prstDash val="solid"/>
           </a:ln>
         </p:spPr>
+        <p:txBody xmlns:a="http://schemas.openxmlformats.org/drawingml/2006/main">
+          <a:bodyPr/>
+          <a:p/>
+        </p:txBody>
       </p:sp>
       <p:sp>
         <p:nvSpPr>
@@ -4698,7 +4574,7 @@
           </a:ln>
         </p:spPr>
         <p:txBody>
-          <a:bodyPr xmlns:a="http://schemas.openxmlformats.org/drawingml/2006/main" lIns="0" tIns="0" rIns="0" bIns="0" anchor="ctr"/>
+          <a:bodyPr xmlns:a="http://schemas.openxmlformats.org/drawingml/2006/main" lIns="0" tIns="0" rIns="0" bIns="0" anchor="ctr" wrap="square"/>
           <a:lstStyle xmlns:a="http://schemas.openxmlformats.org/drawingml/2006/main"/>
           <a:p xmlns:a="http://schemas.openxmlformats.org/drawingml/2006/main">
             <a:pPr algn="ctr">
@@ -4717,12 +4593,22 @@
                   <a:srgbClr val="20262A"/>
                 </a:solidFill>
                 <a:latin typeface="Aptos"/>
-                <a:ea typeface="Aptos"/>
-                <a:cs typeface="Aptos"/>
               </a:rPr>
-              <a:t>data file</a:t>
+              <a:t>2025_12_10_Rig2_</a:t>
             </a:r>
           </a:p>
+          <a:p xmlns:a="http://schemas.openxmlformats.org/drawingml/2006/main">
+            <a:pPr algn="ctr"/>
+            <a:r>
+              <a:rPr sz="1050" b="0">
+                <a:solidFill>
+                  <a:srgbClr val="20262A"/>
+                </a:solidFill>
+                <a:latin typeface="Aptos"/>
+              </a:rPr>
+              <a:t>session001.nwb</a:t>
+            </a:r>
+          </a:p>
         </p:txBody>
       </p:sp>
       <p:sp>
@@ -4757,6 +4643,10 @@
             <a:prstDash val="solid"/>
           </a:ln>
         </p:spPr>
+        <p:txBody xmlns:a="http://schemas.openxmlformats.org/drawingml/2006/main">
+          <a:bodyPr/>
+          <a:p/>
+        </p:txBody>
       </p:sp>
       <p:sp>
         <p:nvSpPr>
@@ -4795,7 +4685,7 @@
           </a:ln>
         </p:spPr>
         <p:txBody>
-          <a:bodyPr xmlns:a="http://schemas.openxmlformats.org/drawingml/2006/main" lIns="0" tIns="0" rIns="0" bIns="0" anchor="ctr"/>
+          <a:bodyPr xmlns:a="http://schemas.openxmlformats.org/drawingml/2006/main" lIns="0" tIns="0" rIns="0" bIns="0" anchor="ctr" wrap="square"/>
           <a:lstStyle xmlns:a="http://schemas.openxmlformats.org/drawingml/2006/main"/>
           <a:p xmlns:a="http://schemas.openxmlformats.org/drawingml/2006/main">
             <a:pPr algn="ctr">
@@ -4814,12 +4704,22 @@
                   <a:srgbClr val="20262A"/>
                 </a:solidFill>
                 <a:latin typeface="Aptos"/>
-                <a:ea typeface="Aptos"/>
-                <a:cs typeface="Aptos"/>
               </a:rPr>
-              <a:t>question addressed</a:t>
+              <a:t>Does lateral inhibition</a:t>
             </a:r>
           </a:p>
+          <a:p xmlns:a="http://schemas.openxmlformats.org/drawingml/2006/main">
+            <a:pPr algn="ctr"/>
+            <a:r>
+              <a:rPr sz="1050" b="1">
+                <a:solidFill>
+                  <a:srgbClr val="20262A"/>
+                </a:solidFill>
+                <a:latin typeface="Aptos"/>
+              </a:rPr>
+              <a:t>normalize PN output?</a:t>
+            </a:r>
+          </a:p>
         </p:txBody>
       </p:sp>
       <p:sp>
@@ -4854,6 +4754,10 @@
             <a:prstDash val="solid"/>
           </a:ln>
         </p:spPr>
+        <p:txBody xmlns:a="http://schemas.openxmlformats.org/drawingml/2006/main">
+          <a:bodyPr/>
+          <a:p/>
+        </p:txBody>
       </p:sp>
       <p:sp>
         <p:nvSpPr>
@@ -4892,7 +4796,7 @@
           </a:ln>
         </p:spPr>
         <p:txBody>
-          <a:bodyPr xmlns:a="http://schemas.openxmlformats.org/drawingml/2006/main" lIns="0" tIns="0" rIns="0" bIns="0" anchor="ctr"/>
+          <a:bodyPr xmlns:a="http://schemas.openxmlformats.org/drawingml/2006/main" lIns="0" tIns="0" rIns="0" bIns="0" anchor="ctr" wrap="square"/>
           <a:lstStyle xmlns:a="http://schemas.openxmlformats.org/drawingml/2006/main"/>
           <a:p xmlns:a="http://schemas.openxmlformats.org/drawingml/2006/main">
             <a:pPr algn="ctr">
@@ -4911,10 +4815,8 @@
                   <a:srgbClr val="20262A"/>
                 </a:solidFill>
                 <a:latin typeface="Aptos"/>
-                <a:ea typeface="Aptos"/>
-                <a:cs typeface="Aptos"/>
               </a:rPr>
-              <a:t>evidence for claim</a:t>
+              <a:t>PN gain ×0.6 (n=18)</a:t>
             </a:r>
           </a:p>
         </p:txBody>
@@ -4951,6 +4853,10 @@
             <a:prstDash val="solid"/>
           </a:ln>
         </p:spPr>
+        <p:txBody xmlns:a="http://schemas.openxmlformats.org/drawingml/2006/main">
+          <a:bodyPr/>
+          <a:p/>
+        </p:txBody>
       </p:sp>
       <p:sp>
         <p:nvSpPr>
@@ -4989,7 +4895,7 @@
           </a:ln>
         </p:spPr>
         <p:txBody>
-          <a:bodyPr xmlns:a="http://schemas.openxmlformats.org/drawingml/2006/main" lIns="0" tIns="0" rIns="0" bIns="0" anchor="ctr"/>
+          <a:bodyPr xmlns:a="http://schemas.openxmlformats.org/drawingml/2006/main" lIns="0" tIns="0" rIns="0" bIns="0" anchor="ctr" wrap="square"/>
           <a:lstStyle xmlns:a="http://schemas.openxmlformats.org/drawingml/2006/main"/>
           <a:p xmlns:a="http://schemas.openxmlformats.org/drawingml/2006/main">
             <a:pPr algn="ctr">
@@ -5008,10 +4914,8 @@
                   <a:srgbClr val="20262A"/>
                 </a:solidFill>
                 <a:latin typeface="Aptos"/>
-                <a:ea typeface="Aptos"/>
-                <a:cs typeface="Aptos"/>
               </a:rPr>
-              <a:t>analysis</a:t>
+              <a:t>divisive-norm fit</a:t>
             </a:r>
           </a:p>
         </p:txBody>
@@ -5048,6 +4952,10 @@
             <a:prstDash val="solid"/>
           </a:ln>
         </p:spPr>
+        <p:txBody xmlns:a="http://schemas.openxmlformats.org/drawingml/2006/main">
+          <a:bodyPr/>
+          <a:p/>
+        </p:txBody>
       </p:sp>
       <p:sp>
         <p:nvSpPr>
@@ -5086,7 +4994,7 @@
           </a:ln>
         </p:spPr>
         <p:txBody>
-          <a:bodyPr xmlns:a="http://schemas.openxmlformats.org/drawingml/2006/main" lIns="0" tIns="0" rIns="0" bIns="0" anchor="ctr"/>
+          <a:bodyPr xmlns:a="http://schemas.openxmlformats.org/drawingml/2006/main" lIns="0" tIns="0" rIns="0" bIns="0" anchor="ctr" wrap="square"/>
           <a:lstStyle xmlns:a="http://schemas.openxmlformats.org/drawingml/2006/main"/>
           <a:p xmlns:a="http://schemas.openxmlformats.org/drawingml/2006/main">
             <a:pPr algn="ctr">
@@ -5105,10 +5013,8 @@
                   <a:srgbClr val="20262A"/>
                 </a:solidFill>
                 <a:latin typeface="Aptos"/>
-                <a:ea typeface="Aptos"/>
-                <a:cs typeface="Aptos"/>
               </a:rPr>
-              <a:t>figure</a:t>
+              <a:t>Fig 3b</a:t>
             </a:r>
           </a:p>
         </p:txBody>
@@ -5145,6 +5051,10 @@
             <a:prstDash val="solid"/>
           </a:ln>
         </p:spPr>
+        <p:txBody xmlns:a="http://schemas.openxmlformats.org/drawingml/2006/main">
+          <a:bodyPr/>
+          <a:p/>
+        </p:txBody>
       </p:sp>
       <p:sp>
         <p:nvSpPr>
@@ -5178,6 +5088,10 @@
             <a:prstDash val="solid"/>
           </a:ln>
         </p:spPr>
+        <p:txBody xmlns:a="http://schemas.openxmlformats.org/drawingml/2006/main">
+          <a:bodyPr/>
+          <a:p/>
+        </p:txBody>
       </p:sp>
       <p:sp>
         <p:nvSpPr>
@@ -5211,6 +5125,10 @@
             <a:prstDash val="solid"/>
           </a:ln>
         </p:spPr>
+        <p:txBody xmlns:a="http://schemas.openxmlformats.org/drawingml/2006/main">
+          <a:bodyPr/>
+          <a:p/>
+        </p:txBody>
       </p:sp>
       <p:sp>
         <p:nvSpPr>
@@ -5244,6 +5162,10 @@
             <a:prstDash val="solid"/>
           </a:ln>
         </p:spPr>
+        <p:txBody xmlns:a="http://schemas.openxmlformats.org/drawingml/2006/main">
+          <a:bodyPr/>
+          <a:p/>
+        </p:txBody>
       </p:sp>
       <p:sp>
         <p:nvSpPr>
@@ -5562,7 +5484,7 @@
           </a:ln>
         </p:spPr>
         <p:txBody>
-          <a:bodyPr xmlns:a="http://schemas.openxmlformats.org/drawingml/2006/main" lIns="0" tIns="0" rIns="0" bIns="0" anchor="t"/>
+          <a:bodyPr xmlns:a="http://schemas.openxmlformats.org/drawingml/2006/main" lIns="0" tIns="0" rIns="0" bIns="0" anchor="t" wrap="square"/>
           <a:lstStyle xmlns:a="http://schemas.openxmlformats.org/drawingml/2006/main"/>
           <a:p xmlns:a="http://schemas.openxmlformats.org/drawingml/2006/main">
             <a:pPr algn="r">
@@ -5581,8 +5503,6 @@
                   <a:srgbClr val="697277"/>
                 </a:solidFill>
                 <a:latin typeface="Aptos"/>
-                <a:ea typeface="Aptos"/>
-                <a:cs typeface="Aptos"/>
               </a:rPr>
               <a:t>11</a:t>
             </a:r>
@@ -6391,7 +6311,7 @@
           </a:ln>
         </p:spPr>
         <p:txBody>
-          <a:bodyPr xmlns:a="http://schemas.openxmlformats.org/drawingml/2006/main" lIns="0" tIns="0" rIns="0" bIns="0" anchor="t"/>
+          <a:bodyPr xmlns:a="http://schemas.openxmlformats.org/drawingml/2006/main" lIns="0" tIns="0" rIns="0" bIns="0" anchor="t" wrap="square"/>
           <a:lstStyle xmlns:a="http://schemas.openxmlformats.org/drawingml/2006/main"/>
           <a:p xmlns:a="http://schemas.openxmlformats.org/drawingml/2006/main">
             <a:pPr algn="r">
@@ -6410,8 +6330,6 @@
                   <a:srgbClr val="697277"/>
                 </a:solidFill>
                 <a:latin typeface="Aptos"/>
-                <a:ea typeface="Aptos"/>
-                <a:cs typeface="Aptos"/>
               </a:rPr>
               <a:t>12</a:t>
             </a:r>
@@ -7004,1231 +6922,6 @@
     <p:extLst>
       <p:ext uri="{BB962C8B-B14F-4D97-AF65-F5344CB8AC3E}">
         <p14:creationId xmlns:p14="http://schemas.microsoft.com/office/powerpoint/2010/main" val="850313168"/>
-      </p:ext>
-    </p:extLst>
-  </p:cSld>
-</p:sld>
-</file>
-
-<file path=ppt/slides/slide13.xml><?xml version="1.0" encoding="utf-8"?>
-<p:sld xmlns:p="http://schemas.openxmlformats.org/presentationml/2006/main">
-  <p:cSld>
-    <p:spTree>
-      <p:nvGrpSpPr>
-        <p:cNvPr id="1" name=""/>
-        <p:cNvGrpSpPr/>
-        <p:nvPr/>
-      </p:nvGrpSpPr>
-      <p:grpSpPr>
-        <a:xfrm xmlns:a="http://schemas.openxmlformats.org/drawingml/2006/main"/>
-      </p:grpSpPr>
-      <p:sp>
-        <p:nvSpPr>
-          <p:cNvPr id="1" name="background">
-            <a:extLst xmlns:a="http://schemas.openxmlformats.org/drawingml/2006/main">
-              <a:ext uri="{FF2B5EF4-FFF2-40B4-BE49-F238E27FC236}">
-                <a16:creationId xmlns:a16="http://schemas.microsoft.com/office/drawing/2014/main" id="{357EA513-C75A-4B74-A7CC-59FB59FEDC27}"/>
-              </a:ext>
-            </a:extLst>
-          </p:cNvPr>
-          <p:cNvSpPr>
-            <a:spLocks xmlns:a="http://schemas.openxmlformats.org/drawingml/2006/main" noGrp="1"/>
-          </p:cNvSpPr>
-          <p:nvPr/>
-        </p:nvSpPr>
-        <p:spPr>
-          <a:xfrm xmlns:a="http://schemas.openxmlformats.org/drawingml/2006/main">
-            <a:off x="0" y="0"/>
-            <a:ext cx="12192000" cy="6858000"/>
-          </a:xfrm>
-          <a:prstGeom xmlns:a="http://schemas.openxmlformats.org/drawingml/2006/main" prst="rect">
-            <a:avLst/>
-          </a:prstGeom>
-          <a:solidFill xmlns:a="http://schemas.openxmlformats.org/drawingml/2006/main">
-            <a:srgbClr val="F7F6F1"/>
-          </a:solidFill>
-          <a:ln xmlns:a="http://schemas.openxmlformats.org/drawingml/2006/main" w="0">
-            <a:solidFill>
-              <a:srgbClr val="F7F6F1"/>
-            </a:solidFill>
-            <a:prstDash val="solid"/>
-          </a:ln>
-        </p:spPr>
-      </p:sp>
-      <p:sp>
-        <p:nvSpPr>
-          <p:cNvPr id="2" name="section">
-            <a:extLst xmlns:a="http://schemas.openxmlformats.org/drawingml/2006/main">
-              <a:ext uri="{FF2B5EF4-FFF2-40B4-BE49-F238E27FC236}">
-                <a16:creationId xmlns:a16="http://schemas.microsoft.com/office/drawing/2014/main" id="{4960CF68-4143-4534-9084-94FA52274DBC}"/>
-              </a:ext>
-            </a:extLst>
-          </p:cNvPr>
-          <p:cNvSpPr>
-            <a:spLocks xmlns:a="http://schemas.openxmlformats.org/drawingml/2006/main" noGrp="1"/>
-          </p:cNvSpPr>
-          <p:nvPr/>
-        </p:nvSpPr>
-        <p:spPr>
-          <a:xfrm xmlns:a="http://schemas.openxmlformats.org/drawingml/2006/main">
-            <a:off x="609600" y="400050"/>
-            <a:ext cx="4095750" cy="228600"/>
-          </a:xfrm>
-          <a:prstGeom xmlns:a="http://schemas.openxmlformats.org/drawingml/2006/main" prst="rect">
-            <a:avLst/>
-          </a:prstGeom>
-          <a:solidFill xmlns:a="http://schemas.openxmlformats.org/drawingml/2006/main">
-            <a:srgbClr val="000000">
-              <a:alpha val="0"/>
-            </a:srgbClr>
-          </a:solidFill>
-          <a:ln xmlns:a="http://schemas.openxmlformats.org/drawingml/2006/main" w="0">
-            <a:solidFill>
-              <a:srgbClr val="000000">
-                <a:alpha val="0"/>
-              </a:srgbClr>
-            </a:solidFill>
-            <a:prstDash val="solid"/>
-          </a:ln>
-        </p:spPr>
-        <p:txBody>
-          <a:bodyPr xmlns:a="http://schemas.openxmlformats.org/drawingml/2006/main" lIns="0" tIns="0" rIns="0" bIns="0" anchor="t"/>
-          <a:lstStyle xmlns:a="http://schemas.openxmlformats.org/drawingml/2006/main"/>
-          <a:p xmlns:a="http://schemas.openxmlformats.org/drawingml/2006/main">
-            <a:pPr algn="l">
-              <a:defRPr sz="975" b="1">
-                <a:solidFill>
-                  <a:srgbClr val="2F5F6F"/>
-                </a:solidFill>
-                <a:latin typeface="Aptos"/>
-                <a:ea typeface="Aptos"/>
-                <a:cs typeface="Aptos"/>
-              </a:defRPr>
-            </a:pPr>
-            <a:r>
-              <a:rPr sz="975" b="1">
-                <a:solidFill>
-                  <a:srgbClr val="2F5F6F"/>
-                </a:solidFill>
-                <a:latin typeface="Aptos"/>
-                <a:ea typeface="Aptos"/>
-                <a:cs typeface="Aptos"/>
-              </a:rPr>
-              <a:t>QUESTIONS FIRST</a:t>
-            </a:r>
-          </a:p>
-        </p:txBody>
-      </p:sp>
-      <p:sp>
-        <p:nvSpPr>
-          <p:cNvPr id="3" name="section-rule">
-            <a:extLst xmlns:a="http://schemas.openxmlformats.org/drawingml/2006/main">
-              <a:ext uri="{FF2B5EF4-FFF2-40B4-BE49-F238E27FC236}">
-                <a16:creationId xmlns:a16="http://schemas.microsoft.com/office/drawing/2014/main" id="{044CCDE6-91EA-489A-8ED1-E0330E01CB4F}"/>
-              </a:ext>
-            </a:extLst>
-          </p:cNvPr>
-          <p:cNvSpPr>
-            <a:spLocks xmlns:a="http://schemas.openxmlformats.org/drawingml/2006/main" noGrp="1"/>
-          </p:cNvSpPr>
-          <p:nvPr/>
-        </p:nvSpPr>
-        <p:spPr>
-          <a:xfrm xmlns:a="http://schemas.openxmlformats.org/drawingml/2006/main">
-            <a:off x="609600" y="838200"/>
-            <a:ext cx="876300" cy="19050"/>
-          </a:xfrm>
-          <a:prstGeom xmlns:a="http://schemas.openxmlformats.org/drawingml/2006/main" prst="rect">
-            <a:avLst/>
-          </a:prstGeom>
-          <a:solidFill xmlns:a="http://schemas.openxmlformats.org/drawingml/2006/main">
-            <a:srgbClr val="2F5F6F"/>
-          </a:solidFill>
-          <a:ln xmlns:a="http://schemas.openxmlformats.org/drawingml/2006/main" w="0">
-            <a:solidFill>
-              <a:srgbClr val="2F5F6F"/>
-            </a:solidFill>
-            <a:prstDash val="solid"/>
-          </a:ln>
-        </p:spPr>
-      </p:sp>
-      <p:sp>
-        <p:nvSpPr>
-          <p:cNvPr id="4" name="source-note">
-            <a:extLst xmlns:a="http://schemas.openxmlformats.org/drawingml/2006/main">
-              <a:ext uri="{FF2B5EF4-FFF2-40B4-BE49-F238E27FC236}">
-                <a16:creationId xmlns:a16="http://schemas.microsoft.com/office/drawing/2014/main" id="{F5E7619F-0BD4-4E27-A966-2C84B84DF948}"/>
-              </a:ext>
-            </a:extLst>
-          </p:cNvPr>
-          <p:cNvSpPr>
-            <a:spLocks xmlns:a="http://schemas.openxmlformats.org/drawingml/2006/main" noGrp="1"/>
-          </p:cNvSpPr>
-          <p:nvPr/>
-        </p:nvSpPr>
-        <p:spPr>
-          <a:xfrm xmlns:a="http://schemas.openxmlformats.org/drawingml/2006/main">
-            <a:off x="609600" y="6305550"/>
-            <a:ext cx="4000500" cy="171450"/>
-          </a:xfrm>
-          <a:prstGeom xmlns:a="http://schemas.openxmlformats.org/drawingml/2006/main" prst="rect">
-            <a:avLst/>
-          </a:prstGeom>
-          <a:solidFill xmlns:a="http://schemas.openxmlformats.org/drawingml/2006/main">
-            <a:srgbClr val="000000">
-              <a:alpha val="0"/>
-            </a:srgbClr>
-          </a:solidFill>
-          <a:ln xmlns:a="http://schemas.openxmlformats.org/drawingml/2006/main" w="0">
-            <a:solidFill>
-              <a:srgbClr val="000000">
-                <a:alpha val="0"/>
-              </a:srgbClr>
-            </a:solidFill>
-            <a:prstDash val="solid"/>
-          </a:ln>
-        </p:spPr>
-        <p:txBody>
-          <a:bodyPr xmlns:a="http://schemas.openxmlformats.org/drawingml/2006/main" lIns="0" tIns="0" rIns="0" bIns="0" anchor="t"/>
-          <a:lstStyle xmlns:a="http://schemas.openxmlformats.org/drawingml/2006/main"/>
-          <a:p xmlns:a="http://schemas.openxmlformats.org/drawingml/2006/main">
-            <a:pPr algn="l">
-              <a:defRPr sz="750" b="0">
-                <a:solidFill>
-                  <a:srgbClr val="697277"/>
-                </a:solidFill>
-                <a:latin typeface="Aptos"/>
-                <a:ea typeface="Aptos"/>
-                <a:cs typeface="Aptos"/>
-              </a:defRPr>
-            </a:pPr>
-            <a:r>
-              <a:rPr sz="750" b="0">
-                <a:solidFill>
-                  <a:srgbClr val="697277"/>
-                </a:solidFill>
-                <a:latin typeface="Aptos"/>
-                <a:ea typeface="Aptos"/>
-                <a:cs typeface="Aptos"/>
-              </a:rPr>
-              <a:t>Source: docs/research-group-presentation.md</a:t>
-            </a:r>
-          </a:p>
-        </p:txBody>
-      </p:sp>
-      <p:sp>
-        <p:nvSpPr>
-          <p:cNvPr id="5" name="slide-number">
-            <a:extLst xmlns:a="http://schemas.openxmlformats.org/drawingml/2006/main">
-              <a:ext uri="{FF2B5EF4-FFF2-40B4-BE49-F238E27FC236}">
-                <a16:creationId xmlns:a16="http://schemas.microsoft.com/office/drawing/2014/main" id="{94B2B384-7CF9-44A6-B1EF-B1A201D83245}"/>
-              </a:ext>
-            </a:extLst>
-          </p:cNvPr>
-          <p:cNvSpPr>
-            <a:spLocks xmlns:a="http://schemas.openxmlformats.org/drawingml/2006/main" noGrp="1"/>
-          </p:cNvSpPr>
-          <p:nvPr/>
-        </p:nvSpPr>
-        <p:spPr>
-          <a:xfrm xmlns:a="http://schemas.openxmlformats.org/drawingml/2006/main">
-            <a:off x="11163300" y="6305550"/>
-            <a:ext cx="419100" cy="171450"/>
-          </a:xfrm>
-          <a:prstGeom xmlns:a="http://schemas.openxmlformats.org/drawingml/2006/main" prst="rect">
-            <a:avLst/>
-          </a:prstGeom>
-          <a:solidFill xmlns:a="http://schemas.openxmlformats.org/drawingml/2006/main">
-            <a:srgbClr val="000000">
-              <a:alpha val="0"/>
-            </a:srgbClr>
-          </a:solidFill>
-          <a:ln xmlns:a="http://schemas.openxmlformats.org/drawingml/2006/main" w="0">
-            <a:solidFill>
-              <a:srgbClr val="000000">
-                <a:alpha val="0"/>
-              </a:srgbClr>
-            </a:solidFill>
-            <a:prstDash val="solid"/>
-          </a:ln>
-        </p:spPr>
-        <p:txBody>
-          <a:bodyPr xmlns:a="http://schemas.openxmlformats.org/drawingml/2006/main" lIns="0" tIns="0" rIns="0" bIns="0" anchor="t"/>
-          <a:lstStyle xmlns:a="http://schemas.openxmlformats.org/drawingml/2006/main"/>
-          <a:p xmlns:a="http://schemas.openxmlformats.org/drawingml/2006/main">
-            <a:pPr algn="r">
-              <a:defRPr sz="750" b="0">
-                <a:solidFill>
-                  <a:srgbClr val="697277"/>
-                </a:solidFill>
-                <a:latin typeface="Aptos"/>
-                <a:ea typeface="Aptos"/>
-                <a:cs typeface="Aptos"/>
-              </a:defRPr>
-            </a:pPr>
-            <a:r>
-              <a:rPr sz="750" b="0">
-                <a:solidFill>
-                  <a:srgbClr val="697277"/>
-                </a:solidFill>
-                <a:latin typeface="Aptos"/>
-                <a:ea typeface="Aptos"/>
-                <a:cs typeface="Aptos"/>
-              </a:rPr>
-              <a:t>13</a:t>
-            </a:r>
-          </a:p>
-        </p:txBody>
-      </p:sp>
-      <p:sp>
-        <p:nvSpPr>
-          <p:cNvPr id="6" name="headline">
-            <a:extLst xmlns:a="http://schemas.openxmlformats.org/drawingml/2006/main">
-              <a:ext uri="{FF2B5EF4-FFF2-40B4-BE49-F238E27FC236}">
-                <a16:creationId xmlns:a16="http://schemas.microsoft.com/office/drawing/2014/main" id="{DE87F9F1-98D8-45CE-B111-79F62FC3EE64}"/>
-              </a:ext>
-            </a:extLst>
-          </p:cNvPr>
-          <p:cNvSpPr>
-            <a:spLocks xmlns:a="http://schemas.openxmlformats.org/drawingml/2006/main" noGrp="1"/>
-          </p:cNvSpPr>
-          <p:nvPr/>
-        </p:nvSpPr>
-        <p:spPr>
-          <a:xfrm xmlns:a="http://schemas.openxmlformats.org/drawingml/2006/main">
-            <a:off x="609600" y="1162050"/>
-            <a:ext cx="9334500" cy="1428750"/>
-          </a:xfrm>
-          <a:prstGeom xmlns:a="http://schemas.openxmlformats.org/drawingml/2006/main" prst="rect">
-            <a:avLst/>
-          </a:prstGeom>
-          <a:solidFill xmlns:a="http://schemas.openxmlformats.org/drawingml/2006/main">
-            <a:srgbClr val="000000">
-              <a:alpha val="0"/>
-            </a:srgbClr>
-          </a:solidFill>
-          <a:ln xmlns:a="http://schemas.openxmlformats.org/drawingml/2006/main" w="0">
-            <a:solidFill>
-              <a:srgbClr val="000000">
-                <a:alpha val="0"/>
-              </a:srgbClr>
-            </a:solidFill>
-            <a:prstDash val="solid"/>
-          </a:ln>
-        </p:spPr>
-        <p:txBody>
-          <a:bodyPr xmlns:a="http://schemas.openxmlformats.org/drawingml/2006/main" lIns="0" tIns="0" rIns="0" bIns="0" anchor="t"/>
-          <a:lstStyle xmlns:a="http://schemas.openxmlformats.org/drawingml/2006/main"/>
-          <a:p xmlns:a="http://schemas.openxmlformats.org/drawingml/2006/main">
-            <a:pPr algn="l">
-              <a:defRPr sz="2775" b="1">
-                <a:solidFill>
-                  <a:srgbClr val="20262A"/>
-                </a:solidFill>
-                <a:latin typeface="Aptos Display"/>
-                <a:ea typeface="Aptos Display"/>
-                <a:cs typeface="Aptos Display"/>
-              </a:defRPr>
-            </a:pPr>
-            <a:r>
-              <a:rPr sz="2775" b="1">
-                <a:solidFill>
-                  <a:srgbClr val="20262A"/>
-                </a:solidFill>
-                <a:latin typeface="Aptos Display"/>
-                <a:ea typeface="Aptos Display"/>
-                <a:cs typeface="Aptos Display"/>
-              </a:rPr>
-              <a:t>Link datasets to the questions they address.</a:t>
-            </a:r>
-          </a:p>
-        </p:txBody>
-      </p:sp>
-      <p:sp>
-        <p:nvSpPr>
-          <p:cNvPr id="7" name="box-motivating question">
-            <a:extLst xmlns:a="http://schemas.openxmlformats.org/drawingml/2006/main">
-              <a:ext uri="{FF2B5EF4-FFF2-40B4-BE49-F238E27FC236}">
-                <a16:creationId xmlns:a16="http://schemas.microsoft.com/office/drawing/2014/main" id="{7AE35EBC-FF30-4B6F-A905-DF1C587E4014}"/>
-              </a:ext>
-            </a:extLst>
-          </p:cNvPr>
-          <p:cNvSpPr>
-            <a:spLocks xmlns:a="http://schemas.openxmlformats.org/drawingml/2006/main" noGrp="1"/>
-          </p:cNvSpPr>
-          <p:nvPr/>
-        </p:nvSpPr>
-        <p:spPr>
-          <a:xfrm xmlns:a="http://schemas.openxmlformats.org/drawingml/2006/main">
-            <a:off x="3962400" y="2952750"/>
-            <a:ext cx="3238500" cy="571500"/>
-          </a:xfrm>
-          <a:prstGeom xmlns:a="http://schemas.openxmlformats.org/drawingml/2006/main" prst="rect">
-            <a:avLst/>
-          </a:prstGeom>
-          <a:solidFill xmlns:a="http://schemas.openxmlformats.org/drawingml/2006/main">
-            <a:srgbClr val="FFFFFF"/>
-          </a:solidFill>
-          <a:ln xmlns:a="http://schemas.openxmlformats.org/drawingml/2006/main" w="11430">
-            <a:solidFill>
-              <a:srgbClr val="20262A"/>
-            </a:solidFill>
-            <a:prstDash val="solid"/>
-          </a:ln>
-        </p:spPr>
-      </p:sp>
-      <p:sp>
-        <p:nvSpPr>
-          <p:cNvPr id="8" name="label-motivating question">
-            <a:extLst xmlns:a="http://schemas.openxmlformats.org/drawingml/2006/main">
-              <a:ext uri="{FF2B5EF4-FFF2-40B4-BE49-F238E27FC236}">
-                <a16:creationId xmlns:a16="http://schemas.microsoft.com/office/drawing/2014/main" id="{560D1519-9DDD-47E8-AF25-1216EB130D90}"/>
-              </a:ext>
-            </a:extLst>
-          </p:cNvPr>
-          <p:cNvSpPr>
-            <a:spLocks xmlns:a="http://schemas.openxmlformats.org/drawingml/2006/main" noGrp="1"/>
-          </p:cNvSpPr>
-          <p:nvPr/>
-        </p:nvSpPr>
-        <p:spPr>
-          <a:xfrm xmlns:a="http://schemas.openxmlformats.org/drawingml/2006/main">
-            <a:off x="4095750" y="3067050"/>
-            <a:ext cx="2971800" cy="342900"/>
-          </a:xfrm>
-          <a:prstGeom xmlns:a="http://schemas.openxmlformats.org/drawingml/2006/main" prst="rect">
-            <a:avLst/>
-          </a:prstGeom>
-          <a:solidFill xmlns:a="http://schemas.openxmlformats.org/drawingml/2006/main">
-            <a:srgbClr val="000000">
-              <a:alpha val="0"/>
-            </a:srgbClr>
-          </a:solidFill>
-          <a:ln xmlns:a="http://schemas.openxmlformats.org/drawingml/2006/main" w="0">
-            <a:solidFill>
-              <a:srgbClr val="000000">
-                <a:alpha val="0"/>
-              </a:srgbClr>
-            </a:solidFill>
-            <a:prstDash val="solid"/>
-          </a:ln>
-        </p:spPr>
-        <p:txBody>
-          <a:bodyPr xmlns:a="http://schemas.openxmlformats.org/drawingml/2006/main" lIns="0" tIns="0" rIns="0" bIns="0" anchor="ctr"/>
-          <a:lstStyle xmlns:a="http://schemas.openxmlformats.org/drawingml/2006/main"/>
-          <a:p xmlns:a="http://schemas.openxmlformats.org/drawingml/2006/main">
-            <a:pPr algn="ctr">
-              <a:defRPr sz="1200" b="0">
-                <a:solidFill>
-                  <a:srgbClr val="20262A"/>
-                </a:solidFill>
-                <a:latin typeface="Aptos"/>
-                <a:ea typeface="Aptos"/>
-                <a:cs typeface="Aptos"/>
-              </a:defRPr>
-            </a:pPr>
-            <a:r>
-              <a:rPr sz="1200" b="0">
-                <a:solidFill>
-                  <a:srgbClr val="20262A"/>
-                </a:solidFill>
-                <a:latin typeface="Aptos"/>
-                <a:ea typeface="Aptos"/>
-                <a:cs typeface="Aptos"/>
-              </a:rPr>
-              <a:t>motivating question</a:t>
-            </a:r>
-          </a:p>
-        </p:txBody>
-      </p:sp>
-      <p:sp>
-        <p:nvSpPr>
-          <p:cNvPr id="9" name="box-answerable question">
-            <a:extLst xmlns:a="http://schemas.openxmlformats.org/drawingml/2006/main">
-              <a:ext uri="{FF2B5EF4-FFF2-40B4-BE49-F238E27FC236}">
-                <a16:creationId xmlns:a16="http://schemas.microsoft.com/office/drawing/2014/main" id="{3C8519A3-DE21-4CE3-9185-CDF29E89727B}"/>
-              </a:ext>
-            </a:extLst>
-          </p:cNvPr>
-          <p:cNvSpPr>
-            <a:spLocks xmlns:a="http://schemas.openxmlformats.org/drawingml/2006/main" noGrp="1"/>
-          </p:cNvSpPr>
-          <p:nvPr/>
-        </p:nvSpPr>
-        <p:spPr>
-          <a:xfrm xmlns:a="http://schemas.openxmlformats.org/drawingml/2006/main">
-            <a:off x="4152900" y="3829050"/>
-            <a:ext cx="2857500" cy="533400"/>
-          </a:xfrm>
-          <a:prstGeom xmlns:a="http://schemas.openxmlformats.org/drawingml/2006/main" prst="rect">
-            <a:avLst/>
-          </a:prstGeom>
-          <a:solidFill xmlns:a="http://schemas.openxmlformats.org/drawingml/2006/main">
-            <a:srgbClr val="FFFFFF"/>
-          </a:solidFill>
-          <a:ln xmlns:a="http://schemas.openxmlformats.org/drawingml/2006/main" w="11430">
-            <a:solidFill>
-              <a:srgbClr val="20262A"/>
-            </a:solidFill>
-            <a:prstDash val="solid"/>
-          </a:ln>
-        </p:spPr>
-      </p:sp>
-      <p:sp>
-        <p:nvSpPr>
-          <p:cNvPr id="10" name="label-answerable question">
-            <a:extLst xmlns:a="http://schemas.openxmlformats.org/drawingml/2006/main">
-              <a:ext uri="{FF2B5EF4-FFF2-40B4-BE49-F238E27FC236}">
-                <a16:creationId xmlns:a16="http://schemas.microsoft.com/office/drawing/2014/main" id="{B525F1B7-E993-43E0-A575-EBF87DD13D30}"/>
-              </a:ext>
-            </a:extLst>
-          </p:cNvPr>
-          <p:cNvSpPr>
-            <a:spLocks xmlns:a="http://schemas.openxmlformats.org/drawingml/2006/main" noGrp="1"/>
-          </p:cNvSpPr>
-          <p:nvPr/>
-        </p:nvSpPr>
-        <p:spPr>
-          <a:xfrm xmlns:a="http://schemas.openxmlformats.org/drawingml/2006/main">
-            <a:off x="4286250" y="3943350"/>
-            <a:ext cx="2590800" cy="304800"/>
-          </a:xfrm>
-          <a:prstGeom xmlns:a="http://schemas.openxmlformats.org/drawingml/2006/main" prst="rect">
-            <a:avLst/>
-          </a:prstGeom>
-          <a:solidFill xmlns:a="http://schemas.openxmlformats.org/drawingml/2006/main">
-            <a:srgbClr val="000000">
-              <a:alpha val="0"/>
-            </a:srgbClr>
-          </a:solidFill>
-          <a:ln xmlns:a="http://schemas.openxmlformats.org/drawingml/2006/main" w="0">
-            <a:solidFill>
-              <a:srgbClr val="000000">
-                <a:alpha val="0"/>
-              </a:srgbClr>
-            </a:solidFill>
-            <a:prstDash val="solid"/>
-          </a:ln>
-        </p:spPr>
-        <p:txBody>
-          <a:bodyPr xmlns:a="http://schemas.openxmlformats.org/drawingml/2006/main" lIns="0" tIns="0" rIns="0" bIns="0" anchor="ctr"/>
-          <a:lstStyle xmlns:a="http://schemas.openxmlformats.org/drawingml/2006/main"/>
-          <a:p xmlns:a="http://schemas.openxmlformats.org/drawingml/2006/main">
-            <a:pPr algn="ctr">
-              <a:defRPr sz="1200" b="0">
-                <a:solidFill>
-                  <a:srgbClr val="20262A"/>
-                </a:solidFill>
-                <a:latin typeface="Aptos"/>
-                <a:ea typeface="Aptos"/>
-                <a:cs typeface="Aptos"/>
-              </a:defRPr>
-            </a:pPr>
-            <a:r>
-              <a:rPr sz="1200" b="0">
-                <a:solidFill>
-                  <a:srgbClr val="20262A"/>
-                </a:solidFill>
-                <a:latin typeface="Aptos"/>
-                <a:ea typeface="Aptos"/>
-                <a:cs typeface="Aptos"/>
-              </a:rPr>
-              <a:t>answerable question</a:t>
-            </a:r>
-          </a:p>
-        </p:txBody>
-      </p:sp>
-      <p:sp>
-        <p:nvSpPr>
-          <p:cNvPr id="11" name="box-dataset">
-            <a:extLst xmlns:a="http://schemas.openxmlformats.org/drawingml/2006/main">
-              <a:ext uri="{FF2B5EF4-FFF2-40B4-BE49-F238E27FC236}">
-                <a16:creationId xmlns:a16="http://schemas.microsoft.com/office/drawing/2014/main" id="{2374053E-AF0B-4BBE-95FC-D50C35F57F02}"/>
-              </a:ext>
-            </a:extLst>
-          </p:cNvPr>
-          <p:cNvSpPr>
-            <a:spLocks xmlns:a="http://schemas.openxmlformats.org/drawingml/2006/main" noGrp="1"/>
-          </p:cNvSpPr>
-          <p:nvPr/>
-        </p:nvSpPr>
-        <p:spPr>
-          <a:xfrm xmlns:a="http://schemas.openxmlformats.org/drawingml/2006/main">
-            <a:off x="1809750" y="4895850"/>
-            <a:ext cx="2095500" cy="514350"/>
-          </a:xfrm>
-          <a:prstGeom xmlns:a="http://schemas.openxmlformats.org/drawingml/2006/main" prst="rect">
-            <a:avLst/>
-          </a:prstGeom>
-          <a:solidFill xmlns:a="http://schemas.openxmlformats.org/drawingml/2006/main">
-            <a:srgbClr val="DCE9EA"/>
-          </a:solidFill>
-          <a:ln xmlns:a="http://schemas.openxmlformats.org/drawingml/2006/main" w="11430">
-            <a:solidFill>
-              <a:srgbClr val="2F5F6F"/>
-            </a:solidFill>
-            <a:prstDash val="solid"/>
-          </a:ln>
-        </p:spPr>
-      </p:sp>
-      <p:sp>
-        <p:nvSpPr>
-          <p:cNvPr id="12" name="label-dataset">
-            <a:extLst xmlns:a="http://schemas.openxmlformats.org/drawingml/2006/main">
-              <a:ext uri="{FF2B5EF4-FFF2-40B4-BE49-F238E27FC236}">
-                <a16:creationId xmlns:a16="http://schemas.microsoft.com/office/drawing/2014/main" id="{ADA9B06A-783A-4CCB-9A10-531E8B03D240}"/>
-              </a:ext>
-            </a:extLst>
-          </p:cNvPr>
-          <p:cNvSpPr>
-            <a:spLocks xmlns:a="http://schemas.openxmlformats.org/drawingml/2006/main" noGrp="1"/>
-          </p:cNvSpPr>
-          <p:nvPr/>
-        </p:nvSpPr>
-        <p:spPr>
-          <a:xfrm xmlns:a="http://schemas.openxmlformats.org/drawingml/2006/main">
-            <a:off x="1943100" y="5010150"/>
-            <a:ext cx="1828800" cy="285750"/>
-          </a:xfrm>
-          <a:prstGeom xmlns:a="http://schemas.openxmlformats.org/drawingml/2006/main" prst="rect">
-            <a:avLst/>
-          </a:prstGeom>
-          <a:solidFill xmlns:a="http://schemas.openxmlformats.org/drawingml/2006/main">
-            <a:srgbClr val="000000">
-              <a:alpha val="0"/>
-            </a:srgbClr>
-          </a:solidFill>
-          <a:ln xmlns:a="http://schemas.openxmlformats.org/drawingml/2006/main" w="0">
-            <a:solidFill>
-              <a:srgbClr val="000000">
-                <a:alpha val="0"/>
-              </a:srgbClr>
-            </a:solidFill>
-            <a:prstDash val="solid"/>
-          </a:ln>
-        </p:spPr>
-        <p:txBody>
-          <a:bodyPr xmlns:a="http://schemas.openxmlformats.org/drawingml/2006/main" lIns="0" tIns="0" rIns="0" bIns="0" anchor="ctr"/>
-          <a:lstStyle xmlns:a="http://schemas.openxmlformats.org/drawingml/2006/main"/>
-          <a:p xmlns:a="http://schemas.openxmlformats.org/drawingml/2006/main">
-            <a:pPr algn="ctr">
-              <a:defRPr sz="1200" b="1">
-                <a:solidFill>
-                  <a:srgbClr val="20262A"/>
-                </a:solidFill>
-                <a:latin typeface="Aptos"/>
-                <a:ea typeface="Aptos"/>
-                <a:cs typeface="Aptos"/>
-              </a:defRPr>
-            </a:pPr>
-            <a:r>
-              <a:rPr sz="1200" b="1">
-                <a:solidFill>
-                  <a:srgbClr val="20262A"/>
-                </a:solidFill>
-                <a:latin typeface="Aptos"/>
-                <a:ea typeface="Aptos"/>
-                <a:cs typeface="Aptos"/>
-              </a:rPr>
-              <a:t>dataset</a:t>
-            </a:r>
-          </a:p>
-        </p:txBody>
-      </p:sp>
-      <p:sp>
-        <p:nvSpPr>
-          <p:cNvPr id="13" name="box-analysis">
-            <a:extLst xmlns:a="http://schemas.openxmlformats.org/drawingml/2006/main">
-              <a:ext uri="{FF2B5EF4-FFF2-40B4-BE49-F238E27FC236}">
-                <a16:creationId xmlns:a16="http://schemas.microsoft.com/office/drawing/2014/main" id="{D82F941E-1F16-424A-80B5-32DA6779B4B6}"/>
-              </a:ext>
-            </a:extLst>
-          </p:cNvPr>
-          <p:cNvSpPr>
-            <a:spLocks xmlns:a="http://schemas.openxmlformats.org/drawingml/2006/main" noGrp="1"/>
-          </p:cNvSpPr>
-          <p:nvPr/>
-        </p:nvSpPr>
-        <p:spPr>
-          <a:xfrm xmlns:a="http://schemas.openxmlformats.org/drawingml/2006/main">
-            <a:off x="4667250" y="4895850"/>
-            <a:ext cx="2095500" cy="514350"/>
-          </a:xfrm>
-          <a:prstGeom xmlns:a="http://schemas.openxmlformats.org/drawingml/2006/main" prst="rect">
-            <a:avLst/>
-          </a:prstGeom>
-          <a:solidFill xmlns:a="http://schemas.openxmlformats.org/drawingml/2006/main">
-            <a:srgbClr val="F7F6F1"/>
-          </a:solidFill>
-          <a:ln xmlns:a="http://schemas.openxmlformats.org/drawingml/2006/main" w="9525">
-            <a:solidFill>
-              <a:srgbClr val="E2DED4"/>
-            </a:solidFill>
-            <a:prstDash val="solid"/>
-          </a:ln>
-        </p:spPr>
-      </p:sp>
-      <p:sp>
-        <p:nvSpPr>
-          <p:cNvPr id="14" name="label-analysis">
-            <a:extLst xmlns:a="http://schemas.openxmlformats.org/drawingml/2006/main">
-              <a:ext uri="{FF2B5EF4-FFF2-40B4-BE49-F238E27FC236}">
-                <a16:creationId xmlns:a16="http://schemas.microsoft.com/office/drawing/2014/main" id="{39B0F71C-EAAD-4F75-A1F2-BBFBFBABFA29}"/>
-              </a:ext>
-            </a:extLst>
-          </p:cNvPr>
-          <p:cNvSpPr>
-            <a:spLocks xmlns:a="http://schemas.openxmlformats.org/drawingml/2006/main" noGrp="1"/>
-          </p:cNvSpPr>
-          <p:nvPr/>
-        </p:nvSpPr>
-        <p:spPr>
-          <a:xfrm xmlns:a="http://schemas.openxmlformats.org/drawingml/2006/main">
-            <a:off x="4800600" y="5010150"/>
-            <a:ext cx="1828800" cy="285750"/>
-          </a:xfrm>
-          <a:prstGeom xmlns:a="http://schemas.openxmlformats.org/drawingml/2006/main" prst="rect">
-            <a:avLst/>
-          </a:prstGeom>
-          <a:solidFill xmlns:a="http://schemas.openxmlformats.org/drawingml/2006/main">
-            <a:srgbClr val="000000">
-              <a:alpha val="0"/>
-            </a:srgbClr>
-          </a:solidFill>
-          <a:ln xmlns:a="http://schemas.openxmlformats.org/drawingml/2006/main" w="0">
-            <a:solidFill>
-              <a:srgbClr val="000000">
-                <a:alpha val="0"/>
-              </a:srgbClr>
-            </a:solidFill>
-            <a:prstDash val="solid"/>
-          </a:ln>
-        </p:spPr>
-        <p:txBody>
-          <a:bodyPr xmlns:a="http://schemas.openxmlformats.org/drawingml/2006/main" lIns="0" tIns="0" rIns="0" bIns="0" anchor="ctr"/>
-          <a:lstStyle xmlns:a="http://schemas.openxmlformats.org/drawingml/2006/main"/>
-          <a:p xmlns:a="http://schemas.openxmlformats.org/drawingml/2006/main">
-            <a:pPr algn="ctr">
-              <a:defRPr sz="1200" b="0">
-                <a:solidFill>
-                  <a:srgbClr val="697277"/>
-                </a:solidFill>
-                <a:latin typeface="Aptos"/>
-                <a:ea typeface="Aptos"/>
-                <a:cs typeface="Aptos"/>
-              </a:defRPr>
-            </a:pPr>
-            <a:r>
-              <a:rPr sz="1200" b="0">
-                <a:solidFill>
-                  <a:srgbClr val="697277"/>
-                </a:solidFill>
-                <a:latin typeface="Aptos"/>
-                <a:ea typeface="Aptos"/>
-                <a:cs typeface="Aptos"/>
-              </a:rPr>
-              <a:t>analysis</a:t>
-            </a:r>
-          </a:p>
-        </p:txBody>
-      </p:sp>
-      <p:sp>
-        <p:nvSpPr>
-          <p:cNvPr id="15" name="box-supported claim + figure">
-            <a:extLst xmlns:a="http://schemas.openxmlformats.org/drawingml/2006/main">
-              <a:ext uri="{FF2B5EF4-FFF2-40B4-BE49-F238E27FC236}">
-                <a16:creationId xmlns:a16="http://schemas.microsoft.com/office/drawing/2014/main" id="{46F5DF45-345A-435A-942A-B09CF1CCA995}"/>
-              </a:ext>
-            </a:extLst>
-          </p:cNvPr>
-          <p:cNvSpPr>
-            <a:spLocks xmlns:a="http://schemas.openxmlformats.org/drawingml/2006/main" noGrp="1"/>
-          </p:cNvSpPr>
-          <p:nvPr/>
-        </p:nvSpPr>
-        <p:spPr>
-          <a:xfrm xmlns:a="http://schemas.openxmlformats.org/drawingml/2006/main">
-            <a:off x="7524750" y="4895850"/>
-            <a:ext cx="2476500" cy="514350"/>
-          </a:xfrm>
-          <a:prstGeom xmlns:a="http://schemas.openxmlformats.org/drawingml/2006/main" prst="rect">
-            <a:avLst/>
-          </a:prstGeom>
-          <a:solidFill xmlns:a="http://schemas.openxmlformats.org/drawingml/2006/main">
-            <a:srgbClr val="F7F6F1"/>
-          </a:solidFill>
-          <a:ln xmlns:a="http://schemas.openxmlformats.org/drawingml/2006/main" w="9525">
-            <a:solidFill>
-              <a:srgbClr val="E2DED4"/>
-            </a:solidFill>
-            <a:prstDash val="solid"/>
-          </a:ln>
-        </p:spPr>
-      </p:sp>
-      <p:sp>
-        <p:nvSpPr>
-          <p:cNvPr id="16" name="label-supported claim + figure">
-            <a:extLst xmlns:a="http://schemas.openxmlformats.org/drawingml/2006/main">
-              <a:ext uri="{FF2B5EF4-FFF2-40B4-BE49-F238E27FC236}">
-                <a16:creationId xmlns:a16="http://schemas.microsoft.com/office/drawing/2014/main" id="{45F48294-D986-4196-8153-CD7786FF18BD}"/>
-              </a:ext>
-            </a:extLst>
-          </p:cNvPr>
-          <p:cNvSpPr>
-            <a:spLocks xmlns:a="http://schemas.openxmlformats.org/drawingml/2006/main" noGrp="1"/>
-          </p:cNvSpPr>
-          <p:nvPr/>
-        </p:nvSpPr>
-        <p:spPr>
-          <a:xfrm xmlns:a="http://schemas.openxmlformats.org/drawingml/2006/main">
-            <a:off x="7658100" y="5010150"/>
-            <a:ext cx="2209800" cy="285750"/>
-          </a:xfrm>
-          <a:prstGeom xmlns:a="http://schemas.openxmlformats.org/drawingml/2006/main" prst="rect">
-            <a:avLst/>
-          </a:prstGeom>
-          <a:solidFill xmlns:a="http://schemas.openxmlformats.org/drawingml/2006/main">
-            <a:srgbClr val="000000">
-              <a:alpha val="0"/>
-            </a:srgbClr>
-          </a:solidFill>
-          <a:ln xmlns:a="http://schemas.openxmlformats.org/drawingml/2006/main" w="0">
-            <a:solidFill>
-              <a:srgbClr val="000000">
-                <a:alpha val="0"/>
-              </a:srgbClr>
-            </a:solidFill>
-            <a:prstDash val="solid"/>
-          </a:ln>
-        </p:spPr>
-        <p:txBody>
-          <a:bodyPr xmlns:a="http://schemas.openxmlformats.org/drawingml/2006/main" lIns="0" tIns="0" rIns="0" bIns="0" anchor="ctr"/>
-          <a:lstStyle xmlns:a="http://schemas.openxmlformats.org/drawingml/2006/main"/>
-          <a:p xmlns:a="http://schemas.openxmlformats.org/drawingml/2006/main">
-            <a:pPr algn="ctr">
-              <a:defRPr sz="1125" b="0">
-                <a:solidFill>
-                  <a:srgbClr val="697277"/>
-                </a:solidFill>
-                <a:latin typeface="Aptos"/>
-                <a:ea typeface="Aptos"/>
-                <a:cs typeface="Aptos"/>
-              </a:defRPr>
-            </a:pPr>
-            <a:r>
-              <a:rPr sz="1125" b="0">
-                <a:solidFill>
-                  <a:srgbClr val="697277"/>
-                </a:solidFill>
-                <a:latin typeface="Aptos"/>
-                <a:ea typeface="Aptos"/>
-                <a:cs typeface="Aptos"/>
-              </a:rPr>
-              <a:t>supported claim + figure</a:t>
-            </a:r>
-          </a:p>
-        </p:txBody>
-      </p:sp>
-      <p:sp>
-        <p:nvSpPr>
-          <p:cNvPr id="17" name="line-v">
-            <a:extLst xmlns:a="http://schemas.openxmlformats.org/drawingml/2006/main">
-              <a:ext uri="{FF2B5EF4-FFF2-40B4-BE49-F238E27FC236}">
-                <a16:creationId xmlns:a16="http://schemas.microsoft.com/office/drawing/2014/main" id="{7BD6B0E8-C2E0-4510-871D-C79E21CF2332}"/>
-              </a:ext>
-            </a:extLst>
-          </p:cNvPr>
-          <p:cNvSpPr>
-            <a:spLocks xmlns:a="http://schemas.openxmlformats.org/drawingml/2006/main" noGrp="1"/>
-          </p:cNvSpPr>
-          <p:nvPr/>
-        </p:nvSpPr>
-        <p:spPr>
-          <a:xfrm xmlns:a="http://schemas.openxmlformats.org/drawingml/2006/main">
-            <a:off x="5581650" y="3524250"/>
-            <a:ext cx="19050" cy="304800"/>
-          </a:xfrm>
-          <a:prstGeom xmlns:a="http://schemas.openxmlformats.org/drawingml/2006/main" prst="rect">
-            <a:avLst/>
-          </a:prstGeom>
-          <a:solidFill xmlns:a="http://schemas.openxmlformats.org/drawingml/2006/main">
-            <a:srgbClr val="A8A198"/>
-          </a:solidFill>
-          <a:ln xmlns:a="http://schemas.openxmlformats.org/drawingml/2006/main" w="0">
-            <a:solidFill>
-              <a:srgbClr val="A8A198"/>
-            </a:solidFill>
-            <a:prstDash val="solid"/>
-          </a:ln>
-        </p:spPr>
-      </p:sp>
-      <p:sp>
-        <p:nvSpPr>
-          <p:cNvPr id="18" name="line-dot">
-            <a:extLst xmlns:a="http://schemas.openxmlformats.org/drawingml/2006/main">
-              <a:ext uri="{FF2B5EF4-FFF2-40B4-BE49-F238E27FC236}">
-                <a16:creationId xmlns:a16="http://schemas.microsoft.com/office/drawing/2014/main" id="{99C6D260-F3CA-450A-9BC3-F16B1B90113B}"/>
-              </a:ext>
-            </a:extLst>
-          </p:cNvPr>
-          <p:cNvSpPr>
-            <a:spLocks xmlns:a="http://schemas.openxmlformats.org/drawingml/2006/main" noGrp="1"/>
-          </p:cNvSpPr>
-          <p:nvPr/>
-        </p:nvSpPr>
-        <p:spPr>
-          <a:xfrm xmlns:a="http://schemas.openxmlformats.org/drawingml/2006/main">
-            <a:off x="5572125" y="4352925"/>
-            <a:ext cx="19050" cy="19050"/>
-          </a:xfrm>
-          <a:prstGeom xmlns:a="http://schemas.openxmlformats.org/drawingml/2006/main" prst="rect">
-            <a:avLst/>
-          </a:prstGeom>
-          <a:solidFill xmlns:a="http://schemas.openxmlformats.org/drawingml/2006/main">
-            <a:srgbClr val="A8A198"/>
-          </a:solidFill>
-          <a:ln xmlns:a="http://schemas.openxmlformats.org/drawingml/2006/main" w="0">
-            <a:solidFill>
-              <a:srgbClr val="A8A198"/>
-            </a:solidFill>
-            <a:prstDash val="solid"/>
-          </a:ln>
-        </p:spPr>
-      </p:sp>
-      <p:sp>
-        <p:nvSpPr>
-          <p:cNvPr id="19" name="line-dot">
-            <a:extLst xmlns:a="http://schemas.openxmlformats.org/drawingml/2006/main">
-              <a:ext uri="{FF2B5EF4-FFF2-40B4-BE49-F238E27FC236}">
-                <a16:creationId xmlns:a16="http://schemas.microsoft.com/office/drawing/2014/main" id="{7EE49557-1631-4B08-A24E-8E81AF2FE587}"/>
-              </a:ext>
-            </a:extLst>
-          </p:cNvPr>
-          <p:cNvSpPr>
-            <a:spLocks xmlns:a="http://schemas.openxmlformats.org/drawingml/2006/main" noGrp="1"/>
-          </p:cNvSpPr>
-          <p:nvPr/>
-        </p:nvSpPr>
-        <p:spPr>
-          <a:xfrm xmlns:a="http://schemas.openxmlformats.org/drawingml/2006/main">
-            <a:off x="5299710" y="4406265"/>
-            <a:ext cx="19050" cy="19050"/>
-          </a:xfrm>
-          <a:prstGeom xmlns:a="http://schemas.openxmlformats.org/drawingml/2006/main" prst="rect">
-            <a:avLst/>
-          </a:prstGeom>
-          <a:solidFill xmlns:a="http://schemas.openxmlformats.org/drawingml/2006/main">
-            <a:srgbClr val="A8A198"/>
-          </a:solidFill>
-          <a:ln xmlns:a="http://schemas.openxmlformats.org/drawingml/2006/main" w="0">
-            <a:solidFill>
-              <a:srgbClr val="A8A198"/>
-            </a:solidFill>
-            <a:prstDash val="solid"/>
-          </a:ln>
-        </p:spPr>
-      </p:sp>
-      <p:sp>
-        <p:nvSpPr>
-          <p:cNvPr id="20" name="line-dot">
-            <a:extLst xmlns:a="http://schemas.openxmlformats.org/drawingml/2006/main">
-              <a:ext uri="{FF2B5EF4-FFF2-40B4-BE49-F238E27FC236}">
-                <a16:creationId xmlns:a16="http://schemas.microsoft.com/office/drawing/2014/main" id="{F5F71FE1-DF74-49B1-9628-1E1FB0799418}"/>
-              </a:ext>
-            </a:extLst>
-          </p:cNvPr>
-          <p:cNvSpPr>
-            <a:spLocks xmlns:a="http://schemas.openxmlformats.org/drawingml/2006/main" noGrp="1"/>
-          </p:cNvSpPr>
-          <p:nvPr/>
-        </p:nvSpPr>
-        <p:spPr>
-          <a:xfrm xmlns:a="http://schemas.openxmlformats.org/drawingml/2006/main">
-            <a:off x="5027295" y="4459605"/>
-            <a:ext cx="19050" cy="19050"/>
-          </a:xfrm>
-          <a:prstGeom xmlns:a="http://schemas.openxmlformats.org/drawingml/2006/main" prst="rect">
-            <a:avLst/>
-          </a:prstGeom>
-          <a:solidFill xmlns:a="http://schemas.openxmlformats.org/drawingml/2006/main">
-            <a:srgbClr val="A8A198"/>
-          </a:solidFill>
-          <a:ln xmlns:a="http://schemas.openxmlformats.org/drawingml/2006/main" w="0">
-            <a:solidFill>
-              <a:srgbClr val="A8A198"/>
-            </a:solidFill>
-            <a:prstDash val="solid"/>
-          </a:ln>
-        </p:spPr>
-      </p:sp>
-      <p:sp>
-        <p:nvSpPr>
-          <p:cNvPr id="21" name="line-dot">
-            <a:extLst xmlns:a="http://schemas.openxmlformats.org/drawingml/2006/main">
-              <a:ext uri="{FF2B5EF4-FFF2-40B4-BE49-F238E27FC236}">
-                <a16:creationId xmlns:a16="http://schemas.microsoft.com/office/drawing/2014/main" id="{474B3608-FD56-49F5-A47A-15E50756FC8C}"/>
-              </a:ext>
-            </a:extLst>
-          </p:cNvPr>
-          <p:cNvSpPr>
-            <a:spLocks xmlns:a="http://schemas.openxmlformats.org/drawingml/2006/main" noGrp="1"/>
-          </p:cNvSpPr>
-          <p:nvPr/>
-        </p:nvSpPr>
-        <p:spPr>
-          <a:xfrm xmlns:a="http://schemas.openxmlformats.org/drawingml/2006/main">
-            <a:off x="4754880" y="4512945"/>
-            <a:ext cx="19050" cy="19050"/>
-          </a:xfrm>
-          <a:prstGeom xmlns:a="http://schemas.openxmlformats.org/drawingml/2006/main" prst="rect">
-            <a:avLst/>
-          </a:prstGeom>
-          <a:solidFill xmlns:a="http://schemas.openxmlformats.org/drawingml/2006/main">
-            <a:srgbClr val="A8A198"/>
-          </a:solidFill>
-          <a:ln xmlns:a="http://schemas.openxmlformats.org/drawingml/2006/main" w="0">
-            <a:solidFill>
-              <a:srgbClr val="A8A198"/>
-            </a:solidFill>
-            <a:prstDash val="solid"/>
-          </a:ln>
-        </p:spPr>
-      </p:sp>
-      <p:sp>
-        <p:nvSpPr>
-          <p:cNvPr id="22" name="line-dot">
-            <a:extLst xmlns:a="http://schemas.openxmlformats.org/drawingml/2006/main">
-              <a:ext uri="{FF2B5EF4-FFF2-40B4-BE49-F238E27FC236}">
-                <a16:creationId xmlns:a16="http://schemas.microsoft.com/office/drawing/2014/main" id="{7ED8BCFA-EB09-4227-8EE7-CB6CF43E2579}"/>
-              </a:ext>
-            </a:extLst>
-          </p:cNvPr>
-          <p:cNvSpPr>
-            <a:spLocks xmlns:a="http://schemas.openxmlformats.org/drawingml/2006/main" noGrp="1"/>
-          </p:cNvSpPr>
-          <p:nvPr/>
-        </p:nvSpPr>
-        <p:spPr>
-          <a:xfrm xmlns:a="http://schemas.openxmlformats.org/drawingml/2006/main">
-            <a:off x="4482465" y="4566285"/>
-            <a:ext cx="19050" cy="19050"/>
-          </a:xfrm>
-          <a:prstGeom xmlns:a="http://schemas.openxmlformats.org/drawingml/2006/main" prst="rect">
-            <a:avLst/>
-          </a:prstGeom>
-          <a:solidFill xmlns:a="http://schemas.openxmlformats.org/drawingml/2006/main">
-            <a:srgbClr val="A8A198"/>
-          </a:solidFill>
-          <a:ln xmlns:a="http://schemas.openxmlformats.org/drawingml/2006/main" w="0">
-            <a:solidFill>
-              <a:srgbClr val="A8A198"/>
-            </a:solidFill>
-            <a:prstDash val="solid"/>
-          </a:ln>
-        </p:spPr>
-      </p:sp>
-      <p:sp>
-        <p:nvSpPr>
-          <p:cNvPr id="23" name="line-dot">
-            <a:extLst xmlns:a="http://schemas.openxmlformats.org/drawingml/2006/main">
-              <a:ext uri="{FF2B5EF4-FFF2-40B4-BE49-F238E27FC236}">
-                <a16:creationId xmlns:a16="http://schemas.microsoft.com/office/drawing/2014/main" id="{DBE2B6C4-8BD6-431C-B7E2-BC85F4480E2D}"/>
-              </a:ext>
-            </a:extLst>
-          </p:cNvPr>
-          <p:cNvSpPr>
-            <a:spLocks xmlns:a="http://schemas.openxmlformats.org/drawingml/2006/main" noGrp="1"/>
-          </p:cNvSpPr>
-          <p:nvPr/>
-        </p:nvSpPr>
-        <p:spPr>
-          <a:xfrm xmlns:a="http://schemas.openxmlformats.org/drawingml/2006/main">
-            <a:off x="4210050" y="4619625"/>
-            <a:ext cx="19050" cy="19050"/>
-          </a:xfrm>
-          <a:prstGeom xmlns:a="http://schemas.openxmlformats.org/drawingml/2006/main" prst="rect">
-            <a:avLst/>
-          </a:prstGeom>
-          <a:solidFill xmlns:a="http://schemas.openxmlformats.org/drawingml/2006/main">
-            <a:srgbClr val="A8A198"/>
-          </a:solidFill>
-          <a:ln xmlns:a="http://schemas.openxmlformats.org/drawingml/2006/main" w="0">
-            <a:solidFill>
-              <a:srgbClr val="A8A198"/>
-            </a:solidFill>
-            <a:prstDash val="solid"/>
-          </a:ln>
-        </p:spPr>
-      </p:sp>
-      <p:sp>
-        <p:nvSpPr>
-          <p:cNvPr id="24" name="line-dot">
-            <a:extLst xmlns:a="http://schemas.openxmlformats.org/drawingml/2006/main">
-              <a:ext uri="{FF2B5EF4-FFF2-40B4-BE49-F238E27FC236}">
-                <a16:creationId xmlns:a16="http://schemas.microsoft.com/office/drawing/2014/main" id="{C6F53D8F-10A5-4B93-A519-5A4148E0B065}"/>
-              </a:ext>
-            </a:extLst>
-          </p:cNvPr>
-          <p:cNvSpPr>
-            <a:spLocks xmlns:a="http://schemas.openxmlformats.org/drawingml/2006/main" noGrp="1"/>
-          </p:cNvSpPr>
-          <p:nvPr/>
-        </p:nvSpPr>
-        <p:spPr>
-          <a:xfrm xmlns:a="http://schemas.openxmlformats.org/drawingml/2006/main">
-            <a:off x="3937635" y="4672965"/>
-            <a:ext cx="19050" cy="19050"/>
-          </a:xfrm>
-          <a:prstGeom xmlns:a="http://schemas.openxmlformats.org/drawingml/2006/main" prst="rect">
-            <a:avLst/>
-          </a:prstGeom>
-          <a:solidFill xmlns:a="http://schemas.openxmlformats.org/drawingml/2006/main">
-            <a:srgbClr val="A8A198"/>
-          </a:solidFill>
-          <a:ln xmlns:a="http://schemas.openxmlformats.org/drawingml/2006/main" w="0">
-            <a:solidFill>
-              <a:srgbClr val="A8A198"/>
-            </a:solidFill>
-            <a:prstDash val="solid"/>
-          </a:ln>
-        </p:spPr>
-      </p:sp>
-      <p:sp>
-        <p:nvSpPr>
-          <p:cNvPr id="25" name="line-dot">
-            <a:extLst xmlns:a="http://schemas.openxmlformats.org/drawingml/2006/main">
-              <a:ext uri="{FF2B5EF4-FFF2-40B4-BE49-F238E27FC236}">
-                <a16:creationId xmlns:a16="http://schemas.microsoft.com/office/drawing/2014/main" id="{FC79E929-D896-4860-B01B-F273E45E7FEA}"/>
-              </a:ext>
-            </a:extLst>
-          </p:cNvPr>
-          <p:cNvSpPr>
-            <a:spLocks xmlns:a="http://schemas.openxmlformats.org/drawingml/2006/main" noGrp="1"/>
-          </p:cNvSpPr>
-          <p:nvPr/>
-        </p:nvSpPr>
-        <p:spPr>
-          <a:xfrm xmlns:a="http://schemas.openxmlformats.org/drawingml/2006/main">
-            <a:off x="3665220" y="4726305"/>
-            <a:ext cx="19050" cy="19050"/>
-          </a:xfrm>
-          <a:prstGeom xmlns:a="http://schemas.openxmlformats.org/drawingml/2006/main" prst="rect">
-            <a:avLst/>
-          </a:prstGeom>
-          <a:solidFill xmlns:a="http://schemas.openxmlformats.org/drawingml/2006/main">
-            <a:srgbClr val="A8A198"/>
-          </a:solidFill>
-          <a:ln xmlns:a="http://schemas.openxmlformats.org/drawingml/2006/main" w="0">
-            <a:solidFill>
-              <a:srgbClr val="A8A198"/>
-            </a:solidFill>
-            <a:prstDash val="solid"/>
-          </a:ln>
-        </p:spPr>
-      </p:sp>
-      <p:sp>
-        <p:nvSpPr>
-          <p:cNvPr id="26" name="line-dot">
-            <a:extLst xmlns:a="http://schemas.openxmlformats.org/drawingml/2006/main">
-              <a:ext uri="{FF2B5EF4-FFF2-40B4-BE49-F238E27FC236}">
-                <a16:creationId xmlns:a16="http://schemas.microsoft.com/office/drawing/2014/main" id="{36218499-9CB2-4B64-A20F-B1138F9B0214}"/>
-              </a:ext>
-            </a:extLst>
-          </p:cNvPr>
-          <p:cNvSpPr>
-            <a:spLocks xmlns:a="http://schemas.openxmlformats.org/drawingml/2006/main" noGrp="1"/>
-          </p:cNvSpPr>
-          <p:nvPr/>
-        </p:nvSpPr>
-        <p:spPr>
-          <a:xfrm xmlns:a="http://schemas.openxmlformats.org/drawingml/2006/main">
-            <a:off x="3392805" y="4779645"/>
-            <a:ext cx="19050" cy="19050"/>
-          </a:xfrm>
-          <a:prstGeom xmlns:a="http://schemas.openxmlformats.org/drawingml/2006/main" prst="rect">
-            <a:avLst/>
-          </a:prstGeom>
-          <a:solidFill xmlns:a="http://schemas.openxmlformats.org/drawingml/2006/main">
-            <a:srgbClr val="A8A198"/>
-          </a:solidFill>
-          <a:ln xmlns:a="http://schemas.openxmlformats.org/drawingml/2006/main" w="0">
-            <a:solidFill>
-              <a:srgbClr val="A8A198"/>
-            </a:solidFill>
-            <a:prstDash val="solid"/>
-          </a:ln>
-        </p:spPr>
-      </p:sp>
-      <p:sp>
-        <p:nvSpPr>
-          <p:cNvPr id="27" name="line-dot">
-            <a:extLst xmlns:a="http://schemas.openxmlformats.org/drawingml/2006/main">
-              <a:ext uri="{FF2B5EF4-FFF2-40B4-BE49-F238E27FC236}">
-                <a16:creationId xmlns:a16="http://schemas.microsoft.com/office/drawing/2014/main" id="{BCD63FE6-2FFD-4C53-B1DE-8E45E0D03DA9}"/>
-              </a:ext>
-            </a:extLst>
-          </p:cNvPr>
-          <p:cNvSpPr>
-            <a:spLocks xmlns:a="http://schemas.openxmlformats.org/drawingml/2006/main" noGrp="1"/>
-          </p:cNvSpPr>
-          <p:nvPr/>
-        </p:nvSpPr>
-        <p:spPr>
-          <a:xfrm xmlns:a="http://schemas.openxmlformats.org/drawingml/2006/main">
-            <a:off x="3120390" y="4832985"/>
-            <a:ext cx="19050" cy="19050"/>
-          </a:xfrm>
-          <a:prstGeom xmlns:a="http://schemas.openxmlformats.org/drawingml/2006/main" prst="rect">
-            <a:avLst/>
-          </a:prstGeom>
-          <a:solidFill xmlns:a="http://schemas.openxmlformats.org/drawingml/2006/main">
-            <a:srgbClr val="A8A198"/>
-          </a:solidFill>
-          <a:ln xmlns:a="http://schemas.openxmlformats.org/drawingml/2006/main" w="0">
-            <a:solidFill>
-              <a:srgbClr val="A8A198"/>
-            </a:solidFill>
-            <a:prstDash val="solid"/>
-          </a:ln>
-        </p:spPr>
-      </p:sp>
-      <p:sp>
-        <p:nvSpPr>
-          <p:cNvPr id="28" name="line-dot">
-            <a:extLst xmlns:a="http://schemas.openxmlformats.org/drawingml/2006/main">
-              <a:ext uri="{FF2B5EF4-FFF2-40B4-BE49-F238E27FC236}">
-                <a16:creationId xmlns:a16="http://schemas.microsoft.com/office/drawing/2014/main" id="{51A34BBA-147A-4629-8BC8-7EB2AAFDEE0E}"/>
-              </a:ext>
-            </a:extLst>
-          </p:cNvPr>
-          <p:cNvSpPr>
-            <a:spLocks xmlns:a="http://schemas.openxmlformats.org/drawingml/2006/main" noGrp="1"/>
-          </p:cNvSpPr>
-          <p:nvPr/>
-        </p:nvSpPr>
-        <p:spPr>
-          <a:xfrm xmlns:a="http://schemas.openxmlformats.org/drawingml/2006/main">
-            <a:off x="2847975" y="4886325"/>
-            <a:ext cx="19050" cy="19050"/>
-          </a:xfrm>
-          <a:prstGeom xmlns:a="http://schemas.openxmlformats.org/drawingml/2006/main" prst="rect">
-            <a:avLst/>
-          </a:prstGeom>
-          <a:solidFill xmlns:a="http://schemas.openxmlformats.org/drawingml/2006/main">
-            <a:srgbClr val="A8A198"/>
-          </a:solidFill>
-          <a:ln xmlns:a="http://schemas.openxmlformats.org/drawingml/2006/main" w="0">
-            <a:solidFill>
-              <a:srgbClr val="A8A198"/>
-            </a:solidFill>
-            <a:prstDash val="solid"/>
-          </a:ln>
-        </p:spPr>
-      </p:sp>
-    </p:spTree>
-    <p:extLst>
-      <p:ext uri="{BB962C8B-B14F-4D97-AF65-F5344CB8AC3E}">
-        <p14:creationId xmlns:p14="http://schemas.microsoft.com/office/powerpoint/2010/main" val="1963605410"/>
       </p:ext>
     </p:extLst>
   </p:cSld>
@@ -8478,7 +7171,7 @@
           </a:ln>
         </p:spPr>
         <p:txBody>
-          <a:bodyPr xmlns:a="http://schemas.openxmlformats.org/drawingml/2006/main" lIns="0" tIns="0" rIns="0" bIns="0" anchor="t"/>
+          <a:bodyPr xmlns:a="http://schemas.openxmlformats.org/drawingml/2006/main" lIns="0" tIns="0" rIns="0" bIns="0" anchor="t" wrap="square"/>
           <a:lstStyle xmlns:a="http://schemas.openxmlformats.org/drawingml/2006/main"/>
           <a:p xmlns:a="http://schemas.openxmlformats.org/drawingml/2006/main">
             <a:pPr algn="r">
@@ -8497,10 +7190,8 @@
                   <a:srgbClr val="697277"/>
                 </a:solidFill>
                 <a:latin typeface="Aptos"/>
-                <a:ea typeface="Aptos"/>
-                <a:cs typeface="Aptos"/>
               </a:rPr>
-              <a:t>14</a:t>
+              <a:t>13</a:t>
             </a:r>
           </a:p>
         </p:txBody>
@@ -8542,7 +7233,7 @@
           </a:ln>
         </p:spPr>
         <p:txBody>
-          <a:bodyPr xmlns:a="http://schemas.openxmlformats.org/drawingml/2006/main" lIns="0" tIns="0" rIns="0" bIns="0" anchor="t"/>
+          <a:bodyPr xmlns:a="http://schemas.openxmlformats.org/drawingml/2006/main" lIns="0" tIns="0" rIns="0" bIns="0" anchor="t" wrap="square"/>
           <a:lstStyle xmlns:a="http://schemas.openxmlformats.org/drawingml/2006/main"/>
           <a:p xmlns:a="http://schemas.openxmlformats.org/drawingml/2006/main">
             <a:pPr algn="l">
@@ -8561,10 +7252,8 @@
                   <a:srgbClr val="20262A"/>
                 </a:solidFill>
                 <a:latin typeface="Aptos Display"/>
-                <a:ea typeface="Aptos Display"/>
-                <a:cs typeface="Aptos Display"/>
               </a:rPr>
-              <a:t>Link analyses to their source data and question.</a:t>
+              <a:t>Link datasets and analyses to their questions.</a:t>
             </a:r>
           </a:p>
         </p:txBody>
@@ -9736,7 +8425,7 @@
           </a:ln>
         </p:spPr>
         <p:txBody>
-          <a:bodyPr xmlns:a="http://schemas.openxmlformats.org/drawingml/2006/main" lIns="0" tIns="0" rIns="0" bIns="0" anchor="t"/>
+          <a:bodyPr xmlns:a="http://schemas.openxmlformats.org/drawingml/2006/main" lIns="0" tIns="0" rIns="0" bIns="0" anchor="t" wrap="square"/>
           <a:lstStyle xmlns:a="http://schemas.openxmlformats.org/drawingml/2006/main"/>
           <a:p xmlns:a="http://schemas.openxmlformats.org/drawingml/2006/main">
             <a:pPr algn="r">
@@ -9755,10 +8444,8 @@
                   <a:srgbClr val="697277"/>
                 </a:solidFill>
                 <a:latin typeface="Aptos"/>
-                <a:ea typeface="Aptos"/>
-                <a:cs typeface="Aptos"/>
               </a:rPr>
-              <a:t>15</a:t>
+              <a:t>14</a:t>
             </a:r>
           </a:p>
         </p:txBody>
@@ -10778,771 +9465,6 @@
     <p:extLst>
       <p:ext uri="{BB962C8B-B14F-4D97-AF65-F5344CB8AC3E}">
         <p14:creationId xmlns:p14="http://schemas.microsoft.com/office/powerpoint/2010/main" val="350188984"/>
-      </p:ext>
-    </p:extLst>
-  </p:cSld>
-</p:sld>
-</file>
-
-<file path=ppt/slides/slide16.xml><?xml version="1.0" encoding="utf-8"?>
-<p:sld xmlns:p="http://schemas.openxmlformats.org/presentationml/2006/main">
-  <p:cSld>
-    <p:spTree>
-      <p:nvGrpSpPr>
-        <p:cNvPr id="1" name=""/>
-        <p:cNvGrpSpPr/>
-        <p:nvPr/>
-      </p:nvGrpSpPr>
-      <p:grpSpPr>
-        <a:xfrm xmlns:a="http://schemas.openxmlformats.org/drawingml/2006/main"/>
-      </p:grpSpPr>
-      <p:sp>
-        <p:nvSpPr>
-          <p:cNvPr id="1" name="background">
-            <a:extLst xmlns:a="http://schemas.openxmlformats.org/drawingml/2006/main">
-              <a:ext uri="{FF2B5EF4-FFF2-40B4-BE49-F238E27FC236}">
-                <a16:creationId xmlns:a16="http://schemas.microsoft.com/office/drawing/2014/main" id="{ABD7EC65-7017-4945-80E6-7F6815839649}"/>
-              </a:ext>
-            </a:extLst>
-          </p:cNvPr>
-          <p:cNvSpPr>
-            <a:spLocks xmlns:a="http://schemas.openxmlformats.org/drawingml/2006/main" noGrp="1"/>
-          </p:cNvSpPr>
-          <p:nvPr/>
-        </p:nvSpPr>
-        <p:spPr>
-          <a:xfrm xmlns:a="http://schemas.openxmlformats.org/drawingml/2006/main">
-            <a:off x="0" y="0"/>
-            <a:ext cx="12192000" cy="6858000"/>
-          </a:xfrm>
-          <a:prstGeom xmlns:a="http://schemas.openxmlformats.org/drawingml/2006/main" prst="rect">
-            <a:avLst/>
-          </a:prstGeom>
-          <a:solidFill xmlns:a="http://schemas.openxmlformats.org/drawingml/2006/main">
-            <a:srgbClr val="F7F6F1"/>
-          </a:solidFill>
-          <a:ln xmlns:a="http://schemas.openxmlformats.org/drawingml/2006/main" w="0">
-            <a:solidFill>
-              <a:srgbClr val="F7F6F1"/>
-            </a:solidFill>
-            <a:prstDash val="solid"/>
-          </a:ln>
-        </p:spPr>
-      </p:sp>
-      <p:sp>
-        <p:nvSpPr>
-          <p:cNvPr id="2" name="section">
-            <a:extLst xmlns:a="http://schemas.openxmlformats.org/drawingml/2006/main">
-              <a:ext uri="{FF2B5EF4-FFF2-40B4-BE49-F238E27FC236}">
-                <a16:creationId xmlns:a16="http://schemas.microsoft.com/office/drawing/2014/main" id="{16980150-4701-4B5C-9509-6662EC5EB1B3}"/>
-              </a:ext>
-            </a:extLst>
-          </p:cNvPr>
-          <p:cNvSpPr>
-            <a:spLocks xmlns:a="http://schemas.openxmlformats.org/drawingml/2006/main" noGrp="1"/>
-          </p:cNvSpPr>
-          <p:nvPr/>
-        </p:nvSpPr>
-        <p:spPr>
-          <a:xfrm xmlns:a="http://schemas.openxmlformats.org/drawingml/2006/main">
-            <a:off x="609600" y="400050"/>
-            <a:ext cx="4095750" cy="228600"/>
-          </a:xfrm>
-          <a:prstGeom xmlns:a="http://schemas.openxmlformats.org/drawingml/2006/main" prst="rect">
-            <a:avLst/>
-          </a:prstGeom>
-          <a:solidFill xmlns:a="http://schemas.openxmlformats.org/drawingml/2006/main">
-            <a:srgbClr val="000000">
-              <a:alpha val="0"/>
-            </a:srgbClr>
-          </a:solidFill>
-          <a:ln xmlns:a="http://schemas.openxmlformats.org/drawingml/2006/main" w="0">
-            <a:solidFill>
-              <a:srgbClr val="000000">
-                <a:alpha val="0"/>
-              </a:srgbClr>
-            </a:solidFill>
-            <a:prstDash val="solid"/>
-          </a:ln>
-        </p:spPr>
-        <p:txBody>
-          <a:bodyPr xmlns:a="http://schemas.openxmlformats.org/drawingml/2006/main" lIns="0" tIns="0" rIns="0" bIns="0" anchor="t"/>
-          <a:lstStyle xmlns:a="http://schemas.openxmlformats.org/drawingml/2006/main"/>
-          <a:p xmlns:a="http://schemas.openxmlformats.org/drawingml/2006/main">
-            <a:pPr algn="l">
-              <a:defRPr sz="975" b="1">
-                <a:solidFill>
-                  <a:srgbClr val="2F5F6F"/>
-                </a:solidFill>
-                <a:latin typeface="Aptos"/>
-                <a:ea typeface="Aptos"/>
-                <a:cs typeface="Aptos"/>
-              </a:defRPr>
-            </a:pPr>
-            <a:r>
-              <a:rPr sz="975" b="1">
-                <a:solidFill>
-                  <a:srgbClr val="2F5F6F"/>
-                </a:solidFill>
-                <a:latin typeface="Aptos"/>
-                <a:ea typeface="Aptos"/>
-                <a:cs typeface="Aptos"/>
-              </a:rPr>
-              <a:t>WORKED EXAMPLE</a:t>
-            </a:r>
-          </a:p>
-        </p:txBody>
-      </p:sp>
-      <p:sp>
-        <p:nvSpPr>
-          <p:cNvPr id="3" name="section-rule">
-            <a:extLst xmlns:a="http://schemas.openxmlformats.org/drawingml/2006/main">
-              <a:ext uri="{FF2B5EF4-FFF2-40B4-BE49-F238E27FC236}">
-                <a16:creationId xmlns:a16="http://schemas.microsoft.com/office/drawing/2014/main" id="{537A0C33-C05B-4A16-8289-FE5F635B42EF}"/>
-              </a:ext>
-            </a:extLst>
-          </p:cNvPr>
-          <p:cNvSpPr>
-            <a:spLocks xmlns:a="http://schemas.openxmlformats.org/drawingml/2006/main" noGrp="1"/>
-          </p:cNvSpPr>
-          <p:nvPr/>
-        </p:nvSpPr>
-        <p:spPr>
-          <a:xfrm xmlns:a="http://schemas.openxmlformats.org/drawingml/2006/main">
-            <a:off x="609600" y="838200"/>
-            <a:ext cx="876300" cy="19050"/>
-          </a:xfrm>
-          <a:prstGeom xmlns:a="http://schemas.openxmlformats.org/drawingml/2006/main" prst="rect">
-            <a:avLst/>
-          </a:prstGeom>
-          <a:solidFill xmlns:a="http://schemas.openxmlformats.org/drawingml/2006/main">
-            <a:srgbClr val="2F5F6F"/>
-          </a:solidFill>
-          <a:ln xmlns:a="http://schemas.openxmlformats.org/drawingml/2006/main" w="0">
-            <a:solidFill>
-              <a:srgbClr val="2F5F6F"/>
-            </a:solidFill>
-            <a:prstDash val="solid"/>
-          </a:ln>
-        </p:spPr>
-      </p:sp>
-      <p:sp>
-        <p:nvSpPr>
-          <p:cNvPr id="4" name="source-note">
-            <a:extLst xmlns:a="http://schemas.openxmlformats.org/drawingml/2006/main">
-              <a:ext uri="{FF2B5EF4-FFF2-40B4-BE49-F238E27FC236}">
-                <a16:creationId xmlns:a16="http://schemas.microsoft.com/office/drawing/2014/main" id="{9B727447-5240-4223-91A8-F86690466D03}"/>
-              </a:ext>
-            </a:extLst>
-          </p:cNvPr>
-          <p:cNvSpPr>
-            <a:spLocks xmlns:a="http://schemas.openxmlformats.org/drawingml/2006/main" noGrp="1"/>
-          </p:cNvSpPr>
-          <p:nvPr/>
-        </p:nvSpPr>
-        <p:spPr>
-          <a:xfrm xmlns:a="http://schemas.openxmlformats.org/drawingml/2006/main">
-            <a:off x="609600" y="6305550"/>
-            <a:ext cx="4000500" cy="171450"/>
-          </a:xfrm>
-          <a:prstGeom xmlns:a="http://schemas.openxmlformats.org/drawingml/2006/main" prst="rect">
-            <a:avLst/>
-          </a:prstGeom>
-          <a:solidFill xmlns:a="http://schemas.openxmlformats.org/drawingml/2006/main">
-            <a:srgbClr val="000000">
-              <a:alpha val="0"/>
-            </a:srgbClr>
-          </a:solidFill>
-          <a:ln xmlns:a="http://schemas.openxmlformats.org/drawingml/2006/main" w="0">
-            <a:solidFill>
-              <a:srgbClr val="000000">
-                <a:alpha val="0"/>
-              </a:srgbClr>
-            </a:solidFill>
-            <a:prstDash val="solid"/>
-          </a:ln>
-        </p:spPr>
-        <p:txBody>
-          <a:bodyPr xmlns:a="http://schemas.openxmlformats.org/drawingml/2006/main" lIns="0" tIns="0" rIns="0" bIns="0" anchor="t"/>
-          <a:lstStyle xmlns:a="http://schemas.openxmlformats.org/drawingml/2006/main"/>
-          <a:p xmlns:a="http://schemas.openxmlformats.org/drawingml/2006/main">
-            <a:pPr algn="l">
-              <a:defRPr sz="750" b="0">
-                <a:solidFill>
-                  <a:srgbClr val="697277"/>
-                </a:solidFill>
-                <a:latin typeface="Aptos"/>
-                <a:ea typeface="Aptos"/>
-                <a:cs typeface="Aptos"/>
-              </a:defRPr>
-            </a:pPr>
-            <a:r>
-              <a:rPr sz="750" b="0">
-                <a:solidFill>
-                  <a:srgbClr val="697277"/>
-                </a:solidFill>
-                <a:latin typeface="Aptos"/>
-                <a:ea typeface="Aptos"/>
-                <a:cs typeface="Aptos"/>
-              </a:rPr>
-              <a:t>Source: docs/research-group-presentation.md</a:t>
-            </a:r>
-          </a:p>
-        </p:txBody>
-      </p:sp>
-      <p:sp>
-        <p:nvSpPr>
-          <p:cNvPr id="5" name="slide-number">
-            <a:extLst xmlns:a="http://schemas.openxmlformats.org/drawingml/2006/main">
-              <a:ext uri="{FF2B5EF4-FFF2-40B4-BE49-F238E27FC236}">
-                <a16:creationId xmlns:a16="http://schemas.microsoft.com/office/drawing/2014/main" id="{DF80AF9C-76F7-4170-A870-EF8A9A3508B2}"/>
-              </a:ext>
-            </a:extLst>
-          </p:cNvPr>
-          <p:cNvSpPr>
-            <a:spLocks xmlns:a="http://schemas.openxmlformats.org/drawingml/2006/main" noGrp="1"/>
-          </p:cNvSpPr>
-          <p:nvPr/>
-        </p:nvSpPr>
-        <p:spPr>
-          <a:xfrm xmlns:a="http://schemas.openxmlformats.org/drawingml/2006/main">
-            <a:off x="11163300" y="6305550"/>
-            <a:ext cx="419100" cy="171450"/>
-          </a:xfrm>
-          <a:prstGeom xmlns:a="http://schemas.openxmlformats.org/drawingml/2006/main" prst="rect">
-            <a:avLst/>
-          </a:prstGeom>
-          <a:solidFill xmlns:a="http://schemas.openxmlformats.org/drawingml/2006/main">
-            <a:srgbClr val="000000">
-              <a:alpha val="0"/>
-            </a:srgbClr>
-          </a:solidFill>
-          <a:ln xmlns:a="http://schemas.openxmlformats.org/drawingml/2006/main" w="0">
-            <a:solidFill>
-              <a:srgbClr val="000000">
-                <a:alpha val="0"/>
-              </a:srgbClr>
-            </a:solidFill>
-            <a:prstDash val="solid"/>
-          </a:ln>
-        </p:spPr>
-        <p:txBody>
-          <a:bodyPr xmlns:a="http://schemas.openxmlformats.org/drawingml/2006/main" lIns="0" tIns="0" rIns="0" bIns="0" anchor="t"/>
-          <a:lstStyle xmlns:a="http://schemas.openxmlformats.org/drawingml/2006/main"/>
-          <a:p xmlns:a="http://schemas.openxmlformats.org/drawingml/2006/main">
-            <a:pPr algn="r">
-              <a:defRPr sz="750" b="0">
-                <a:solidFill>
-                  <a:srgbClr val="697277"/>
-                </a:solidFill>
-                <a:latin typeface="Aptos"/>
-                <a:ea typeface="Aptos"/>
-                <a:cs typeface="Aptos"/>
-              </a:defRPr>
-            </a:pPr>
-            <a:r>
-              <a:rPr sz="750" b="0">
-                <a:solidFill>
-                  <a:srgbClr val="697277"/>
-                </a:solidFill>
-                <a:latin typeface="Aptos"/>
-                <a:ea typeface="Aptos"/>
-                <a:cs typeface="Aptos"/>
-              </a:rPr>
-              <a:t>16</a:t>
-            </a:r>
-          </a:p>
-        </p:txBody>
-      </p:sp>
-      <p:sp>
-        <p:nvSpPr>
-          <p:cNvPr id="6" name="headline">
-            <a:extLst xmlns:a="http://schemas.openxmlformats.org/drawingml/2006/main">
-              <a:ext uri="{FF2B5EF4-FFF2-40B4-BE49-F238E27FC236}">
-                <a16:creationId xmlns:a16="http://schemas.microsoft.com/office/drawing/2014/main" id="{89BFFA8C-B92D-4A3E-A14C-63974E2CC5C9}"/>
-              </a:ext>
-            </a:extLst>
-          </p:cNvPr>
-          <p:cNvSpPr>
-            <a:spLocks xmlns:a="http://schemas.openxmlformats.org/drawingml/2006/main" noGrp="1"/>
-          </p:cNvSpPr>
-          <p:nvPr/>
-        </p:nvSpPr>
-        <p:spPr>
-          <a:xfrm xmlns:a="http://schemas.openxmlformats.org/drawingml/2006/main">
-            <a:off x="609600" y="1162050"/>
-            <a:ext cx="9334500" cy="1428750"/>
-          </a:xfrm>
-          <a:prstGeom xmlns:a="http://schemas.openxmlformats.org/drawingml/2006/main" prst="rect">
-            <a:avLst/>
-          </a:prstGeom>
-          <a:solidFill xmlns:a="http://schemas.openxmlformats.org/drawingml/2006/main">
-            <a:srgbClr val="000000">
-              <a:alpha val="0"/>
-            </a:srgbClr>
-          </a:solidFill>
-          <a:ln xmlns:a="http://schemas.openxmlformats.org/drawingml/2006/main" w="0">
-            <a:solidFill>
-              <a:srgbClr val="000000">
-                <a:alpha val="0"/>
-              </a:srgbClr>
-            </a:solidFill>
-            <a:prstDash val="solid"/>
-          </a:ln>
-        </p:spPr>
-        <p:txBody>
-          <a:bodyPr xmlns:a="http://schemas.openxmlformats.org/drawingml/2006/main" lIns="0" tIns="0" rIns="0" bIns="0" anchor="t"/>
-          <a:lstStyle xmlns:a="http://schemas.openxmlformats.org/drawingml/2006/main"/>
-          <a:p xmlns:a="http://schemas.openxmlformats.org/drawingml/2006/main">
-            <a:pPr algn="l">
-              <a:defRPr sz="2775" b="1">
-                <a:solidFill>
-                  <a:srgbClr val="20262A"/>
-                </a:solidFill>
-                <a:latin typeface="Aptos Display"/>
-                <a:ea typeface="Aptos Display"/>
-                <a:cs typeface="Aptos Display"/>
-              </a:defRPr>
-            </a:pPr>
-            <a:r>
-              <a:rPr sz="2775" b="1">
-                <a:solidFill>
-                  <a:srgbClr val="20262A"/>
-                </a:solidFill>
-                <a:latin typeface="Aptos Display"/>
-                <a:ea typeface="Aptos Display"/>
-                <a:cs typeface="Aptos Display"/>
-              </a:rPr>
-              <a:t>A figure should remain traceable to the question it addresses.</a:t>
-            </a:r>
-          </a:p>
-        </p:txBody>
-      </p:sp>
-      <p:sp>
-        <p:nvSpPr>
-          <p:cNvPr id="7" name="box-figure">
-            <a:extLst xmlns:a="http://schemas.openxmlformats.org/drawingml/2006/main">
-              <a:ext uri="{FF2B5EF4-FFF2-40B4-BE49-F238E27FC236}">
-                <a16:creationId xmlns:a16="http://schemas.microsoft.com/office/drawing/2014/main" id="{D6AD023C-3B65-4BFA-886B-91D20B97B374}"/>
-              </a:ext>
-            </a:extLst>
-          </p:cNvPr>
-          <p:cNvSpPr>
-            <a:spLocks xmlns:a="http://schemas.openxmlformats.org/drawingml/2006/main" noGrp="1"/>
-          </p:cNvSpPr>
-          <p:nvPr/>
-        </p:nvSpPr>
-        <p:spPr>
-          <a:xfrm xmlns:a="http://schemas.openxmlformats.org/drawingml/2006/main">
-            <a:off x="1600200" y="3733800"/>
-            <a:ext cx="2152650" cy="590550"/>
-          </a:xfrm>
-          <a:prstGeom xmlns:a="http://schemas.openxmlformats.org/drawingml/2006/main" prst="rect">
-            <a:avLst/>
-          </a:prstGeom>
-          <a:solidFill xmlns:a="http://schemas.openxmlformats.org/drawingml/2006/main">
-            <a:srgbClr val="FFFFFF"/>
-          </a:solidFill>
-          <a:ln xmlns:a="http://schemas.openxmlformats.org/drawingml/2006/main" w="11430">
-            <a:solidFill>
-              <a:srgbClr val="20262A"/>
-            </a:solidFill>
-            <a:prstDash val="solid"/>
-          </a:ln>
-        </p:spPr>
-      </p:sp>
-      <p:sp>
-        <p:nvSpPr>
-          <p:cNvPr id="8" name="label-figure">
-            <a:extLst xmlns:a="http://schemas.openxmlformats.org/drawingml/2006/main">
-              <a:ext uri="{FF2B5EF4-FFF2-40B4-BE49-F238E27FC236}">
-                <a16:creationId xmlns:a16="http://schemas.microsoft.com/office/drawing/2014/main" id="{9EB7A728-AF6F-4CB8-A18A-51CCE3FAC756}"/>
-              </a:ext>
-            </a:extLst>
-          </p:cNvPr>
-          <p:cNvSpPr>
-            <a:spLocks xmlns:a="http://schemas.openxmlformats.org/drawingml/2006/main" noGrp="1"/>
-          </p:cNvSpPr>
-          <p:nvPr/>
-        </p:nvSpPr>
-        <p:spPr>
-          <a:xfrm xmlns:a="http://schemas.openxmlformats.org/drawingml/2006/main">
-            <a:off x="1733550" y="3848100"/>
-            <a:ext cx="1885950" cy="361950"/>
-          </a:xfrm>
-          <a:prstGeom xmlns:a="http://schemas.openxmlformats.org/drawingml/2006/main" prst="rect">
-            <a:avLst/>
-          </a:prstGeom>
-          <a:solidFill xmlns:a="http://schemas.openxmlformats.org/drawingml/2006/main">
-            <a:srgbClr val="000000">
-              <a:alpha val="0"/>
-            </a:srgbClr>
-          </a:solidFill>
-          <a:ln xmlns:a="http://schemas.openxmlformats.org/drawingml/2006/main" w="0">
-            <a:solidFill>
-              <a:srgbClr val="000000">
-                <a:alpha val="0"/>
-              </a:srgbClr>
-            </a:solidFill>
-            <a:prstDash val="solid"/>
-          </a:ln>
-        </p:spPr>
-        <p:txBody>
-          <a:bodyPr xmlns:a="http://schemas.openxmlformats.org/drawingml/2006/main" lIns="0" tIns="0" rIns="0" bIns="0" anchor="ctr"/>
-          <a:lstStyle xmlns:a="http://schemas.openxmlformats.org/drawingml/2006/main"/>
-          <a:p xmlns:a="http://schemas.openxmlformats.org/drawingml/2006/main">
-            <a:pPr algn="ctr">
-              <a:defRPr sz="1050" b="0">
-                <a:solidFill>
-                  <a:srgbClr val="20262A"/>
-                </a:solidFill>
-                <a:latin typeface="Aptos"/>
-                <a:ea typeface="Aptos"/>
-                <a:cs typeface="Aptos"/>
-              </a:defRPr>
-            </a:pPr>
-            <a:r>
-              <a:rPr sz="1050" b="0">
-                <a:solidFill>
-                  <a:srgbClr val="20262A"/>
-                </a:solidFill>
-                <a:latin typeface="Aptos"/>
-                <a:ea typeface="Aptos"/>
-                <a:cs typeface="Aptos"/>
-              </a:rPr>
-              <a:t>figure</a:t>
-            </a:r>
-          </a:p>
-        </p:txBody>
-      </p:sp>
-      <p:sp>
-        <p:nvSpPr>
-          <p:cNvPr id="9" name="box-supported claim">
-            <a:extLst xmlns:a="http://schemas.openxmlformats.org/drawingml/2006/main">
-              <a:ext uri="{FF2B5EF4-FFF2-40B4-BE49-F238E27FC236}">
-                <a16:creationId xmlns:a16="http://schemas.microsoft.com/office/drawing/2014/main" id="{70C3F1DE-FC83-47C1-B4D2-24660DCFC51D}"/>
-              </a:ext>
-            </a:extLst>
-          </p:cNvPr>
-          <p:cNvSpPr>
-            <a:spLocks xmlns:a="http://schemas.openxmlformats.org/drawingml/2006/main" noGrp="1"/>
-          </p:cNvSpPr>
-          <p:nvPr/>
-        </p:nvSpPr>
-        <p:spPr>
-          <a:xfrm xmlns:a="http://schemas.openxmlformats.org/drawingml/2006/main">
-            <a:off x="4686300" y="3733800"/>
-            <a:ext cx="2381250" cy="590550"/>
-          </a:xfrm>
-          <a:prstGeom xmlns:a="http://schemas.openxmlformats.org/drawingml/2006/main" prst="rect">
-            <a:avLst/>
-          </a:prstGeom>
-          <a:solidFill xmlns:a="http://schemas.openxmlformats.org/drawingml/2006/main">
-            <a:srgbClr val="FFFFFF"/>
-          </a:solidFill>
-          <a:ln xmlns:a="http://schemas.openxmlformats.org/drawingml/2006/main" w="11430">
-            <a:solidFill>
-              <a:srgbClr val="20262A"/>
-            </a:solidFill>
-            <a:prstDash val="solid"/>
-          </a:ln>
-        </p:spPr>
-      </p:sp>
-      <p:sp>
-        <p:nvSpPr>
-          <p:cNvPr id="10" name="label-supported claim">
-            <a:extLst xmlns:a="http://schemas.openxmlformats.org/drawingml/2006/main">
-              <a:ext uri="{FF2B5EF4-FFF2-40B4-BE49-F238E27FC236}">
-                <a16:creationId xmlns:a16="http://schemas.microsoft.com/office/drawing/2014/main" id="{5235A048-E046-4056-BE8E-427CFF54F06F}"/>
-              </a:ext>
-            </a:extLst>
-          </p:cNvPr>
-          <p:cNvSpPr>
-            <a:spLocks xmlns:a="http://schemas.openxmlformats.org/drawingml/2006/main" noGrp="1"/>
-          </p:cNvSpPr>
-          <p:nvPr/>
-        </p:nvSpPr>
-        <p:spPr>
-          <a:xfrm xmlns:a="http://schemas.openxmlformats.org/drawingml/2006/main">
-            <a:off x="4819650" y="3848100"/>
-            <a:ext cx="2114550" cy="361950"/>
-          </a:xfrm>
-          <a:prstGeom xmlns:a="http://schemas.openxmlformats.org/drawingml/2006/main" prst="rect">
-            <a:avLst/>
-          </a:prstGeom>
-          <a:solidFill xmlns:a="http://schemas.openxmlformats.org/drawingml/2006/main">
-            <a:srgbClr val="000000">
-              <a:alpha val="0"/>
-            </a:srgbClr>
-          </a:solidFill>
-          <a:ln xmlns:a="http://schemas.openxmlformats.org/drawingml/2006/main" w="0">
-            <a:solidFill>
-              <a:srgbClr val="000000">
-                <a:alpha val="0"/>
-              </a:srgbClr>
-            </a:solidFill>
-            <a:prstDash val="solid"/>
-          </a:ln>
-        </p:spPr>
-        <p:txBody>
-          <a:bodyPr xmlns:a="http://schemas.openxmlformats.org/drawingml/2006/main" lIns="0" tIns="0" rIns="0" bIns="0" anchor="ctr"/>
-          <a:lstStyle xmlns:a="http://schemas.openxmlformats.org/drawingml/2006/main"/>
-          <a:p xmlns:a="http://schemas.openxmlformats.org/drawingml/2006/main">
-            <a:pPr algn="ctr">
-              <a:defRPr sz="1050" b="0">
-                <a:solidFill>
-                  <a:srgbClr val="20262A"/>
-                </a:solidFill>
-                <a:latin typeface="Aptos"/>
-                <a:ea typeface="Aptos"/>
-                <a:cs typeface="Aptos"/>
-              </a:defRPr>
-            </a:pPr>
-            <a:r>
-              <a:rPr sz="1050" b="0">
-                <a:solidFill>
-                  <a:srgbClr val="20262A"/>
-                </a:solidFill>
-                <a:latin typeface="Aptos"/>
-                <a:ea typeface="Aptos"/>
-                <a:cs typeface="Aptos"/>
-              </a:rPr>
-              <a:t>supported claim</a:t>
-            </a:r>
-          </a:p>
-        </p:txBody>
-      </p:sp>
-      <p:sp>
-        <p:nvSpPr>
-          <p:cNvPr id="11" name="box-question addressed">
-            <a:extLst xmlns:a="http://schemas.openxmlformats.org/drawingml/2006/main">
-              <a:ext uri="{FF2B5EF4-FFF2-40B4-BE49-F238E27FC236}">
-                <a16:creationId xmlns:a16="http://schemas.microsoft.com/office/drawing/2014/main" id="{1C9AC65F-EB35-4CB2-9076-861E08A72C3F}"/>
-              </a:ext>
-            </a:extLst>
-          </p:cNvPr>
-          <p:cNvSpPr>
-            <a:spLocks xmlns:a="http://schemas.openxmlformats.org/drawingml/2006/main" noGrp="1"/>
-          </p:cNvSpPr>
-          <p:nvPr/>
-        </p:nvSpPr>
-        <p:spPr>
-          <a:xfrm xmlns:a="http://schemas.openxmlformats.org/drawingml/2006/main">
-            <a:off x="8001000" y="3733800"/>
-            <a:ext cx="2381250" cy="590550"/>
-          </a:xfrm>
-          <a:prstGeom xmlns:a="http://schemas.openxmlformats.org/drawingml/2006/main" prst="rect">
-            <a:avLst/>
-          </a:prstGeom>
-          <a:solidFill xmlns:a="http://schemas.openxmlformats.org/drawingml/2006/main">
-            <a:srgbClr val="DCE9EA"/>
-          </a:solidFill>
-          <a:ln xmlns:a="http://schemas.openxmlformats.org/drawingml/2006/main" w="11430">
-            <a:solidFill>
-              <a:srgbClr val="2F5F6F"/>
-            </a:solidFill>
-            <a:prstDash val="solid"/>
-          </a:ln>
-        </p:spPr>
-      </p:sp>
-      <p:sp>
-        <p:nvSpPr>
-          <p:cNvPr id="12" name="label-question addressed">
-            <a:extLst xmlns:a="http://schemas.openxmlformats.org/drawingml/2006/main">
-              <a:ext uri="{FF2B5EF4-FFF2-40B4-BE49-F238E27FC236}">
-                <a16:creationId xmlns:a16="http://schemas.microsoft.com/office/drawing/2014/main" id="{DEFA56DA-999F-44B4-A714-46BC0A39F0FE}"/>
-              </a:ext>
-            </a:extLst>
-          </p:cNvPr>
-          <p:cNvSpPr>
-            <a:spLocks xmlns:a="http://schemas.openxmlformats.org/drawingml/2006/main" noGrp="1"/>
-          </p:cNvSpPr>
-          <p:nvPr/>
-        </p:nvSpPr>
-        <p:spPr>
-          <a:xfrm xmlns:a="http://schemas.openxmlformats.org/drawingml/2006/main">
-            <a:off x="8134350" y="3848100"/>
-            <a:ext cx="2114550" cy="361950"/>
-          </a:xfrm>
-          <a:prstGeom xmlns:a="http://schemas.openxmlformats.org/drawingml/2006/main" prst="rect">
-            <a:avLst/>
-          </a:prstGeom>
-          <a:solidFill xmlns:a="http://schemas.openxmlformats.org/drawingml/2006/main">
-            <a:srgbClr val="000000">
-              <a:alpha val="0"/>
-            </a:srgbClr>
-          </a:solidFill>
-          <a:ln xmlns:a="http://schemas.openxmlformats.org/drawingml/2006/main" w="0">
-            <a:solidFill>
-              <a:srgbClr val="000000">
-                <a:alpha val="0"/>
-              </a:srgbClr>
-            </a:solidFill>
-            <a:prstDash val="solid"/>
-          </a:ln>
-        </p:spPr>
-        <p:txBody>
-          <a:bodyPr xmlns:a="http://schemas.openxmlformats.org/drawingml/2006/main" lIns="0" tIns="0" rIns="0" bIns="0" anchor="ctr"/>
-          <a:lstStyle xmlns:a="http://schemas.openxmlformats.org/drawingml/2006/main"/>
-          <a:p xmlns:a="http://schemas.openxmlformats.org/drawingml/2006/main">
-            <a:pPr algn="ctr">
-              <a:defRPr sz="1050" b="1">
-                <a:solidFill>
-                  <a:srgbClr val="20262A"/>
-                </a:solidFill>
-                <a:latin typeface="Aptos"/>
-                <a:ea typeface="Aptos"/>
-                <a:cs typeface="Aptos"/>
-              </a:defRPr>
-            </a:pPr>
-            <a:r>
-              <a:rPr sz="1050" b="1">
-                <a:solidFill>
-                  <a:srgbClr val="20262A"/>
-                </a:solidFill>
-                <a:latin typeface="Aptos"/>
-                <a:ea typeface="Aptos"/>
-                <a:cs typeface="Aptos"/>
-              </a:rPr>
-              <a:t>question addressed</a:t>
-            </a:r>
-          </a:p>
-        </p:txBody>
-      </p:sp>
-      <p:sp>
-        <p:nvSpPr>
-          <p:cNvPr id="13" name="line-h">
-            <a:extLst xmlns:a="http://schemas.openxmlformats.org/drawingml/2006/main">
-              <a:ext uri="{FF2B5EF4-FFF2-40B4-BE49-F238E27FC236}">
-                <a16:creationId xmlns:a16="http://schemas.microsoft.com/office/drawing/2014/main" id="{6463EAD2-955E-46BC-8CBA-D140FBCA4CC1}"/>
-              </a:ext>
-            </a:extLst>
-          </p:cNvPr>
-          <p:cNvSpPr>
-            <a:spLocks xmlns:a="http://schemas.openxmlformats.org/drawingml/2006/main" noGrp="1"/>
-          </p:cNvSpPr>
-          <p:nvPr/>
-        </p:nvSpPr>
-        <p:spPr>
-          <a:xfrm xmlns:a="http://schemas.openxmlformats.org/drawingml/2006/main">
-            <a:off x="3752850" y="4029075"/>
-            <a:ext cx="933450" cy="19050"/>
-          </a:xfrm>
-          <a:prstGeom xmlns:a="http://schemas.openxmlformats.org/drawingml/2006/main" prst="rect">
-            <a:avLst/>
-          </a:prstGeom>
-          <a:solidFill xmlns:a="http://schemas.openxmlformats.org/drawingml/2006/main">
-            <a:srgbClr val="A8A198"/>
-          </a:solidFill>
-          <a:ln xmlns:a="http://schemas.openxmlformats.org/drawingml/2006/main" w="0">
-            <a:solidFill>
-              <a:srgbClr val="A8A198"/>
-            </a:solidFill>
-            <a:prstDash val="solid"/>
-          </a:ln>
-        </p:spPr>
-      </p:sp>
-      <p:sp>
-        <p:nvSpPr>
-          <p:cNvPr id="14" name="line-h">
-            <a:extLst xmlns:a="http://schemas.openxmlformats.org/drawingml/2006/main">
-              <a:ext uri="{FF2B5EF4-FFF2-40B4-BE49-F238E27FC236}">
-                <a16:creationId xmlns:a16="http://schemas.microsoft.com/office/drawing/2014/main" id="{4C33A702-9BFC-4BDD-843C-DF93FACA8FFA}"/>
-              </a:ext>
-            </a:extLst>
-          </p:cNvPr>
-          <p:cNvSpPr>
-            <a:spLocks xmlns:a="http://schemas.openxmlformats.org/drawingml/2006/main" noGrp="1"/>
-          </p:cNvSpPr>
-          <p:nvPr/>
-        </p:nvSpPr>
-        <p:spPr>
-          <a:xfrm xmlns:a="http://schemas.openxmlformats.org/drawingml/2006/main">
-            <a:off x="7067550" y="4029075"/>
-            <a:ext cx="933450" cy="19050"/>
-          </a:xfrm>
-          <a:prstGeom xmlns:a="http://schemas.openxmlformats.org/drawingml/2006/main" prst="rect">
-            <a:avLst/>
-          </a:prstGeom>
-          <a:solidFill xmlns:a="http://schemas.openxmlformats.org/drawingml/2006/main">
-            <a:srgbClr val="A8A198"/>
-          </a:solidFill>
-          <a:ln xmlns:a="http://schemas.openxmlformats.org/drawingml/2006/main" w="0">
-            <a:solidFill>
-              <a:srgbClr val="A8A198"/>
-            </a:solidFill>
-            <a:prstDash val="solid"/>
-          </a:ln>
-        </p:spPr>
-      </p:sp>
-      <p:sp>
-        <p:nvSpPr>
-          <p:cNvPr id="15" name="">
-            <a:extLst xmlns:a="http://schemas.openxmlformats.org/drawingml/2006/main">
-              <a:ext uri="{FF2B5EF4-FFF2-40B4-BE49-F238E27FC236}">
-                <a16:creationId xmlns:a16="http://schemas.microsoft.com/office/drawing/2014/main" id="{14CAA238-BF8B-4530-9B7D-8B72EF3BEEC2}"/>
-              </a:ext>
-            </a:extLst>
-          </p:cNvPr>
-          <p:cNvSpPr>
-            <a:spLocks xmlns:a="http://schemas.openxmlformats.org/drawingml/2006/main" noGrp="1"/>
-          </p:cNvSpPr>
-          <p:nvPr/>
-        </p:nvSpPr>
-        <p:spPr>
-          <a:xfrm xmlns:a="http://schemas.openxmlformats.org/drawingml/2006/main">
-            <a:off x="2343150" y="4819650"/>
-            <a:ext cx="7620000" cy="323850"/>
-          </a:xfrm>
-          <a:prstGeom xmlns:a="http://schemas.openxmlformats.org/drawingml/2006/main" prst="rect">
-            <a:avLst/>
-          </a:prstGeom>
-          <a:solidFill xmlns:a="http://schemas.openxmlformats.org/drawingml/2006/main">
-            <a:srgbClr val="000000">
-              <a:alpha val="0"/>
-            </a:srgbClr>
-          </a:solidFill>
-          <a:ln xmlns:a="http://schemas.openxmlformats.org/drawingml/2006/main" w="0">
-            <a:solidFill>
-              <a:srgbClr val="000000">
-                <a:alpha val="0"/>
-              </a:srgbClr>
-            </a:solidFill>
-            <a:prstDash val="solid"/>
-          </a:ln>
-        </p:spPr>
-        <p:txBody>
-          <a:bodyPr xmlns:a="http://schemas.openxmlformats.org/drawingml/2006/main" lIns="0" tIns="0" rIns="0" bIns="0" anchor="ctr"/>
-          <a:lstStyle xmlns:a="http://schemas.openxmlformats.org/drawingml/2006/main"/>
-          <a:p xmlns:a="http://schemas.openxmlformats.org/drawingml/2006/main">
-            <a:pPr algn="ctr">
-              <a:defRPr sz="1200" b="0">
-                <a:solidFill>
-                  <a:srgbClr val="697277"/>
-                </a:solidFill>
-                <a:latin typeface="Aptos"/>
-                <a:ea typeface="Aptos"/>
-                <a:cs typeface="Aptos"/>
-              </a:defRPr>
-            </a:pPr>
-            <a:r>
-              <a:rPr sz="1200" b="0">
-                <a:solidFill>
-                  <a:srgbClr val="697277"/>
-                </a:solidFill>
-                <a:latin typeface="Aptos"/>
-                <a:ea typeface="Aptos"/>
-                <a:cs typeface="Aptos"/>
-              </a:rPr>
-              <a:t>The figure is not just an output. It is evidence for a claim about a question.</a:t>
-            </a:r>
-          </a:p>
-        </p:txBody>
-      </p:sp>
-    </p:spTree>
-    <p:extLst>
-      <p:ext uri="{BB962C8B-B14F-4D97-AF65-F5344CB8AC3E}">
-        <p14:creationId xmlns:p14="http://schemas.microsoft.com/office/powerpoint/2010/main" val="318302225"/>
       </p:ext>
     </p:extLst>
   </p:cSld>
@@ -11792,7 +9714,7 @@
           </a:ln>
         </p:spPr>
         <p:txBody>
-          <a:bodyPr xmlns:a="http://schemas.openxmlformats.org/drawingml/2006/main" lIns="0" tIns="0" rIns="0" bIns="0" anchor="t"/>
+          <a:bodyPr xmlns:a="http://schemas.openxmlformats.org/drawingml/2006/main" lIns="0" tIns="0" rIns="0" bIns="0" anchor="t" wrap="square"/>
           <a:lstStyle xmlns:a="http://schemas.openxmlformats.org/drawingml/2006/main"/>
           <a:p xmlns:a="http://schemas.openxmlformats.org/drawingml/2006/main">
             <a:pPr algn="r">
@@ -11811,10 +9733,8 @@
                   <a:srgbClr val="697277"/>
                 </a:solidFill>
                 <a:latin typeface="Aptos"/>
-                <a:ea typeface="Aptos"/>
-                <a:cs typeface="Aptos"/>
               </a:rPr>
-              <a:t>17</a:t>
+              <a:t>15</a:t>
             </a:r>
           </a:p>
         </p:txBody>
@@ -12524,7 +10444,7 @@
           </a:ln>
         </p:spPr>
         <p:txBody>
-          <a:bodyPr xmlns:a="http://schemas.openxmlformats.org/drawingml/2006/main" lIns="0" tIns="0" rIns="0" bIns="0" anchor="t"/>
+          <a:bodyPr xmlns:a="http://schemas.openxmlformats.org/drawingml/2006/main" lIns="0" tIns="0" rIns="0" bIns="0" anchor="t" wrap="square"/>
           <a:lstStyle xmlns:a="http://schemas.openxmlformats.org/drawingml/2006/main"/>
           <a:p xmlns:a="http://schemas.openxmlformats.org/drawingml/2006/main">
             <a:pPr algn="r">
@@ -12543,10 +10463,8 @@
                   <a:srgbClr val="697277"/>
                 </a:solidFill>
                 <a:latin typeface="Aptos"/>
-                <a:ea typeface="Aptos"/>
-                <a:cs typeface="Aptos"/>
               </a:rPr>
-              <a:t>18</a:t>
+              <a:t>16</a:t>
             </a:r>
           </a:p>
         </p:txBody>
@@ -13289,7 +11207,7 @@
           </a:ln>
         </p:spPr>
         <p:txBody>
-          <a:bodyPr xmlns:a="http://schemas.openxmlformats.org/drawingml/2006/main" lIns="0" tIns="0" rIns="0" bIns="0" anchor="t"/>
+          <a:bodyPr xmlns:a="http://schemas.openxmlformats.org/drawingml/2006/main" lIns="0" tIns="0" rIns="0" bIns="0" anchor="t" wrap="square"/>
           <a:lstStyle xmlns:a="http://schemas.openxmlformats.org/drawingml/2006/main"/>
           <a:p xmlns:a="http://schemas.openxmlformats.org/drawingml/2006/main">
             <a:pPr algn="r">
@@ -13308,10 +11226,8 @@
                   <a:srgbClr val="697277"/>
                 </a:solidFill>
                 <a:latin typeface="Aptos"/>
-                <a:ea typeface="Aptos"/>
-                <a:cs typeface="Aptos"/>
               </a:rPr>
-              <a:t>19</a:t>
+              <a:t>17</a:t>
             </a:r>
           </a:p>
         </p:txBody>
@@ -14197,7 +12113,7 @@
           </a:ln>
         </p:spPr>
         <p:txBody>
-          <a:bodyPr xmlns:a="http://schemas.openxmlformats.org/drawingml/2006/main" lIns="0" tIns="0" rIns="0" bIns="0" anchor="t"/>
+          <a:bodyPr xmlns:a="http://schemas.openxmlformats.org/drawingml/2006/main" lIns="0" tIns="0" rIns="0" bIns="0" anchor="t" wrap="square"/>
           <a:lstStyle xmlns:a="http://schemas.openxmlformats.org/drawingml/2006/main"/>
           <a:p xmlns:a="http://schemas.openxmlformats.org/drawingml/2006/main">
             <a:pPr algn="r">
@@ -14216,8 +12132,6 @@
                   <a:srgbClr val="697277"/>
                 </a:solidFill>
                 <a:latin typeface="Aptos"/>
-                <a:ea typeface="Aptos"/>
-                <a:cs typeface="Aptos"/>
               </a:rPr>
               <a:t>02</a:t>
             </a:r>
@@ -14898,7 +12812,7 @@
           </a:ln>
         </p:spPr>
         <p:txBody>
-          <a:bodyPr xmlns:a="http://schemas.openxmlformats.org/drawingml/2006/main" lIns="0" tIns="0" rIns="0" bIns="0" anchor="t"/>
+          <a:bodyPr xmlns:a="http://schemas.openxmlformats.org/drawingml/2006/main" lIns="0" tIns="0" rIns="0" bIns="0" anchor="t" wrap="square"/>
           <a:lstStyle xmlns:a="http://schemas.openxmlformats.org/drawingml/2006/main"/>
           <a:p xmlns:a="http://schemas.openxmlformats.org/drawingml/2006/main">
             <a:pPr algn="r">
@@ -14917,10 +12831,8 @@
                   <a:srgbClr val="697277"/>
                 </a:solidFill>
                 <a:latin typeface="Aptos"/>
-                <a:ea typeface="Aptos"/>
-                <a:cs typeface="Aptos"/>
               </a:rPr>
-              <a:t>20</a:t>
+              <a:t>18</a:t>
             </a:r>
           </a:p>
         </p:txBody>
@@ -15640,6 +13552,10 @@
             <a:prstDash val="solid"/>
           </a:ln>
         </p:spPr>
+        <p:txBody xmlns:a="http://schemas.openxmlformats.org/drawingml/2006/main">
+          <a:bodyPr/>
+          <a:p/>
+        </p:txBody>
       </p:sp>
       <p:sp>
         <p:nvSpPr>
@@ -15737,6 +13653,10 @@
             <a:prstDash val="solid"/>
           </a:ln>
         </p:spPr>
+        <p:txBody xmlns:a="http://schemas.openxmlformats.org/drawingml/2006/main">
+          <a:bodyPr/>
+          <a:p/>
+        </p:txBody>
       </p:sp>
       <p:sp>
         <p:nvSpPr>
@@ -15839,7 +13759,7 @@
           </a:ln>
         </p:spPr>
         <p:txBody>
-          <a:bodyPr xmlns:a="http://schemas.openxmlformats.org/drawingml/2006/main" lIns="0" tIns="0" rIns="0" bIns="0" anchor="t"/>
+          <a:bodyPr xmlns:a="http://schemas.openxmlformats.org/drawingml/2006/main" lIns="0" tIns="0" rIns="0" bIns="0" anchor="t" wrap="square"/>
           <a:lstStyle xmlns:a="http://schemas.openxmlformats.org/drawingml/2006/main"/>
           <a:p xmlns:a="http://schemas.openxmlformats.org/drawingml/2006/main">
             <a:pPr algn="r">
@@ -15858,10 +13778,8 @@
                   <a:srgbClr val="697277"/>
                 </a:solidFill>
                 <a:latin typeface="Aptos"/>
-                <a:ea typeface="Aptos"/>
-                <a:cs typeface="Aptos"/>
               </a:rPr>
-              <a:t>21</a:t>
+              <a:t>19</a:t>
             </a:r>
           </a:p>
         </p:txBody>
@@ -15962,6 +13880,10 @@
             <a:prstDash val="solid"/>
           </a:ln>
         </p:spPr>
+        <p:txBody xmlns:a="http://schemas.openxmlformats.org/drawingml/2006/main">
+          <a:bodyPr/>
+          <a:p/>
+        </p:txBody>
       </p:sp>
       <p:sp>
         <p:nvSpPr>
@@ -16000,7 +13922,7 @@
           </a:ln>
         </p:spPr>
         <p:txBody>
-          <a:bodyPr xmlns:a="http://schemas.openxmlformats.org/drawingml/2006/main" lIns="0" tIns="0" rIns="0" bIns="0" anchor="ctr"/>
+          <a:bodyPr xmlns:a="http://schemas.openxmlformats.org/drawingml/2006/main" lIns="0" tIns="0" rIns="0" bIns="0" anchor="ctr" wrap="square"/>
           <a:lstStyle xmlns:a="http://schemas.openxmlformats.org/drawingml/2006/main"/>
           <a:p xmlns:a="http://schemas.openxmlformats.org/drawingml/2006/main">
             <a:pPr algn="ctr">
@@ -16019,10 +13941,8 @@
                   <a:srgbClr val="20262A"/>
                 </a:solidFill>
                 <a:latin typeface="Aptos"/>
-                <a:ea typeface="Aptos"/>
-                <a:cs typeface="Aptos"/>
               </a:rPr>
-              <a:t>one project</a:t>
+              <a:t>AL-gain project</a:t>
             </a:r>
           </a:p>
         </p:txBody>
@@ -16059,6 +13979,10 @@
             <a:prstDash val="solid"/>
           </a:ln>
         </p:spPr>
+        <p:txBody xmlns:a="http://schemas.openxmlformats.org/drawingml/2006/main">
+          <a:bodyPr/>
+          <a:p/>
+        </p:txBody>
       </p:sp>
       <p:sp>
         <p:nvSpPr>
@@ -16097,7 +14021,7 @@
           </a:ln>
         </p:spPr>
         <p:txBody>
-          <a:bodyPr xmlns:a="http://schemas.openxmlformats.org/drawingml/2006/main" lIns="0" tIns="0" rIns="0" bIns="0" anchor="ctr"/>
+          <a:bodyPr xmlns:a="http://schemas.openxmlformats.org/drawingml/2006/main" lIns="0" tIns="0" rIns="0" bIns="0" anchor="ctr" wrap="square"/>
           <a:lstStyle xmlns:a="http://schemas.openxmlformats.org/drawingml/2006/main"/>
           <a:p xmlns:a="http://schemas.openxmlformats.org/drawingml/2006/main">
             <a:pPr algn="ctr">
@@ -16116,10 +14040,8 @@
                   <a:srgbClr val="20262A"/>
                 </a:solidFill>
                 <a:latin typeface="Aptos"/>
-                <a:ea typeface="Aptos"/>
-                <a:cs typeface="Aptos"/>
               </a:rPr>
-              <a:t>question hierarchy</a:t>
+              <a:t>superseded → 2 sub-Qs</a:t>
             </a:r>
           </a:p>
         </p:txBody>
@@ -16156,6 +14078,10 @@
             <a:prstDash val="solid"/>
           </a:ln>
         </p:spPr>
+        <p:txBody xmlns:a="http://schemas.openxmlformats.org/drawingml/2006/main">
+          <a:bodyPr/>
+          <a:p/>
+        </p:txBody>
       </p:sp>
       <p:sp>
         <p:nvSpPr>
@@ -16194,7 +14120,7 @@
           </a:ln>
         </p:spPr>
         <p:txBody>
-          <a:bodyPr xmlns:a="http://schemas.openxmlformats.org/drawingml/2006/main" lIns="0" tIns="0" rIns="0" bIns="0" anchor="ctr"/>
+          <a:bodyPr xmlns:a="http://schemas.openxmlformats.org/drawingml/2006/main" lIns="0" tIns="0" rIns="0" bIns="0" anchor="ctr" wrap="square"/>
           <a:lstStyle xmlns:a="http://schemas.openxmlformats.org/drawingml/2006/main"/>
           <a:p xmlns:a="http://schemas.openxmlformats.org/drawingml/2006/main">
             <a:pPr algn="ctr">
@@ -16213,10 +14139,8 @@
                   <a:srgbClr val="20262A"/>
                 </a:solidFill>
                 <a:latin typeface="Aptos"/>
-                <a:ea typeface="Aptos"/>
-                <a:cs typeface="Aptos"/>
               </a:rPr>
-              <a:t>one result</a:t>
+              <a:t>Fig 3b</a:t>
             </a:r>
           </a:p>
         </p:txBody>
@@ -16253,6 +14177,10 @@
             <a:prstDash val="solid"/>
           </a:ln>
         </p:spPr>
+        <p:txBody xmlns:a="http://schemas.openxmlformats.org/drawingml/2006/main">
+          <a:bodyPr/>
+          <a:p/>
+        </p:txBody>
       </p:sp>
       <p:sp>
         <p:nvSpPr>
@@ -16286,6 +14214,10 @@
             <a:prstDash val="solid"/>
           </a:ln>
         </p:spPr>
+        <p:txBody xmlns:a="http://schemas.openxmlformats.org/drawingml/2006/main">
+          <a:bodyPr/>
+          <a:p/>
+        </p:txBody>
       </p:sp>
       <p:sp>
         <p:nvSpPr>
@@ -16604,7 +14536,7 @@
           </a:ln>
         </p:spPr>
         <p:txBody>
-          <a:bodyPr xmlns:a="http://schemas.openxmlformats.org/drawingml/2006/main" lIns="0" tIns="0" rIns="0" bIns="0" anchor="t"/>
+          <a:bodyPr xmlns:a="http://schemas.openxmlformats.org/drawingml/2006/main" lIns="0" tIns="0" rIns="0" bIns="0" anchor="t" wrap="square"/>
           <a:lstStyle xmlns:a="http://schemas.openxmlformats.org/drawingml/2006/main"/>
           <a:p xmlns:a="http://schemas.openxmlformats.org/drawingml/2006/main">
             <a:pPr algn="r">
@@ -16623,8 +14555,6 @@
                   <a:srgbClr val="697277"/>
                 </a:solidFill>
                 <a:latin typeface="Aptos"/>
-                <a:ea typeface="Aptos"/>
-                <a:cs typeface="Aptos"/>
               </a:rPr>
               <a:t>03</a:t>
             </a:r>
@@ -17367,6 +15297,10 @@
             <a:prstDash val="solid"/>
           </a:ln>
         </p:spPr>
+        <p:txBody xmlns:a="http://schemas.openxmlformats.org/drawingml/2006/main">
+          <a:bodyPr/>
+          <a:p/>
+        </p:txBody>
       </p:sp>
       <p:sp>
         <p:nvSpPr>
@@ -17464,6 +15398,10 @@
             <a:prstDash val="solid"/>
           </a:ln>
         </p:spPr>
+        <p:txBody xmlns:a="http://schemas.openxmlformats.org/drawingml/2006/main">
+          <a:bodyPr/>
+          <a:p/>
+        </p:txBody>
       </p:sp>
       <p:sp>
         <p:nvSpPr>
@@ -17566,7 +15504,7 @@
           </a:ln>
         </p:spPr>
         <p:txBody>
-          <a:bodyPr xmlns:a="http://schemas.openxmlformats.org/drawingml/2006/main" lIns="0" tIns="0" rIns="0" bIns="0" anchor="t"/>
+          <a:bodyPr xmlns:a="http://schemas.openxmlformats.org/drawingml/2006/main" lIns="0" tIns="0" rIns="0" bIns="0" anchor="t" wrap="square"/>
           <a:lstStyle xmlns:a="http://schemas.openxmlformats.org/drawingml/2006/main"/>
           <a:p xmlns:a="http://schemas.openxmlformats.org/drawingml/2006/main">
             <a:pPr algn="r">
@@ -17585,8 +15523,6 @@
                   <a:srgbClr val="697277"/>
                 </a:solidFill>
                 <a:latin typeface="Aptos"/>
-                <a:ea typeface="Aptos"/>
-                <a:cs typeface="Aptos"/>
               </a:rPr>
               <a:t>04</a:t>
             </a:r>
@@ -17689,6 +15625,10 @@
             <a:prstDash val="solid"/>
           </a:ln>
         </p:spPr>
+        <p:txBody xmlns:a="http://schemas.openxmlformats.org/drawingml/2006/main">
+          <a:bodyPr/>
+          <a:p/>
+        </p:txBody>
       </p:sp>
       <p:sp>
         <p:nvSpPr>
@@ -17809,6 +15749,10 @@
             <a:prstDash val="solid"/>
           </a:ln>
         </p:spPr>
+        <p:txBody xmlns:a="http://schemas.openxmlformats.org/drawingml/2006/main">
+          <a:bodyPr/>
+          <a:p/>
+        </p:txBody>
       </p:sp>
       <p:sp>
         <p:nvSpPr>
@@ -17842,6 +15786,10 @@
             <a:prstDash val="solid"/>
           </a:ln>
         </p:spPr>
+        <p:txBody xmlns:a="http://schemas.openxmlformats.org/drawingml/2006/main">
+          <a:bodyPr/>
+          <a:p/>
+        </p:txBody>
       </p:sp>
       <p:sp>
         <p:nvSpPr>
@@ -17962,6 +15910,10 @@
             <a:prstDash val="solid"/>
           </a:ln>
         </p:spPr>
+        <p:txBody xmlns:a="http://schemas.openxmlformats.org/drawingml/2006/main">
+          <a:bodyPr/>
+          <a:p/>
+        </p:txBody>
       </p:sp>
       <p:sp>
         <p:nvSpPr>
@@ -17995,6 +15947,10 @@
             <a:prstDash val="solid"/>
           </a:ln>
         </p:spPr>
+        <p:txBody xmlns:a="http://schemas.openxmlformats.org/drawingml/2006/main">
+          <a:bodyPr/>
+          <a:p/>
+        </p:txBody>
       </p:sp>
       <p:sp>
         <p:nvSpPr>
@@ -18099,8 +16055,8 @@
         </p:nvSpPr>
         <p:spPr>
           <a:xfrm xmlns:a="http://schemas.openxmlformats.org/drawingml/2006/main">
-            <a:off x="1428750" y="4057650"/>
-            <a:ext cx="1809750" cy="495300"/>
+            <a:off x="822960" y="3822191"/>
+            <a:ext cx="2240280" cy="786384"/>
           </a:xfrm>
           <a:prstGeom xmlns:a="http://schemas.openxmlformats.org/drawingml/2006/main" prst="rect">
             <a:avLst/>
@@ -18115,6 +16071,10 @@
             <a:prstDash val="solid"/>
           </a:ln>
         </p:spPr>
+        <p:txBody xmlns:a="http://schemas.openxmlformats.org/drawingml/2006/main">
+          <a:bodyPr/>
+          <a:p/>
+        </p:txBody>
       </p:sp>
       <p:sp>
         <p:nvSpPr>
@@ -18132,8 +16092,8 @@
         </p:nvSpPr>
         <p:spPr>
           <a:xfrm xmlns:a="http://schemas.openxmlformats.org/drawingml/2006/main">
-            <a:off x="1562100" y="4171950"/>
-            <a:ext cx="1543050" cy="266700"/>
+            <a:off x="932688" y="3931920"/>
+            <a:ext cx="2020824" cy="566928"/>
           </a:xfrm>
           <a:prstGeom xmlns:a="http://schemas.openxmlformats.org/drawingml/2006/main" prst="rect">
             <a:avLst/>
@@ -18153,7 +16113,7 @@
           </a:ln>
         </p:spPr>
         <p:txBody>
-          <a:bodyPr xmlns:a="http://schemas.openxmlformats.org/drawingml/2006/main" lIns="0" tIns="0" rIns="0" bIns="0" anchor="ctr"/>
+          <a:bodyPr xmlns:a="http://schemas.openxmlformats.org/drawingml/2006/main" lIns="0" tIns="0" rIns="0" bIns="0" anchor="ctr" wrap="square"/>
           <a:lstStyle xmlns:a="http://schemas.openxmlformats.org/drawingml/2006/main"/>
           <a:p xmlns:a="http://schemas.openxmlformats.org/drawingml/2006/main">
             <a:pPr algn="ctr">
@@ -18172,12 +16132,22 @@
                   <a:srgbClr val="20262A"/>
                 </a:solidFill>
                 <a:latin typeface="Aptos"/>
-                <a:ea typeface="Aptos"/>
-                <a:cs typeface="Aptos"/>
               </a:rPr>
-              <a:t>motivating question</a:t>
+              <a:t>Does lateral inhibition</a:t>
             </a:r>
           </a:p>
+          <a:p xmlns:a="http://schemas.openxmlformats.org/drawingml/2006/main">
+            <a:pPr algn="ctr"/>
+            <a:r>
+              <a:rPr sz="1050" b="1">
+                <a:solidFill>
+                  <a:srgbClr val="20262A"/>
+                </a:solidFill>
+                <a:latin typeface="Aptos"/>
+              </a:rPr>
+              <a:t>normalize PN output?</a:t>
+            </a:r>
+          </a:p>
         </p:txBody>
       </p:sp>
       <p:sp>
@@ -18212,6 +16182,10 @@
             <a:prstDash val="solid"/>
           </a:ln>
         </p:spPr>
+        <p:txBody xmlns:a="http://schemas.openxmlformats.org/drawingml/2006/main">
+          <a:bodyPr/>
+          <a:p/>
+        </p:txBody>
       </p:sp>
       <p:sp>
         <p:nvSpPr>
@@ -18250,7 +16224,7 @@
           </a:ln>
         </p:spPr>
         <p:txBody>
-          <a:bodyPr xmlns:a="http://schemas.openxmlformats.org/drawingml/2006/main" lIns="0" tIns="0" rIns="0" bIns="0" anchor="ctr"/>
+          <a:bodyPr xmlns:a="http://schemas.openxmlformats.org/drawingml/2006/main" lIns="0" tIns="0" rIns="0" bIns="0" anchor="ctr" wrap="square"/>
           <a:lstStyle xmlns:a="http://schemas.openxmlformats.org/drawingml/2006/main"/>
           <a:p xmlns:a="http://schemas.openxmlformats.org/drawingml/2006/main">
             <a:pPr algn="ctr">
@@ -18269,10 +16243,8 @@
                   <a:srgbClr val="20262A"/>
                 </a:solidFill>
                 <a:latin typeface="Aptos"/>
-                <a:ea typeface="Aptos"/>
-                <a:cs typeface="Aptos"/>
               </a:rPr>
-              <a:t>notebook note</a:t>
+              <a:t>bench note (fly07)</a:t>
             </a:r>
           </a:p>
         </p:txBody>
@@ -18309,6 +16281,10 @@
             <a:prstDash val="solid"/>
           </a:ln>
         </p:spPr>
+        <p:txBody xmlns:a="http://schemas.openxmlformats.org/drawingml/2006/main">
+          <a:bodyPr/>
+          <a:p/>
+        </p:txBody>
       </p:sp>
       <p:sp>
         <p:nvSpPr>
@@ -18347,7 +16323,7 @@
           </a:ln>
         </p:spPr>
         <p:txBody>
-          <a:bodyPr xmlns:a="http://schemas.openxmlformats.org/drawingml/2006/main" lIns="0" tIns="0" rIns="0" bIns="0" anchor="ctr"/>
+          <a:bodyPr xmlns:a="http://schemas.openxmlformats.org/drawingml/2006/main" lIns="0" tIns="0" rIns="0" bIns="0" anchor="ctr" wrap="square"/>
           <a:lstStyle xmlns:a="http://schemas.openxmlformats.org/drawingml/2006/main"/>
           <a:p xmlns:a="http://schemas.openxmlformats.org/drawingml/2006/main">
             <a:pPr algn="ctr">
@@ -18366,12 +16342,22 @@
                   <a:srgbClr val="20262A"/>
                 </a:solidFill>
                 <a:latin typeface="Aptos"/>
-                <a:ea typeface="Aptos"/>
-                <a:cs typeface="Aptos"/>
               </a:rPr>
-              <a:t>session_0427.zarr</a:t>
+              <a:t>2025_12_10_Rig2_</a:t>
             </a:r>
           </a:p>
+          <a:p xmlns:a="http://schemas.openxmlformats.org/drawingml/2006/main">
+            <a:pPr algn="ctr"/>
+            <a:r>
+              <a:rPr sz="1050" b="0">
+                <a:solidFill>
+                  <a:srgbClr val="20262A"/>
+                </a:solidFill>
+                <a:latin typeface="Aptos"/>
+              </a:rPr>
+              <a:t>session001.nwb</a:t>
+            </a:r>
+          </a:p>
         </p:txBody>
       </p:sp>
       <p:sp>
@@ -18406,6 +16392,10 @@
             <a:prstDash val="solid"/>
           </a:ln>
         </p:spPr>
+        <p:txBody xmlns:a="http://schemas.openxmlformats.org/drawingml/2006/main">
+          <a:bodyPr/>
+          <a:p/>
+        </p:txBody>
       </p:sp>
       <p:sp>
         <p:nvSpPr>
@@ -18444,7 +16434,7 @@
           </a:ln>
         </p:spPr>
         <p:txBody>
-          <a:bodyPr xmlns:a="http://schemas.openxmlformats.org/drawingml/2006/main" lIns="0" tIns="0" rIns="0" bIns="0" anchor="ctr"/>
+          <a:bodyPr xmlns:a="http://schemas.openxmlformats.org/drawingml/2006/main" lIns="0" tIns="0" rIns="0" bIns="0" anchor="ctr" wrap="square"/>
           <a:lstStyle xmlns:a="http://schemas.openxmlformats.org/drawingml/2006/main"/>
           <a:p xmlns:a="http://schemas.openxmlformats.org/drawingml/2006/main">
             <a:pPr algn="ctr">
@@ -18463,10 +16453,8 @@
                   <a:srgbClr val="20262A"/>
                 </a:solidFill>
                 <a:latin typeface="Aptos"/>
-                <a:ea typeface="Aptos"/>
-                <a:cs typeface="Aptos"/>
               </a:rPr>
-              <a:t>analysis notebook</a:t>
+              <a:t>divisive-norm fit</a:t>
             </a:r>
           </a:p>
         </p:txBody>
@@ -18503,6 +16491,10 @@
             <a:prstDash val="solid"/>
           </a:ln>
         </p:spPr>
+        <p:txBody xmlns:a="http://schemas.openxmlformats.org/drawingml/2006/main">
+          <a:bodyPr/>
+          <a:p/>
+        </p:txBody>
       </p:sp>
       <p:sp>
         <p:nvSpPr>
@@ -18541,7 +16533,7 @@
           </a:ln>
         </p:spPr>
         <p:txBody>
-          <a:bodyPr xmlns:a="http://schemas.openxmlformats.org/drawingml/2006/main" lIns="0" tIns="0" rIns="0" bIns="0" anchor="ctr"/>
+          <a:bodyPr xmlns:a="http://schemas.openxmlformats.org/drawingml/2006/main" lIns="0" tIns="0" rIns="0" bIns="0" anchor="ctr" wrap="square"/>
           <a:lstStyle xmlns:a="http://schemas.openxmlformats.org/drawingml/2006/main"/>
           <a:p xmlns:a="http://schemas.openxmlformats.org/drawingml/2006/main">
             <a:pPr algn="ctr">
@@ -18560,10 +16552,8 @@
                   <a:srgbClr val="20262A"/>
                 </a:solidFill>
                 <a:latin typeface="Aptos"/>
-                <a:ea typeface="Aptos"/>
-                <a:cs typeface="Aptos"/>
               </a:rPr>
-              <a:t>figure draft</a:t>
+              <a:t>Fig 3b (draft)</a:t>
             </a:r>
           </a:p>
         </p:txBody>
@@ -18600,6 +16590,10 @@
             <a:prstDash val="solid"/>
           </a:ln>
         </p:spPr>
+        <p:txBody xmlns:a="http://schemas.openxmlformats.org/drawingml/2006/main">
+          <a:bodyPr/>
+          <a:p/>
+        </p:txBody>
       </p:sp>
       <p:sp>
         <p:nvSpPr>
@@ -18633,6 +16627,10 @@
             <a:prstDash val="solid"/>
           </a:ln>
         </p:spPr>
+        <p:txBody xmlns:a="http://schemas.openxmlformats.org/drawingml/2006/main">
+          <a:bodyPr/>
+          <a:p/>
+        </p:txBody>
       </p:sp>
       <p:sp>
         <p:nvSpPr>
@@ -18666,6 +16664,10 @@
             <a:prstDash val="solid"/>
           </a:ln>
         </p:spPr>
+        <p:txBody xmlns:a="http://schemas.openxmlformats.org/drawingml/2006/main">
+          <a:bodyPr/>
+          <a:p/>
+        </p:txBody>
       </p:sp>
       <p:sp>
         <p:nvSpPr>
@@ -18699,6 +16701,10 @@
             <a:prstDash val="solid"/>
           </a:ln>
         </p:spPr>
+        <p:txBody xmlns:a="http://schemas.openxmlformats.org/drawingml/2006/main">
+          <a:bodyPr/>
+          <a:p/>
+        </p:txBody>
       </p:sp>
       <p:sp>
         <p:nvSpPr>
@@ -18732,6 +16738,10 @@
             <a:prstDash val="solid"/>
           </a:ln>
         </p:spPr>
+        <p:txBody xmlns:a="http://schemas.openxmlformats.org/drawingml/2006/main">
+          <a:bodyPr/>
+          <a:p/>
+        </p:txBody>
       </p:sp>
       <p:sp>
         <p:nvSpPr>
@@ -18765,6 +16775,10 @@
             <a:prstDash val="solid"/>
           </a:ln>
         </p:spPr>
+        <p:txBody xmlns:a="http://schemas.openxmlformats.org/drawingml/2006/main">
+          <a:bodyPr/>
+          <a:p/>
+        </p:txBody>
       </p:sp>
       <p:sp>
         <p:nvSpPr>
@@ -18798,6 +16812,10 @@
             <a:prstDash val="solid"/>
           </a:ln>
         </p:spPr>
+        <p:txBody xmlns:a="http://schemas.openxmlformats.org/drawingml/2006/main">
+          <a:bodyPr/>
+          <a:p/>
+        </p:txBody>
       </p:sp>
       <p:sp>
         <p:nvSpPr>
@@ -18831,6 +16849,10 @@
             <a:prstDash val="solid"/>
           </a:ln>
         </p:spPr>
+        <p:txBody xmlns:a="http://schemas.openxmlformats.org/drawingml/2006/main">
+          <a:bodyPr/>
+          <a:p/>
+        </p:txBody>
       </p:sp>
       <p:sp>
         <p:nvSpPr>
@@ -18864,6 +16886,10 @@
             <a:prstDash val="solid"/>
           </a:ln>
         </p:spPr>
+        <p:txBody xmlns:a="http://schemas.openxmlformats.org/drawingml/2006/main">
+          <a:bodyPr/>
+          <a:p/>
+        </p:txBody>
       </p:sp>
       <p:sp>
         <p:nvSpPr>
@@ -18897,6 +16923,10 @@
             <a:prstDash val="solid"/>
           </a:ln>
         </p:spPr>
+        <p:txBody xmlns:a="http://schemas.openxmlformats.org/drawingml/2006/main">
+          <a:bodyPr/>
+          <a:p/>
+        </p:txBody>
       </p:sp>
       <p:sp>
         <p:nvSpPr>
@@ -18930,6 +16960,10 @@
             <a:prstDash val="solid"/>
           </a:ln>
         </p:spPr>
+        <p:txBody xmlns:a="http://schemas.openxmlformats.org/drawingml/2006/main">
+          <a:bodyPr/>
+          <a:p/>
+        </p:txBody>
       </p:sp>
       <p:sp>
         <p:nvSpPr>
@@ -19027,6 +17061,10 @@
             <a:prstDash val="solid"/>
           </a:ln>
         </p:spPr>
+        <p:txBody xmlns:a="http://schemas.openxmlformats.org/drawingml/2006/main">
+          <a:bodyPr/>
+          <a:p/>
+        </p:txBody>
       </p:sp>
       <p:sp>
         <p:nvSpPr>
@@ -19060,6 +17098,10 @@
             <a:prstDash val="solid"/>
           </a:ln>
         </p:spPr>
+        <p:txBody xmlns:a="http://schemas.openxmlformats.org/drawingml/2006/main">
+          <a:bodyPr/>
+          <a:p/>
+        </p:txBody>
       </p:sp>
       <p:sp>
         <p:nvSpPr>
@@ -19093,6 +17135,10 @@
             <a:prstDash val="solid"/>
           </a:ln>
         </p:spPr>
+        <p:txBody xmlns:a="http://schemas.openxmlformats.org/drawingml/2006/main">
+          <a:bodyPr/>
+          <a:p/>
+        </p:txBody>
       </p:sp>
       <p:sp>
         <p:nvSpPr>
@@ -19126,6 +17172,10 @@
             <a:prstDash val="solid"/>
           </a:ln>
         </p:spPr>
+        <p:txBody xmlns:a="http://schemas.openxmlformats.org/drawingml/2006/main">
+          <a:bodyPr/>
+          <a:p/>
+        </p:txBody>
       </p:sp>
       <p:sp>
         <p:nvSpPr>
@@ -19159,6 +17209,10 @@
             <a:prstDash val="solid"/>
           </a:ln>
         </p:spPr>
+        <p:txBody xmlns:a="http://schemas.openxmlformats.org/drawingml/2006/main">
+          <a:bodyPr/>
+          <a:p/>
+        </p:txBody>
       </p:sp>
       <p:sp>
         <p:nvSpPr>
@@ -19192,6 +17246,10 @@
             <a:prstDash val="solid"/>
           </a:ln>
         </p:spPr>
+        <p:txBody xmlns:a="http://schemas.openxmlformats.org/drawingml/2006/main">
+          <a:bodyPr/>
+          <a:p/>
+        </p:txBody>
       </p:sp>
       <p:sp>
         <p:nvSpPr>
@@ -19225,6 +17283,10 @@
             <a:prstDash val="solid"/>
           </a:ln>
         </p:spPr>
+        <p:txBody xmlns:a="http://schemas.openxmlformats.org/drawingml/2006/main">
+          <a:bodyPr/>
+          <a:p/>
+        </p:txBody>
       </p:sp>
       <p:sp>
         <p:nvSpPr>
@@ -19258,6 +17320,10 @@
             <a:prstDash val="solid"/>
           </a:ln>
         </p:spPr>
+        <p:txBody xmlns:a="http://schemas.openxmlformats.org/drawingml/2006/main">
+          <a:bodyPr/>
+          <a:p/>
+        </p:txBody>
       </p:sp>
       <p:sp>
         <p:nvSpPr>
@@ -19291,6 +17357,10 @@
             <a:prstDash val="solid"/>
           </a:ln>
         </p:spPr>
+        <p:txBody xmlns:a="http://schemas.openxmlformats.org/drawingml/2006/main">
+          <a:bodyPr/>
+          <a:p/>
+        </p:txBody>
       </p:sp>
       <p:sp>
         <p:nvSpPr>
@@ -19324,6 +17394,10 @@
             <a:prstDash val="solid"/>
           </a:ln>
         </p:spPr>
+        <p:txBody xmlns:a="http://schemas.openxmlformats.org/drawingml/2006/main">
+          <a:bodyPr/>
+          <a:p/>
+        </p:txBody>
       </p:sp>
       <p:sp>
         <p:nvSpPr>
@@ -19357,6 +17431,10 @@
             <a:prstDash val="solid"/>
           </a:ln>
         </p:spPr>
+        <p:txBody xmlns:a="http://schemas.openxmlformats.org/drawingml/2006/main">
+          <a:bodyPr/>
+          <a:p/>
+        </p:txBody>
       </p:sp>
       <p:sp>
         <p:nvSpPr>
@@ -19454,6 +17532,10 @@
             <a:prstDash val="solid"/>
           </a:ln>
         </p:spPr>
+        <p:txBody xmlns:a="http://schemas.openxmlformats.org/drawingml/2006/main">
+          <a:bodyPr/>
+          <a:p/>
+        </p:txBody>
       </p:sp>
       <p:sp>
         <p:nvSpPr>
@@ -19487,6 +17569,10 @@
             <a:prstDash val="solid"/>
           </a:ln>
         </p:spPr>
+        <p:txBody xmlns:a="http://schemas.openxmlformats.org/drawingml/2006/main">
+          <a:bodyPr/>
+          <a:p/>
+        </p:txBody>
       </p:sp>
       <p:sp>
         <p:nvSpPr>
@@ -19805,7 +17891,7 @@
           </a:ln>
         </p:spPr>
         <p:txBody>
-          <a:bodyPr xmlns:a="http://schemas.openxmlformats.org/drawingml/2006/main" lIns="0" tIns="0" rIns="0" bIns="0" anchor="t"/>
+          <a:bodyPr xmlns:a="http://schemas.openxmlformats.org/drawingml/2006/main" lIns="0" tIns="0" rIns="0" bIns="0" anchor="t" wrap="square"/>
           <a:lstStyle xmlns:a="http://schemas.openxmlformats.org/drawingml/2006/main"/>
           <a:p xmlns:a="http://schemas.openxmlformats.org/drawingml/2006/main">
             <a:pPr algn="r">
@@ -19824,8 +17910,6 @@
                   <a:srgbClr val="697277"/>
                 </a:solidFill>
                 <a:latin typeface="Aptos"/>
-                <a:ea typeface="Aptos"/>
-                <a:cs typeface="Aptos"/>
               </a:rPr>
               <a:t>05</a:t>
             </a:r>
@@ -21384,7 +19468,7 @@
           </a:ln>
         </p:spPr>
         <p:txBody>
-          <a:bodyPr xmlns:a="http://schemas.openxmlformats.org/drawingml/2006/main" lIns="0" tIns="0" rIns="0" bIns="0" anchor="t"/>
+          <a:bodyPr xmlns:a="http://schemas.openxmlformats.org/drawingml/2006/main" lIns="0" tIns="0" rIns="0" bIns="0" anchor="t" wrap="square"/>
           <a:lstStyle xmlns:a="http://schemas.openxmlformats.org/drawingml/2006/main"/>
           <a:p xmlns:a="http://schemas.openxmlformats.org/drawingml/2006/main">
             <a:pPr algn="r">
@@ -21403,8 +19487,6 @@
                   <a:srgbClr val="697277"/>
                 </a:solidFill>
                 <a:latin typeface="Aptos"/>
-                <a:ea typeface="Aptos"/>
-                <a:cs typeface="Aptos"/>
               </a:rPr>
               <a:t>06</a:t>
             </a:r>
@@ -24416,6 +22498,10 @@
             <a:prstDash val="solid"/>
           </a:ln>
         </p:spPr>
+        <p:txBody xmlns:a="http://schemas.openxmlformats.org/drawingml/2006/main">
+          <a:bodyPr/>
+          <a:p/>
+        </p:txBody>
       </p:sp>
       <p:sp>
         <p:nvSpPr>
@@ -24513,6 +22599,10 @@
             <a:prstDash val="solid"/>
           </a:ln>
         </p:spPr>
+        <p:txBody xmlns:a="http://schemas.openxmlformats.org/drawingml/2006/main">
+          <a:bodyPr/>
+          <a:p/>
+        </p:txBody>
       </p:sp>
       <p:sp>
         <p:nvSpPr>
@@ -24615,7 +22705,7 @@
           </a:ln>
         </p:spPr>
         <p:txBody>
-          <a:bodyPr xmlns:a="http://schemas.openxmlformats.org/drawingml/2006/main" lIns="0" tIns="0" rIns="0" bIns="0" anchor="t"/>
+          <a:bodyPr xmlns:a="http://schemas.openxmlformats.org/drawingml/2006/main" lIns="0" tIns="0" rIns="0" bIns="0" anchor="t" wrap="square"/>
           <a:lstStyle xmlns:a="http://schemas.openxmlformats.org/drawingml/2006/main"/>
           <a:p xmlns:a="http://schemas.openxmlformats.org/drawingml/2006/main">
             <a:pPr algn="r">
@@ -24634,8 +22724,6 @@
                   <a:srgbClr val="697277"/>
                 </a:solidFill>
                 <a:latin typeface="Aptos"/>
-                <a:ea typeface="Aptos"/>
-                <a:cs typeface="Aptos"/>
               </a:rPr>
               <a:t>07</a:t>
             </a:r>
@@ -24738,6 +22826,10 @@
             <a:prstDash val="solid"/>
           </a:ln>
         </p:spPr>
+        <p:txBody xmlns:a="http://schemas.openxmlformats.org/drawingml/2006/main">
+          <a:bodyPr/>
+          <a:p/>
+        </p:txBody>
       </p:sp>
       <p:sp>
         <p:nvSpPr>
@@ -24776,7 +22868,7 @@
           </a:ln>
         </p:spPr>
         <p:txBody>
-          <a:bodyPr xmlns:a="http://schemas.openxmlformats.org/drawingml/2006/main" lIns="0" tIns="0" rIns="0" bIns="0" anchor="ctr"/>
+          <a:bodyPr xmlns:a="http://schemas.openxmlformats.org/drawingml/2006/main" lIns="0" tIns="0" rIns="0" bIns="0" anchor="ctr" wrap="square"/>
           <a:lstStyle xmlns:a="http://schemas.openxmlformats.org/drawingml/2006/main"/>
           <a:p xmlns:a="http://schemas.openxmlformats.org/drawingml/2006/main">
             <a:pPr algn="ctr">
@@ -24795,12 +22887,22 @@
                   <a:srgbClr val="20262A"/>
                 </a:solidFill>
                 <a:latin typeface="Aptos"/>
-                <a:ea typeface="Aptos"/>
-                <a:cs typeface="Aptos"/>
               </a:rPr>
-              <a:t>motivating question</a:t>
+              <a:t>Does lateral inhibition</a:t>
             </a:r>
           </a:p>
+          <a:p xmlns:a="http://schemas.openxmlformats.org/drawingml/2006/main">
+            <a:pPr algn="ctr"/>
+            <a:r>
+              <a:rPr sz="1050" b="1">
+                <a:solidFill>
+                  <a:srgbClr val="20262A"/>
+                </a:solidFill>
+                <a:latin typeface="Aptos"/>
+              </a:rPr>
+              <a:t>normalize PN output?</a:t>
+            </a:r>
+          </a:p>
         </p:txBody>
       </p:sp>
       <p:sp>
@@ -24835,6 +22937,10 @@
             <a:prstDash val="solid"/>
           </a:ln>
         </p:spPr>
+        <p:txBody xmlns:a="http://schemas.openxmlformats.org/drawingml/2006/main">
+          <a:bodyPr/>
+          <a:p/>
+        </p:txBody>
       </p:sp>
       <p:sp>
         <p:nvSpPr>
@@ -24873,7 +22979,7 @@
           </a:ln>
         </p:spPr>
         <p:txBody>
-          <a:bodyPr xmlns:a="http://schemas.openxmlformats.org/drawingml/2006/main" lIns="0" tIns="0" rIns="0" bIns="0" anchor="ctr"/>
+          <a:bodyPr xmlns:a="http://schemas.openxmlformats.org/drawingml/2006/main" lIns="0" tIns="0" rIns="0" bIns="0" anchor="ctr" wrap="square"/>
           <a:lstStyle xmlns:a="http://schemas.openxmlformats.org/drawingml/2006/main"/>
           <a:p xmlns:a="http://schemas.openxmlformats.org/drawingml/2006/main">
             <a:pPr algn="ctr">
@@ -24892,12 +22998,22 @@
                   <a:srgbClr val="20262A"/>
                 </a:solidFill>
                 <a:latin typeface="Aptos"/>
-                <a:ea typeface="Aptos"/>
-                <a:cs typeface="Aptos"/>
               </a:rPr>
-              <a:t>session_0427.zarr</a:t>
+              <a:t>2025_12_10_Rig2_</a:t>
             </a:r>
           </a:p>
+          <a:p xmlns:a="http://schemas.openxmlformats.org/drawingml/2006/main">
+            <a:pPr algn="ctr"/>
+            <a:r>
+              <a:rPr sz="1050" b="0">
+                <a:solidFill>
+                  <a:srgbClr val="20262A"/>
+                </a:solidFill>
+                <a:latin typeface="Aptos"/>
+              </a:rPr>
+              <a:t>session001.nwb</a:t>
+            </a:r>
+          </a:p>
         </p:txBody>
       </p:sp>
       <p:sp>
@@ -24932,6 +23048,10 @@
             <a:prstDash val="solid"/>
           </a:ln>
         </p:spPr>
+        <p:txBody xmlns:a="http://schemas.openxmlformats.org/drawingml/2006/main">
+          <a:bodyPr/>
+          <a:p/>
+        </p:txBody>
       </p:sp>
       <p:sp>
         <p:nvSpPr>
@@ -24970,7 +23090,7 @@
           </a:ln>
         </p:spPr>
         <p:txBody>
-          <a:bodyPr xmlns:a="http://schemas.openxmlformats.org/drawingml/2006/main" lIns="0" tIns="0" rIns="0" bIns="0" anchor="ctr"/>
+          <a:bodyPr xmlns:a="http://schemas.openxmlformats.org/drawingml/2006/main" lIns="0" tIns="0" rIns="0" bIns="0" anchor="ctr" wrap="square"/>
           <a:lstStyle xmlns:a="http://schemas.openxmlformats.org/drawingml/2006/main"/>
           <a:p xmlns:a="http://schemas.openxmlformats.org/drawingml/2006/main">
             <a:pPr algn="ctr">
@@ -24989,10 +23109,8 @@
                   <a:srgbClr val="20262A"/>
                 </a:solidFill>
                 <a:latin typeface="Aptos"/>
-                <a:ea typeface="Aptos"/>
-                <a:cs typeface="Aptos"/>
               </a:rPr>
-              <a:t>analysis</a:t>
+              <a:t>divisive-norm fit</a:t>
             </a:r>
           </a:p>
         </p:txBody>
@@ -25029,6 +23147,10 @@
             <a:prstDash val="solid"/>
           </a:ln>
         </p:spPr>
+        <p:txBody xmlns:a="http://schemas.openxmlformats.org/drawingml/2006/main">
+          <a:bodyPr/>
+          <a:p/>
+        </p:txBody>
       </p:sp>
       <p:sp>
         <p:nvSpPr>
@@ -25067,7 +23189,7 @@
           </a:ln>
         </p:spPr>
         <p:txBody>
-          <a:bodyPr xmlns:a="http://schemas.openxmlformats.org/drawingml/2006/main" lIns="0" tIns="0" rIns="0" bIns="0" anchor="ctr"/>
+          <a:bodyPr xmlns:a="http://schemas.openxmlformats.org/drawingml/2006/main" lIns="0" tIns="0" rIns="0" bIns="0" anchor="ctr" wrap="square"/>
           <a:lstStyle xmlns:a="http://schemas.openxmlformats.org/drawingml/2006/main"/>
           <a:p xmlns:a="http://schemas.openxmlformats.org/drawingml/2006/main">
             <a:pPr algn="ctr">
@@ -25086,10 +23208,8 @@
                   <a:srgbClr val="20262A"/>
                 </a:solidFill>
                 <a:latin typeface="Aptos"/>
-                <a:ea typeface="Aptos"/>
-                <a:cs typeface="Aptos"/>
               </a:rPr>
-              <a:t>figure</a:t>
+              <a:t>Fig 3b</a:t>
             </a:r>
           </a:p>
         </p:txBody>
@@ -25126,6 +23246,10 @@
             <a:prstDash val="solid"/>
           </a:ln>
         </p:spPr>
+        <p:txBody xmlns:a="http://schemas.openxmlformats.org/drawingml/2006/main">
+          <a:bodyPr/>
+          <a:p/>
+        </p:txBody>
       </p:sp>
       <p:sp>
         <p:nvSpPr>
@@ -25159,6 +23283,10 @@
             <a:prstDash val="solid"/>
           </a:ln>
         </p:spPr>
+        <p:txBody xmlns:a="http://schemas.openxmlformats.org/drawingml/2006/main">
+          <a:bodyPr/>
+          <a:p/>
+        </p:txBody>
       </p:sp>
       <p:sp>
         <p:nvSpPr>
@@ -25192,6 +23320,10 @@
             <a:prstDash val="solid"/>
           </a:ln>
         </p:spPr>
+        <p:txBody xmlns:a="http://schemas.openxmlformats.org/drawingml/2006/main">
+          <a:bodyPr/>
+          <a:p/>
+        </p:txBody>
       </p:sp>
       <p:sp>
         <p:nvSpPr>
@@ -25289,6 +23421,10 @@
             <a:prstDash val="solid"/>
           </a:ln>
         </p:spPr>
+        <p:txBody xmlns:a="http://schemas.openxmlformats.org/drawingml/2006/main">
+          <a:bodyPr/>
+          <a:p/>
+        </p:txBody>
       </p:sp>
       <p:sp>
         <p:nvSpPr>
@@ -25409,6 +23545,10 @@
             <a:prstDash val="solid"/>
           </a:ln>
         </p:spPr>
+        <p:txBody xmlns:a="http://schemas.openxmlformats.org/drawingml/2006/main">
+          <a:bodyPr/>
+          <a:p/>
+        </p:txBody>
       </p:sp>
       <p:sp>
         <p:nvSpPr>
@@ -25442,6 +23582,10 @@
             <a:prstDash val="solid"/>
           </a:ln>
         </p:spPr>
+        <p:txBody xmlns:a="http://schemas.openxmlformats.org/drawingml/2006/main">
+          <a:bodyPr/>
+          <a:p/>
+        </p:txBody>
       </p:sp>
       <p:sp>
         <p:nvSpPr>
@@ -25475,6 +23619,10 @@
             <a:prstDash val="solid"/>
           </a:ln>
         </p:spPr>
+        <p:txBody xmlns:a="http://schemas.openxmlformats.org/drawingml/2006/main">
+          <a:bodyPr/>
+          <a:p/>
+        </p:txBody>
       </p:sp>
       <p:sp>
         <p:nvSpPr>
@@ -25508,6 +23656,10 @@
             <a:prstDash val="solid"/>
           </a:ln>
         </p:spPr>
+        <p:txBody xmlns:a="http://schemas.openxmlformats.org/drawingml/2006/main">
+          <a:bodyPr/>
+          <a:p/>
+        </p:txBody>
       </p:sp>
       <p:sp>
         <p:nvSpPr>
@@ -25541,6 +23693,10 @@
             <a:prstDash val="solid"/>
           </a:ln>
         </p:spPr>
+        <p:txBody xmlns:a="http://schemas.openxmlformats.org/drawingml/2006/main">
+          <a:bodyPr/>
+          <a:p/>
+        </p:txBody>
       </p:sp>
       <p:sp>
         <p:nvSpPr>
@@ -25574,6 +23730,10 @@
             <a:prstDash val="solid"/>
           </a:ln>
         </p:spPr>
+        <p:txBody xmlns:a="http://schemas.openxmlformats.org/drawingml/2006/main">
+          <a:bodyPr/>
+          <a:p/>
+        </p:txBody>
       </p:sp>
       <p:sp>
         <p:nvSpPr>
@@ -25607,6 +23767,10 @@
             <a:prstDash val="solid"/>
           </a:ln>
         </p:spPr>
+        <p:txBody xmlns:a="http://schemas.openxmlformats.org/drawingml/2006/main">
+          <a:bodyPr/>
+          <a:p/>
+        </p:txBody>
       </p:sp>
       <p:sp>
         <p:nvSpPr>
@@ -25640,6 +23804,10 @@
             <a:prstDash val="solid"/>
           </a:ln>
         </p:spPr>
+        <p:txBody xmlns:a="http://schemas.openxmlformats.org/drawingml/2006/main">
+          <a:bodyPr/>
+          <a:p/>
+        </p:txBody>
       </p:sp>
       <p:sp>
         <p:nvSpPr>
@@ -25673,6 +23841,10 @@
             <a:prstDash val="solid"/>
           </a:ln>
         </p:spPr>
+        <p:txBody xmlns:a="http://schemas.openxmlformats.org/drawingml/2006/main">
+          <a:bodyPr/>
+          <a:p/>
+        </p:txBody>
       </p:sp>
       <p:sp>
         <p:nvSpPr>
@@ -25706,6 +23878,10 @@
             <a:prstDash val="solid"/>
           </a:ln>
         </p:spPr>
+        <p:txBody xmlns:a="http://schemas.openxmlformats.org/drawingml/2006/main">
+          <a:bodyPr/>
+          <a:p/>
+        </p:txBody>
       </p:sp>
       <p:sp>
         <p:nvSpPr>
@@ -25739,6 +23915,72 @@
             <a:prstDash val="solid"/>
           </a:ln>
         </p:spPr>
+        <p:txBody xmlns:a="http://schemas.openxmlformats.org/drawingml/2006/main">
+          <a:bodyPr/>
+          <a:p/>
+        </p:txBody>
+      </p:sp>
+      <p:sp>
+        <p:nvSpPr>
+          <p:cNvPr id="23" name="">
+            <a:extLst xmlns:a="http://schemas.openxmlformats.org/drawingml/2006/main">
+              <a:ext uri="{FF2B5EF4-FFF2-40B4-BE49-F238E27FC236}">
+                <a16:creationId xmlns:a16="http://schemas.microsoft.com/office/drawing/2014/main" id="{88F106A5-8B36-423F-ACEC-9E801286503C}"/>
+              </a:ext>
+            </a:extLst>
+          </p:cNvPr>
+          <p:cNvSpPr>
+            <a:spLocks xmlns:a="http://schemas.openxmlformats.org/drawingml/2006/main" noGrp="1"/>
+          </p:cNvSpPr>
+          <p:nvPr/>
+        </p:nvSpPr>
+        <p:spPr>
+          <a:xfrm xmlns:a="http://schemas.openxmlformats.org/drawingml/2006/main">
+            <a:off x="2130552" y="5623560"/>
+            <a:ext cx="7955279" cy="365760"/>
+          </a:xfrm>
+          <a:prstGeom xmlns:a="http://schemas.openxmlformats.org/drawingml/2006/main" prst="rect">
+            <a:avLst/>
+          </a:prstGeom>
+          <a:solidFill xmlns:a="http://schemas.openxmlformats.org/drawingml/2006/main">
+            <a:srgbClr val="000000">
+              <a:alpha val="0"/>
+            </a:srgbClr>
+          </a:solidFill>
+          <a:ln xmlns:a="http://schemas.openxmlformats.org/drawingml/2006/main" w="0">
+            <a:solidFill>
+              <a:srgbClr val="000000">
+                <a:alpha val="0"/>
+              </a:srgbClr>
+            </a:solidFill>
+            <a:prstDash val="solid"/>
+          </a:ln>
+        </p:spPr>
+        <p:txBody>
+          <a:bodyPr xmlns:a="http://schemas.openxmlformats.org/drawingml/2006/main" lIns="0" tIns="0" rIns="0" bIns="0" anchor="ctr" wrap="square"/>
+          <a:lstStyle xmlns:a="http://schemas.openxmlformats.org/drawingml/2006/main"/>
+          <a:p xmlns:a="http://schemas.openxmlformats.org/drawingml/2006/main">
+            <a:pPr algn="ctr">
+              <a:defRPr sz="1200" b="0">
+                <a:solidFill>
+                  <a:srgbClr val="697277"/>
+                </a:solidFill>
+                <a:latin typeface="Aptos"/>
+                <a:ea typeface="Aptos"/>
+                <a:cs typeface="Aptos"/>
+              </a:defRPr>
+            </a:pPr>
+            <a:r>
+              <a:rPr sz="1200" b="0">
+                <a:solidFill>
+                  <a:srgbClr val="697277"/>
+                </a:solidFill>
+                <a:latin typeface="Aptos"/>
+              </a:rPr>
+              <a:t>A figure stays traceable to the question its claim answers.</a:t>
+            </a:r>
+          </a:p>
+        </p:txBody>
       </p:sp>
     </p:spTree>
     <p:extLst>
@@ -25794,6 +24036,10 @@
             <a:prstDash val="solid"/>
           </a:ln>
         </p:spPr>
+        <p:txBody xmlns:a="http://schemas.openxmlformats.org/drawingml/2006/main">
+          <a:bodyPr/>
+          <a:p/>
+        </p:txBody>
       </p:sp>
       <p:sp>
         <p:nvSpPr>
@@ -25891,6 +24137,10 @@
             <a:prstDash val="solid"/>
           </a:ln>
         </p:spPr>
+        <p:txBody xmlns:a="http://schemas.openxmlformats.org/drawingml/2006/main">
+          <a:bodyPr/>
+          <a:p/>
+        </p:txBody>
       </p:sp>
       <p:sp>
         <p:nvSpPr>
@@ -25993,7 +24243,7 @@
           </a:ln>
         </p:spPr>
         <p:txBody>
-          <a:bodyPr xmlns:a="http://schemas.openxmlformats.org/drawingml/2006/main" lIns="0" tIns="0" rIns="0" bIns="0" anchor="t"/>
+          <a:bodyPr xmlns:a="http://schemas.openxmlformats.org/drawingml/2006/main" lIns="0" tIns="0" rIns="0" bIns="0" anchor="t" wrap="square"/>
           <a:lstStyle xmlns:a="http://schemas.openxmlformats.org/drawingml/2006/main"/>
           <a:p xmlns:a="http://schemas.openxmlformats.org/drawingml/2006/main">
             <a:pPr algn="r">
@@ -26012,8 +24262,6 @@
                   <a:srgbClr val="697277"/>
                 </a:solidFill>
                 <a:latin typeface="Aptos"/>
-                <a:ea typeface="Aptos"/>
-                <a:cs typeface="Aptos"/>
               </a:rPr>
               <a:t>08</a:t>
             </a:r>
@@ -26116,6 +24364,10 @@
             <a:prstDash val="solid"/>
           </a:ln>
         </p:spPr>
+        <p:txBody xmlns:a="http://schemas.openxmlformats.org/drawingml/2006/main">
+          <a:bodyPr/>
+          <a:p/>
+        </p:txBody>
       </p:sp>
       <p:sp>
         <p:nvSpPr>
@@ -26154,7 +24406,7 @@
           </a:ln>
         </p:spPr>
         <p:txBody>
-          <a:bodyPr xmlns:a="http://schemas.openxmlformats.org/drawingml/2006/main" lIns="0" tIns="0" rIns="0" bIns="0" anchor="ctr"/>
+          <a:bodyPr xmlns:a="http://schemas.openxmlformats.org/drawingml/2006/main" lIns="0" tIns="0" rIns="0" bIns="0" anchor="ctr" wrap="square"/>
           <a:lstStyle xmlns:a="http://schemas.openxmlformats.org/drawingml/2006/main"/>
           <a:p xmlns:a="http://schemas.openxmlformats.org/drawingml/2006/main">
             <a:pPr algn="ctr">
@@ -26173,12 +24425,22 @@
                   <a:srgbClr val="20262A"/>
                 </a:solidFill>
                 <a:latin typeface="Aptos"/>
-                <a:ea typeface="Aptos"/>
-                <a:cs typeface="Aptos"/>
               </a:rPr>
-              <a:t>motivating question</a:t>
+              <a:t>Does lateral inhibition</a:t>
             </a:r>
           </a:p>
+          <a:p xmlns:a="http://schemas.openxmlformats.org/drawingml/2006/main">
+            <a:pPr algn="ctr"/>
+            <a:r>
+              <a:rPr sz="1050" b="1">
+                <a:solidFill>
+                  <a:srgbClr val="20262A"/>
+                </a:solidFill>
+                <a:latin typeface="Aptos"/>
+              </a:rPr>
+              <a:t>normalize PN output?</a:t>
+            </a:r>
+          </a:p>
         </p:txBody>
       </p:sp>
       <p:sp>
@@ -26213,6 +24475,10 @@
             <a:prstDash val="solid"/>
           </a:ln>
         </p:spPr>
+        <p:txBody xmlns:a="http://schemas.openxmlformats.org/drawingml/2006/main">
+          <a:bodyPr/>
+          <a:p/>
+        </p:txBody>
       </p:sp>
       <p:sp>
         <p:nvSpPr>
@@ -26251,7 +24517,7 @@
           </a:ln>
         </p:spPr>
         <p:txBody>
-          <a:bodyPr xmlns:a="http://schemas.openxmlformats.org/drawingml/2006/main" lIns="0" tIns="0" rIns="0" bIns="0" anchor="ctr"/>
+          <a:bodyPr xmlns:a="http://schemas.openxmlformats.org/drawingml/2006/main" lIns="0" tIns="0" rIns="0" bIns="0" anchor="ctr" wrap="square"/>
           <a:lstStyle xmlns:a="http://schemas.openxmlformats.org/drawingml/2006/main"/>
           <a:p xmlns:a="http://schemas.openxmlformats.org/drawingml/2006/main">
             <a:pPr algn="ctr">
@@ -26270,12 +24536,22 @@
                   <a:srgbClr val="20262A"/>
                 </a:solidFill>
                 <a:latin typeface="Aptos"/>
-                <a:ea typeface="Aptos"/>
-                <a:cs typeface="Aptos"/>
               </a:rPr>
-              <a:t>session_0427.zarr</a:t>
+              <a:t>2025_12_10_Rig2_</a:t>
             </a:r>
           </a:p>
+          <a:p xmlns:a="http://schemas.openxmlformats.org/drawingml/2006/main">
+            <a:pPr algn="ctr"/>
+            <a:r>
+              <a:rPr sz="1050" b="0">
+                <a:solidFill>
+                  <a:srgbClr val="20262A"/>
+                </a:solidFill>
+                <a:latin typeface="Aptos"/>
+              </a:rPr>
+              <a:t>session001.nwb</a:t>
+            </a:r>
+          </a:p>
         </p:txBody>
       </p:sp>
       <p:sp>
@@ -26310,6 +24586,10 @@
             <a:prstDash val="solid"/>
           </a:ln>
         </p:spPr>
+        <p:txBody xmlns:a="http://schemas.openxmlformats.org/drawingml/2006/main">
+          <a:bodyPr/>
+          <a:p/>
+        </p:txBody>
       </p:sp>
       <p:sp>
         <p:nvSpPr>
@@ -26348,7 +24628,7 @@
           </a:ln>
         </p:spPr>
         <p:txBody>
-          <a:bodyPr xmlns:a="http://schemas.openxmlformats.org/drawingml/2006/main" lIns="0" tIns="0" rIns="0" bIns="0" anchor="ctr"/>
+          <a:bodyPr xmlns:a="http://schemas.openxmlformats.org/drawingml/2006/main" lIns="0" tIns="0" rIns="0" bIns="0" anchor="ctr" wrap="square"/>
           <a:lstStyle xmlns:a="http://schemas.openxmlformats.org/drawingml/2006/main"/>
           <a:p xmlns:a="http://schemas.openxmlformats.org/drawingml/2006/main">
             <a:pPr algn="ctr">
@@ -26367,10 +24647,8 @@
                   <a:srgbClr val="20262A"/>
                 </a:solidFill>
                 <a:latin typeface="Aptos"/>
-                <a:ea typeface="Aptos"/>
-                <a:cs typeface="Aptos"/>
               </a:rPr>
-              <a:t>analysis</a:t>
+              <a:t>divisive-norm fit</a:t>
             </a:r>
           </a:p>
         </p:txBody>
@@ -26407,6 +24685,10 @@
             <a:prstDash val="solid"/>
           </a:ln>
         </p:spPr>
+        <p:txBody xmlns:a="http://schemas.openxmlformats.org/drawingml/2006/main">
+          <a:bodyPr/>
+          <a:p/>
+        </p:txBody>
       </p:sp>
       <p:sp>
         <p:nvSpPr>
@@ -26445,7 +24727,7 @@
           </a:ln>
         </p:spPr>
         <p:txBody>
-          <a:bodyPr xmlns:a="http://schemas.openxmlformats.org/drawingml/2006/main" lIns="0" tIns="0" rIns="0" bIns="0" anchor="ctr"/>
+          <a:bodyPr xmlns:a="http://schemas.openxmlformats.org/drawingml/2006/main" lIns="0" tIns="0" rIns="0" bIns="0" anchor="ctr" wrap="square"/>
           <a:lstStyle xmlns:a="http://schemas.openxmlformats.org/drawingml/2006/main"/>
           <a:p xmlns:a="http://schemas.openxmlformats.org/drawingml/2006/main">
             <a:pPr algn="ctr">
@@ -26464,10 +24746,8 @@
                   <a:srgbClr val="20262A"/>
                 </a:solidFill>
                 <a:latin typeface="Aptos"/>
-                <a:ea typeface="Aptos"/>
-                <a:cs typeface="Aptos"/>
               </a:rPr>
-              <a:t>figure</a:t>
+              <a:t>Fig 3b</a:t>
             </a:r>
           </a:p>
         </p:txBody>
@@ -26504,6 +24784,10 @@
             <a:prstDash val="solid"/>
           </a:ln>
         </p:spPr>
+        <p:txBody xmlns:a="http://schemas.openxmlformats.org/drawingml/2006/main">
+          <a:bodyPr/>
+          <a:p/>
+        </p:txBody>
       </p:sp>
       <p:sp>
         <p:nvSpPr>
@@ -26537,6 +24821,10 @@
             <a:prstDash val="solid"/>
           </a:ln>
         </p:spPr>
+        <p:txBody xmlns:a="http://schemas.openxmlformats.org/drawingml/2006/main">
+          <a:bodyPr/>
+          <a:p/>
+        </p:txBody>
       </p:sp>
       <p:sp>
         <p:nvSpPr>
@@ -26570,6 +24858,10 @@
             <a:prstDash val="solid"/>
           </a:ln>
         </p:spPr>
+        <p:txBody xmlns:a="http://schemas.openxmlformats.org/drawingml/2006/main">
+          <a:bodyPr/>
+          <a:p/>
+        </p:txBody>
       </p:sp>
       <p:sp>
         <p:nvSpPr>
@@ -26667,6 +24959,10 @@
             <a:prstDash val="solid"/>
           </a:ln>
         </p:spPr>
+        <p:txBody xmlns:a="http://schemas.openxmlformats.org/drawingml/2006/main">
+          <a:bodyPr/>
+          <a:p/>
+        </p:txBody>
       </p:sp>
       <p:sp>
         <p:nvSpPr>
@@ -26787,6 +25083,10 @@
             <a:prstDash val="solid"/>
           </a:ln>
         </p:spPr>
+        <p:txBody xmlns:a="http://schemas.openxmlformats.org/drawingml/2006/main">
+          <a:bodyPr/>
+          <a:p/>
+        </p:txBody>
       </p:sp>
       <p:sp>
         <p:nvSpPr>
@@ -26820,6 +25120,10 @@
             <a:prstDash val="solid"/>
           </a:ln>
         </p:spPr>
+        <p:txBody xmlns:a="http://schemas.openxmlformats.org/drawingml/2006/main">
+          <a:bodyPr/>
+          <a:p/>
+        </p:txBody>
       </p:sp>
       <p:sp>
         <p:nvSpPr>
@@ -26853,6 +25157,10 @@
             <a:prstDash val="solid"/>
           </a:ln>
         </p:spPr>
+        <p:txBody xmlns:a="http://schemas.openxmlformats.org/drawingml/2006/main">
+          <a:bodyPr/>
+          <a:p/>
+        </p:txBody>
       </p:sp>
       <p:sp>
         <p:nvSpPr>
@@ -26886,6 +25194,10 @@
             <a:prstDash val="solid"/>
           </a:ln>
         </p:spPr>
+        <p:txBody xmlns:a="http://schemas.openxmlformats.org/drawingml/2006/main">
+          <a:bodyPr/>
+          <a:p/>
+        </p:txBody>
       </p:sp>
       <p:sp>
         <p:nvSpPr>
@@ -26919,6 +25231,10 @@
             <a:prstDash val="solid"/>
           </a:ln>
         </p:spPr>
+        <p:txBody xmlns:a="http://schemas.openxmlformats.org/drawingml/2006/main">
+          <a:bodyPr/>
+          <a:p/>
+        </p:txBody>
       </p:sp>
       <p:sp>
         <p:nvSpPr>
@@ -26952,6 +25268,10 @@
             <a:prstDash val="solid"/>
           </a:ln>
         </p:spPr>
+        <p:txBody xmlns:a="http://schemas.openxmlformats.org/drawingml/2006/main">
+          <a:bodyPr/>
+          <a:p/>
+        </p:txBody>
       </p:sp>
       <p:sp>
         <p:nvSpPr>
@@ -26985,6 +25305,10 @@
             <a:prstDash val="solid"/>
           </a:ln>
         </p:spPr>
+        <p:txBody xmlns:a="http://schemas.openxmlformats.org/drawingml/2006/main">
+          <a:bodyPr/>
+          <a:p/>
+        </p:txBody>
       </p:sp>
       <p:sp>
         <p:nvSpPr>
@@ -27018,6 +25342,10 @@
             <a:prstDash val="solid"/>
           </a:ln>
         </p:spPr>
+        <p:txBody xmlns:a="http://schemas.openxmlformats.org/drawingml/2006/main">
+          <a:bodyPr/>
+          <a:p/>
+        </p:txBody>
       </p:sp>
       <p:sp>
         <p:nvSpPr>
@@ -27051,6 +25379,10 @@
             <a:prstDash val="solid"/>
           </a:ln>
         </p:spPr>
+        <p:txBody xmlns:a="http://schemas.openxmlformats.org/drawingml/2006/main">
+          <a:bodyPr/>
+          <a:p/>
+        </p:txBody>
       </p:sp>
       <p:sp>
         <p:nvSpPr>
@@ -27084,6 +25416,10 @@
             <a:prstDash val="solid"/>
           </a:ln>
         </p:spPr>
+        <p:txBody xmlns:a="http://schemas.openxmlformats.org/drawingml/2006/main">
+          <a:bodyPr/>
+          <a:p/>
+        </p:txBody>
       </p:sp>
       <p:sp>
         <p:nvSpPr>
@@ -27117,6 +25453,10 @@
             <a:prstDash val="solid"/>
           </a:ln>
         </p:spPr>
+        <p:txBody xmlns:a="http://schemas.openxmlformats.org/drawingml/2006/main">
+          <a:bodyPr/>
+          <a:p/>
+        </p:txBody>
       </p:sp>
       <p:sp>
         <p:nvSpPr>
@@ -27150,6 +25490,10 @@
             <a:prstDash val="solid"/>
           </a:ln>
         </p:spPr>
+        <p:txBody xmlns:a="http://schemas.openxmlformats.org/drawingml/2006/main">
+          <a:bodyPr/>
+          <a:p/>
+        </p:txBody>
       </p:sp>
       <p:sp>
         <p:nvSpPr>
@@ -27247,6 +25591,10 @@
             <a:prstDash val="solid"/>
           </a:ln>
         </p:spPr>
+        <p:txBody xmlns:a="http://schemas.openxmlformats.org/drawingml/2006/main">
+          <a:bodyPr/>
+          <a:p/>
+        </p:txBody>
       </p:sp>
       <p:sp>
         <p:nvSpPr>
@@ -27436,6 +25784,10 @@
             <a:prstDash val="solid"/>
           </a:ln>
         </p:spPr>
+        <p:txBody xmlns:a="http://schemas.openxmlformats.org/drawingml/2006/main">
+          <a:bodyPr/>
+          <a:p/>
+        </p:txBody>
       </p:sp>
       <p:sp>
         <p:nvSpPr>
@@ -27469,6 +25821,10 @@
             <a:prstDash val="solid"/>
           </a:ln>
         </p:spPr>
+        <p:txBody xmlns:a="http://schemas.openxmlformats.org/drawingml/2006/main">
+          <a:bodyPr/>
+          <a:p/>
+        </p:txBody>
       </p:sp>
       <p:sp>
         <p:nvSpPr>
@@ -27502,6 +25858,10 @@
             <a:prstDash val="solid"/>
           </a:ln>
         </p:spPr>
+        <p:txBody xmlns:a="http://schemas.openxmlformats.org/drawingml/2006/main">
+          <a:bodyPr/>
+          <a:p/>
+        </p:txBody>
       </p:sp>
       <p:sp>
         <p:nvSpPr>
@@ -27535,6 +25895,10 @@
             <a:prstDash val="solid"/>
           </a:ln>
         </p:spPr>
+        <p:txBody xmlns:a="http://schemas.openxmlformats.org/drawingml/2006/main">
+          <a:bodyPr/>
+          <a:p/>
+        </p:txBody>
       </p:sp>
       <p:sp>
         <p:nvSpPr>
@@ -27568,6 +25932,10 @@
             <a:prstDash val="solid"/>
           </a:ln>
         </p:spPr>
+        <p:txBody xmlns:a="http://schemas.openxmlformats.org/drawingml/2006/main">
+          <a:bodyPr/>
+          <a:p/>
+        </p:txBody>
       </p:sp>
       <p:sp>
         <p:nvSpPr>
@@ -27601,6 +25969,10 @@
             <a:prstDash val="solid"/>
           </a:ln>
         </p:spPr>
+        <p:txBody xmlns:a="http://schemas.openxmlformats.org/drawingml/2006/main">
+          <a:bodyPr/>
+          <a:p/>
+        </p:txBody>
       </p:sp>
       <p:sp>
         <p:nvSpPr>
@@ -27634,6 +26006,10 @@
             <a:prstDash val="solid"/>
           </a:ln>
         </p:spPr>
+        <p:txBody xmlns:a="http://schemas.openxmlformats.org/drawingml/2006/main">
+          <a:bodyPr/>
+          <a:p/>
+        </p:txBody>
       </p:sp>
       <p:sp>
         <p:nvSpPr>
@@ -27667,6 +26043,10 @@
             <a:prstDash val="solid"/>
           </a:ln>
         </p:spPr>
+        <p:txBody xmlns:a="http://schemas.openxmlformats.org/drawingml/2006/main">
+          <a:bodyPr/>
+          <a:p/>
+        </p:txBody>
       </p:sp>
       <p:sp>
         <p:nvSpPr>
@@ -27700,6 +26080,10 @@
             <a:prstDash val="solid"/>
           </a:ln>
         </p:spPr>
+        <p:txBody xmlns:a="http://schemas.openxmlformats.org/drawingml/2006/main">
+          <a:bodyPr/>
+          <a:p/>
+        </p:txBody>
       </p:sp>
       <p:sp>
         <p:nvSpPr>
@@ -27733,6 +26117,10 @@
             <a:prstDash val="solid"/>
           </a:ln>
         </p:spPr>
+        <p:txBody xmlns:a="http://schemas.openxmlformats.org/drawingml/2006/main">
+          <a:bodyPr/>
+          <a:p/>
+        </p:txBody>
       </p:sp>
       <p:sp>
         <p:nvSpPr>
@@ -27766,6 +26154,10 @@
             <a:prstDash val="solid"/>
           </a:ln>
         </p:spPr>
+        <p:txBody xmlns:a="http://schemas.openxmlformats.org/drawingml/2006/main">
+          <a:bodyPr/>
+          <a:p/>
+        </p:txBody>
       </p:sp>
       <p:sp>
         <p:nvSpPr>
@@ -27799,6 +26191,10 @@
             <a:prstDash val="solid"/>
           </a:ln>
         </p:spPr>
+        <p:txBody xmlns:a="http://schemas.openxmlformats.org/drawingml/2006/main">
+          <a:bodyPr/>
+          <a:p/>
+        </p:txBody>
       </p:sp>
     </p:spTree>
     <p:extLst>
@@ -27854,6 +26250,10 @@
             <a:prstDash val="solid"/>
           </a:ln>
         </p:spPr>
+        <p:txBody xmlns:a="http://schemas.openxmlformats.org/drawingml/2006/main">
+          <a:bodyPr/>
+          <a:p/>
+        </p:txBody>
       </p:sp>
       <p:sp>
         <p:nvSpPr>
@@ -27951,6 +26351,10 @@
             <a:prstDash val="solid"/>
           </a:ln>
         </p:spPr>
+        <p:txBody xmlns:a="http://schemas.openxmlformats.org/drawingml/2006/main">
+          <a:bodyPr/>
+          <a:p/>
+        </p:txBody>
       </p:sp>
       <p:sp>
         <p:nvSpPr>
@@ -28053,7 +26457,7 @@
           </a:ln>
         </p:spPr>
         <p:txBody>
-          <a:bodyPr xmlns:a="http://schemas.openxmlformats.org/drawingml/2006/main" lIns="0" tIns="0" rIns="0" bIns="0" anchor="t"/>
+          <a:bodyPr xmlns:a="http://schemas.openxmlformats.org/drawingml/2006/main" lIns="0" tIns="0" rIns="0" bIns="0" anchor="t" wrap="square"/>
           <a:lstStyle xmlns:a="http://schemas.openxmlformats.org/drawingml/2006/main"/>
           <a:p xmlns:a="http://schemas.openxmlformats.org/drawingml/2006/main">
             <a:pPr algn="r">
@@ -28072,8 +26476,6 @@
                   <a:srgbClr val="697277"/>
                 </a:solidFill>
                 <a:latin typeface="Aptos"/>
-                <a:ea typeface="Aptos"/>
-                <a:cs typeface="Aptos"/>
               </a:rPr>
               <a:t>09</a:t>
             </a:r>
@@ -28176,6 +26578,10 @@
             <a:prstDash val="solid"/>
           </a:ln>
         </p:spPr>
+        <p:txBody xmlns:a="http://schemas.openxmlformats.org/drawingml/2006/main">
+          <a:bodyPr/>
+          <a:p/>
+        </p:txBody>
       </p:sp>
       <p:sp>
         <p:nvSpPr>
@@ -28214,7 +26620,7 @@
           </a:ln>
         </p:spPr>
         <p:txBody>
-          <a:bodyPr xmlns:a="http://schemas.openxmlformats.org/drawingml/2006/main" lIns="0" tIns="0" rIns="0" bIns="0" anchor="ctr"/>
+          <a:bodyPr xmlns:a="http://schemas.openxmlformats.org/drawingml/2006/main" lIns="0" tIns="0" rIns="0" bIns="0" anchor="ctr" wrap="square"/>
           <a:lstStyle xmlns:a="http://schemas.openxmlformats.org/drawingml/2006/main"/>
           <a:p xmlns:a="http://schemas.openxmlformats.org/drawingml/2006/main">
             <a:pPr algn="ctr">
@@ -28233,12 +26639,22 @@
                   <a:srgbClr val="20262A"/>
                 </a:solidFill>
                 <a:latin typeface="Aptos"/>
-                <a:ea typeface="Aptos"/>
-                <a:cs typeface="Aptos"/>
               </a:rPr>
-              <a:t>motivating question</a:t>
+              <a:t>Does lateral inhibition</a:t>
             </a:r>
           </a:p>
+          <a:p xmlns:a="http://schemas.openxmlformats.org/drawingml/2006/main">
+            <a:pPr algn="ctr"/>
+            <a:r>
+              <a:rPr sz="1050" b="1">
+                <a:solidFill>
+                  <a:srgbClr val="20262A"/>
+                </a:solidFill>
+                <a:latin typeface="Aptos"/>
+              </a:rPr>
+              <a:t>normalize PN output?</a:t>
+            </a:r>
+          </a:p>
         </p:txBody>
       </p:sp>
       <p:sp>
@@ -28273,6 +26689,10 @@
             <a:prstDash val="solid"/>
           </a:ln>
         </p:spPr>
+        <p:txBody xmlns:a="http://schemas.openxmlformats.org/drawingml/2006/main">
+          <a:bodyPr/>
+          <a:p/>
+        </p:txBody>
       </p:sp>
       <p:sp>
         <p:nvSpPr>
@@ -28311,7 +26731,7 @@
           </a:ln>
         </p:spPr>
         <p:txBody>
-          <a:bodyPr xmlns:a="http://schemas.openxmlformats.org/drawingml/2006/main" lIns="0" tIns="0" rIns="0" bIns="0" anchor="ctr"/>
+          <a:bodyPr xmlns:a="http://schemas.openxmlformats.org/drawingml/2006/main" lIns="0" tIns="0" rIns="0" bIns="0" anchor="ctr" wrap="square"/>
           <a:lstStyle xmlns:a="http://schemas.openxmlformats.org/drawingml/2006/main"/>
           <a:p xmlns:a="http://schemas.openxmlformats.org/drawingml/2006/main">
             <a:pPr algn="ctr">
@@ -28330,12 +26750,22 @@
                   <a:srgbClr val="20262A"/>
                 </a:solidFill>
                 <a:latin typeface="Aptos"/>
-                <a:ea typeface="Aptos"/>
-                <a:cs typeface="Aptos"/>
               </a:rPr>
-              <a:t>session_0427.zarr</a:t>
+              <a:t>2025_12_10_Rig2_</a:t>
             </a:r>
           </a:p>
+          <a:p xmlns:a="http://schemas.openxmlformats.org/drawingml/2006/main">
+            <a:pPr algn="ctr"/>
+            <a:r>
+              <a:rPr sz="1050" b="0">
+                <a:solidFill>
+                  <a:srgbClr val="20262A"/>
+                </a:solidFill>
+                <a:latin typeface="Aptos"/>
+              </a:rPr>
+              <a:t>session001.nwb</a:t>
+            </a:r>
+          </a:p>
         </p:txBody>
       </p:sp>
       <p:sp>
@@ -28370,6 +26800,10 @@
             <a:prstDash val="solid"/>
           </a:ln>
         </p:spPr>
+        <p:txBody xmlns:a="http://schemas.openxmlformats.org/drawingml/2006/main">
+          <a:bodyPr/>
+          <a:p/>
+        </p:txBody>
       </p:sp>
       <p:sp>
         <p:nvSpPr>
@@ -28408,7 +26842,7 @@
           </a:ln>
         </p:spPr>
         <p:txBody>
-          <a:bodyPr xmlns:a="http://schemas.openxmlformats.org/drawingml/2006/main" lIns="0" tIns="0" rIns="0" bIns="0" anchor="ctr"/>
+          <a:bodyPr xmlns:a="http://schemas.openxmlformats.org/drawingml/2006/main" lIns="0" tIns="0" rIns="0" bIns="0" anchor="ctr" wrap="square"/>
           <a:lstStyle xmlns:a="http://schemas.openxmlformats.org/drawingml/2006/main"/>
           <a:p xmlns:a="http://schemas.openxmlformats.org/drawingml/2006/main">
             <a:pPr algn="ctr">
@@ -28427,10 +26861,8 @@
                   <a:srgbClr val="20262A"/>
                 </a:solidFill>
                 <a:latin typeface="Aptos"/>
-                <a:ea typeface="Aptos"/>
-                <a:cs typeface="Aptos"/>
               </a:rPr>
-              <a:t>analysis</a:t>
+              <a:t>divisive-norm fit</a:t>
             </a:r>
           </a:p>
         </p:txBody>
@@ -28467,6 +26899,10 @@
             <a:prstDash val="solid"/>
           </a:ln>
         </p:spPr>
+        <p:txBody xmlns:a="http://schemas.openxmlformats.org/drawingml/2006/main">
+          <a:bodyPr/>
+          <a:p/>
+        </p:txBody>
       </p:sp>
       <p:sp>
         <p:nvSpPr>
@@ -28505,7 +26941,7 @@
           </a:ln>
         </p:spPr>
         <p:txBody>
-          <a:bodyPr xmlns:a="http://schemas.openxmlformats.org/drawingml/2006/main" lIns="0" tIns="0" rIns="0" bIns="0" anchor="ctr"/>
+          <a:bodyPr xmlns:a="http://schemas.openxmlformats.org/drawingml/2006/main" lIns="0" tIns="0" rIns="0" bIns="0" anchor="ctr" wrap="square"/>
           <a:lstStyle xmlns:a="http://schemas.openxmlformats.org/drawingml/2006/main"/>
           <a:p xmlns:a="http://schemas.openxmlformats.org/drawingml/2006/main">
             <a:pPr algn="ctr">
@@ -28524,10 +26960,8 @@
                   <a:srgbClr val="20262A"/>
                 </a:solidFill>
                 <a:latin typeface="Aptos"/>
-                <a:ea typeface="Aptos"/>
-                <a:cs typeface="Aptos"/>
               </a:rPr>
-              <a:t>figure</a:t>
+              <a:t>Fig 3b</a:t>
             </a:r>
           </a:p>
         </p:txBody>
@@ -28564,6 +26998,10 @@
             <a:prstDash val="solid"/>
           </a:ln>
         </p:spPr>
+        <p:txBody xmlns:a="http://schemas.openxmlformats.org/drawingml/2006/main">
+          <a:bodyPr/>
+          <a:p/>
+        </p:txBody>
       </p:sp>
       <p:sp>
         <p:nvSpPr>
@@ -28597,6 +27035,10 @@
             <a:prstDash val="solid"/>
           </a:ln>
         </p:spPr>
+        <p:txBody xmlns:a="http://schemas.openxmlformats.org/drawingml/2006/main">
+          <a:bodyPr/>
+          <a:p/>
+        </p:txBody>
       </p:sp>
       <p:sp>
         <p:nvSpPr>
@@ -28630,6 +27072,10 @@
             <a:prstDash val="solid"/>
           </a:ln>
         </p:spPr>
+        <p:txBody xmlns:a="http://schemas.openxmlformats.org/drawingml/2006/main">
+          <a:bodyPr/>
+          <a:p/>
+        </p:txBody>
       </p:sp>
       <p:sp>
         <p:nvSpPr>
@@ -28727,6 +27173,10 @@
             <a:prstDash val="solid"/>
           </a:ln>
         </p:spPr>
+        <p:txBody xmlns:a="http://schemas.openxmlformats.org/drawingml/2006/main">
+          <a:bodyPr/>
+          <a:p/>
+        </p:txBody>
       </p:sp>
       <p:sp>
         <p:nvSpPr>
@@ -28847,6 +27297,10 @@
             <a:prstDash val="solid"/>
           </a:ln>
         </p:spPr>
+        <p:txBody xmlns:a="http://schemas.openxmlformats.org/drawingml/2006/main">
+          <a:bodyPr/>
+          <a:p/>
+        </p:txBody>
       </p:sp>
       <p:sp>
         <p:nvSpPr>
@@ -28880,6 +27334,10 @@
             <a:prstDash val="solid"/>
           </a:ln>
         </p:spPr>
+        <p:txBody xmlns:a="http://schemas.openxmlformats.org/drawingml/2006/main">
+          <a:bodyPr/>
+          <a:p/>
+        </p:txBody>
       </p:sp>
       <p:sp>
         <p:nvSpPr>
@@ -28913,6 +27371,10 @@
             <a:prstDash val="solid"/>
           </a:ln>
         </p:spPr>
+        <p:txBody xmlns:a="http://schemas.openxmlformats.org/drawingml/2006/main">
+          <a:bodyPr/>
+          <a:p/>
+        </p:txBody>
       </p:sp>
       <p:sp>
         <p:nvSpPr>
@@ -28946,6 +27408,10 @@
             <a:prstDash val="solid"/>
           </a:ln>
         </p:spPr>
+        <p:txBody xmlns:a="http://schemas.openxmlformats.org/drawingml/2006/main">
+          <a:bodyPr/>
+          <a:p/>
+        </p:txBody>
       </p:sp>
       <p:sp>
         <p:nvSpPr>
@@ -28979,6 +27445,10 @@
             <a:prstDash val="solid"/>
           </a:ln>
         </p:spPr>
+        <p:txBody xmlns:a="http://schemas.openxmlformats.org/drawingml/2006/main">
+          <a:bodyPr/>
+          <a:p/>
+        </p:txBody>
       </p:sp>
       <p:sp>
         <p:nvSpPr>
@@ -29012,6 +27482,10 @@
             <a:prstDash val="solid"/>
           </a:ln>
         </p:spPr>
+        <p:txBody xmlns:a="http://schemas.openxmlformats.org/drawingml/2006/main">
+          <a:bodyPr/>
+          <a:p/>
+        </p:txBody>
       </p:sp>
       <p:sp>
         <p:nvSpPr>
@@ -29045,6 +27519,10 @@
             <a:prstDash val="solid"/>
           </a:ln>
         </p:spPr>
+        <p:txBody xmlns:a="http://schemas.openxmlformats.org/drawingml/2006/main">
+          <a:bodyPr/>
+          <a:p/>
+        </p:txBody>
       </p:sp>
       <p:sp>
         <p:nvSpPr>
@@ -29078,6 +27556,10 @@
             <a:prstDash val="solid"/>
           </a:ln>
         </p:spPr>
+        <p:txBody xmlns:a="http://schemas.openxmlformats.org/drawingml/2006/main">
+          <a:bodyPr/>
+          <a:p/>
+        </p:txBody>
       </p:sp>
       <p:sp>
         <p:nvSpPr>
@@ -29111,6 +27593,10 @@
             <a:prstDash val="solid"/>
           </a:ln>
         </p:spPr>
+        <p:txBody xmlns:a="http://schemas.openxmlformats.org/drawingml/2006/main">
+          <a:bodyPr/>
+          <a:p/>
+        </p:txBody>
       </p:sp>
       <p:sp>
         <p:nvSpPr>
@@ -29144,6 +27630,10 @@
             <a:prstDash val="solid"/>
           </a:ln>
         </p:spPr>
+        <p:txBody xmlns:a="http://schemas.openxmlformats.org/drawingml/2006/main">
+          <a:bodyPr/>
+          <a:p/>
+        </p:txBody>
       </p:sp>
       <p:sp>
         <p:nvSpPr>
@@ -29177,6 +27667,10 @@
             <a:prstDash val="solid"/>
           </a:ln>
         </p:spPr>
+        <p:txBody xmlns:a="http://schemas.openxmlformats.org/drawingml/2006/main">
+          <a:bodyPr/>
+          <a:p/>
+        </p:txBody>
       </p:sp>
       <p:sp>
         <p:nvSpPr>
@@ -29210,6 +27704,10 @@
             <a:prstDash val="solid"/>
           </a:ln>
         </p:spPr>
+        <p:txBody xmlns:a="http://schemas.openxmlformats.org/drawingml/2006/main">
+          <a:bodyPr/>
+          <a:p/>
+        </p:txBody>
       </p:sp>
       <p:sp>
         <p:nvSpPr>
@@ -29307,6 +27805,10 @@
             <a:prstDash val="solid"/>
           </a:ln>
         </p:spPr>
+        <p:txBody xmlns:a="http://schemas.openxmlformats.org/drawingml/2006/main">
+          <a:bodyPr/>
+          <a:p/>
+        </p:txBody>
       </p:sp>
       <p:sp>
         <p:nvSpPr>
@@ -29496,6 +27998,10 @@
             <a:prstDash val="solid"/>
           </a:ln>
         </p:spPr>
+        <p:txBody xmlns:a="http://schemas.openxmlformats.org/drawingml/2006/main">
+          <a:bodyPr/>
+          <a:p/>
+        </p:txBody>
       </p:sp>
       <p:sp>
         <p:nvSpPr>
@@ -29529,6 +28035,10 @@
             <a:prstDash val="solid"/>
           </a:ln>
         </p:spPr>
+        <p:txBody xmlns:a="http://schemas.openxmlformats.org/drawingml/2006/main">
+          <a:bodyPr/>
+          <a:p/>
+        </p:txBody>
       </p:sp>
       <p:sp>
         <p:nvSpPr>
@@ -29562,6 +28072,10 @@
             <a:prstDash val="solid"/>
           </a:ln>
         </p:spPr>
+        <p:txBody xmlns:a="http://schemas.openxmlformats.org/drawingml/2006/main">
+          <a:bodyPr/>
+          <a:p/>
+        </p:txBody>
       </p:sp>
       <p:sp>
         <p:nvSpPr>
@@ -29595,6 +28109,10 @@
             <a:prstDash val="solid"/>
           </a:ln>
         </p:spPr>
+        <p:txBody xmlns:a="http://schemas.openxmlformats.org/drawingml/2006/main">
+          <a:bodyPr/>
+          <a:p/>
+        </p:txBody>
       </p:sp>
       <p:sp>
         <p:nvSpPr>
@@ -29628,6 +28146,10 @@
             <a:prstDash val="solid"/>
           </a:ln>
         </p:spPr>
+        <p:txBody xmlns:a="http://schemas.openxmlformats.org/drawingml/2006/main">
+          <a:bodyPr/>
+          <a:p/>
+        </p:txBody>
       </p:sp>
       <p:sp>
         <p:nvSpPr>
@@ -29661,6 +28183,10 @@
             <a:prstDash val="solid"/>
           </a:ln>
         </p:spPr>
+        <p:txBody xmlns:a="http://schemas.openxmlformats.org/drawingml/2006/main">
+          <a:bodyPr/>
+          <a:p/>
+        </p:txBody>
       </p:sp>
       <p:sp>
         <p:nvSpPr>
@@ -29694,6 +28220,10 @@
             <a:prstDash val="solid"/>
           </a:ln>
         </p:spPr>
+        <p:txBody xmlns:a="http://schemas.openxmlformats.org/drawingml/2006/main">
+          <a:bodyPr/>
+          <a:p/>
+        </p:txBody>
       </p:sp>
       <p:sp>
         <p:nvSpPr>
@@ -29727,6 +28257,10 @@
             <a:prstDash val="solid"/>
           </a:ln>
         </p:spPr>
+        <p:txBody xmlns:a="http://schemas.openxmlformats.org/drawingml/2006/main">
+          <a:bodyPr/>
+          <a:p/>
+        </p:txBody>
       </p:sp>
       <p:sp>
         <p:nvSpPr>
@@ -29760,6 +28294,10 @@
             <a:prstDash val="solid"/>
           </a:ln>
         </p:spPr>
+        <p:txBody xmlns:a="http://schemas.openxmlformats.org/drawingml/2006/main">
+          <a:bodyPr/>
+          <a:p/>
+        </p:txBody>
       </p:sp>
       <p:sp>
         <p:nvSpPr>
@@ -29793,6 +28331,10 @@
             <a:prstDash val="solid"/>
           </a:ln>
         </p:spPr>
+        <p:txBody xmlns:a="http://schemas.openxmlformats.org/drawingml/2006/main">
+          <a:bodyPr/>
+          <a:p/>
+        </p:txBody>
       </p:sp>
       <p:sp>
         <p:nvSpPr>
@@ -29826,6 +28368,10 @@
             <a:prstDash val="solid"/>
           </a:ln>
         </p:spPr>
+        <p:txBody xmlns:a="http://schemas.openxmlformats.org/drawingml/2006/main">
+          <a:bodyPr/>
+          <a:p/>
+        </p:txBody>
       </p:sp>
       <p:sp>
         <p:nvSpPr>
@@ -29859,6 +28405,10 @@
             <a:prstDash val="solid"/>
           </a:ln>
         </p:spPr>
+        <p:txBody xmlns:a="http://schemas.openxmlformats.org/drawingml/2006/main">
+          <a:bodyPr/>
+          <a:p/>
+        </p:txBody>
       </p:sp>
       <p:sp>
         <p:nvSpPr>
@@ -29892,6 +28442,10 @@
             <a:prstDash val="solid"/>
           </a:ln>
         </p:spPr>
+        <p:txBody xmlns:a="http://schemas.openxmlformats.org/drawingml/2006/main">
+          <a:bodyPr/>
+          <a:p/>
+        </p:txBody>
       </p:sp>
       <p:sp>
         <p:nvSpPr>
@@ -29989,6 +28543,10 @@
             <a:prstDash val="solid"/>
           </a:ln>
         </p:spPr>
+        <p:txBody xmlns:a="http://schemas.openxmlformats.org/drawingml/2006/main">
+          <a:bodyPr/>
+          <a:p/>
+        </p:txBody>
       </p:sp>
       <p:sp>
         <p:nvSpPr>
@@ -30132,6 +28690,10 @@
             <a:prstDash val="solid"/>
           </a:ln>
         </p:spPr>
+        <p:txBody xmlns:a="http://schemas.openxmlformats.org/drawingml/2006/main">
+          <a:bodyPr/>
+          <a:p/>
+        </p:txBody>
       </p:sp>
       <p:sp>
         <p:nvSpPr>
@@ -30229,6 +28791,10 @@
             <a:prstDash val="solid"/>
           </a:ln>
         </p:spPr>
+        <p:txBody xmlns:a="http://schemas.openxmlformats.org/drawingml/2006/main">
+          <a:bodyPr/>
+          <a:p/>
+        </p:txBody>
       </p:sp>
       <p:sp>
         <p:nvSpPr>
@@ -30262,6 +28828,10 @@
             <a:prstDash val="solid"/>
           </a:ln>
         </p:spPr>
+        <p:txBody xmlns:a="http://schemas.openxmlformats.org/drawingml/2006/main">
+          <a:bodyPr/>
+          <a:p/>
+        </p:txBody>
       </p:sp>
       <p:sp>
         <p:nvSpPr>
@@ -30295,6 +28865,10 @@
             <a:prstDash val="solid"/>
           </a:ln>
         </p:spPr>
+        <p:txBody xmlns:a="http://schemas.openxmlformats.org/drawingml/2006/main">
+          <a:bodyPr/>
+          <a:p/>
+        </p:txBody>
       </p:sp>
       <p:sp>
         <p:nvSpPr>
@@ -30328,6 +28902,10 @@
             <a:prstDash val="solid"/>
           </a:ln>
         </p:spPr>
+        <p:txBody xmlns:a="http://schemas.openxmlformats.org/drawingml/2006/main">
+          <a:bodyPr/>
+          <a:p/>
+        </p:txBody>
       </p:sp>
       <p:sp>
         <p:nvSpPr>
@@ -30361,6 +28939,10 @@
             <a:prstDash val="solid"/>
           </a:ln>
         </p:spPr>
+        <p:txBody xmlns:a="http://schemas.openxmlformats.org/drawingml/2006/main">
+          <a:bodyPr/>
+          <a:p/>
+        </p:txBody>
       </p:sp>
       <p:sp>
         <p:nvSpPr>
@@ -30394,6 +28976,10 @@
             <a:prstDash val="solid"/>
           </a:ln>
         </p:spPr>
+        <p:txBody xmlns:a="http://schemas.openxmlformats.org/drawingml/2006/main">
+          <a:bodyPr/>
+          <a:p/>
+        </p:txBody>
       </p:sp>
       <p:sp>
         <p:nvSpPr>
@@ -30427,6 +29013,10 @@
             <a:prstDash val="solid"/>
           </a:ln>
         </p:spPr>
+        <p:txBody xmlns:a="http://schemas.openxmlformats.org/drawingml/2006/main">
+          <a:bodyPr/>
+          <a:p/>
+        </p:txBody>
       </p:sp>
       <p:sp>
         <p:nvSpPr>
@@ -30460,6 +29050,10 @@
             <a:prstDash val="solid"/>
           </a:ln>
         </p:spPr>
+        <p:txBody xmlns:a="http://schemas.openxmlformats.org/drawingml/2006/main">
+          <a:bodyPr/>
+          <a:p/>
+        </p:txBody>
       </p:sp>
       <p:sp>
         <p:nvSpPr>
@@ -30493,6 +29087,10 @@
             <a:prstDash val="solid"/>
           </a:ln>
         </p:spPr>
+        <p:txBody xmlns:a="http://schemas.openxmlformats.org/drawingml/2006/main">
+          <a:bodyPr/>
+          <a:p/>
+        </p:txBody>
       </p:sp>
       <p:sp>
         <p:nvSpPr>
@@ -30526,6 +29124,10 @@
             <a:prstDash val="solid"/>
           </a:ln>
         </p:spPr>
+        <p:txBody xmlns:a="http://schemas.openxmlformats.org/drawingml/2006/main">
+          <a:bodyPr/>
+          <a:p/>
+        </p:txBody>
       </p:sp>
       <p:sp>
         <p:nvSpPr>
@@ -30559,6 +29161,10 @@
             <a:prstDash val="solid"/>
           </a:ln>
         </p:spPr>
+        <p:txBody xmlns:a="http://schemas.openxmlformats.org/drawingml/2006/main">
+          <a:bodyPr/>
+          <a:p/>
+        </p:txBody>
       </p:sp>
       <p:sp>
         <p:nvSpPr>
@@ -30592,6 +29198,10 @@
             <a:prstDash val="solid"/>
           </a:ln>
         </p:spPr>
+        <p:txBody xmlns:a="http://schemas.openxmlformats.org/drawingml/2006/main">
+          <a:bodyPr/>
+          <a:p/>
+        </p:txBody>
       </p:sp>
       <p:sp>
         <p:nvSpPr>
@@ -30625,6 +29235,10 @@
             <a:prstDash val="solid"/>
           </a:ln>
         </p:spPr>
+        <p:txBody xmlns:a="http://schemas.openxmlformats.org/drawingml/2006/main">
+          <a:bodyPr/>
+          <a:p/>
+        </p:txBody>
       </p:sp>
     </p:spTree>
     <p:extLst>

--- a/outputs/019e93bf-5861-7ba2-af6a-d3677b8793cd/presentations/lab-tracker-research-group/output/lab-tracker-research-group-presentation.pptx
+++ b/outputs/019e93bf-5861-7ba2-af6a-d3677b8793cd/presentations/lab-tracker-research-group/output/lab-tracker-research-group-presentation.pptx
@@ -5183,7 +5183,7 @@
         </p:nvSpPr>
         <p:spPr>
           <a:xfrm xmlns:a="http://schemas.openxmlformats.org/drawingml/2006/main">
-            <a:off x="2324100" y="5372100"/>
+            <a:off x="2324100" y="5870448"/>
             <a:ext cx="7048500" cy="323850"/>
           </a:xfrm>
           <a:prstGeom xmlns:a="http://schemas.openxmlformats.org/drawingml/2006/main" prst="rect">
@@ -5227,6 +5227,154 @@
                 <a:cs typeface="Aptos"/>
               </a:rPr>
               <a:t>The system stores references to artifacts and the scientific edges between them.</a:t>
+            </a:r>
+          </a:p>
+        </p:txBody>
+      </p:sp>
+      <p:sp>
+        <p:nvSpPr>
+          <p:cNvPr id="24" name="ctlq-24">
+            <a:extLst xmlns:a="http://schemas.openxmlformats.org/drawingml/2006/main">
+              <a:ext uri="{FF2B5EF4-FFF2-40B4-BE49-F238E27FC236}">
+                <a16:creationId xmlns:a16="http://schemas.microsoft.com/office/drawing/2014/main" id="{4459E0AF-E9B0-4ECE-8906-35C7BDFF170E}"/>
+              </a:ext>
+            </a:extLst>
+          </p:cNvPr>
+          <p:cNvSpPr>
+            <a:spLocks xmlns:a="http://schemas.openxmlformats.org/drawingml/2006/main" noGrp="1"/>
+          </p:cNvSpPr>
+          <p:nvPr/>
+        </p:nvSpPr>
+        <p:spPr>
+          <a:xfrm xmlns:a="http://schemas.openxmlformats.org/drawingml/2006/main">
+            <a:off x="2194560" y="4855464"/>
+            <a:ext cx="18288" cy="155448"/>
+          </a:xfrm>
+          <a:prstGeom xmlns:a="http://schemas.openxmlformats.org/drawingml/2006/main" prst="rect">
+            <a:avLst/>
+          </a:prstGeom>
+          <a:solidFill xmlns:a="http://schemas.openxmlformats.org/drawingml/2006/main">
+            <a:srgbClr val="A8A198"/>
+          </a:solidFill>
+          <a:ln xmlns:a="http://schemas.openxmlformats.org/drawingml/2006/main" w="0">
+            <a:solidFill>
+              <a:srgbClr val="A8A198"/>
+            </a:solidFill>
+            <a:prstDash val="solid"/>
+          </a:ln>
+        </p:spPr>
+        <p:txBody xmlns:a="http://schemas.openxmlformats.org/drawingml/2006/main">
+          <a:bodyPr/>
+          <a:p/>
+        </p:txBody>
+      </p:sp>
+      <p:sp>
+        <p:nvSpPr>
+          <p:cNvPr id="25" name="ctlq-25">
+            <a:extLst xmlns:a="http://schemas.openxmlformats.org/drawingml/2006/main">
+              <a:ext uri="{FF2B5EF4-FFF2-40B4-BE49-F238E27FC236}">
+                <a16:creationId xmlns:a16="http://schemas.microsoft.com/office/drawing/2014/main" id="{F38125BC-69C9-4FD2-87F8-AB41F32EB967}"/>
+              </a:ext>
+            </a:extLst>
+          </p:cNvPr>
+          <p:cNvSpPr>
+            <a:spLocks xmlns:a="http://schemas.openxmlformats.org/drawingml/2006/main" noGrp="1"/>
+          </p:cNvSpPr>
+          <p:nvPr/>
+        </p:nvSpPr>
+        <p:spPr>
+          <a:xfrm xmlns:a="http://schemas.openxmlformats.org/drawingml/2006/main">
+            <a:off x="1106424" y="5010912"/>
+            <a:ext cx="2194560" cy="603504"/>
+          </a:xfrm>
+          <a:prstGeom xmlns:a="http://schemas.openxmlformats.org/drawingml/2006/main" prst="rect">
+            <a:avLst/>
+          </a:prstGeom>
+          <a:solidFill xmlns:a="http://schemas.openxmlformats.org/drawingml/2006/main">
+            <a:srgbClr val="FFFFFF"/>
+          </a:solidFill>
+          <a:ln xmlns:a="http://schemas.openxmlformats.org/drawingml/2006/main" w="11430">
+            <a:solidFill>
+              <a:srgbClr val="20262A"/>
+            </a:solidFill>
+            <a:prstDash val="solid"/>
+          </a:ln>
+        </p:spPr>
+        <p:txBody xmlns:a="http://schemas.openxmlformats.org/drawingml/2006/main">
+          <a:bodyPr/>
+          <a:p/>
+        </p:txBody>
+      </p:sp>
+      <p:sp>
+        <p:nvSpPr>
+          <p:cNvPr id="26" name="ctlq-26">
+            <a:extLst xmlns:a="http://schemas.openxmlformats.org/drawingml/2006/main">
+              <a:ext uri="{FF2B5EF4-FFF2-40B4-BE49-F238E27FC236}">
+                <a16:creationId xmlns:a16="http://schemas.microsoft.com/office/drawing/2014/main" id="{0D6F16F7-98FE-4409-B5CE-B8CEC3E53E12}"/>
+              </a:ext>
+            </a:extLst>
+          </p:cNvPr>
+          <p:cNvSpPr>
+            <a:spLocks xmlns:a="http://schemas.openxmlformats.org/drawingml/2006/main" noGrp="1"/>
+          </p:cNvSpPr>
+          <p:nvPr/>
+        </p:nvSpPr>
+        <p:spPr>
+          <a:xfrm xmlns:a="http://schemas.openxmlformats.org/drawingml/2006/main">
+            <a:off x="1216152" y="5084064"/>
+            <a:ext cx="1975104" cy="457200"/>
+          </a:xfrm>
+          <a:prstGeom xmlns:a="http://schemas.openxmlformats.org/drawingml/2006/main" prst="rect">
+            <a:avLst/>
+          </a:prstGeom>
+          <a:solidFill xmlns:a="http://schemas.openxmlformats.org/drawingml/2006/main">
+            <a:srgbClr val="000000">
+              <a:alpha val="0"/>
+            </a:srgbClr>
+          </a:solidFill>
+          <a:ln xmlns:a="http://schemas.openxmlformats.org/drawingml/2006/main" w="0">
+            <a:solidFill>
+              <a:srgbClr val="000000">
+                <a:alpha val="0"/>
+              </a:srgbClr>
+            </a:solidFill>
+            <a:prstDash val="solid"/>
+          </a:ln>
+        </p:spPr>
+        <p:txBody>
+          <a:bodyPr xmlns:a="http://schemas.openxmlformats.org/drawingml/2006/main" lIns="0" tIns="0" rIns="0" bIns="0" anchor="ctr" wrap="square"/>
+          <a:lstStyle xmlns:a="http://schemas.openxmlformats.org/drawingml/2006/main"/>
+          <a:p xmlns:a="http://schemas.openxmlformats.org/drawingml/2006/main">
+            <a:pPr algn="ctr">
+              <a:defRPr sz="1050" b="0">
+                <a:solidFill>
+                  <a:srgbClr val="20262A"/>
+                </a:solidFill>
+                <a:latin typeface="Aptos"/>
+                <a:ea typeface="Aptos"/>
+                <a:cs typeface="Aptos"/>
+              </a:defRPr>
+            </a:pPr>
+            <a:r>
+              <a:rPr sz="1050" b="0">
+                <a:solidFill>
+                  <a:srgbClr val="20262A"/>
+                </a:solidFill>
+                <a:latin typeface="Aptos"/>
+              </a:rPr>
+              <a:t>control question:</a:t>
+            </a:r>
+          </a:p>
+          <a:p xmlns:a="http://schemas.openxmlformats.org/drawingml/2006/main">
+            <a:pPr algn="ctr"/>
+            <a:r>
+              <a:rPr sz="1050" b="0">
+                <a:solidFill>
+                  <a:srgbClr val="20262A"/>
+                </a:solidFill>
+                <a:latin typeface="Aptos"/>
+              </a:rPr>
+              <a:t>presynaptic on ORNs?</a:t>
             </a:r>
           </a:p>
         </p:txBody>

--- a/outputs/019e93bf-5861-7ba2-af6a-d3677b8793cd/presentations/lab-tracker-research-group/output/lab-tracker-research-group-presentation.pptx
+++ b/outputs/019e93bf-5861-7ba2-af6a-d3677b8793cd/presentations/lab-tracker-research-group/output/lab-tracker-research-group-presentation.pptx
@@ -2451,1634 +2451,9 @@
                 <a:ea typeface="Aptos"/>
                 <a:cs typeface="Aptos"/>
               </a:rPr>
-              <a:t>Questions -&gt; evidence -&gt; claims -&gt; figures</a:t>
+              <a:t>Questions → evidence → claims → figures</a:t>
             </a:r>
           </a:p>
-        </p:txBody>
-      </p:sp>
-      <p:sp>
-        <p:nvSpPr>
-          <p:cNvPr id="5" name="box-question">
-            <a:extLst xmlns:a="http://schemas.openxmlformats.org/drawingml/2006/main">
-              <a:ext uri="{FF2B5EF4-FFF2-40B4-BE49-F238E27FC236}">
-                <a16:creationId xmlns:a16="http://schemas.microsoft.com/office/drawing/2014/main" id="{75BF0BB5-7D34-4C78-9124-1C9BB69C159F}"/>
-              </a:ext>
-            </a:extLst>
-          </p:cNvPr>
-          <p:cNvSpPr>
-            <a:spLocks xmlns:a="http://schemas.openxmlformats.org/drawingml/2006/main" noGrp="1"/>
-          </p:cNvSpPr>
-          <p:nvPr/>
-        </p:nvSpPr>
-        <p:spPr>
-          <a:xfrm xmlns:a="http://schemas.openxmlformats.org/drawingml/2006/main">
-            <a:off x="7677150" y="2152650"/>
-            <a:ext cx="1809750" cy="457200"/>
-          </a:xfrm>
-          <a:prstGeom xmlns:a="http://schemas.openxmlformats.org/drawingml/2006/main" prst="rect">
-            <a:avLst/>
-          </a:prstGeom>
-          <a:solidFill xmlns:a="http://schemas.openxmlformats.org/drawingml/2006/main">
-            <a:srgbClr val="DCE9EA"/>
-          </a:solidFill>
-          <a:ln xmlns:a="http://schemas.openxmlformats.org/drawingml/2006/main" w="11430">
-            <a:solidFill>
-              <a:srgbClr val="2F5F6F"/>
-            </a:solidFill>
-            <a:prstDash val="solid"/>
-          </a:ln>
-        </p:spPr>
-        <p:txBody xmlns:a="http://schemas.openxmlformats.org/drawingml/2006/main">
-          <a:bodyPr/>
-          <a:p/>
-        </p:txBody>
-      </p:sp>
-      <p:sp>
-        <p:nvSpPr>
-          <p:cNvPr id="6" name="label-question">
-            <a:extLst xmlns:a="http://schemas.openxmlformats.org/drawingml/2006/main">
-              <a:ext uri="{FF2B5EF4-FFF2-40B4-BE49-F238E27FC236}">
-                <a16:creationId xmlns:a16="http://schemas.microsoft.com/office/drawing/2014/main" id="{87003F95-9364-4AE6-BE24-EEF996DD8031}"/>
-              </a:ext>
-            </a:extLst>
-          </p:cNvPr>
-          <p:cNvSpPr>
-            <a:spLocks xmlns:a="http://schemas.openxmlformats.org/drawingml/2006/main" noGrp="1"/>
-          </p:cNvSpPr>
-          <p:nvPr/>
-        </p:nvSpPr>
-        <p:spPr>
-          <a:xfrm xmlns:a="http://schemas.openxmlformats.org/drawingml/2006/main">
-            <a:off x="7810500" y="2266950"/>
-            <a:ext cx="1543050" cy="228600"/>
-          </a:xfrm>
-          <a:prstGeom xmlns:a="http://schemas.openxmlformats.org/drawingml/2006/main" prst="rect">
-            <a:avLst/>
-          </a:prstGeom>
-          <a:solidFill xmlns:a="http://schemas.openxmlformats.org/drawingml/2006/main">
-            <a:srgbClr val="000000">
-              <a:alpha val="0"/>
-            </a:srgbClr>
-          </a:solidFill>
-          <a:ln xmlns:a="http://schemas.openxmlformats.org/drawingml/2006/main" w="0">
-            <a:solidFill>
-              <a:srgbClr val="000000">
-                <a:alpha val="0"/>
-              </a:srgbClr>
-            </a:solidFill>
-            <a:prstDash val="solid"/>
-          </a:ln>
-        </p:spPr>
-        <p:txBody>
-          <a:bodyPr xmlns:a="http://schemas.openxmlformats.org/drawingml/2006/main" lIns="0" tIns="0" rIns="0" bIns="0" anchor="ctr"/>
-          <a:lstStyle xmlns:a="http://schemas.openxmlformats.org/drawingml/2006/main"/>
-          <a:p xmlns:a="http://schemas.openxmlformats.org/drawingml/2006/main">
-            <a:pPr algn="ctr">
-              <a:defRPr sz="1050" b="1">
-                <a:solidFill>
-                  <a:srgbClr val="20262A"/>
-                </a:solidFill>
-                <a:latin typeface="Aptos"/>
-                <a:ea typeface="Aptos"/>
-                <a:cs typeface="Aptos"/>
-              </a:defRPr>
-            </a:pPr>
-            <a:r>
-              <a:rPr sz="1050" b="1">
-                <a:solidFill>
-                  <a:srgbClr val="20262A"/>
-                </a:solidFill>
-                <a:latin typeface="Aptos"/>
-                <a:ea typeface="Aptos"/>
-                <a:cs typeface="Aptos"/>
-              </a:rPr>
-              <a:t>question</a:t>
-            </a:r>
-          </a:p>
-        </p:txBody>
-      </p:sp>
-      <p:sp>
-        <p:nvSpPr>
-          <p:cNvPr id="7" name="box-evidence">
-            <a:extLst xmlns:a="http://schemas.openxmlformats.org/drawingml/2006/main">
-              <a:ext uri="{FF2B5EF4-FFF2-40B4-BE49-F238E27FC236}">
-                <a16:creationId xmlns:a16="http://schemas.microsoft.com/office/drawing/2014/main" id="{CDB85FBB-415C-4D3E-9232-2FD89E8EB021}"/>
-              </a:ext>
-            </a:extLst>
-          </p:cNvPr>
-          <p:cNvSpPr>
-            <a:spLocks xmlns:a="http://schemas.openxmlformats.org/drawingml/2006/main" noGrp="1"/>
-          </p:cNvSpPr>
-          <p:nvPr/>
-        </p:nvSpPr>
-        <p:spPr>
-          <a:xfrm xmlns:a="http://schemas.openxmlformats.org/drawingml/2006/main">
-            <a:off x="6953250" y="3352800"/>
-            <a:ext cx="1619250" cy="419100"/>
-          </a:xfrm>
-          <a:prstGeom xmlns:a="http://schemas.openxmlformats.org/drawingml/2006/main" prst="rect">
-            <a:avLst/>
-          </a:prstGeom>
-          <a:solidFill xmlns:a="http://schemas.openxmlformats.org/drawingml/2006/main">
-            <a:srgbClr val="FFFFFF"/>
-          </a:solidFill>
-          <a:ln xmlns:a="http://schemas.openxmlformats.org/drawingml/2006/main" w="11430">
-            <a:solidFill>
-              <a:srgbClr val="20262A"/>
-            </a:solidFill>
-            <a:prstDash val="solid"/>
-          </a:ln>
-        </p:spPr>
-        <p:txBody xmlns:a="http://schemas.openxmlformats.org/drawingml/2006/main">
-          <a:bodyPr/>
-          <a:p/>
-        </p:txBody>
-      </p:sp>
-      <p:sp>
-        <p:nvSpPr>
-          <p:cNvPr id="8" name="label-evidence">
-            <a:extLst xmlns:a="http://schemas.openxmlformats.org/drawingml/2006/main">
-              <a:ext uri="{FF2B5EF4-FFF2-40B4-BE49-F238E27FC236}">
-                <a16:creationId xmlns:a16="http://schemas.microsoft.com/office/drawing/2014/main" id="{DADFD021-DC2C-4CEC-9221-CD7D2224F7BB}"/>
-              </a:ext>
-            </a:extLst>
-          </p:cNvPr>
-          <p:cNvSpPr>
-            <a:spLocks xmlns:a="http://schemas.openxmlformats.org/drawingml/2006/main" noGrp="1"/>
-          </p:cNvSpPr>
-          <p:nvPr/>
-        </p:nvSpPr>
-        <p:spPr>
-          <a:xfrm xmlns:a="http://schemas.openxmlformats.org/drawingml/2006/main">
-            <a:off x="7086600" y="3467100"/>
-            <a:ext cx="1352550" cy="190500"/>
-          </a:xfrm>
-          <a:prstGeom xmlns:a="http://schemas.openxmlformats.org/drawingml/2006/main" prst="rect">
-            <a:avLst/>
-          </a:prstGeom>
-          <a:solidFill xmlns:a="http://schemas.openxmlformats.org/drawingml/2006/main">
-            <a:srgbClr val="000000">
-              <a:alpha val="0"/>
-            </a:srgbClr>
-          </a:solidFill>
-          <a:ln xmlns:a="http://schemas.openxmlformats.org/drawingml/2006/main" w="0">
-            <a:solidFill>
-              <a:srgbClr val="000000">
-                <a:alpha val="0"/>
-              </a:srgbClr>
-            </a:solidFill>
-            <a:prstDash val="solid"/>
-          </a:ln>
-        </p:spPr>
-        <p:txBody>
-          <a:bodyPr xmlns:a="http://schemas.openxmlformats.org/drawingml/2006/main" lIns="0" tIns="0" rIns="0" bIns="0" anchor="ctr"/>
-          <a:lstStyle xmlns:a="http://schemas.openxmlformats.org/drawingml/2006/main"/>
-          <a:p xmlns:a="http://schemas.openxmlformats.org/drawingml/2006/main">
-            <a:pPr algn="ctr">
-              <a:defRPr sz="1050" b="0">
-                <a:solidFill>
-                  <a:srgbClr val="20262A"/>
-                </a:solidFill>
-                <a:latin typeface="Aptos"/>
-                <a:ea typeface="Aptos"/>
-                <a:cs typeface="Aptos"/>
-              </a:defRPr>
-            </a:pPr>
-            <a:r>
-              <a:rPr sz="1050" b="0">
-                <a:solidFill>
-                  <a:srgbClr val="20262A"/>
-                </a:solidFill>
-                <a:latin typeface="Aptos"/>
-                <a:ea typeface="Aptos"/>
-                <a:cs typeface="Aptos"/>
-              </a:rPr>
-              <a:t>evidence</a:t>
-            </a:r>
-          </a:p>
-        </p:txBody>
-      </p:sp>
-      <p:sp>
-        <p:nvSpPr>
-          <p:cNvPr id="9" name="box-claim">
-            <a:extLst xmlns:a="http://schemas.openxmlformats.org/drawingml/2006/main">
-              <a:ext uri="{FF2B5EF4-FFF2-40B4-BE49-F238E27FC236}">
-                <a16:creationId xmlns:a16="http://schemas.microsoft.com/office/drawing/2014/main" id="{F36292FD-E9D1-475D-806C-525C385AB7A6}"/>
-              </a:ext>
-            </a:extLst>
-          </p:cNvPr>
-          <p:cNvSpPr>
-            <a:spLocks xmlns:a="http://schemas.openxmlformats.org/drawingml/2006/main" noGrp="1"/>
-          </p:cNvSpPr>
-          <p:nvPr/>
-        </p:nvSpPr>
-        <p:spPr>
-          <a:xfrm xmlns:a="http://schemas.openxmlformats.org/drawingml/2006/main">
-            <a:off x="8953500" y="3352800"/>
-            <a:ext cx="1619250" cy="419100"/>
-          </a:xfrm>
-          <a:prstGeom xmlns:a="http://schemas.openxmlformats.org/drawingml/2006/main" prst="rect">
-            <a:avLst/>
-          </a:prstGeom>
-          <a:solidFill xmlns:a="http://schemas.openxmlformats.org/drawingml/2006/main">
-            <a:srgbClr val="FFFFFF"/>
-          </a:solidFill>
-          <a:ln xmlns:a="http://schemas.openxmlformats.org/drawingml/2006/main" w="11430">
-            <a:solidFill>
-              <a:srgbClr val="20262A"/>
-            </a:solidFill>
-            <a:prstDash val="solid"/>
-          </a:ln>
-        </p:spPr>
-        <p:txBody xmlns:a="http://schemas.openxmlformats.org/drawingml/2006/main">
-          <a:bodyPr/>
-          <a:p/>
-        </p:txBody>
-      </p:sp>
-      <p:sp>
-        <p:nvSpPr>
-          <p:cNvPr id="10" name="label-claim">
-            <a:extLst xmlns:a="http://schemas.openxmlformats.org/drawingml/2006/main">
-              <a:ext uri="{FF2B5EF4-FFF2-40B4-BE49-F238E27FC236}">
-                <a16:creationId xmlns:a16="http://schemas.microsoft.com/office/drawing/2014/main" id="{4BAF8690-16F7-4DA1-923F-8B25E7EEECF6}"/>
-              </a:ext>
-            </a:extLst>
-          </p:cNvPr>
-          <p:cNvSpPr>
-            <a:spLocks xmlns:a="http://schemas.openxmlformats.org/drawingml/2006/main" noGrp="1"/>
-          </p:cNvSpPr>
-          <p:nvPr/>
-        </p:nvSpPr>
-        <p:spPr>
-          <a:xfrm xmlns:a="http://schemas.openxmlformats.org/drawingml/2006/main">
-            <a:off x="9086850" y="3467100"/>
-            <a:ext cx="1352550" cy="190500"/>
-          </a:xfrm>
-          <a:prstGeom xmlns:a="http://schemas.openxmlformats.org/drawingml/2006/main" prst="rect">
-            <a:avLst/>
-          </a:prstGeom>
-          <a:solidFill xmlns:a="http://schemas.openxmlformats.org/drawingml/2006/main">
-            <a:srgbClr val="000000">
-              <a:alpha val="0"/>
-            </a:srgbClr>
-          </a:solidFill>
-          <a:ln xmlns:a="http://schemas.openxmlformats.org/drawingml/2006/main" w="0">
-            <a:solidFill>
-              <a:srgbClr val="000000">
-                <a:alpha val="0"/>
-              </a:srgbClr>
-            </a:solidFill>
-            <a:prstDash val="solid"/>
-          </a:ln>
-        </p:spPr>
-        <p:txBody>
-          <a:bodyPr xmlns:a="http://schemas.openxmlformats.org/drawingml/2006/main" lIns="0" tIns="0" rIns="0" bIns="0" anchor="ctr"/>
-          <a:lstStyle xmlns:a="http://schemas.openxmlformats.org/drawingml/2006/main"/>
-          <a:p xmlns:a="http://schemas.openxmlformats.org/drawingml/2006/main">
-            <a:pPr algn="ctr">
-              <a:defRPr sz="1050" b="0">
-                <a:solidFill>
-                  <a:srgbClr val="20262A"/>
-                </a:solidFill>
-                <a:latin typeface="Aptos"/>
-                <a:ea typeface="Aptos"/>
-                <a:cs typeface="Aptos"/>
-              </a:defRPr>
-            </a:pPr>
-            <a:r>
-              <a:rPr sz="1050" b="0">
-                <a:solidFill>
-                  <a:srgbClr val="20262A"/>
-                </a:solidFill>
-                <a:latin typeface="Aptos"/>
-                <a:ea typeface="Aptos"/>
-                <a:cs typeface="Aptos"/>
-              </a:rPr>
-              <a:t>claim</a:t>
-            </a:r>
-          </a:p>
-        </p:txBody>
-      </p:sp>
-      <p:sp>
-        <p:nvSpPr>
-          <p:cNvPr id="11" name="box-figure">
-            <a:extLst xmlns:a="http://schemas.openxmlformats.org/drawingml/2006/main">
-              <a:ext uri="{FF2B5EF4-FFF2-40B4-BE49-F238E27FC236}">
-                <a16:creationId xmlns:a16="http://schemas.microsoft.com/office/drawing/2014/main" id="{F540DFAB-78C1-4038-850A-F0BB3D8D2785}"/>
-              </a:ext>
-            </a:extLst>
-          </p:cNvPr>
-          <p:cNvSpPr>
-            <a:spLocks xmlns:a="http://schemas.openxmlformats.org/drawingml/2006/main" noGrp="1"/>
-          </p:cNvSpPr>
-          <p:nvPr/>
-        </p:nvSpPr>
-        <p:spPr>
-          <a:xfrm xmlns:a="http://schemas.openxmlformats.org/drawingml/2006/main">
-            <a:off x="7981950" y="4533900"/>
-            <a:ext cx="1619250" cy="419100"/>
-          </a:xfrm>
-          <a:prstGeom xmlns:a="http://schemas.openxmlformats.org/drawingml/2006/main" prst="rect">
-            <a:avLst/>
-          </a:prstGeom>
-          <a:solidFill xmlns:a="http://schemas.openxmlformats.org/drawingml/2006/main">
-            <a:srgbClr val="FFFFFF"/>
-          </a:solidFill>
-          <a:ln xmlns:a="http://schemas.openxmlformats.org/drawingml/2006/main" w="11430">
-            <a:solidFill>
-              <a:srgbClr val="20262A"/>
-            </a:solidFill>
-            <a:prstDash val="solid"/>
-          </a:ln>
-        </p:spPr>
-        <p:txBody xmlns:a="http://schemas.openxmlformats.org/drawingml/2006/main">
-          <a:bodyPr/>
-          <a:p/>
-        </p:txBody>
-      </p:sp>
-      <p:sp>
-        <p:nvSpPr>
-          <p:cNvPr id="12" name="label-figure">
-            <a:extLst xmlns:a="http://schemas.openxmlformats.org/drawingml/2006/main">
-              <a:ext uri="{FF2B5EF4-FFF2-40B4-BE49-F238E27FC236}">
-                <a16:creationId xmlns:a16="http://schemas.microsoft.com/office/drawing/2014/main" id="{D61B0CF2-06FF-4571-9980-9EBF5412874D}"/>
-              </a:ext>
-            </a:extLst>
-          </p:cNvPr>
-          <p:cNvSpPr>
-            <a:spLocks xmlns:a="http://schemas.openxmlformats.org/drawingml/2006/main" noGrp="1"/>
-          </p:cNvSpPr>
-          <p:nvPr/>
-        </p:nvSpPr>
-        <p:spPr>
-          <a:xfrm xmlns:a="http://schemas.openxmlformats.org/drawingml/2006/main">
-            <a:off x="8115300" y="4648200"/>
-            <a:ext cx="1352550" cy="190500"/>
-          </a:xfrm>
-          <a:prstGeom xmlns:a="http://schemas.openxmlformats.org/drawingml/2006/main" prst="rect">
-            <a:avLst/>
-          </a:prstGeom>
-          <a:solidFill xmlns:a="http://schemas.openxmlformats.org/drawingml/2006/main">
-            <a:srgbClr val="000000">
-              <a:alpha val="0"/>
-            </a:srgbClr>
-          </a:solidFill>
-          <a:ln xmlns:a="http://schemas.openxmlformats.org/drawingml/2006/main" w="0">
-            <a:solidFill>
-              <a:srgbClr val="000000">
-                <a:alpha val="0"/>
-              </a:srgbClr>
-            </a:solidFill>
-            <a:prstDash val="solid"/>
-          </a:ln>
-        </p:spPr>
-        <p:txBody>
-          <a:bodyPr xmlns:a="http://schemas.openxmlformats.org/drawingml/2006/main" lIns="0" tIns="0" rIns="0" bIns="0" anchor="ctr"/>
-          <a:lstStyle xmlns:a="http://schemas.openxmlformats.org/drawingml/2006/main"/>
-          <a:p xmlns:a="http://schemas.openxmlformats.org/drawingml/2006/main">
-            <a:pPr algn="ctr">
-              <a:defRPr sz="1050" b="0">
-                <a:solidFill>
-                  <a:srgbClr val="20262A"/>
-                </a:solidFill>
-                <a:latin typeface="Aptos"/>
-                <a:ea typeface="Aptos"/>
-                <a:cs typeface="Aptos"/>
-              </a:defRPr>
-            </a:pPr>
-            <a:r>
-              <a:rPr sz="1050" b="0">
-                <a:solidFill>
-                  <a:srgbClr val="20262A"/>
-                </a:solidFill>
-                <a:latin typeface="Aptos"/>
-                <a:ea typeface="Aptos"/>
-                <a:cs typeface="Aptos"/>
-              </a:rPr>
-              <a:t>figure</a:t>
-            </a:r>
-          </a:p>
-        </p:txBody>
-      </p:sp>
-      <p:sp>
-        <p:nvSpPr>
-          <p:cNvPr id="13" name="line-dot">
-            <a:extLst xmlns:a="http://schemas.openxmlformats.org/drawingml/2006/main">
-              <a:ext uri="{FF2B5EF4-FFF2-40B4-BE49-F238E27FC236}">
-                <a16:creationId xmlns:a16="http://schemas.microsoft.com/office/drawing/2014/main" id="{EA82A7C2-1ECE-41EE-A400-E4C335262239}"/>
-              </a:ext>
-            </a:extLst>
-          </p:cNvPr>
-          <p:cNvSpPr>
-            <a:spLocks xmlns:a="http://schemas.openxmlformats.org/drawingml/2006/main" noGrp="1"/>
-          </p:cNvSpPr>
-          <p:nvPr/>
-        </p:nvSpPr>
-        <p:spPr>
-          <a:xfrm xmlns:a="http://schemas.openxmlformats.org/drawingml/2006/main">
-            <a:off x="8562975" y="2600325"/>
-            <a:ext cx="19050" cy="19050"/>
-          </a:xfrm>
-          <a:prstGeom xmlns:a="http://schemas.openxmlformats.org/drawingml/2006/main" prst="rect">
-            <a:avLst/>
-          </a:prstGeom>
-          <a:solidFill xmlns:a="http://schemas.openxmlformats.org/drawingml/2006/main">
-            <a:srgbClr val="A8A198"/>
-          </a:solidFill>
-          <a:ln xmlns:a="http://schemas.openxmlformats.org/drawingml/2006/main" w="0">
-            <a:solidFill>
-              <a:srgbClr val="A8A198"/>
-            </a:solidFill>
-            <a:prstDash val="solid"/>
-          </a:ln>
-        </p:spPr>
-        <p:txBody xmlns:a="http://schemas.openxmlformats.org/drawingml/2006/main">
-          <a:bodyPr/>
-          <a:p/>
-        </p:txBody>
-      </p:sp>
-      <p:sp>
-        <p:nvSpPr>
-          <p:cNvPr id="14" name="line-dot">
-            <a:extLst xmlns:a="http://schemas.openxmlformats.org/drawingml/2006/main">
-              <a:ext uri="{FF2B5EF4-FFF2-40B4-BE49-F238E27FC236}">
-                <a16:creationId xmlns:a16="http://schemas.microsoft.com/office/drawing/2014/main" id="{37096AF5-7DBA-4C82-B807-FB265BE0CF5F}"/>
-              </a:ext>
-            </a:extLst>
-          </p:cNvPr>
-          <p:cNvSpPr>
-            <a:spLocks xmlns:a="http://schemas.openxmlformats.org/drawingml/2006/main" noGrp="1"/>
-          </p:cNvSpPr>
-          <p:nvPr/>
-        </p:nvSpPr>
-        <p:spPr>
-          <a:xfrm xmlns:a="http://schemas.openxmlformats.org/drawingml/2006/main">
-            <a:off x="8482013" y="2674620"/>
-            <a:ext cx="19050" cy="19050"/>
-          </a:xfrm>
-          <a:prstGeom xmlns:a="http://schemas.openxmlformats.org/drawingml/2006/main" prst="rect">
-            <a:avLst/>
-          </a:prstGeom>
-          <a:solidFill xmlns:a="http://schemas.openxmlformats.org/drawingml/2006/main">
-            <a:srgbClr val="A8A198"/>
-          </a:solidFill>
-          <a:ln xmlns:a="http://schemas.openxmlformats.org/drawingml/2006/main" w="0">
-            <a:solidFill>
-              <a:srgbClr val="A8A198"/>
-            </a:solidFill>
-            <a:prstDash val="solid"/>
-          </a:ln>
-        </p:spPr>
-        <p:txBody xmlns:a="http://schemas.openxmlformats.org/drawingml/2006/main">
-          <a:bodyPr/>
-          <a:p/>
-        </p:txBody>
-      </p:sp>
-      <p:sp>
-        <p:nvSpPr>
-          <p:cNvPr id="15" name="line-dot">
-            <a:extLst xmlns:a="http://schemas.openxmlformats.org/drawingml/2006/main">
-              <a:ext uri="{FF2B5EF4-FFF2-40B4-BE49-F238E27FC236}">
-                <a16:creationId xmlns:a16="http://schemas.microsoft.com/office/drawing/2014/main" id="{C8E9CE2E-9741-4277-ABED-D30EB840332C}"/>
-              </a:ext>
-            </a:extLst>
-          </p:cNvPr>
-          <p:cNvSpPr>
-            <a:spLocks xmlns:a="http://schemas.openxmlformats.org/drawingml/2006/main" noGrp="1"/>
-          </p:cNvSpPr>
-          <p:nvPr/>
-        </p:nvSpPr>
-        <p:spPr>
-          <a:xfrm xmlns:a="http://schemas.openxmlformats.org/drawingml/2006/main">
-            <a:off x="8401050" y="2748915"/>
-            <a:ext cx="19050" cy="19050"/>
-          </a:xfrm>
-          <a:prstGeom xmlns:a="http://schemas.openxmlformats.org/drawingml/2006/main" prst="rect">
-            <a:avLst/>
-          </a:prstGeom>
-          <a:solidFill xmlns:a="http://schemas.openxmlformats.org/drawingml/2006/main">
-            <a:srgbClr val="A8A198"/>
-          </a:solidFill>
-          <a:ln xmlns:a="http://schemas.openxmlformats.org/drawingml/2006/main" w="0">
-            <a:solidFill>
-              <a:srgbClr val="A8A198"/>
-            </a:solidFill>
-            <a:prstDash val="solid"/>
-          </a:ln>
-        </p:spPr>
-        <p:txBody xmlns:a="http://schemas.openxmlformats.org/drawingml/2006/main">
-          <a:bodyPr/>
-          <a:p/>
-        </p:txBody>
-      </p:sp>
-      <p:sp>
-        <p:nvSpPr>
-          <p:cNvPr id="16" name="line-dot">
-            <a:extLst xmlns:a="http://schemas.openxmlformats.org/drawingml/2006/main">
-              <a:ext uri="{FF2B5EF4-FFF2-40B4-BE49-F238E27FC236}">
-                <a16:creationId xmlns:a16="http://schemas.microsoft.com/office/drawing/2014/main" id="{0CA98AB9-CCEA-46BE-85B1-A3B49160978F}"/>
-              </a:ext>
-            </a:extLst>
-          </p:cNvPr>
-          <p:cNvSpPr>
-            <a:spLocks xmlns:a="http://schemas.openxmlformats.org/drawingml/2006/main" noGrp="1"/>
-          </p:cNvSpPr>
-          <p:nvPr/>
-        </p:nvSpPr>
-        <p:spPr>
-          <a:xfrm xmlns:a="http://schemas.openxmlformats.org/drawingml/2006/main">
-            <a:off x="8320088" y="2823210"/>
-            <a:ext cx="19050" cy="19050"/>
-          </a:xfrm>
-          <a:prstGeom xmlns:a="http://schemas.openxmlformats.org/drawingml/2006/main" prst="rect">
-            <a:avLst/>
-          </a:prstGeom>
-          <a:solidFill xmlns:a="http://schemas.openxmlformats.org/drawingml/2006/main">
-            <a:srgbClr val="A8A198"/>
-          </a:solidFill>
-          <a:ln xmlns:a="http://schemas.openxmlformats.org/drawingml/2006/main" w="0">
-            <a:solidFill>
-              <a:srgbClr val="A8A198"/>
-            </a:solidFill>
-            <a:prstDash val="solid"/>
-          </a:ln>
-        </p:spPr>
-        <p:txBody xmlns:a="http://schemas.openxmlformats.org/drawingml/2006/main">
-          <a:bodyPr/>
-          <a:p/>
-        </p:txBody>
-      </p:sp>
-      <p:sp>
-        <p:nvSpPr>
-          <p:cNvPr id="17" name="line-dot">
-            <a:extLst xmlns:a="http://schemas.openxmlformats.org/drawingml/2006/main">
-              <a:ext uri="{FF2B5EF4-FFF2-40B4-BE49-F238E27FC236}">
-                <a16:creationId xmlns:a16="http://schemas.microsoft.com/office/drawing/2014/main" id="{2A3104CE-25F2-4B8D-90F7-8E15490EF711}"/>
-              </a:ext>
-            </a:extLst>
-          </p:cNvPr>
-          <p:cNvSpPr>
-            <a:spLocks xmlns:a="http://schemas.openxmlformats.org/drawingml/2006/main" noGrp="1"/>
-          </p:cNvSpPr>
-          <p:nvPr/>
-        </p:nvSpPr>
-        <p:spPr>
-          <a:xfrm xmlns:a="http://schemas.openxmlformats.org/drawingml/2006/main">
-            <a:off x="8239125" y="2897505"/>
-            <a:ext cx="19050" cy="19050"/>
-          </a:xfrm>
-          <a:prstGeom xmlns:a="http://schemas.openxmlformats.org/drawingml/2006/main" prst="rect">
-            <a:avLst/>
-          </a:prstGeom>
-          <a:solidFill xmlns:a="http://schemas.openxmlformats.org/drawingml/2006/main">
-            <a:srgbClr val="A8A198"/>
-          </a:solidFill>
-          <a:ln xmlns:a="http://schemas.openxmlformats.org/drawingml/2006/main" w="0">
-            <a:solidFill>
-              <a:srgbClr val="A8A198"/>
-            </a:solidFill>
-            <a:prstDash val="solid"/>
-          </a:ln>
-        </p:spPr>
-        <p:txBody xmlns:a="http://schemas.openxmlformats.org/drawingml/2006/main">
-          <a:bodyPr/>
-          <a:p/>
-        </p:txBody>
-      </p:sp>
-      <p:sp>
-        <p:nvSpPr>
-          <p:cNvPr id="18" name="line-dot">
-            <a:extLst xmlns:a="http://schemas.openxmlformats.org/drawingml/2006/main">
-              <a:ext uri="{FF2B5EF4-FFF2-40B4-BE49-F238E27FC236}">
-                <a16:creationId xmlns:a16="http://schemas.microsoft.com/office/drawing/2014/main" id="{02764455-3B3B-4DA8-B95D-F0D89DF16654}"/>
-              </a:ext>
-            </a:extLst>
-          </p:cNvPr>
-          <p:cNvSpPr>
-            <a:spLocks xmlns:a="http://schemas.openxmlformats.org/drawingml/2006/main" noGrp="1"/>
-          </p:cNvSpPr>
-          <p:nvPr/>
-        </p:nvSpPr>
-        <p:spPr>
-          <a:xfrm xmlns:a="http://schemas.openxmlformats.org/drawingml/2006/main">
-            <a:off x="8158163" y="2971800"/>
-            <a:ext cx="19050" cy="19050"/>
-          </a:xfrm>
-          <a:prstGeom xmlns:a="http://schemas.openxmlformats.org/drawingml/2006/main" prst="rect">
-            <a:avLst/>
-          </a:prstGeom>
-          <a:solidFill xmlns:a="http://schemas.openxmlformats.org/drawingml/2006/main">
-            <a:srgbClr val="A8A198"/>
-          </a:solidFill>
-          <a:ln xmlns:a="http://schemas.openxmlformats.org/drawingml/2006/main" w="0">
-            <a:solidFill>
-              <a:srgbClr val="A8A198"/>
-            </a:solidFill>
-            <a:prstDash val="solid"/>
-          </a:ln>
-        </p:spPr>
-        <p:txBody xmlns:a="http://schemas.openxmlformats.org/drawingml/2006/main">
-          <a:bodyPr/>
-          <a:p/>
-        </p:txBody>
-      </p:sp>
-      <p:sp>
-        <p:nvSpPr>
-          <p:cNvPr id="19" name="line-dot">
-            <a:extLst xmlns:a="http://schemas.openxmlformats.org/drawingml/2006/main">
-              <a:ext uri="{FF2B5EF4-FFF2-40B4-BE49-F238E27FC236}">
-                <a16:creationId xmlns:a16="http://schemas.microsoft.com/office/drawing/2014/main" id="{407B3455-6FBF-4332-9E98-6AE73C70964E}"/>
-              </a:ext>
-            </a:extLst>
-          </p:cNvPr>
-          <p:cNvSpPr>
-            <a:spLocks xmlns:a="http://schemas.openxmlformats.org/drawingml/2006/main" noGrp="1"/>
-          </p:cNvSpPr>
-          <p:nvPr/>
-        </p:nvSpPr>
-        <p:spPr>
-          <a:xfrm xmlns:a="http://schemas.openxmlformats.org/drawingml/2006/main">
-            <a:off x="8077200" y="3046095"/>
-            <a:ext cx="19050" cy="19050"/>
-          </a:xfrm>
-          <a:prstGeom xmlns:a="http://schemas.openxmlformats.org/drawingml/2006/main" prst="rect">
-            <a:avLst/>
-          </a:prstGeom>
-          <a:solidFill xmlns:a="http://schemas.openxmlformats.org/drawingml/2006/main">
-            <a:srgbClr val="A8A198"/>
-          </a:solidFill>
-          <a:ln xmlns:a="http://schemas.openxmlformats.org/drawingml/2006/main" w="0">
-            <a:solidFill>
-              <a:srgbClr val="A8A198"/>
-            </a:solidFill>
-            <a:prstDash val="solid"/>
-          </a:ln>
-        </p:spPr>
-        <p:txBody xmlns:a="http://schemas.openxmlformats.org/drawingml/2006/main">
-          <a:bodyPr/>
-          <a:p/>
-        </p:txBody>
-      </p:sp>
-      <p:sp>
-        <p:nvSpPr>
-          <p:cNvPr id="20" name="line-dot">
-            <a:extLst xmlns:a="http://schemas.openxmlformats.org/drawingml/2006/main">
-              <a:ext uri="{FF2B5EF4-FFF2-40B4-BE49-F238E27FC236}">
-                <a16:creationId xmlns:a16="http://schemas.microsoft.com/office/drawing/2014/main" id="{02DFFD38-96C3-449C-8054-96BBF06735BB}"/>
-              </a:ext>
-            </a:extLst>
-          </p:cNvPr>
-          <p:cNvSpPr>
-            <a:spLocks xmlns:a="http://schemas.openxmlformats.org/drawingml/2006/main" noGrp="1"/>
-          </p:cNvSpPr>
-          <p:nvPr/>
-        </p:nvSpPr>
-        <p:spPr>
-          <a:xfrm xmlns:a="http://schemas.openxmlformats.org/drawingml/2006/main">
-            <a:off x="7996238" y="3120390"/>
-            <a:ext cx="19050" cy="19050"/>
-          </a:xfrm>
-          <a:prstGeom xmlns:a="http://schemas.openxmlformats.org/drawingml/2006/main" prst="rect">
-            <a:avLst/>
-          </a:prstGeom>
-          <a:solidFill xmlns:a="http://schemas.openxmlformats.org/drawingml/2006/main">
-            <a:srgbClr val="A8A198"/>
-          </a:solidFill>
-          <a:ln xmlns:a="http://schemas.openxmlformats.org/drawingml/2006/main" w="0">
-            <a:solidFill>
-              <a:srgbClr val="A8A198"/>
-            </a:solidFill>
-            <a:prstDash val="solid"/>
-          </a:ln>
-        </p:spPr>
-        <p:txBody xmlns:a="http://schemas.openxmlformats.org/drawingml/2006/main">
-          <a:bodyPr/>
-          <a:p/>
-        </p:txBody>
-      </p:sp>
-      <p:sp>
-        <p:nvSpPr>
-          <p:cNvPr id="21" name="line-dot">
-            <a:extLst xmlns:a="http://schemas.openxmlformats.org/drawingml/2006/main">
-              <a:ext uri="{FF2B5EF4-FFF2-40B4-BE49-F238E27FC236}">
-                <a16:creationId xmlns:a16="http://schemas.microsoft.com/office/drawing/2014/main" id="{54FB0952-E849-4F7F-8180-C1DC6E8C4F81}"/>
-              </a:ext>
-            </a:extLst>
-          </p:cNvPr>
-          <p:cNvSpPr>
-            <a:spLocks xmlns:a="http://schemas.openxmlformats.org/drawingml/2006/main" noGrp="1"/>
-          </p:cNvSpPr>
-          <p:nvPr/>
-        </p:nvSpPr>
-        <p:spPr>
-          <a:xfrm xmlns:a="http://schemas.openxmlformats.org/drawingml/2006/main">
-            <a:off x="7915275" y="3194685"/>
-            <a:ext cx="19050" cy="19050"/>
-          </a:xfrm>
-          <a:prstGeom xmlns:a="http://schemas.openxmlformats.org/drawingml/2006/main" prst="rect">
-            <a:avLst/>
-          </a:prstGeom>
-          <a:solidFill xmlns:a="http://schemas.openxmlformats.org/drawingml/2006/main">
-            <a:srgbClr val="A8A198"/>
-          </a:solidFill>
-          <a:ln xmlns:a="http://schemas.openxmlformats.org/drawingml/2006/main" w="0">
-            <a:solidFill>
-              <a:srgbClr val="A8A198"/>
-            </a:solidFill>
-            <a:prstDash val="solid"/>
-          </a:ln>
-        </p:spPr>
-        <p:txBody xmlns:a="http://schemas.openxmlformats.org/drawingml/2006/main">
-          <a:bodyPr/>
-          <a:p/>
-        </p:txBody>
-      </p:sp>
-      <p:sp>
-        <p:nvSpPr>
-          <p:cNvPr id="22" name="line-dot">
-            <a:extLst xmlns:a="http://schemas.openxmlformats.org/drawingml/2006/main">
-              <a:ext uri="{FF2B5EF4-FFF2-40B4-BE49-F238E27FC236}">
-                <a16:creationId xmlns:a16="http://schemas.microsoft.com/office/drawing/2014/main" id="{09E37FDF-2E46-45D0-8FDA-92EBDD19B1B8}"/>
-              </a:ext>
-            </a:extLst>
-          </p:cNvPr>
-          <p:cNvSpPr>
-            <a:spLocks xmlns:a="http://schemas.openxmlformats.org/drawingml/2006/main" noGrp="1"/>
-          </p:cNvSpPr>
-          <p:nvPr/>
-        </p:nvSpPr>
-        <p:spPr>
-          <a:xfrm xmlns:a="http://schemas.openxmlformats.org/drawingml/2006/main">
-            <a:off x="7834313" y="3268980"/>
-            <a:ext cx="19050" cy="19050"/>
-          </a:xfrm>
-          <a:prstGeom xmlns:a="http://schemas.openxmlformats.org/drawingml/2006/main" prst="rect">
-            <a:avLst/>
-          </a:prstGeom>
-          <a:solidFill xmlns:a="http://schemas.openxmlformats.org/drawingml/2006/main">
-            <a:srgbClr val="A8A198"/>
-          </a:solidFill>
-          <a:ln xmlns:a="http://schemas.openxmlformats.org/drawingml/2006/main" w="0">
-            <a:solidFill>
-              <a:srgbClr val="A8A198"/>
-            </a:solidFill>
-            <a:prstDash val="solid"/>
-          </a:ln>
-        </p:spPr>
-        <p:txBody xmlns:a="http://schemas.openxmlformats.org/drawingml/2006/main">
-          <a:bodyPr/>
-          <a:p/>
-        </p:txBody>
-      </p:sp>
-      <p:sp>
-        <p:nvSpPr>
-          <p:cNvPr id="23" name="line-dot">
-            <a:extLst xmlns:a="http://schemas.openxmlformats.org/drawingml/2006/main">
-              <a:ext uri="{FF2B5EF4-FFF2-40B4-BE49-F238E27FC236}">
-                <a16:creationId xmlns:a16="http://schemas.microsoft.com/office/drawing/2014/main" id="{AF152DD7-86C2-465D-9FAE-607A706304A4}"/>
-              </a:ext>
-            </a:extLst>
-          </p:cNvPr>
-          <p:cNvSpPr>
-            <a:spLocks xmlns:a="http://schemas.openxmlformats.org/drawingml/2006/main" noGrp="1"/>
-          </p:cNvSpPr>
-          <p:nvPr/>
-        </p:nvSpPr>
-        <p:spPr>
-          <a:xfrm xmlns:a="http://schemas.openxmlformats.org/drawingml/2006/main">
-            <a:off x="7753350" y="3343275"/>
-            <a:ext cx="19050" cy="19050"/>
-          </a:xfrm>
-          <a:prstGeom xmlns:a="http://schemas.openxmlformats.org/drawingml/2006/main" prst="rect">
-            <a:avLst/>
-          </a:prstGeom>
-          <a:solidFill xmlns:a="http://schemas.openxmlformats.org/drawingml/2006/main">
-            <a:srgbClr val="A8A198"/>
-          </a:solidFill>
-          <a:ln xmlns:a="http://schemas.openxmlformats.org/drawingml/2006/main" w="0">
-            <a:solidFill>
-              <a:srgbClr val="A8A198"/>
-            </a:solidFill>
-            <a:prstDash val="solid"/>
-          </a:ln>
-        </p:spPr>
-        <p:txBody xmlns:a="http://schemas.openxmlformats.org/drawingml/2006/main">
-          <a:bodyPr/>
-          <a:p/>
-        </p:txBody>
-      </p:sp>
-      <p:sp>
-        <p:nvSpPr>
-          <p:cNvPr id="24" name="line-dot">
-            <a:extLst xmlns:a="http://schemas.openxmlformats.org/drawingml/2006/main">
-              <a:ext uri="{FF2B5EF4-FFF2-40B4-BE49-F238E27FC236}">
-                <a16:creationId xmlns:a16="http://schemas.microsoft.com/office/drawing/2014/main" id="{157EA86C-DA4D-490B-BD5E-AD5D9C03F811}"/>
-              </a:ext>
-            </a:extLst>
-          </p:cNvPr>
-          <p:cNvSpPr>
-            <a:spLocks xmlns:a="http://schemas.openxmlformats.org/drawingml/2006/main" noGrp="1"/>
-          </p:cNvSpPr>
-          <p:nvPr/>
-        </p:nvSpPr>
-        <p:spPr>
-          <a:xfrm xmlns:a="http://schemas.openxmlformats.org/drawingml/2006/main">
-            <a:off x="8601075" y="2600325"/>
-            <a:ext cx="19050" cy="19050"/>
-          </a:xfrm>
-          <a:prstGeom xmlns:a="http://schemas.openxmlformats.org/drawingml/2006/main" prst="rect">
-            <a:avLst/>
-          </a:prstGeom>
-          <a:solidFill xmlns:a="http://schemas.openxmlformats.org/drawingml/2006/main">
-            <a:srgbClr val="A8A198"/>
-          </a:solidFill>
-          <a:ln xmlns:a="http://schemas.openxmlformats.org/drawingml/2006/main" w="0">
-            <a:solidFill>
-              <a:srgbClr val="A8A198"/>
-            </a:solidFill>
-            <a:prstDash val="solid"/>
-          </a:ln>
-        </p:spPr>
-        <p:txBody xmlns:a="http://schemas.openxmlformats.org/drawingml/2006/main">
-          <a:bodyPr/>
-          <a:p/>
-        </p:txBody>
-      </p:sp>
-      <p:sp>
-        <p:nvSpPr>
-          <p:cNvPr id="25" name="line-dot">
-            <a:extLst xmlns:a="http://schemas.openxmlformats.org/drawingml/2006/main">
-              <a:ext uri="{FF2B5EF4-FFF2-40B4-BE49-F238E27FC236}">
-                <a16:creationId xmlns:a16="http://schemas.microsoft.com/office/drawing/2014/main" id="{8BB92EDE-F7FF-4B5A-9ADF-E0B6CA3E09C1}"/>
-              </a:ext>
-            </a:extLst>
-          </p:cNvPr>
-          <p:cNvSpPr>
-            <a:spLocks xmlns:a="http://schemas.openxmlformats.org/drawingml/2006/main" noGrp="1"/>
-          </p:cNvSpPr>
-          <p:nvPr/>
-        </p:nvSpPr>
-        <p:spPr>
-          <a:xfrm xmlns:a="http://schemas.openxmlformats.org/drawingml/2006/main">
-            <a:off x="8717280" y="2674620"/>
-            <a:ext cx="19050" cy="19050"/>
-          </a:xfrm>
-          <a:prstGeom xmlns:a="http://schemas.openxmlformats.org/drawingml/2006/main" prst="rect">
-            <a:avLst/>
-          </a:prstGeom>
-          <a:solidFill xmlns:a="http://schemas.openxmlformats.org/drawingml/2006/main">
-            <a:srgbClr val="A8A198"/>
-          </a:solidFill>
-          <a:ln xmlns:a="http://schemas.openxmlformats.org/drawingml/2006/main" w="0">
-            <a:solidFill>
-              <a:srgbClr val="A8A198"/>
-            </a:solidFill>
-            <a:prstDash val="solid"/>
-          </a:ln>
-        </p:spPr>
-        <p:txBody xmlns:a="http://schemas.openxmlformats.org/drawingml/2006/main">
-          <a:bodyPr/>
-          <a:p/>
-        </p:txBody>
-      </p:sp>
-      <p:sp>
-        <p:nvSpPr>
-          <p:cNvPr id="26" name="line-dot">
-            <a:extLst xmlns:a="http://schemas.openxmlformats.org/drawingml/2006/main">
-              <a:ext uri="{FF2B5EF4-FFF2-40B4-BE49-F238E27FC236}">
-                <a16:creationId xmlns:a16="http://schemas.microsoft.com/office/drawing/2014/main" id="{F306B834-C989-4D02-956A-FF4BD6D8F260}"/>
-              </a:ext>
-            </a:extLst>
-          </p:cNvPr>
-          <p:cNvSpPr>
-            <a:spLocks xmlns:a="http://schemas.openxmlformats.org/drawingml/2006/main" noGrp="1"/>
-          </p:cNvSpPr>
-          <p:nvPr/>
-        </p:nvSpPr>
-        <p:spPr>
-          <a:xfrm xmlns:a="http://schemas.openxmlformats.org/drawingml/2006/main">
-            <a:off x="8833485" y="2748915"/>
-            <a:ext cx="19050" cy="19050"/>
-          </a:xfrm>
-          <a:prstGeom xmlns:a="http://schemas.openxmlformats.org/drawingml/2006/main" prst="rect">
-            <a:avLst/>
-          </a:prstGeom>
-          <a:solidFill xmlns:a="http://schemas.openxmlformats.org/drawingml/2006/main">
-            <a:srgbClr val="A8A198"/>
-          </a:solidFill>
-          <a:ln xmlns:a="http://schemas.openxmlformats.org/drawingml/2006/main" w="0">
-            <a:solidFill>
-              <a:srgbClr val="A8A198"/>
-            </a:solidFill>
-            <a:prstDash val="solid"/>
-          </a:ln>
-        </p:spPr>
-        <p:txBody xmlns:a="http://schemas.openxmlformats.org/drawingml/2006/main">
-          <a:bodyPr/>
-          <a:p/>
-        </p:txBody>
-      </p:sp>
-      <p:sp>
-        <p:nvSpPr>
-          <p:cNvPr id="27" name="line-dot">
-            <a:extLst xmlns:a="http://schemas.openxmlformats.org/drawingml/2006/main">
-              <a:ext uri="{FF2B5EF4-FFF2-40B4-BE49-F238E27FC236}">
-                <a16:creationId xmlns:a16="http://schemas.microsoft.com/office/drawing/2014/main" id="{905AFD4D-DBD5-4A9C-8E31-66383886F952}"/>
-              </a:ext>
-            </a:extLst>
-          </p:cNvPr>
-          <p:cNvSpPr>
-            <a:spLocks xmlns:a="http://schemas.openxmlformats.org/drawingml/2006/main" noGrp="1"/>
-          </p:cNvSpPr>
-          <p:nvPr/>
-        </p:nvSpPr>
-        <p:spPr>
-          <a:xfrm xmlns:a="http://schemas.openxmlformats.org/drawingml/2006/main">
-            <a:off x="8949690" y="2823210"/>
-            <a:ext cx="19050" cy="19050"/>
-          </a:xfrm>
-          <a:prstGeom xmlns:a="http://schemas.openxmlformats.org/drawingml/2006/main" prst="rect">
-            <a:avLst/>
-          </a:prstGeom>
-          <a:solidFill xmlns:a="http://schemas.openxmlformats.org/drawingml/2006/main">
-            <a:srgbClr val="A8A198"/>
-          </a:solidFill>
-          <a:ln xmlns:a="http://schemas.openxmlformats.org/drawingml/2006/main" w="0">
-            <a:solidFill>
-              <a:srgbClr val="A8A198"/>
-            </a:solidFill>
-            <a:prstDash val="solid"/>
-          </a:ln>
-        </p:spPr>
-        <p:txBody xmlns:a="http://schemas.openxmlformats.org/drawingml/2006/main">
-          <a:bodyPr/>
-          <a:p/>
-        </p:txBody>
-      </p:sp>
-      <p:sp>
-        <p:nvSpPr>
-          <p:cNvPr id="28" name="line-dot">
-            <a:extLst xmlns:a="http://schemas.openxmlformats.org/drawingml/2006/main">
-              <a:ext uri="{FF2B5EF4-FFF2-40B4-BE49-F238E27FC236}">
-                <a16:creationId xmlns:a16="http://schemas.microsoft.com/office/drawing/2014/main" id="{FA9C99D4-18F5-4007-996D-79CE670543E1}"/>
-              </a:ext>
-            </a:extLst>
-          </p:cNvPr>
-          <p:cNvSpPr>
-            <a:spLocks xmlns:a="http://schemas.openxmlformats.org/drawingml/2006/main" noGrp="1"/>
-          </p:cNvSpPr>
-          <p:nvPr/>
-        </p:nvSpPr>
-        <p:spPr>
-          <a:xfrm xmlns:a="http://schemas.openxmlformats.org/drawingml/2006/main">
-            <a:off x="9065895" y="2897505"/>
-            <a:ext cx="19050" cy="19050"/>
-          </a:xfrm>
-          <a:prstGeom xmlns:a="http://schemas.openxmlformats.org/drawingml/2006/main" prst="rect">
-            <a:avLst/>
-          </a:prstGeom>
-          <a:solidFill xmlns:a="http://schemas.openxmlformats.org/drawingml/2006/main">
-            <a:srgbClr val="A8A198"/>
-          </a:solidFill>
-          <a:ln xmlns:a="http://schemas.openxmlformats.org/drawingml/2006/main" w="0">
-            <a:solidFill>
-              <a:srgbClr val="A8A198"/>
-            </a:solidFill>
-            <a:prstDash val="solid"/>
-          </a:ln>
-        </p:spPr>
-        <p:txBody xmlns:a="http://schemas.openxmlformats.org/drawingml/2006/main">
-          <a:bodyPr/>
-          <a:p/>
-        </p:txBody>
-      </p:sp>
-      <p:sp>
-        <p:nvSpPr>
-          <p:cNvPr id="29" name="line-dot">
-            <a:extLst xmlns:a="http://schemas.openxmlformats.org/drawingml/2006/main">
-              <a:ext uri="{FF2B5EF4-FFF2-40B4-BE49-F238E27FC236}">
-                <a16:creationId xmlns:a16="http://schemas.microsoft.com/office/drawing/2014/main" id="{EF930B97-C7AA-4FEC-BAC4-587065D00667}"/>
-              </a:ext>
-            </a:extLst>
-          </p:cNvPr>
-          <p:cNvSpPr>
-            <a:spLocks xmlns:a="http://schemas.openxmlformats.org/drawingml/2006/main" noGrp="1"/>
-          </p:cNvSpPr>
-          <p:nvPr/>
-        </p:nvSpPr>
-        <p:spPr>
-          <a:xfrm xmlns:a="http://schemas.openxmlformats.org/drawingml/2006/main">
-            <a:off x="9182100" y="2971800"/>
-            <a:ext cx="19050" cy="19050"/>
-          </a:xfrm>
-          <a:prstGeom xmlns:a="http://schemas.openxmlformats.org/drawingml/2006/main" prst="rect">
-            <a:avLst/>
-          </a:prstGeom>
-          <a:solidFill xmlns:a="http://schemas.openxmlformats.org/drawingml/2006/main">
-            <a:srgbClr val="A8A198"/>
-          </a:solidFill>
-          <a:ln xmlns:a="http://schemas.openxmlformats.org/drawingml/2006/main" w="0">
-            <a:solidFill>
-              <a:srgbClr val="A8A198"/>
-            </a:solidFill>
-            <a:prstDash val="solid"/>
-          </a:ln>
-        </p:spPr>
-        <p:txBody xmlns:a="http://schemas.openxmlformats.org/drawingml/2006/main">
-          <a:bodyPr/>
-          <a:p/>
-        </p:txBody>
-      </p:sp>
-      <p:sp>
-        <p:nvSpPr>
-          <p:cNvPr id="30" name="line-dot">
-            <a:extLst xmlns:a="http://schemas.openxmlformats.org/drawingml/2006/main">
-              <a:ext uri="{FF2B5EF4-FFF2-40B4-BE49-F238E27FC236}">
-                <a16:creationId xmlns:a16="http://schemas.microsoft.com/office/drawing/2014/main" id="{6DEF6F5D-721E-44C8-A4A1-75D03FE0A6C5}"/>
-              </a:ext>
-            </a:extLst>
-          </p:cNvPr>
-          <p:cNvSpPr>
-            <a:spLocks xmlns:a="http://schemas.openxmlformats.org/drawingml/2006/main" noGrp="1"/>
-          </p:cNvSpPr>
-          <p:nvPr/>
-        </p:nvSpPr>
-        <p:spPr>
-          <a:xfrm xmlns:a="http://schemas.openxmlformats.org/drawingml/2006/main">
-            <a:off x="9298305" y="3046095"/>
-            <a:ext cx="19050" cy="19050"/>
-          </a:xfrm>
-          <a:prstGeom xmlns:a="http://schemas.openxmlformats.org/drawingml/2006/main" prst="rect">
-            <a:avLst/>
-          </a:prstGeom>
-          <a:solidFill xmlns:a="http://schemas.openxmlformats.org/drawingml/2006/main">
-            <a:srgbClr val="A8A198"/>
-          </a:solidFill>
-          <a:ln xmlns:a="http://schemas.openxmlformats.org/drawingml/2006/main" w="0">
-            <a:solidFill>
-              <a:srgbClr val="A8A198"/>
-            </a:solidFill>
-            <a:prstDash val="solid"/>
-          </a:ln>
-        </p:spPr>
-        <p:txBody xmlns:a="http://schemas.openxmlformats.org/drawingml/2006/main">
-          <a:bodyPr/>
-          <a:p/>
-        </p:txBody>
-      </p:sp>
-      <p:sp>
-        <p:nvSpPr>
-          <p:cNvPr id="31" name="line-dot">
-            <a:extLst xmlns:a="http://schemas.openxmlformats.org/drawingml/2006/main">
-              <a:ext uri="{FF2B5EF4-FFF2-40B4-BE49-F238E27FC236}">
-                <a16:creationId xmlns:a16="http://schemas.microsoft.com/office/drawing/2014/main" id="{F49B7CE8-87F7-4301-8244-9AF4C87B1528}"/>
-              </a:ext>
-            </a:extLst>
-          </p:cNvPr>
-          <p:cNvSpPr>
-            <a:spLocks xmlns:a="http://schemas.openxmlformats.org/drawingml/2006/main" noGrp="1"/>
-          </p:cNvSpPr>
-          <p:nvPr/>
-        </p:nvSpPr>
-        <p:spPr>
-          <a:xfrm xmlns:a="http://schemas.openxmlformats.org/drawingml/2006/main">
-            <a:off x="9414510" y="3120390"/>
-            <a:ext cx="19050" cy="19050"/>
-          </a:xfrm>
-          <a:prstGeom xmlns:a="http://schemas.openxmlformats.org/drawingml/2006/main" prst="rect">
-            <a:avLst/>
-          </a:prstGeom>
-          <a:solidFill xmlns:a="http://schemas.openxmlformats.org/drawingml/2006/main">
-            <a:srgbClr val="A8A198"/>
-          </a:solidFill>
-          <a:ln xmlns:a="http://schemas.openxmlformats.org/drawingml/2006/main" w="0">
-            <a:solidFill>
-              <a:srgbClr val="A8A198"/>
-            </a:solidFill>
-            <a:prstDash val="solid"/>
-          </a:ln>
-        </p:spPr>
-        <p:txBody xmlns:a="http://schemas.openxmlformats.org/drawingml/2006/main">
-          <a:bodyPr/>
-          <a:p/>
-        </p:txBody>
-      </p:sp>
-      <p:sp>
-        <p:nvSpPr>
-          <p:cNvPr id="32" name="line-dot">
-            <a:extLst xmlns:a="http://schemas.openxmlformats.org/drawingml/2006/main">
-              <a:ext uri="{FF2B5EF4-FFF2-40B4-BE49-F238E27FC236}">
-                <a16:creationId xmlns:a16="http://schemas.microsoft.com/office/drawing/2014/main" id="{22D5FF59-6621-433D-95C0-F4293FD42F99}"/>
-              </a:ext>
-            </a:extLst>
-          </p:cNvPr>
-          <p:cNvSpPr>
-            <a:spLocks xmlns:a="http://schemas.openxmlformats.org/drawingml/2006/main" noGrp="1"/>
-          </p:cNvSpPr>
-          <p:nvPr/>
-        </p:nvSpPr>
-        <p:spPr>
-          <a:xfrm xmlns:a="http://schemas.openxmlformats.org/drawingml/2006/main">
-            <a:off x="9530715" y="3194685"/>
-            <a:ext cx="19050" cy="19050"/>
-          </a:xfrm>
-          <a:prstGeom xmlns:a="http://schemas.openxmlformats.org/drawingml/2006/main" prst="rect">
-            <a:avLst/>
-          </a:prstGeom>
-          <a:solidFill xmlns:a="http://schemas.openxmlformats.org/drawingml/2006/main">
-            <a:srgbClr val="A8A198"/>
-          </a:solidFill>
-          <a:ln xmlns:a="http://schemas.openxmlformats.org/drawingml/2006/main" w="0">
-            <a:solidFill>
-              <a:srgbClr val="A8A198"/>
-            </a:solidFill>
-            <a:prstDash val="solid"/>
-          </a:ln>
-        </p:spPr>
-        <p:txBody xmlns:a="http://schemas.openxmlformats.org/drawingml/2006/main">
-          <a:bodyPr/>
-          <a:p/>
-        </p:txBody>
-      </p:sp>
-      <p:sp>
-        <p:nvSpPr>
-          <p:cNvPr id="33" name="line-dot">
-            <a:extLst xmlns:a="http://schemas.openxmlformats.org/drawingml/2006/main">
-              <a:ext uri="{FF2B5EF4-FFF2-40B4-BE49-F238E27FC236}">
-                <a16:creationId xmlns:a16="http://schemas.microsoft.com/office/drawing/2014/main" id="{F48ECD5C-5511-47AD-A88F-A0C2FAA346A9}"/>
-              </a:ext>
-            </a:extLst>
-          </p:cNvPr>
-          <p:cNvSpPr>
-            <a:spLocks xmlns:a="http://schemas.openxmlformats.org/drawingml/2006/main" noGrp="1"/>
-          </p:cNvSpPr>
-          <p:nvPr/>
-        </p:nvSpPr>
-        <p:spPr>
-          <a:xfrm xmlns:a="http://schemas.openxmlformats.org/drawingml/2006/main">
-            <a:off x="9646920" y="3268980"/>
-            <a:ext cx="19050" cy="19050"/>
-          </a:xfrm>
-          <a:prstGeom xmlns:a="http://schemas.openxmlformats.org/drawingml/2006/main" prst="rect">
-            <a:avLst/>
-          </a:prstGeom>
-          <a:solidFill xmlns:a="http://schemas.openxmlformats.org/drawingml/2006/main">
-            <a:srgbClr val="A8A198"/>
-          </a:solidFill>
-          <a:ln xmlns:a="http://schemas.openxmlformats.org/drawingml/2006/main" w="0">
-            <a:solidFill>
-              <a:srgbClr val="A8A198"/>
-            </a:solidFill>
-            <a:prstDash val="solid"/>
-          </a:ln>
-        </p:spPr>
-        <p:txBody xmlns:a="http://schemas.openxmlformats.org/drawingml/2006/main">
-          <a:bodyPr/>
-          <a:p/>
-        </p:txBody>
-      </p:sp>
-      <p:sp>
-        <p:nvSpPr>
-          <p:cNvPr id="34" name="line-dot">
-            <a:extLst xmlns:a="http://schemas.openxmlformats.org/drawingml/2006/main">
-              <a:ext uri="{FF2B5EF4-FFF2-40B4-BE49-F238E27FC236}">
-                <a16:creationId xmlns:a16="http://schemas.microsoft.com/office/drawing/2014/main" id="{493D3EBE-8363-4D67-91BA-E34DE26EC876}"/>
-              </a:ext>
-            </a:extLst>
-          </p:cNvPr>
-          <p:cNvSpPr>
-            <a:spLocks xmlns:a="http://schemas.openxmlformats.org/drawingml/2006/main" noGrp="1"/>
-          </p:cNvSpPr>
-          <p:nvPr/>
-        </p:nvSpPr>
-        <p:spPr>
-          <a:xfrm xmlns:a="http://schemas.openxmlformats.org/drawingml/2006/main">
-            <a:off x="9763125" y="3343275"/>
-            <a:ext cx="19050" cy="19050"/>
-          </a:xfrm>
-          <a:prstGeom xmlns:a="http://schemas.openxmlformats.org/drawingml/2006/main" prst="rect">
-            <a:avLst/>
-          </a:prstGeom>
-          <a:solidFill xmlns:a="http://schemas.openxmlformats.org/drawingml/2006/main">
-            <a:srgbClr val="A8A198"/>
-          </a:solidFill>
-          <a:ln xmlns:a="http://schemas.openxmlformats.org/drawingml/2006/main" w="0">
-            <a:solidFill>
-              <a:srgbClr val="A8A198"/>
-            </a:solidFill>
-            <a:prstDash val="solid"/>
-          </a:ln>
-        </p:spPr>
-        <p:txBody xmlns:a="http://schemas.openxmlformats.org/drawingml/2006/main">
-          <a:bodyPr/>
-          <a:p/>
-        </p:txBody>
-      </p:sp>
-      <p:sp>
-        <p:nvSpPr>
-          <p:cNvPr id="35" name="line-dot">
-            <a:extLst xmlns:a="http://schemas.openxmlformats.org/drawingml/2006/main">
-              <a:ext uri="{FF2B5EF4-FFF2-40B4-BE49-F238E27FC236}">
-                <a16:creationId xmlns:a16="http://schemas.microsoft.com/office/drawing/2014/main" id="{F5329BA2-95B6-4C77-A84B-239F2D21AFB8}"/>
-              </a:ext>
-            </a:extLst>
-          </p:cNvPr>
-          <p:cNvSpPr>
-            <a:spLocks xmlns:a="http://schemas.openxmlformats.org/drawingml/2006/main" noGrp="1"/>
-          </p:cNvSpPr>
-          <p:nvPr/>
-        </p:nvSpPr>
-        <p:spPr>
-          <a:xfrm xmlns:a="http://schemas.openxmlformats.org/drawingml/2006/main">
-            <a:off x="9753600" y="3762375"/>
-            <a:ext cx="19050" cy="19050"/>
-          </a:xfrm>
-          <a:prstGeom xmlns:a="http://schemas.openxmlformats.org/drawingml/2006/main" prst="rect">
-            <a:avLst/>
-          </a:prstGeom>
-          <a:solidFill xmlns:a="http://schemas.openxmlformats.org/drawingml/2006/main">
-            <a:srgbClr val="A8A198"/>
-          </a:solidFill>
-          <a:ln xmlns:a="http://schemas.openxmlformats.org/drawingml/2006/main" w="0">
-            <a:solidFill>
-              <a:srgbClr val="A8A198"/>
-            </a:solidFill>
-            <a:prstDash val="solid"/>
-          </a:ln>
-        </p:spPr>
-        <p:txBody xmlns:a="http://schemas.openxmlformats.org/drawingml/2006/main">
-          <a:bodyPr/>
-          <a:p/>
-        </p:txBody>
-      </p:sp>
-      <p:sp>
-        <p:nvSpPr>
-          <p:cNvPr id="36" name="line-dot">
-            <a:extLst xmlns:a="http://schemas.openxmlformats.org/drawingml/2006/main">
-              <a:ext uri="{FF2B5EF4-FFF2-40B4-BE49-F238E27FC236}">
-                <a16:creationId xmlns:a16="http://schemas.microsoft.com/office/drawing/2014/main" id="{40686BC1-EB1B-4D10-B58E-FBE6C4CCED28}"/>
-              </a:ext>
-            </a:extLst>
-          </p:cNvPr>
-          <p:cNvSpPr>
-            <a:spLocks xmlns:a="http://schemas.openxmlformats.org/drawingml/2006/main" noGrp="1"/>
-          </p:cNvSpPr>
-          <p:nvPr/>
-        </p:nvSpPr>
-        <p:spPr>
-          <a:xfrm xmlns:a="http://schemas.openxmlformats.org/drawingml/2006/main">
-            <a:off x="9655493" y="3838575"/>
-            <a:ext cx="19050" cy="19050"/>
-          </a:xfrm>
-          <a:prstGeom xmlns:a="http://schemas.openxmlformats.org/drawingml/2006/main" prst="rect">
-            <a:avLst/>
-          </a:prstGeom>
-          <a:solidFill xmlns:a="http://schemas.openxmlformats.org/drawingml/2006/main">
-            <a:srgbClr val="A8A198"/>
-          </a:solidFill>
-          <a:ln xmlns:a="http://schemas.openxmlformats.org/drawingml/2006/main" w="0">
-            <a:solidFill>
-              <a:srgbClr val="A8A198"/>
-            </a:solidFill>
-            <a:prstDash val="solid"/>
-          </a:ln>
-        </p:spPr>
-        <p:txBody xmlns:a="http://schemas.openxmlformats.org/drawingml/2006/main">
-          <a:bodyPr/>
-          <a:p/>
-        </p:txBody>
-      </p:sp>
-      <p:sp>
-        <p:nvSpPr>
-          <p:cNvPr id="37" name="line-dot">
-            <a:extLst xmlns:a="http://schemas.openxmlformats.org/drawingml/2006/main">
-              <a:ext uri="{FF2B5EF4-FFF2-40B4-BE49-F238E27FC236}">
-                <a16:creationId xmlns:a16="http://schemas.microsoft.com/office/drawing/2014/main" id="{25BD9A20-990B-4A8E-8CD2-70BE06300F29}"/>
-              </a:ext>
-            </a:extLst>
-          </p:cNvPr>
-          <p:cNvSpPr>
-            <a:spLocks xmlns:a="http://schemas.openxmlformats.org/drawingml/2006/main" noGrp="1"/>
-          </p:cNvSpPr>
-          <p:nvPr/>
-        </p:nvSpPr>
-        <p:spPr>
-          <a:xfrm xmlns:a="http://schemas.openxmlformats.org/drawingml/2006/main">
-            <a:off x="9557385" y="3914775"/>
-            <a:ext cx="19050" cy="19050"/>
-          </a:xfrm>
-          <a:prstGeom xmlns:a="http://schemas.openxmlformats.org/drawingml/2006/main" prst="rect">
-            <a:avLst/>
-          </a:prstGeom>
-          <a:solidFill xmlns:a="http://schemas.openxmlformats.org/drawingml/2006/main">
-            <a:srgbClr val="A8A198"/>
-          </a:solidFill>
-          <a:ln xmlns:a="http://schemas.openxmlformats.org/drawingml/2006/main" w="0">
-            <a:solidFill>
-              <a:srgbClr val="A8A198"/>
-            </a:solidFill>
-            <a:prstDash val="solid"/>
-          </a:ln>
-        </p:spPr>
-        <p:txBody xmlns:a="http://schemas.openxmlformats.org/drawingml/2006/main">
-          <a:bodyPr/>
-          <a:p/>
-        </p:txBody>
-      </p:sp>
-      <p:sp>
-        <p:nvSpPr>
-          <p:cNvPr id="38" name="line-dot">
-            <a:extLst xmlns:a="http://schemas.openxmlformats.org/drawingml/2006/main">
-              <a:ext uri="{FF2B5EF4-FFF2-40B4-BE49-F238E27FC236}">
-                <a16:creationId xmlns:a16="http://schemas.microsoft.com/office/drawing/2014/main" id="{C0076225-9FCB-4807-B700-E56FED80CFB0}"/>
-              </a:ext>
-            </a:extLst>
-          </p:cNvPr>
-          <p:cNvSpPr>
-            <a:spLocks xmlns:a="http://schemas.openxmlformats.org/drawingml/2006/main" noGrp="1"/>
-          </p:cNvSpPr>
-          <p:nvPr/>
-        </p:nvSpPr>
-        <p:spPr>
-          <a:xfrm xmlns:a="http://schemas.openxmlformats.org/drawingml/2006/main">
-            <a:off x="9459278" y="3990975"/>
-            <a:ext cx="19050" cy="19050"/>
-          </a:xfrm>
-          <a:prstGeom xmlns:a="http://schemas.openxmlformats.org/drawingml/2006/main" prst="rect">
-            <a:avLst/>
-          </a:prstGeom>
-          <a:solidFill xmlns:a="http://schemas.openxmlformats.org/drawingml/2006/main">
-            <a:srgbClr val="A8A198"/>
-          </a:solidFill>
-          <a:ln xmlns:a="http://schemas.openxmlformats.org/drawingml/2006/main" w="0">
-            <a:solidFill>
-              <a:srgbClr val="A8A198"/>
-            </a:solidFill>
-            <a:prstDash val="solid"/>
-          </a:ln>
-        </p:spPr>
-        <p:txBody xmlns:a="http://schemas.openxmlformats.org/drawingml/2006/main">
-          <a:bodyPr/>
-          <a:p/>
-        </p:txBody>
-      </p:sp>
-      <p:sp>
-        <p:nvSpPr>
-          <p:cNvPr id="39" name="line-dot">
-            <a:extLst xmlns:a="http://schemas.openxmlformats.org/drawingml/2006/main">
-              <a:ext uri="{FF2B5EF4-FFF2-40B4-BE49-F238E27FC236}">
-                <a16:creationId xmlns:a16="http://schemas.microsoft.com/office/drawing/2014/main" id="{E9D0EFA6-6925-4EA9-9AEF-D3EB409F9E67}"/>
-              </a:ext>
-            </a:extLst>
-          </p:cNvPr>
-          <p:cNvSpPr>
-            <a:spLocks xmlns:a="http://schemas.openxmlformats.org/drawingml/2006/main" noGrp="1"/>
-          </p:cNvSpPr>
-          <p:nvPr/>
-        </p:nvSpPr>
-        <p:spPr>
-          <a:xfrm xmlns:a="http://schemas.openxmlformats.org/drawingml/2006/main">
-            <a:off x="9361170" y="4067175"/>
-            <a:ext cx="19050" cy="19050"/>
-          </a:xfrm>
-          <a:prstGeom xmlns:a="http://schemas.openxmlformats.org/drawingml/2006/main" prst="rect">
-            <a:avLst/>
-          </a:prstGeom>
-          <a:solidFill xmlns:a="http://schemas.openxmlformats.org/drawingml/2006/main">
-            <a:srgbClr val="A8A198"/>
-          </a:solidFill>
-          <a:ln xmlns:a="http://schemas.openxmlformats.org/drawingml/2006/main" w="0">
-            <a:solidFill>
-              <a:srgbClr val="A8A198"/>
-            </a:solidFill>
-            <a:prstDash val="solid"/>
-          </a:ln>
-        </p:spPr>
-        <p:txBody xmlns:a="http://schemas.openxmlformats.org/drawingml/2006/main">
-          <a:bodyPr/>
-          <a:p/>
-        </p:txBody>
-      </p:sp>
-      <p:sp>
-        <p:nvSpPr>
-          <p:cNvPr id="40" name="line-dot">
-            <a:extLst xmlns:a="http://schemas.openxmlformats.org/drawingml/2006/main">
-              <a:ext uri="{FF2B5EF4-FFF2-40B4-BE49-F238E27FC236}">
-                <a16:creationId xmlns:a16="http://schemas.microsoft.com/office/drawing/2014/main" id="{CF7DE798-C0C6-449F-A1E9-F2BD2FAC01E1}"/>
-              </a:ext>
-            </a:extLst>
-          </p:cNvPr>
-          <p:cNvSpPr>
-            <a:spLocks xmlns:a="http://schemas.openxmlformats.org/drawingml/2006/main" noGrp="1"/>
-          </p:cNvSpPr>
-          <p:nvPr/>
-        </p:nvSpPr>
-        <p:spPr>
-          <a:xfrm xmlns:a="http://schemas.openxmlformats.org/drawingml/2006/main">
-            <a:off x="9263063" y="4143375"/>
-            <a:ext cx="19050" cy="19050"/>
-          </a:xfrm>
-          <a:prstGeom xmlns:a="http://schemas.openxmlformats.org/drawingml/2006/main" prst="rect">
-            <a:avLst/>
-          </a:prstGeom>
-          <a:solidFill xmlns:a="http://schemas.openxmlformats.org/drawingml/2006/main">
-            <a:srgbClr val="A8A198"/>
-          </a:solidFill>
-          <a:ln xmlns:a="http://schemas.openxmlformats.org/drawingml/2006/main" w="0">
-            <a:solidFill>
-              <a:srgbClr val="A8A198"/>
-            </a:solidFill>
-            <a:prstDash val="solid"/>
-          </a:ln>
-        </p:spPr>
-        <p:txBody xmlns:a="http://schemas.openxmlformats.org/drawingml/2006/main">
-          <a:bodyPr/>
-          <a:p/>
-        </p:txBody>
-      </p:sp>
-      <p:sp>
-        <p:nvSpPr>
-          <p:cNvPr id="41" name="line-dot">
-            <a:extLst xmlns:a="http://schemas.openxmlformats.org/drawingml/2006/main">
-              <a:ext uri="{FF2B5EF4-FFF2-40B4-BE49-F238E27FC236}">
-                <a16:creationId xmlns:a16="http://schemas.microsoft.com/office/drawing/2014/main" id="{6D6DAFCB-954E-418D-A9D8-1F5F19D25BD0}"/>
-              </a:ext>
-            </a:extLst>
-          </p:cNvPr>
-          <p:cNvSpPr>
-            <a:spLocks xmlns:a="http://schemas.openxmlformats.org/drawingml/2006/main" noGrp="1"/>
-          </p:cNvSpPr>
-          <p:nvPr/>
-        </p:nvSpPr>
-        <p:spPr>
-          <a:xfrm xmlns:a="http://schemas.openxmlformats.org/drawingml/2006/main">
-            <a:off x="9164955" y="4219575"/>
-            <a:ext cx="19050" cy="19050"/>
-          </a:xfrm>
-          <a:prstGeom xmlns:a="http://schemas.openxmlformats.org/drawingml/2006/main" prst="rect">
-            <a:avLst/>
-          </a:prstGeom>
-          <a:solidFill xmlns:a="http://schemas.openxmlformats.org/drawingml/2006/main">
-            <a:srgbClr val="A8A198"/>
-          </a:solidFill>
-          <a:ln xmlns:a="http://schemas.openxmlformats.org/drawingml/2006/main" w="0">
-            <a:solidFill>
-              <a:srgbClr val="A8A198"/>
-            </a:solidFill>
-            <a:prstDash val="solid"/>
-          </a:ln>
-        </p:spPr>
-        <p:txBody xmlns:a="http://schemas.openxmlformats.org/drawingml/2006/main">
-          <a:bodyPr/>
-          <a:p/>
-        </p:txBody>
-      </p:sp>
-      <p:sp>
-        <p:nvSpPr>
-          <p:cNvPr id="42" name="line-dot">
-            <a:extLst xmlns:a="http://schemas.openxmlformats.org/drawingml/2006/main">
-              <a:ext uri="{FF2B5EF4-FFF2-40B4-BE49-F238E27FC236}">
-                <a16:creationId xmlns:a16="http://schemas.microsoft.com/office/drawing/2014/main" id="{7615B66F-F6FE-4C14-8CB6-E20C4B64A503}"/>
-              </a:ext>
-            </a:extLst>
-          </p:cNvPr>
-          <p:cNvSpPr>
-            <a:spLocks xmlns:a="http://schemas.openxmlformats.org/drawingml/2006/main" noGrp="1"/>
-          </p:cNvSpPr>
-          <p:nvPr/>
-        </p:nvSpPr>
-        <p:spPr>
-          <a:xfrm xmlns:a="http://schemas.openxmlformats.org/drawingml/2006/main">
-            <a:off x="9066848" y="4295775"/>
-            <a:ext cx="19050" cy="19050"/>
-          </a:xfrm>
-          <a:prstGeom xmlns:a="http://schemas.openxmlformats.org/drawingml/2006/main" prst="rect">
-            <a:avLst/>
-          </a:prstGeom>
-          <a:solidFill xmlns:a="http://schemas.openxmlformats.org/drawingml/2006/main">
-            <a:srgbClr val="A8A198"/>
-          </a:solidFill>
-          <a:ln xmlns:a="http://schemas.openxmlformats.org/drawingml/2006/main" w="0">
-            <a:solidFill>
-              <a:srgbClr val="A8A198"/>
-            </a:solidFill>
-            <a:prstDash val="solid"/>
-          </a:ln>
-        </p:spPr>
-        <p:txBody xmlns:a="http://schemas.openxmlformats.org/drawingml/2006/main">
-          <a:bodyPr/>
-          <a:p/>
-        </p:txBody>
-      </p:sp>
-      <p:sp>
-        <p:nvSpPr>
-          <p:cNvPr id="43" name="line-dot">
-            <a:extLst xmlns:a="http://schemas.openxmlformats.org/drawingml/2006/main">
-              <a:ext uri="{FF2B5EF4-FFF2-40B4-BE49-F238E27FC236}">
-                <a16:creationId xmlns:a16="http://schemas.microsoft.com/office/drawing/2014/main" id="{B61A6BA1-0F03-4E66-9F3B-870F45C2274E}"/>
-              </a:ext>
-            </a:extLst>
-          </p:cNvPr>
-          <p:cNvSpPr>
-            <a:spLocks xmlns:a="http://schemas.openxmlformats.org/drawingml/2006/main" noGrp="1"/>
-          </p:cNvSpPr>
-          <p:nvPr/>
-        </p:nvSpPr>
-        <p:spPr>
-          <a:xfrm xmlns:a="http://schemas.openxmlformats.org/drawingml/2006/main">
-            <a:off x="8968740" y="4371975"/>
-            <a:ext cx="19050" cy="19050"/>
-          </a:xfrm>
-          <a:prstGeom xmlns:a="http://schemas.openxmlformats.org/drawingml/2006/main" prst="rect">
-            <a:avLst/>
-          </a:prstGeom>
-          <a:solidFill xmlns:a="http://schemas.openxmlformats.org/drawingml/2006/main">
-            <a:srgbClr val="A8A198"/>
-          </a:solidFill>
-          <a:ln xmlns:a="http://schemas.openxmlformats.org/drawingml/2006/main" w="0">
-            <a:solidFill>
-              <a:srgbClr val="A8A198"/>
-            </a:solidFill>
-            <a:prstDash val="solid"/>
-          </a:ln>
-        </p:spPr>
-        <p:txBody xmlns:a="http://schemas.openxmlformats.org/drawingml/2006/main">
-          <a:bodyPr/>
-          <a:p/>
-        </p:txBody>
-      </p:sp>
-      <p:sp>
-        <p:nvSpPr>
-          <p:cNvPr id="44" name="line-dot">
-            <a:extLst xmlns:a="http://schemas.openxmlformats.org/drawingml/2006/main">
-              <a:ext uri="{FF2B5EF4-FFF2-40B4-BE49-F238E27FC236}">
-                <a16:creationId xmlns:a16="http://schemas.microsoft.com/office/drawing/2014/main" id="{C3FEDFF2-6E9C-44A7-A08F-48156A8A3ED0}"/>
-              </a:ext>
-            </a:extLst>
-          </p:cNvPr>
-          <p:cNvSpPr>
-            <a:spLocks xmlns:a="http://schemas.openxmlformats.org/drawingml/2006/main" noGrp="1"/>
-          </p:cNvSpPr>
-          <p:nvPr/>
-        </p:nvSpPr>
-        <p:spPr>
-          <a:xfrm xmlns:a="http://schemas.openxmlformats.org/drawingml/2006/main">
-            <a:off x="8870633" y="4448175"/>
-            <a:ext cx="19050" cy="19050"/>
-          </a:xfrm>
-          <a:prstGeom xmlns:a="http://schemas.openxmlformats.org/drawingml/2006/main" prst="rect">
-            <a:avLst/>
-          </a:prstGeom>
-          <a:solidFill xmlns:a="http://schemas.openxmlformats.org/drawingml/2006/main">
-            <a:srgbClr val="A8A198"/>
-          </a:solidFill>
-          <a:ln xmlns:a="http://schemas.openxmlformats.org/drawingml/2006/main" w="0">
-            <a:solidFill>
-              <a:srgbClr val="A8A198"/>
-            </a:solidFill>
-            <a:prstDash val="solid"/>
-          </a:ln>
-        </p:spPr>
-        <p:txBody xmlns:a="http://schemas.openxmlformats.org/drawingml/2006/main">
-          <a:bodyPr/>
-          <a:p/>
-        </p:txBody>
-      </p:sp>
-      <p:sp>
-        <p:nvSpPr>
-          <p:cNvPr id="45" name="line-dot">
-            <a:extLst xmlns:a="http://schemas.openxmlformats.org/drawingml/2006/main">
-              <a:ext uri="{FF2B5EF4-FFF2-40B4-BE49-F238E27FC236}">
-                <a16:creationId xmlns:a16="http://schemas.microsoft.com/office/drawing/2014/main" id="{3A8001EA-B6C0-4DF9-8376-882594AFDC63}"/>
-              </a:ext>
-            </a:extLst>
-          </p:cNvPr>
-          <p:cNvSpPr>
-            <a:spLocks xmlns:a="http://schemas.openxmlformats.org/drawingml/2006/main" noGrp="1"/>
-          </p:cNvSpPr>
-          <p:nvPr/>
-        </p:nvSpPr>
-        <p:spPr>
-          <a:xfrm xmlns:a="http://schemas.openxmlformats.org/drawingml/2006/main">
-            <a:off x="8772525" y="4524375"/>
-            <a:ext cx="19050" cy="19050"/>
-          </a:xfrm>
-          <a:prstGeom xmlns:a="http://schemas.openxmlformats.org/drawingml/2006/main" prst="rect">
-            <a:avLst/>
-          </a:prstGeom>
-          <a:solidFill xmlns:a="http://schemas.openxmlformats.org/drawingml/2006/main">
-            <a:srgbClr val="A8A198"/>
-          </a:solidFill>
-          <a:ln xmlns:a="http://schemas.openxmlformats.org/drawingml/2006/main" w="0">
-            <a:solidFill>
-              <a:srgbClr val="A8A198"/>
-            </a:solidFill>
-            <a:prstDash val="solid"/>
-          </a:ln>
-        </p:spPr>
-        <p:txBody xmlns:a="http://schemas.openxmlformats.org/drawingml/2006/main">
-          <a:bodyPr/>
-          <a:p/>
         </p:txBody>
       </p:sp>
       <p:sp>
@@ -14580,383 +12955,6 @@
               <a:t>A useful record includes why an experiment was done.</a:t>
             </a:r>
           </a:p>
-        </p:txBody>
-      </p:sp>
-      <p:sp>
-        <p:nvSpPr>
-          <p:cNvPr id="7" name="box-what happened">
-            <a:extLst xmlns:a="http://schemas.openxmlformats.org/drawingml/2006/main">
-              <a:ext uri="{FF2B5EF4-FFF2-40B4-BE49-F238E27FC236}">
-                <a16:creationId xmlns:a16="http://schemas.microsoft.com/office/drawing/2014/main" id="{081E671E-1BFF-46FB-9B36-398F9026070B}"/>
-              </a:ext>
-            </a:extLst>
-          </p:cNvPr>
-          <p:cNvSpPr>
-            <a:spLocks xmlns:a="http://schemas.openxmlformats.org/drawingml/2006/main" noGrp="1"/>
-          </p:cNvSpPr>
-          <p:nvPr/>
-        </p:nvSpPr>
-        <p:spPr>
-          <a:xfrm xmlns:a="http://schemas.openxmlformats.org/drawingml/2006/main">
-            <a:off x="1619250" y="3733800"/>
-            <a:ext cx="2286000" cy="666750"/>
-          </a:xfrm>
-          <a:prstGeom xmlns:a="http://schemas.openxmlformats.org/drawingml/2006/main" prst="rect">
-            <a:avLst/>
-          </a:prstGeom>
-          <a:solidFill xmlns:a="http://schemas.openxmlformats.org/drawingml/2006/main">
-            <a:srgbClr val="FFFFFF"/>
-          </a:solidFill>
-          <a:ln xmlns:a="http://schemas.openxmlformats.org/drawingml/2006/main" w="11430">
-            <a:solidFill>
-              <a:srgbClr val="20262A"/>
-            </a:solidFill>
-            <a:prstDash val="solid"/>
-          </a:ln>
-        </p:spPr>
-        <p:txBody xmlns:a="http://schemas.openxmlformats.org/drawingml/2006/main">
-          <a:bodyPr/>
-          <a:p/>
-        </p:txBody>
-      </p:sp>
-      <p:sp>
-        <p:nvSpPr>
-          <p:cNvPr id="8" name="label-what happened">
-            <a:extLst xmlns:a="http://schemas.openxmlformats.org/drawingml/2006/main">
-              <a:ext uri="{FF2B5EF4-FFF2-40B4-BE49-F238E27FC236}">
-                <a16:creationId xmlns:a16="http://schemas.microsoft.com/office/drawing/2014/main" id="{9BB8E346-586E-4CDA-8B08-ADDE3F1EFF82}"/>
-              </a:ext>
-            </a:extLst>
-          </p:cNvPr>
-          <p:cNvSpPr>
-            <a:spLocks xmlns:a="http://schemas.openxmlformats.org/drawingml/2006/main" noGrp="1"/>
-          </p:cNvSpPr>
-          <p:nvPr/>
-        </p:nvSpPr>
-        <p:spPr>
-          <a:xfrm xmlns:a="http://schemas.openxmlformats.org/drawingml/2006/main">
-            <a:off x="1752600" y="3848100"/>
-            <a:ext cx="2019300" cy="438150"/>
-          </a:xfrm>
-          <a:prstGeom xmlns:a="http://schemas.openxmlformats.org/drawingml/2006/main" prst="rect">
-            <a:avLst/>
-          </a:prstGeom>
-          <a:solidFill xmlns:a="http://schemas.openxmlformats.org/drawingml/2006/main">
-            <a:srgbClr val="000000">
-              <a:alpha val="0"/>
-            </a:srgbClr>
-          </a:solidFill>
-          <a:ln xmlns:a="http://schemas.openxmlformats.org/drawingml/2006/main" w="0">
-            <a:solidFill>
-              <a:srgbClr val="000000">
-                <a:alpha val="0"/>
-              </a:srgbClr>
-            </a:solidFill>
-            <a:prstDash val="solid"/>
-          </a:ln>
-        </p:spPr>
-        <p:txBody>
-          <a:bodyPr xmlns:a="http://schemas.openxmlformats.org/drawingml/2006/main" lIns="0" tIns="0" rIns="0" bIns="0" anchor="ctr"/>
-          <a:lstStyle xmlns:a="http://schemas.openxmlformats.org/drawingml/2006/main"/>
-          <a:p xmlns:a="http://schemas.openxmlformats.org/drawingml/2006/main">
-            <a:pPr algn="ctr">
-              <a:defRPr sz="1125" b="0">
-                <a:solidFill>
-                  <a:srgbClr val="20262A"/>
-                </a:solidFill>
-                <a:latin typeface="Aptos"/>
-                <a:ea typeface="Aptos"/>
-                <a:cs typeface="Aptos"/>
-              </a:defRPr>
-            </a:pPr>
-            <a:r>
-              <a:rPr sz="1125" b="0">
-                <a:solidFill>
-                  <a:srgbClr val="20262A"/>
-                </a:solidFill>
-                <a:latin typeface="Aptos"/>
-                <a:ea typeface="Aptos"/>
-                <a:cs typeface="Aptos"/>
-              </a:rPr>
-              <a:t>what was done</a:t>
-            </a:r>
-          </a:p>
-        </p:txBody>
-      </p:sp>
-      <p:sp>
-        <p:nvSpPr>
-          <p:cNvPr id="9" name="box-why it happened">
-            <a:extLst xmlns:a="http://schemas.openxmlformats.org/drawingml/2006/main">
-              <a:ext uri="{FF2B5EF4-FFF2-40B4-BE49-F238E27FC236}">
-                <a16:creationId xmlns:a16="http://schemas.microsoft.com/office/drawing/2014/main" id="{9C12A63C-DF80-4131-812D-BCE80C5C3770}"/>
-              </a:ext>
-            </a:extLst>
-          </p:cNvPr>
-          <p:cNvSpPr>
-            <a:spLocks xmlns:a="http://schemas.openxmlformats.org/drawingml/2006/main" noGrp="1"/>
-          </p:cNvSpPr>
-          <p:nvPr/>
-        </p:nvSpPr>
-        <p:spPr>
-          <a:xfrm xmlns:a="http://schemas.openxmlformats.org/drawingml/2006/main">
-            <a:off x="4762500" y="3733800"/>
-            <a:ext cx="2286000" cy="666750"/>
-          </a:xfrm>
-          <a:prstGeom xmlns:a="http://schemas.openxmlformats.org/drawingml/2006/main" prst="rect">
-            <a:avLst/>
-          </a:prstGeom>
-          <a:solidFill xmlns:a="http://schemas.openxmlformats.org/drawingml/2006/main">
-            <a:srgbClr val="DCE9EA"/>
-          </a:solidFill>
-          <a:ln xmlns:a="http://schemas.openxmlformats.org/drawingml/2006/main" w="11430">
-            <a:solidFill>
-              <a:srgbClr val="2F5F6F"/>
-            </a:solidFill>
-            <a:prstDash val="solid"/>
-          </a:ln>
-        </p:spPr>
-        <p:txBody xmlns:a="http://schemas.openxmlformats.org/drawingml/2006/main">
-          <a:bodyPr/>
-          <a:p/>
-        </p:txBody>
-      </p:sp>
-      <p:sp>
-        <p:nvSpPr>
-          <p:cNvPr id="10" name="label-why it happened">
-            <a:extLst xmlns:a="http://schemas.openxmlformats.org/drawingml/2006/main">
-              <a:ext uri="{FF2B5EF4-FFF2-40B4-BE49-F238E27FC236}">
-                <a16:creationId xmlns:a16="http://schemas.microsoft.com/office/drawing/2014/main" id="{D8FACD1A-F970-4A0D-A995-C97B2E8CFA52}"/>
-              </a:ext>
-            </a:extLst>
-          </p:cNvPr>
-          <p:cNvSpPr>
-            <a:spLocks xmlns:a="http://schemas.openxmlformats.org/drawingml/2006/main" noGrp="1"/>
-          </p:cNvSpPr>
-          <p:nvPr/>
-        </p:nvSpPr>
-        <p:spPr>
-          <a:xfrm xmlns:a="http://schemas.openxmlformats.org/drawingml/2006/main">
-            <a:off x="4895850" y="3848100"/>
-            <a:ext cx="2019300" cy="438150"/>
-          </a:xfrm>
-          <a:prstGeom xmlns:a="http://schemas.openxmlformats.org/drawingml/2006/main" prst="rect">
-            <a:avLst/>
-          </a:prstGeom>
-          <a:solidFill xmlns:a="http://schemas.openxmlformats.org/drawingml/2006/main">
-            <a:srgbClr val="000000">
-              <a:alpha val="0"/>
-            </a:srgbClr>
-          </a:solidFill>
-          <a:ln xmlns:a="http://schemas.openxmlformats.org/drawingml/2006/main" w="0">
-            <a:solidFill>
-              <a:srgbClr val="000000">
-                <a:alpha val="0"/>
-              </a:srgbClr>
-            </a:solidFill>
-            <a:prstDash val="solid"/>
-          </a:ln>
-        </p:spPr>
-        <p:txBody>
-          <a:bodyPr xmlns:a="http://schemas.openxmlformats.org/drawingml/2006/main" lIns="0" tIns="0" rIns="0" bIns="0" anchor="ctr"/>
-          <a:lstStyle xmlns:a="http://schemas.openxmlformats.org/drawingml/2006/main"/>
-          <a:p xmlns:a="http://schemas.openxmlformats.org/drawingml/2006/main">
-            <a:pPr algn="ctr">
-              <a:defRPr sz="1125" b="1">
-                <a:solidFill>
-                  <a:srgbClr val="20262A"/>
-                </a:solidFill>
-                <a:latin typeface="Aptos"/>
-                <a:ea typeface="Aptos"/>
-                <a:cs typeface="Aptos"/>
-              </a:defRPr>
-            </a:pPr>
-            <a:r>
-              <a:rPr sz="1125" b="1">
-                <a:solidFill>
-                  <a:srgbClr val="20262A"/>
-                </a:solidFill>
-                <a:latin typeface="Aptos"/>
-                <a:ea typeface="Aptos"/>
-                <a:cs typeface="Aptos"/>
-              </a:rPr>
-              <a:t>why it was done</a:t>
-            </a:r>
-          </a:p>
-        </p:txBody>
-      </p:sp>
-      <p:sp>
-        <p:nvSpPr>
-          <p:cNvPr id="11" name="box-what it supports">
-            <a:extLst xmlns:a="http://schemas.openxmlformats.org/drawingml/2006/main">
-              <a:ext uri="{FF2B5EF4-FFF2-40B4-BE49-F238E27FC236}">
-                <a16:creationId xmlns:a16="http://schemas.microsoft.com/office/drawing/2014/main" id="{11D6BD1F-A2B7-48D0-ACE7-879819D4C973}"/>
-              </a:ext>
-            </a:extLst>
-          </p:cNvPr>
-          <p:cNvSpPr>
-            <a:spLocks xmlns:a="http://schemas.openxmlformats.org/drawingml/2006/main" noGrp="1"/>
-          </p:cNvSpPr>
-          <p:nvPr/>
-        </p:nvSpPr>
-        <p:spPr>
-          <a:xfrm xmlns:a="http://schemas.openxmlformats.org/drawingml/2006/main">
-            <a:off x="7905750" y="3733800"/>
-            <a:ext cx="2286000" cy="666750"/>
-          </a:xfrm>
-          <a:prstGeom xmlns:a="http://schemas.openxmlformats.org/drawingml/2006/main" prst="rect">
-            <a:avLst/>
-          </a:prstGeom>
-          <a:solidFill xmlns:a="http://schemas.openxmlformats.org/drawingml/2006/main">
-            <a:srgbClr val="FFFFFF"/>
-          </a:solidFill>
-          <a:ln xmlns:a="http://schemas.openxmlformats.org/drawingml/2006/main" w="11430">
-            <a:solidFill>
-              <a:srgbClr val="20262A"/>
-            </a:solidFill>
-            <a:prstDash val="solid"/>
-          </a:ln>
-        </p:spPr>
-        <p:txBody xmlns:a="http://schemas.openxmlformats.org/drawingml/2006/main">
-          <a:bodyPr/>
-          <a:p/>
-        </p:txBody>
-      </p:sp>
-      <p:sp>
-        <p:nvSpPr>
-          <p:cNvPr id="12" name="label-what it supports">
-            <a:extLst xmlns:a="http://schemas.openxmlformats.org/drawingml/2006/main">
-              <a:ext uri="{FF2B5EF4-FFF2-40B4-BE49-F238E27FC236}">
-                <a16:creationId xmlns:a16="http://schemas.microsoft.com/office/drawing/2014/main" id="{B7AB261D-97A5-4EF3-8673-A9BF145148F7}"/>
-              </a:ext>
-            </a:extLst>
-          </p:cNvPr>
-          <p:cNvSpPr>
-            <a:spLocks xmlns:a="http://schemas.openxmlformats.org/drawingml/2006/main" noGrp="1"/>
-          </p:cNvSpPr>
-          <p:nvPr/>
-        </p:nvSpPr>
-        <p:spPr>
-          <a:xfrm xmlns:a="http://schemas.openxmlformats.org/drawingml/2006/main">
-            <a:off x="8039100" y="3848100"/>
-            <a:ext cx="2019300" cy="438150"/>
-          </a:xfrm>
-          <a:prstGeom xmlns:a="http://schemas.openxmlformats.org/drawingml/2006/main" prst="rect">
-            <a:avLst/>
-          </a:prstGeom>
-          <a:solidFill xmlns:a="http://schemas.openxmlformats.org/drawingml/2006/main">
-            <a:srgbClr val="000000">
-              <a:alpha val="0"/>
-            </a:srgbClr>
-          </a:solidFill>
-          <a:ln xmlns:a="http://schemas.openxmlformats.org/drawingml/2006/main" w="0">
-            <a:solidFill>
-              <a:srgbClr val="000000">
-                <a:alpha val="0"/>
-              </a:srgbClr>
-            </a:solidFill>
-            <a:prstDash val="solid"/>
-          </a:ln>
-        </p:spPr>
-        <p:txBody>
-          <a:bodyPr xmlns:a="http://schemas.openxmlformats.org/drawingml/2006/main" lIns="0" tIns="0" rIns="0" bIns="0" anchor="ctr"/>
-          <a:lstStyle xmlns:a="http://schemas.openxmlformats.org/drawingml/2006/main"/>
-          <a:p xmlns:a="http://schemas.openxmlformats.org/drawingml/2006/main">
-            <a:pPr algn="ctr">
-              <a:defRPr sz="1125" b="0">
-                <a:solidFill>
-                  <a:srgbClr val="20262A"/>
-                </a:solidFill>
-                <a:latin typeface="Aptos"/>
-                <a:ea typeface="Aptos"/>
-                <a:cs typeface="Aptos"/>
-              </a:defRPr>
-            </a:pPr>
-            <a:r>
-              <a:rPr sz="1125" b="0">
-                <a:solidFill>
-                  <a:srgbClr val="20262A"/>
-                </a:solidFill>
-                <a:latin typeface="Aptos"/>
-                <a:ea typeface="Aptos"/>
-                <a:cs typeface="Aptos"/>
-              </a:rPr>
-              <a:t>what it supports</a:t>
-            </a:r>
-          </a:p>
-        </p:txBody>
-      </p:sp>
-      <p:sp>
-        <p:nvSpPr>
-          <p:cNvPr id="13" name="line-h">
-            <a:extLst xmlns:a="http://schemas.openxmlformats.org/drawingml/2006/main">
-              <a:ext uri="{FF2B5EF4-FFF2-40B4-BE49-F238E27FC236}">
-                <a16:creationId xmlns:a16="http://schemas.microsoft.com/office/drawing/2014/main" id="{BB1A1474-A80F-48F6-8279-07A90B282179}"/>
-              </a:ext>
-            </a:extLst>
-          </p:cNvPr>
-          <p:cNvSpPr>
-            <a:spLocks xmlns:a="http://schemas.openxmlformats.org/drawingml/2006/main" noGrp="1"/>
-          </p:cNvSpPr>
-          <p:nvPr/>
-        </p:nvSpPr>
-        <p:spPr>
-          <a:xfrm xmlns:a="http://schemas.openxmlformats.org/drawingml/2006/main">
-            <a:off x="3905250" y="4067175"/>
-            <a:ext cx="857250" cy="19050"/>
-          </a:xfrm>
-          <a:prstGeom xmlns:a="http://schemas.openxmlformats.org/drawingml/2006/main" prst="rect">
-            <a:avLst/>
-          </a:prstGeom>
-          <a:solidFill xmlns:a="http://schemas.openxmlformats.org/drawingml/2006/main">
-            <a:srgbClr val="A8A198"/>
-          </a:solidFill>
-          <a:ln xmlns:a="http://schemas.openxmlformats.org/drawingml/2006/main" w="0">
-            <a:solidFill>
-              <a:srgbClr val="A8A198"/>
-            </a:solidFill>
-            <a:prstDash val="solid"/>
-          </a:ln>
-        </p:spPr>
-        <p:txBody xmlns:a="http://schemas.openxmlformats.org/drawingml/2006/main">
-          <a:bodyPr/>
-          <a:p/>
-        </p:txBody>
-      </p:sp>
-      <p:sp>
-        <p:nvSpPr>
-          <p:cNvPr id="14" name="line-h">
-            <a:extLst xmlns:a="http://schemas.openxmlformats.org/drawingml/2006/main">
-              <a:ext uri="{FF2B5EF4-FFF2-40B4-BE49-F238E27FC236}">
-                <a16:creationId xmlns:a16="http://schemas.microsoft.com/office/drawing/2014/main" id="{7BC44863-66D7-45F7-8CBF-F9FCDF29A536}"/>
-              </a:ext>
-            </a:extLst>
-          </p:cNvPr>
-          <p:cNvSpPr>
-            <a:spLocks xmlns:a="http://schemas.openxmlformats.org/drawingml/2006/main" noGrp="1"/>
-          </p:cNvSpPr>
-          <p:nvPr/>
-        </p:nvSpPr>
-        <p:spPr>
-          <a:xfrm xmlns:a="http://schemas.openxmlformats.org/drawingml/2006/main">
-            <a:off x="7048500" y="4067175"/>
-            <a:ext cx="857250" cy="19050"/>
-          </a:xfrm>
-          <a:prstGeom xmlns:a="http://schemas.openxmlformats.org/drawingml/2006/main" prst="rect">
-            <a:avLst/>
-          </a:prstGeom>
-          <a:solidFill xmlns:a="http://schemas.openxmlformats.org/drawingml/2006/main">
-            <a:srgbClr val="A8A198"/>
-          </a:solidFill>
-          <a:ln xmlns:a="http://schemas.openxmlformats.org/drawingml/2006/main" w="0">
-            <a:solidFill>
-              <a:srgbClr val="A8A198"/>
-            </a:solidFill>
-            <a:prstDash val="solid"/>
-          </a:ln>
-        </p:spPr>
-        <p:txBody xmlns:a="http://schemas.openxmlformats.org/drawingml/2006/main">
-          <a:bodyPr/>
-          <a:p/>
         </p:txBody>
       </p:sp>
     </p:spTree>

--- a/outputs/019e93bf-5861-7ba2-af6a-d3677b8793cd/presentations/lab-tracker-research-group/output/lab-tracker-research-group-presentation.pptx
+++ b/outputs/019e93bf-5861-7ba2-af6a-d3677b8793cd/presentations/lab-tracker-research-group/output/lab-tracker-research-group-presentation.pptx
@@ -8714,410 +8714,30 @@
           </a:p>
         </p:txBody>
       </p:sp>
-      <p:sp>
-        <p:nvSpPr>
-          <p:cNvPr id="7" name="box-raw note">
-            <a:extLst xmlns:a="http://schemas.openxmlformats.org/drawingml/2006/main">
-              <a:ext uri="{FF2B5EF4-FFF2-40B4-BE49-F238E27FC236}">
-                <a16:creationId xmlns:a16="http://schemas.microsoft.com/office/drawing/2014/main" id="{CA512BA1-66CB-46E3-9D0F-422AE2B0E8A4}"/>
-              </a:ext>
-            </a:extLst>
-          </p:cNvPr>
-          <p:cNvSpPr>
-            <a:spLocks xmlns:a="http://schemas.openxmlformats.org/drawingml/2006/main" noGrp="1"/>
-          </p:cNvSpPr>
-          <p:nvPr/>
-        </p:nvSpPr>
-        <p:spPr>
-          <a:xfrm xmlns:a="http://schemas.openxmlformats.org/drawingml/2006/main">
-            <a:off x="1009650" y="3790950"/>
-            <a:ext cx="1905000" cy="590550"/>
-          </a:xfrm>
-          <a:prstGeom xmlns:a="http://schemas.openxmlformats.org/drawingml/2006/main" prst="rect">
-            <a:avLst/>
-          </a:prstGeom>
-          <a:solidFill xmlns:a="http://schemas.openxmlformats.org/drawingml/2006/main">
-            <a:srgbClr val="DCE9EA"/>
-          </a:solidFill>
-          <a:ln xmlns:a="http://schemas.openxmlformats.org/drawingml/2006/main" w="11430">
-            <a:solidFill>
-              <a:srgbClr val="2F5F6F"/>
-            </a:solidFill>
-            <a:prstDash val="solid"/>
-          </a:ln>
-        </p:spPr>
-        <p:txBody xmlns:a="http://schemas.openxmlformats.org/drawingml/2006/main">
-          <a:bodyPr/>
-          <a:p/>
-        </p:txBody>
-      </p:sp>
-      <p:sp>
-        <p:nvSpPr>
-          <p:cNvPr id="8" name="label-raw note">
-            <a:extLst xmlns:a="http://schemas.openxmlformats.org/drawingml/2006/main">
-              <a:ext uri="{FF2B5EF4-FFF2-40B4-BE49-F238E27FC236}">
-                <a16:creationId xmlns:a16="http://schemas.microsoft.com/office/drawing/2014/main" id="{082AAF31-9A22-4B76-9FB2-C39F9FC48F22}"/>
-              </a:ext>
-            </a:extLst>
-          </p:cNvPr>
-          <p:cNvSpPr>
-            <a:spLocks xmlns:a="http://schemas.openxmlformats.org/drawingml/2006/main" noGrp="1"/>
-          </p:cNvSpPr>
-          <p:nvPr/>
-        </p:nvSpPr>
-        <p:spPr>
-          <a:xfrm xmlns:a="http://schemas.openxmlformats.org/drawingml/2006/main">
-            <a:off x="1143000" y="3905250"/>
-            <a:ext cx="1638300" cy="361950"/>
-          </a:xfrm>
-          <a:prstGeom xmlns:a="http://schemas.openxmlformats.org/drawingml/2006/main" prst="rect">
-            <a:avLst/>
-          </a:prstGeom>
-          <a:solidFill xmlns:a="http://schemas.openxmlformats.org/drawingml/2006/main">
-            <a:srgbClr val="000000">
-              <a:alpha val="0"/>
-            </a:srgbClr>
-          </a:solidFill>
-          <a:ln xmlns:a="http://schemas.openxmlformats.org/drawingml/2006/main" w="0">
-            <a:solidFill>
-              <a:srgbClr val="000000">
-                <a:alpha val="0"/>
-              </a:srgbClr>
-            </a:solidFill>
-            <a:prstDash val="solid"/>
-          </a:ln>
-        </p:spPr>
-        <p:txBody>
-          <a:bodyPr xmlns:a="http://schemas.openxmlformats.org/drawingml/2006/main" lIns="0" tIns="0" rIns="0" bIns="0" anchor="ctr"/>
-          <a:lstStyle xmlns:a="http://schemas.openxmlformats.org/drawingml/2006/main"/>
-          <a:p xmlns:a="http://schemas.openxmlformats.org/drawingml/2006/main">
-            <a:pPr algn="ctr">
-              <a:defRPr sz="1125" b="1">
-                <a:solidFill>
-                  <a:srgbClr val="20262A"/>
-                </a:solidFill>
-                <a:latin typeface="Aptos"/>
-                <a:ea typeface="Aptos"/>
-                <a:cs typeface="Aptos"/>
-              </a:defRPr>
-            </a:pPr>
-            <a:r>
-              <a:rPr sz="1125" b="1">
-                <a:solidFill>
-                  <a:srgbClr val="20262A"/>
-                </a:solidFill>
-                <a:latin typeface="Aptos"/>
-                <a:ea typeface="Aptos"/>
-                <a:cs typeface="Aptos"/>
-              </a:rPr>
-              <a:t>raw note</a:t>
-            </a:r>
-          </a:p>
-        </p:txBody>
-      </p:sp>
-      <p:sp>
-        <p:nvSpPr>
-          <p:cNvPr id="9" name="box-context packet">
-            <a:extLst xmlns:a="http://schemas.openxmlformats.org/drawingml/2006/main">
-              <a:ext uri="{FF2B5EF4-FFF2-40B4-BE49-F238E27FC236}">
-                <a16:creationId xmlns:a16="http://schemas.microsoft.com/office/drawing/2014/main" id="{D92C455A-B63F-494D-A882-1D7FDE498AAA}"/>
-              </a:ext>
-            </a:extLst>
-          </p:cNvPr>
-          <p:cNvSpPr>
-            <a:spLocks xmlns:a="http://schemas.openxmlformats.org/drawingml/2006/main" noGrp="1"/>
-          </p:cNvSpPr>
-          <p:nvPr/>
-        </p:nvSpPr>
-        <p:spPr>
-          <a:xfrm xmlns:a="http://schemas.openxmlformats.org/drawingml/2006/main">
-            <a:off x="3676650" y="3790950"/>
-            <a:ext cx="2171700" cy="590550"/>
-          </a:xfrm>
-          <a:prstGeom xmlns:a="http://schemas.openxmlformats.org/drawingml/2006/main" prst="rect">
-            <a:avLst/>
-          </a:prstGeom>
-          <a:solidFill xmlns:a="http://schemas.openxmlformats.org/drawingml/2006/main">
-            <a:srgbClr val="F7F6F1"/>
-          </a:solidFill>
-          <a:ln xmlns:a="http://schemas.openxmlformats.org/drawingml/2006/main" w="9525">
-            <a:solidFill>
-              <a:srgbClr val="E2DED4"/>
-            </a:solidFill>
-            <a:prstDash val="solid"/>
-          </a:ln>
-        </p:spPr>
-        <p:txBody xmlns:a="http://schemas.openxmlformats.org/drawingml/2006/main">
-          <a:bodyPr/>
-          <a:p/>
-        </p:txBody>
-      </p:sp>
-      <p:sp>
-        <p:nvSpPr>
-          <p:cNvPr id="10" name="label-context packet">
-            <a:extLst xmlns:a="http://schemas.openxmlformats.org/drawingml/2006/main">
-              <a:ext uri="{FF2B5EF4-FFF2-40B4-BE49-F238E27FC236}">
-                <a16:creationId xmlns:a16="http://schemas.microsoft.com/office/drawing/2014/main" id="{2AE99298-ABFE-4F86-8AAD-C501EF2A6BF1}"/>
-              </a:ext>
-            </a:extLst>
-          </p:cNvPr>
-          <p:cNvSpPr>
-            <a:spLocks xmlns:a="http://schemas.openxmlformats.org/drawingml/2006/main" noGrp="1"/>
-          </p:cNvSpPr>
-          <p:nvPr/>
-        </p:nvSpPr>
-        <p:spPr>
-          <a:xfrm xmlns:a="http://schemas.openxmlformats.org/drawingml/2006/main">
-            <a:off x="3810000" y="3905250"/>
-            <a:ext cx="1905000" cy="361950"/>
-          </a:xfrm>
-          <a:prstGeom xmlns:a="http://schemas.openxmlformats.org/drawingml/2006/main" prst="rect">
-            <a:avLst/>
-          </a:prstGeom>
-          <a:solidFill xmlns:a="http://schemas.openxmlformats.org/drawingml/2006/main">
-            <a:srgbClr val="000000">
-              <a:alpha val="0"/>
-            </a:srgbClr>
-          </a:solidFill>
-          <a:ln xmlns:a="http://schemas.openxmlformats.org/drawingml/2006/main" w="0">
-            <a:solidFill>
-              <a:srgbClr val="000000">
-                <a:alpha val="0"/>
-              </a:srgbClr>
-            </a:solidFill>
-            <a:prstDash val="solid"/>
-          </a:ln>
-        </p:spPr>
-        <p:txBody>
-          <a:bodyPr xmlns:a="http://schemas.openxmlformats.org/drawingml/2006/main" lIns="0" tIns="0" rIns="0" bIns="0" anchor="ctr"/>
-          <a:lstStyle xmlns:a="http://schemas.openxmlformats.org/drawingml/2006/main"/>
-          <a:p xmlns:a="http://schemas.openxmlformats.org/drawingml/2006/main">
-            <a:pPr algn="ctr">
-              <a:defRPr sz="1125" b="0">
-                <a:solidFill>
-                  <a:srgbClr val="697277"/>
-                </a:solidFill>
-                <a:latin typeface="Aptos"/>
-                <a:ea typeface="Aptos"/>
-                <a:cs typeface="Aptos"/>
-              </a:defRPr>
-            </a:pPr>
-            <a:r>
-              <a:rPr sz="1125" b="0">
-                <a:solidFill>
-                  <a:srgbClr val="697277"/>
-                </a:solidFill>
-                <a:latin typeface="Aptos"/>
-                <a:ea typeface="Aptos"/>
-                <a:cs typeface="Aptos"/>
-              </a:rPr>
-              <a:t>context packet</a:t>
-            </a:r>
-          </a:p>
-        </p:txBody>
-      </p:sp>
-      <p:sp>
-        <p:nvSpPr>
-          <p:cNvPr id="11" name="box-proposed operations">
-            <a:extLst xmlns:a="http://schemas.openxmlformats.org/drawingml/2006/main">
-              <a:ext uri="{FF2B5EF4-FFF2-40B4-BE49-F238E27FC236}">
-                <a16:creationId xmlns:a16="http://schemas.microsoft.com/office/drawing/2014/main" id="{22F05A53-D61B-486D-9625-296498E6FF23}"/>
-              </a:ext>
-            </a:extLst>
-          </p:cNvPr>
-          <p:cNvSpPr>
-            <a:spLocks xmlns:a="http://schemas.openxmlformats.org/drawingml/2006/main" noGrp="1"/>
-          </p:cNvSpPr>
-          <p:nvPr/>
-        </p:nvSpPr>
-        <p:spPr>
-          <a:xfrm xmlns:a="http://schemas.openxmlformats.org/drawingml/2006/main">
-            <a:off x="6610350" y="3790950"/>
-            <a:ext cx="2381250" cy="590550"/>
-          </a:xfrm>
-          <a:prstGeom xmlns:a="http://schemas.openxmlformats.org/drawingml/2006/main" prst="rect">
-            <a:avLst/>
-          </a:prstGeom>
-          <a:solidFill xmlns:a="http://schemas.openxmlformats.org/drawingml/2006/main">
-            <a:srgbClr val="F7F6F1"/>
-          </a:solidFill>
-          <a:ln xmlns:a="http://schemas.openxmlformats.org/drawingml/2006/main" w="9525">
-            <a:solidFill>
-              <a:srgbClr val="E2DED4"/>
-            </a:solidFill>
-            <a:prstDash val="solid"/>
-          </a:ln>
-        </p:spPr>
-        <p:txBody xmlns:a="http://schemas.openxmlformats.org/drawingml/2006/main">
-          <a:bodyPr/>
-          <a:p/>
-        </p:txBody>
-      </p:sp>
-      <p:sp>
-        <p:nvSpPr>
-          <p:cNvPr id="12" name="label-proposed operations">
-            <a:extLst xmlns:a="http://schemas.openxmlformats.org/drawingml/2006/main">
-              <a:ext uri="{FF2B5EF4-FFF2-40B4-BE49-F238E27FC236}">
-                <a16:creationId xmlns:a16="http://schemas.microsoft.com/office/drawing/2014/main" id="{C031E168-7F2B-4A0F-822D-9FD2CAF8FC59}"/>
-              </a:ext>
-            </a:extLst>
-          </p:cNvPr>
-          <p:cNvSpPr>
-            <a:spLocks xmlns:a="http://schemas.openxmlformats.org/drawingml/2006/main" noGrp="1"/>
-          </p:cNvSpPr>
-          <p:nvPr/>
-        </p:nvSpPr>
-        <p:spPr>
-          <a:xfrm xmlns:a="http://schemas.openxmlformats.org/drawingml/2006/main">
-            <a:off x="6743700" y="3905250"/>
-            <a:ext cx="2114550" cy="361950"/>
-          </a:xfrm>
-          <a:prstGeom xmlns:a="http://schemas.openxmlformats.org/drawingml/2006/main" prst="rect">
-            <a:avLst/>
-          </a:prstGeom>
-          <a:solidFill xmlns:a="http://schemas.openxmlformats.org/drawingml/2006/main">
-            <a:srgbClr val="000000">
-              <a:alpha val="0"/>
-            </a:srgbClr>
-          </a:solidFill>
-          <a:ln xmlns:a="http://schemas.openxmlformats.org/drawingml/2006/main" w="0">
-            <a:solidFill>
-              <a:srgbClr val="000000">
-                <a:alpha val="0"/>
-              </a:srgbClr>
-            </a:solidFill>
-            <a:prstDash val="solid"/>
-          </a:ln>
-        </p:spPr>
-        <p:txBody>
-          <a:bodyPr xmlns:a="http://schemas.openxmlformats.org/drawingml/2006/main" lIns="0" tIns="0" rIns="0" bIns="0" anchor="ctr"/>
-          <a:lstStyle xmlns:a="http://schemas.openxmlformats.org/drawingml/2006/main"/>
-          <a:p xmlns:a="http://schemas.openxmlformats.org/drawingml/2006/main">
-            <a:pPr algn="ctr">
-              <a:defRPr sz="1125" b="0">
-                <a:solidFill>
-                  <a:srgbClr val="697277"/>
-                </a:solidFill>
-                <a:latin typeface="Aptos"/>
-                <a:ea typeface="Aptos"/>
-                <a:cs typeface="Aptos"/>
-              </a:defRPr>
-            </a:pPr>
-            <a:r>
-              <a:rPr sz="1125" b="0">
-                <a:solidFill>
-                  <a:srgbClr val="697277"/>
-                </a:solidFill>
-                <a:latin typeface="Aptos"/>
-                <a:ea typeface="Aptos"/>
-                <a:cs typeface="Aptos"/>
-              </a:rPr>
-              <a:t>proposed operations</a:t>
-            </a:r>
-          </a:p>
-        </p:txBody>
-      </p:sp>
-      <p:sp>
-        <p:nvSpPr>
-          <p:cNvPr id="13" name="box-reviewer decision">
-            <a:extLst xmlns:a="http://schemas.openxmlformats.org/drawingml/2006/main">
-              <a:ext uri="{FF2B5EF4-FFF2-40B4-BE49-F238E27FC236}">
-                <a16:creationId xmlns:a16="http://schemas.microsoft.com/office/drawing/2014/main" id="{BC61A410-6FFC-4731-A2E2-411ABEBE3A07}"/>
-              </a:ext>
-            </a:extLst>
-          </p:cNvPr>
-          <p:cNvSpPr>
-            <a:spLocks xmlns:a="http://schemas.openxmlformats.org/drawingml/2006/main" noGrp="1"/>
-          </p:cNvSpPr>
-          <p:nvPr/>
-        </p:nvSpPr>
-        <p:spPr>
-          <a:xfrm xmlns:a="http://schemas.openxmlformats.org/drawingml/2006/main">
-            <a:off x="9734550" y="3790950"/>
-            <a:ext cx="2095500" cy="590550"/>
-          </a:xfrm>
-          <a:prstGeom xmlns:a="http://schemas.openxmlformats.org/drawingml/2006/main" prst="rect">
-            <a:avLst/>
-          </a:prstGeom>
-          <a:solidFill xmlns:a="http://schemas.openxmlformats.org/drawingml/2006/main">
-            <a:srgbClr val="F7F6F1"/>
-          </a:solidFill>
-          <a:ln xmlns:a="http://schemas.openxmlformats.org/drawingml/2006/main" w="9525">
-            <a:solidFill>
-              <a:srgbClr val="E2DED4"/>
-            </a:solidFill>
-            <a:prstDash val="solid"/>
-          </a:ln>
-        </p:spPr>
-        <p:txBody xmlns:a="http://schemas.openxmlformats.org/drawingml/2006/main">
-          <a:bodyPr/>
-          <a:p/>
-        </p:txBody>
-      </p:sp>
-      <p:sp>
-        <p:nvSpPr>
-          <p:cNvPr id="14" name="label-reviewer decision">
-            <a:extLst xmlns:a="http://schemas.openxmlformats.org/drawingml/2006/main">
-              <a:ext uri="{FF2B5EF4-FFF2-40B4-BE49-F238E27FC236}">
-                <a16:creationId xmlns:a16="http://schemas.microsoft.com/office/drawing/2014/main" id="{D10E9ED7-8F26-4DF7-9B10-11FAB7E5A0B9}"/>
-              </a:ext>
-            </a:extLst>
-          </p:cNvPr>
-          <p:cNvSpPr>
-            <a:spLocks xmlns:a="http://schemas.openxmlformats.org/drawingml/2006/main" noGrp="1"/>
-          </p:cNvSpPr>
-          <p:nvPr/>
-        </p:nvSpPr>
-        <p:spPr>
-          <a:xfrm xmlns:a="http://schemas.openxmlformats.org/drawingml/2006/main">
-            <a:off x="9867900" y="3905250"/>
-            <a:ext cx="1828800" cy="361950"/>
-          </a:xfrm>
-          <a:prstGeom xmlns:a="http://schemas.openxmlformats.org/drawingml/2006/main" prst="rect">
-            <a:avLst/>
-          </a:prstGeom>
-          <a:solidFill xmlns:a="http://schemas.openxmlformats.org/drawingml/2006/main">
-            <a:srgbClr val="000000">
-              <a:alpha val="0"/>
-            </a:srgbClr>
-          </a:solidFill>
-          <a:ln xmlns:a="http://schemas.openxmlformats.org/drawingml/2006/main" w="0">
-            <a:solidFill>
-              <a:srgbClr val="000000">
-                <a:alpha val="0"/>
-              </a:srgbClr>
-            </a:solidFill>
-            <a:prstDash val="solid"/>
-          </a:ln>
-        </p:spPr>
-        <p:txBody>
-          <a:bodyPr xmlns:a="http://schemas.openxmlformats.org/drawingml/2006/main" lIns="0" tIns="0" rIns="0" bIns="0" anchor="ctr"/>
-          <a:lstStyle xmlns:a="http://schemas.openxmlformats.org/drawingml/2006/main"/>
-          <a:p xmlns:a="http://schemas.openxmlformats.org/drawingml/2006/main">
-            <a:pPr algn="ctr">
-              <a:defRPr sz="1125" b="0">
-                <a:solidFill>
-                  <a:srgbClr val="697277"/>
-                </a:solidFill>
-                <a:latin typeface="Aptos"/>
-                <a:ea typeface="Aptos"/>
-                <a:cs typeface="Aptos"/>
-              </a:defRPr>
-            </a:pPr>
-            <a:r>
-              <a:rPr sz="1125" b="0">
-                <a:solidFill>
-                  <a:srgbClr val="697277"/>
-                </a:solidFill>
-                <a:latin typeface="Aptos"/>
-                <a:ea typeface="Aptos"/>
-                <a:cs typeface="Aptos"/>
-              </a:rPr>
-              <a:t>reviewer decision</a:t>
-            </a:r>
-          </a:p>
-        </p:txBody>
-      </p:sp>
+      <p:pic xmlns:a="http://schemas.openxmlformats.org/drawingml/2006/main" xmlns:r="http://schemas.openxmlformats.org/officeDocument/2006/relationships">
+        <p:nvPicPr>
+          <p:cNvPr id="7" name="Picture 6" descr="capture-1-input.png"/>
+          <p:cNvPicPr>
+            <a:picLocks noChangeAspect="1"/>
+          </p:cNvPicPr>
+          <p:nvPr/>
+        </p:nvPicPr>
+        <p:blipFill>
+          <a:blip r:embed="rId3"/>
+          <a:stretch>
+            <a:fillRect/>
+          </a:stretch>
+        </p:blipFill>
+        <p:spPr>
+          <a:xfrm>
+            <a:off x="5182882" y="2240280"/>
+            <a:ext cx="1795755" cy="3886200"/>
+          </a:xfrm>
+          <a:prstGeom prst="rect">
+            <a:avLst/>
+          </a:prstGeom>
+        </p:spPr>
+      </p:pic>
     </p:spTree>
     <p:extLst>
       <p:ext uri="{BB962C8B-B14F-4D97-AF65-F5344CB8AC3E}">
@@ -10259,594 +9879,30 @@
           </a:p>
         </p:txBody>
       </p:sp>
-      <p:sp>
-        <p:nvSpPr>
-          <p:cNvPr id="7" name="box-raw note">
-            <a:extLst xmlns:a="http://schemas.openxmlformats.org/drawingml/2006/main">
-              <a:ext uri="{FF2B5EF4-FFF2-40B4-BE49-F238E27FC236}">
-                <a16:creationId xmlns:a16="http://schemas.microsoft.com/office/drawing/2014/main" id="{17E0EF93-C272-4919-B73F-4373ED7CDD1A}"/>
-              </a:ext>
-            </a:extLst>
-          </p:cNvPr>
-          <p:cNvSpPr>
-            <a:spLocks xmlns:a="http://schemas.openxmlformats.org/drawingml/2006/main" noGrp="1"/>
-          </p:cNvSpPr>
-          <p:nvPr/>
-        </p:nvSpPr>
-        <p:spPr>
-          <a:xfrm xmlns:a="http://schemas.openxmlformats.org/drawingml/2006/main">
-            <a:off x="1009650" y="3790950"/>
-            <a:ext cx="1905000" cy="590550"/>
-          </a:xfrm>
-          <a:prstGeom xmlns:a="http://schemas.openxmlformats.org/drawingml/2006/main" prst="rect">
-            <a:avLst/>
-          </a:prstGeom>
-          <a:solidFill xmlns:a="http://schemas.openxmlformats.org/drawingml/2006/main">
-            <a:srgbClr val="FFFFFF"/>
-          </a:solidFill>
-          <a:ln xmlns:a="http://schemas.openxmlformats.org/drawingml/2006/main" w="11430">
-            <a:solidFill>
-              <a:srgbClr val="20262A"/>
-            </a:solidFill>
-            <a:prstDash val="solid"/>
-          </a:ln>
-        </p:spPr>
-        <p:txBody xmlns:a="http://schemas.openxmlformats.org/drawingml/2006/main">
-          <a:bodyPr/>
-          <a:p/>
-        </p:txBody>
-      </p:sp>
-      <p:sp>
-        <p:nvSpPr>
-          <p:cNvPr id="8" name="label-raw note">
-            <a:extLst xmlns:a="http://schemas.openxmlformats.org/drawingml/2006/main">
-              <a:ext uri="{FF2B5EF4-FFF2-40B4-BE49-F238E27FC236}">
-                <a16:creationId xmlns:a16="http://schemas.microsoft.com/office/drawing/2014/main" id="{25E00BF0-759E-4801-BB55-192E76EA5881}"/>
-              </a:ext>
-            </a:extLst>
-          </p:cNvPr>
-          <p:cNvSpPr>
-            <a:spLocks xmlns:a="http://schemas.openxmlformats.org/drawingml/2006/main" noGrp="1"/>
-          </p:cNvSpPr>
-          <p:nvPr/>
-        </p:nvSpPr>
-        <p:spPr>
-          <a:xfrm xmlns:a="http://schemas.openxmlformats.org/drawingml/2006/main">
-            <a:off x="1143000" y="3905250"/>
-            <a:ext cx="1638300" cy="361950"/>
-          </a:xfrm>
-          <a:prstGeom xmlns:a="http://schemas.openxmlformats.org/drawingml/2006/main" prst="rect">
-            <a:avLst/>
-          </a:prstGeom>
-          <a:solidFill xmlns:a="http://schemas.openxmlformats.org/drawingml/2006/main">
-            <a:srgbClr val="000000">
-              <a:alpha val="0"/>
-            </a:srgbClr>
-          </a:solidFill>
-          <a:ln xmlns:a="http://schemas.openxmlformats.org/drawingml/2006/main" w="0">
-            <a:solidFill>
-              <a:srgbClr val="000000">
-                <a:alpha val="0"/>
-              </a:srgbClr>
-            </a:solidFill>
-            <a:prstDash val="solid"/>
-          </a:ln>
-        </p:spPr>
-        <p:txBody>
-          <a:bodyPr xmlns:a="http://schemas.openxmlformats.org/drawingml/2006/main" lIns="0" tIns="0" rIns="0" bIns="0" anchor="ctr"/>
-          <a:lstStyle xmlns:a="http://schemas.openxmlformats.org/drawingml/2006/main"/>
-          <a:p xmlns:a="http://schemas.openxmlformats.org/drawingml/2006/main">
-            <a:pPr algn="ctr">
-              <a:defRPr sz="1125" b="0">
-                <a:solidFill>
-                  <a:srgbClr val="20262A"/>
-                </a:solidFill>
-                <a:latin typeface="Aptos"/>
-                <a:ea typeface="Aptos"/>
-                <a:cs typeface="Aptos"/>
-              </a:defRPr>
-            </a:pPr>
-            <a:r>
-              <a:rPr sz="1125" b="0">
-                <a:solidFill>
-                  <a:srgbClr val="20262A"/>
-                </a:solidFill>
-                <a:latin typeface="Aptos"/>
-                <a:ea typeface="Aptos"/>
-                <a:cs typeface="Aptos"/>
-              </a:rPr>
-              <a:t>raw note</a:t>
-            </a:r>
-          </a:p>
-        </p:txBody>
-      </p:sp>
-      <p:sp>
-        <p:nvSpPr>
-          <p:cNvPr id="9" name="box-context packet">
-            <a:extLst xmlns:a="http://schemas.openxmlformats.org/drawingml/2006/main">
-              <a:ext uri="{FF2B5EF4-FFF2-40B4-BE49-F238E27FC236}">
-                <a16:creationId xmlns:a16="http://schemas.microsoft.com/office/drawing/2014/main" id="{C6502EB1-FE40-4698-9BCA-795E7C9484FB}"/>
-              </a:ext>
-            </a:extLst>
-          </p:cNvPr>
-          <p:cNvSpPr>
-            <a:spLocks xmlns:a="http://schemas.openxmlformats.org/drawingml/2006/main" noGrp="1"/>
-          </p:cNvSpPr>
-          <p:nvPr/>
-        </p:nvSpPr>
-        <p:spPr>
-          <a:xfrm xmlns:a="http://schemas.openxmlformats.org/drawingml/2006/main">
-            <a:off x="3676650" y="3790950"/>
-            <a:ext cx="2171700" cy="590550"/>
-          </a:xfrm>
-          <a:prstGeom xmlns:a="http://schemas.openxmlformats.org/drawingml/2006/main" prst="rect">
-            <a:avLst/>
-          </a:prstGeom>
-          <a:solidFill xmlns:a="http://schemas.openxmlformats.org/drawingml/2006/main">
-            <a:srgbClr val="FFFFFF"/>
-          </a:solidFill>
-          <a:ln xmlns:a="http://schemas.openxmlformats.org/drawingml/2006/main" w="11430">
-            <a:solidFill>
-              <a:srgbClr val="20262A"/>
-            </a:solidFill>
-            <a:prstDash val="solid"/>
-          </a:ln>
-        </p:spPr>
-        <p:txBody xmlns:a="http://schemas.openxmlformats.org/drawingml/2006/main">
-          <a:bodyPr/>
-          <a:p/>
-        </p:txBody>
-      </p:sp>
-      <p:sp>
-        <p:nvSpPr>
-          <p:cNvPr id="10" name="label-context packet">
-            <a:extLst xmlns:a="http://schemas.openxmlformats.org/drawingml/2006/main">
-              <a:ext uri="{FF2B5EF4-FFF2-40B4-BE49-F238E27FC236}">
-                <a16:creationId xmlns:a16="http://schemas.microsoft.com/office/drawing/2014/main" id="{BC7717C6-487F-4FD5-AA11-8D61E43609A2}"/>
-              </a:ext>
-            </a:extLst>
-          </p:cNvPr>
-          <p:cNvSpPr>
-            <a:spLocks xmlns:a="http://schemas.openxmlformats.org/drawingml/2006/main" noGrp="1"/>
-          </p:cNvSpPr>
-          <p:nvPr/>
-        </p:nvSpPr>
-        <p:spPr>
-          <a:xfrm xmlns:a="http://schemas.openxmlformats.org/drawingml/2006/main">
-            <a:off x="3810000" y="3905250"/>
-            <a:ext cx="1905000" cy="361950"/>
-          </a:xfrm>
-          <a:prstGeom xmlns:a="http://schemas.openxmlformats.org/drawingml/2006/main" prst="rect">
-            <a:avLst/>
-          </a:prstGeom>
-          <a:solidFill xmlns:a="http://schemas.openxmlformats.org/drawingml/2006/main">
-            <a:srgbClr val="000000">
-              <a:alpha val="0"/>
-            </a:srgbClr>
-          </a:solidFill>
-          <a:ln xmlns:a="http://schemas.openxmlformats.org/drawingml/2006/main" w="0">
-            <a:solidFill>
-              <a:srgbClr val="000000">
-                <a:alpha val="0"/>
-              </a:srgbClr>
-            </a:solidFill>
-            <a:prstDash val="solid"/>
-          </a:ln>
-        </p:spPr>
-        <p:txBody>
-          <a:bodyPr xmlns:a="http://schemas.openxmlformats.org/drawingml/2006/main" lIns="0" tIns="0" rIns="0" bIns="0" anchor="ctr"/>
-          <a:lstStyle xmlns:a="http://schemas.openxmlformats.org/drawingml/2006/main"/>
-          <a:p xmlns:a="http://schemas.openxmlformats.org/drawingml/2006/main">
-            <a:pPr algn="ctr">
-              <a:defRPr sz="1125" b="0">
-                <a:solidFill>
-                  <a:srgbClr val="20262A"/>
-                </a:solidFill>
-                <a:latin typeface="Aptos"/>
-                <a:ea typeface="Aptos"/>
-                <a:cs typeface="Aptos"/>
-              </a:defRPr>
-            </a:pPr>
-            <a:r>
-              <a:rPr sz="1125" b="0">
-                <a:solidFill>
-                  <a:srgbClr val="20262A"/>
-                </a:solidFill>
-                <a:latin typeface="Aptos"/>
-                <a:ea typeface="Aptos"/>
-                <a:cs typeface="Aptos"/>
-              </a:rPr>
-              <a:t>context packet</a:t>
-            </a:r>
-          </a:p>
-        </p:txBody>
-      </p:sp>
-      <p:sp>
-        <p:nvSpPr>
-          <p:cNvPr id="11" name="line-h">
-            <a:extLst xmlns:a="http://schemas.openxmlformats.org/drawingml/2006/main">
-              <a:ext uri="{FF2B5EF4-FFF2-40B4-BE49-F238E27FC236}">
-                <a16:creationId xmlns:a16="http://schemas.microsoft.com/office/drawing/2014/main" id="{FA1B665C-0129-4C4B-85CF-EB439FDFC188}"/>
-              </a:ext>
-            </a:extLst>
-          </p:cNvPr>
-          <p:cNvSpPr>
-            <a:spLocks xmlns:a="http://schemas.openxmlformats.org/drawingml/2006/main" noGrp="1"/>
-          </p:cNvSpPr>
-          <p:nvPr/>
-        </p:nvSpPr>
-        <p:spPr>
-          <a:xfrm xmlns:a="http://schemas.openxmlformats.org/drawingml/2006/main">
-            <a:off x="2914650" y="4086225"/>
-            <a:ext cx="762000" cy="19050"/>
-          </a:xfrm>
-          <a:prstGeom xmlns:a="http://schemas.openxmlformats.org/drawingml/2006/main" prst="rect">
-            <a:avLst/>
-          </a:prstGeom>
-          <a:solidFill xmlns:a="http://schemas.openxmlformats.org/drawingml/2006/main">
-            <a:srgbClr val="A8A198"/>
-          </a:solidFill>
-          <a:ln xmlns:a="http://schemas.openxmlformats.org/drawingml/2006/main" w="0">
-            <a:solidFill>
-              <a:srgbClr val="A8A198"/>
-            </a:solidFill>
-            <a:prstDash val="solid"/>
-          </a:ln>
-        </p:spPr>
-        <p:txBody xmlns:a="http://schemas.openxmlformats.org/drawingml/2006/main">
-          <a:bodyPr/>
-          <a:p/>
-        </p:txBody>
-      </p:sp>
-      <p:sp>
-        <p:nvSpPr>
-          <p:cNvPr id="12" name="box-proposed operations">
-            <a:extLst xmlns:a="http://schemas.openxmlformats.org/drawingml/2006/main">
-              <a:ext uri="{FF2B5EF4-FFF2-40B4-BE49-F238E27FC236}">
-                <a16:creationId xmlns:a16="http://schemas.microsoft.com/office/drawing/2014/main" id="{50713F3E-2EA5-49A2-B283-FE6072CB55F5}"/>
-              </a:ext>
-            </a:extLst>
-          </p:cNvPr>
-          <p:cNvSpPr>
-            <a:spLocks xmlns:a="http://schemas.openxmlformats.org/drawingml/2006/main" noGrp="1"/>
-          </p:cNvSpPr>
-          <p:nvPr/>
-        </p:nvSpPr>
-        <p:spPr>
-          <a:xfrm xmlns:a="http://schemas.openxmlformats.org/drawingml/2006/main">
-            <a:off x="6610350" y="3790950"/>
-            <a:ext cx="2381250" cy="590550"/>
-          </a:xfrm>
-          <a:prstGeom xmlns:a="http://schemas.openxmlformats.org/drawingml/2006/main" prst="rect">
-            <a:avLst/>
-          </a:prstGeom>
-          <a:solidFill xmlns:a="http://schemas.openxmlformats.org/drawingml/2006/main">
-            <a:srgbClr val="DCE9EA"/>
-          </a:solidFill>
-          <a:ln xmlns:a="http://schemas.openxmlformats.org/drawingml/2006/main" w="11430">
-            <a:solidFill>
-              <a:srgbClr val="2F5F6F"/>
-            </a:solidFill>
-            <a:prstDash val="solid"/>
-          </a:ln>
-        </p:spPr>
-        <p:txBody xmlns:a="http://schemas.openxmlformats.org/drawingml/2006/main">
-          <a:bodyPr/>
-          <a:p/>
-        </p:txBody>
-      </p:sp>
-      <p:sp>
-        <p:nvSpPr>
-          <p:cNvPr id="13" name="label-proposed operations">
-            <a:extLst xmlns:a="http://schemas.openxmlformats.org/drawingml/2006/main">
-              <a:ext uri="{FF2B5EF4-FFF2-40B4-BE49-F238E27FC236}">
-                <a16:creationId xmlns:a16="http://schemas.microsoft.com/office/drawing/2014/main" id="{073909C2-E409-481D-AD0D-CA9FEC35B8A3}"/>
-              </a:ext>
-            </a:extLst>
-          </p:cNvPr>
-          <p:cNvSpPr>
-            <a:spLocks xmlns:a="http://schemas.openxmlformats.org/drawingml/2006/main" noGrp="1"/>
-          </p:cNvSpPr>
-          <p:nvPr/>
-        </p:nvSpPr>
-        <p:spPr>
-          <a:xfrm xmlns:a="http://schemas.openxmlformats.org/drawingml/2006/main">
-            <a:off x="6743700" y="3905250"/>
-            <a:ext cx="2114550" cy="361950"/>
-          </a:xfrm>
-          <a:prstGeom xmlns:a="http://schemas.openxmlformats.org/drawingml/2006/main" prst="rect">
-            <a:avLst/>
-          </a:prstGeom>
-          <a:solidFill xmlns:a="http://schemas.openxmlformats.org/drawingml/2006/main">
-            <a:srgbClr val="000000">
-              <a:alpha val="0"/>
-            </a:srgbClr>
-          </a:solidFill>
-          <a:ln xmlns:a="http://schemas.openxmlformats.org/drawingml/2006/main" w="0">
-            <a:solidFill>
-              <a:srgbClr val="000000">
-                <a:alpha val="0"/>
-              </a:srgbClr>
-            </a:solidFill>
-            <a:prstDash val="solid"/>
-          </a:ln>
-        </p:spPr>
-        <p:txBody>
-          <a:bodyPr xmlns:a="http://schemas.openxmlformats.org/drawingml/2006/main" lIns="0" tIns="0" rIns="0" bIns="0" anchor="ctr"/>
-          <a:lstStyle xmlns:a="http://schemas.openxmlformats.org/drawingml/2006/main"/>
-          <a:p xmlns:a="http://schemas.openxmlformats.org/drawingml/2006/main">
-            <a:pPr algn="ctr">
-              <a:defRPr sz="1125" b="1">
-                <a:solidFill>
-                  <a:srgbClr val="20262A"/>
-                </a:solidFill>
-                <a:latin typeface="Aptos"/>
-                <a:ea typeface="Aptos"/>
-                <a:cs typeface="Aptos"/>
-              </a:defRPr>
-            </a:pPr>
-            <a:r>
-              <a:rPr sz="1125" b="1">
-                <a:solidFill>
-                  <a:srgbClr val="20262A"/>
-                </a:solidFill>
-                <a:latin typeface="Aptos"/>
-                <a:ea typeface="Aptos"/>
-                <a:cs typeface="Aptos"/>
-              </a:rPr>
-              <a:t>proposed operations</a:t>
-            </a:r>
-          </a:p>
-        </p:txBody>
-      </p:sp>
-      <p:sp>
-        <p:nvSpPr>
-          <p:cNvPr id="14" name="line-h">
-            <a:extLst xmlns:a="http://schemas.openxmlformats.org/drawingml/2006/main">
-              <a:ext uri="{FF2B5EF4-FFF2-40B4-BE49-F238E27FC236}">
-                <a16:creationId xmlns:a16="http://schemas.microsoft.com/office/drawing/2014/main" id="{6A623131-72F4-489B-9CFD-F5920E53DDBF}"/>
-              </a:ext>
-            </a:extLst>
-          </p:cNvPr>
-          <p:cNvSpPr>
-            <a:spLocks xmlns:a="http://schemas.openxmlformats.org/drawingml/2006/main" noGrp="1"/>
-          </p:cNvSpPr>
-          <p:nvPr/>
-        </p:nvSpPr>
-        <p:spPr>
-          <a:xfrm xmlns:a="http://schemas.openxmlformats.org/drawingml/2006/main">
-            <a:off x="5848350" y="4086225"/>
-            <a:ext cx="762000" cy="19050"/>
-          </a:xfrm>
-          <a:prstGeom xmlns:a="http://schemas.openxmlformats.org/drawingml/2006/main" prst="rect">
-            <a:avLst/>
-          </a:prstGeom>
-          <a:solidFill xmlns:a="http://schemas.openxmlformats.org/drawingml/2006/main">
-            <a:srgbClr val="A8A198"/>
-          </a:solidFill>
-          <a:ln xmlns:a="http://schemas.openxmlformats.org/drawingml/2006/main" w="0">
-            <a:solidFill>
-              <a:srgbClr val="A8A198"/>
-            </a:solidFill>
-            <a:prstDash val="solid"/>
-          </a:ln>
-        </p:spPr>
-        <p:txBody xmlns:a="http://schemas.openxmlformats.org/drawingml/2006/main">
-          <a:bodyPr/>
-          <a:p/>
-        </p:txBody>
-      </p:sp>
-      <p:sp>
-        <p:nvSpPr>
-          <p:cNvPr id="15" name="box-reviewer decision">
-            <a:extLst xmlns:a="http://schemas.openxmlformats.org/drawingml/2006/main">
-              <a:ext uri="{FF2B5EF4-FFF2-40B4-BE49-F238E27FC236}">
-                <a16:creationId xmlns:a16="http://schemas.microsoft.com/office/drawing/2014/main" id="{30F82B85-F5F0-4561-A33E-BAD0A876D494}"/>
-              </a:ext>
-            </a:extLst>
-          </p:cNvPr>
-          <p:cNvSpPr>
-            <a:spLocks xmlns:a="http://schemas.openxmlformats.org/drawingml/2006/main" noGrp="1"/>
-          </p:cNvSpPr>
-          <p:nvPr/>
-        </p:nvSpPr>
-        <p:spPr>
-          <a:xfrm xmlns:a="http://schemas.openxmlformats.org/drawingml/2006/main">
-            <a:off x="9734550" y="3790950"/>
-            <a:ext cx="2095500" cy="590550"/>
-          </a:xfrm>
-          <a:prstGeom xmlns:a="http://schemas.openxmlformats.org/drawingml/2006/main" prst="rect">
-            <a:avLst/>
-          </a:prstGeom>
-          <a:solidFill xmlns:a="http://schemas.openxmlformats.org/drawingml/2006/main">
-            <a:srgbClr val="F7F6F1"/>
-          </a:solidFill>
-          <a:ln xmlns:a="http://schemas.openxmlformats.org/drawingml/2006/main" w="9525">
-            <a:solidFill>
-              <a:srgbClr val="E2DED4"/>
-            </a:solidFill>
-            <a:prstDash val="solid"/>
-          </a:ln>
-        </p:spPr>
-        <p:txBody xmlns:a="http://schemas.openxmlformats.org/drawingml/2006/main">
-          <a:bodyPr/>
-          <a:p/>
-        </p:txBody>
-      </p:sp>
-      <p:sp>
-        <p:nvSpPr>
-          <p:cNvPr id="16" name="label-reviewer decision">
-            <a:extLst xmlns:a="http://schemas.openxmlformats.org/drawingml/2006/main">
-              <a:ext uri="{FF2B5EF4-FFF2-40B4-BE49-F238E27FC236}">
-                <a16:creationId xmlns:a16="http://schemas.microsoft.com/office/drawing/2014/main" id="{D0FFFEBB-59AA-46E9-A616-0F2F4CF4F03F}"/>
-              </a:ext>
-            </a:extLst>
-          </p:cNvPr>
-          <p:cNvSpPr>
-            <a:spLocks xmlns:a="http://schemas.openxmlformats.org/drawingml/2006/main" noGrp="1"/>
-          </p:cNvSpPr>
-          <p:nvPr/>
-        </p:nvSpPr>
-        <p:spPr>
-          <a:xfrm xmlns:a="http://schemas.openxmlformats.org/drawingml/2006/main">
-            <a:off x="9867900" y="3905250"/>
-            <a:ext cx="1828800" cy="361950"/>
-          </a:xfrm>
-          <a:prstGeom xmlns:a="http://schemas.openxmlformats.org/drawingml/2006/main" prst="rect">
-            <a:avLst/>
-          </a:prstGeom>
-          <a:solidFill xmlns:a="http://schemas.openxmlformats.org/drawingml/2006/main">
-            <a:srgbClr val="000000">
-              <a:alpha val="0"/>
-            </a:srgbClr>
-          </a:solidFill>
-          <a:ln xmlns:a="http://schemas.openxmlformats.org/drawingml/2006/main" w="0">
-            <a:solidFill>
-              <a:srgbClr val="000000">
-                <a:alpha val="0"/>
-              </a:srgbClr>
-            </a:solidFill>
-            <a:prstDash val="solid"/>
-          </a:ln>
-        </p:spPr>
-        <p:txBody>
-          <a:bodyPr xmlns:a="http://schemas.openxmlformats.org/drawingml/2006/main" lIns="0" tIns="0" rIns="0" bIns="0" anchor="ctr"/>
-          <a:lstStyle xmlns:a="http://schemas.openxmlformats.org/drawingml/2006/main"/>
-          <a:p xmlns:a="http://schemas.openxmlformats.org/drawingml/2006/main">
-            <a:pPr algn="ctr">
-              <a:defRPr sz="1125" b="0">
-                <a:solidFill>
-                  <a:srgbClr val="697277"/>
-                </a:solidFill>
-                <a:latin typeface="Aptos"/>
-                <a:ea typeface="Aptos"/>
-                <a:cs typeface="Aptos"/>
-              </a:defRPr>
-            </a:pPr>
-            <a:r>
-              <a:rPr sz="1125" b="0">
-                <a:solidFill>
-                  <a:srgbClr val="697277"/>
-                </a:solidFill>
-                <a:latin typeface="Aptos"/>
-                <a:ea typeface="Aptos"/>
-                <a:cs typeface="Aptos"/>
-              </a:rPr>
-              <a:t>reviewer decision</a:t>
-            </a:r>
-          </a:p>
-        </p:txBody>
-      </p:sp>
-      <p:sp>
-        <p:nvSpPr>
-          <p:cNvPr id="17" name="">
-            <a:extLst xmlns:a="http://schemas.openxmlformats.org/drawingml/2006/main">
-              <a:ext uri="{FF2B5EF4-FFF2-40B4-BE49-F238E27FC236}">
-                <a16:creationId xmlns:a16="http://schemas.microsoft.com/office/drawing/2014/main" id="{B1B894F9-C554-48D2-8998-93AF795833C9}"/>
-              </a:ext>
-            </a:extLst>
-          </p:cNvPr>
-          <p:cNvSpPr>
-            <a:spLocks xmlns:a="http://schemas.openxmlformats.org/drawingml/2006/main" noGrp="1"/>
-          </p:cNvSpPr>
-          <p:nvPr/>
-        </p:nvSpPr>
-        <p:spPr>
-          <a:xfrm xmlns:a="http://schemas.openxmlformats.org/drawingml/2006/main">
-            <a:off x="6667500" y="4610100"/>
-            <a:ext cx="2286000" cy="704850"/>
-          </a:xfrm>
-          <a:prstGeom xmlns:a="http://schemas.openxmlformats.org/drawingml/2006/main" prst="rect">
-            <a:avLst/>
-          </a:prstGeom>
-          <a:solidFill xmlns:a="http://schemas.openxmlformats.org/drawingml/2006/main">
-            <a:srgbClr val="000000">
-              <a:alpha val="0"/>
-            </a:srgbClr>
-          </a:solidFill>
-          <a:ln xmlns:a="http://schemas.openxmlformats.org/drawingml/2006/main" w="0">
-            <a:solidFill>
-              <a:srgbClr val="000000">
-                <a:alpha val="0"/>
-              </a:srgbClr>
-            </a:solidFill>
-            <a:prstDash val="solid"/>
-          </a:ln>
-        </p:spPr>
-        <p:txBody>
-          <a:bodyPr xmlns:a="http://schemas.openxmlformats.org/drawingml/2006/main" lIns="0" tIns="0" rIns="0" bIns="0" anchor="ctr"/>
-          <a:lstStyle xmlns:a="http://schemas.openxmlformats.org/drawingml/2006/main"/>
-          <a:p xmlns:a="http://schemas.openxmlformats.org/drawingml/2006/main">
-            <a:pPr algn="ctr">
-              <a:defRPr sz="975" b="0">
-                <a:solidFill>
-                  <a:srgbClr val="697277"/>
-                </a:solidFill>
-                <a:latin typeface="Aptos"/>
-                <a:ea typeface="Aptos"/>
-                <a:cs typeface="Aptos"/>
-              </a:defRPr>
-            </a:pPr>
-            <a:r>
-              <a:rPr sz="975" b="0">
-                <a:solidFill>
-                  <a:srgbClr val="697277"/>
-                </a:solidFill>
-                <a:latin typeface="Aptos"/>
-                <a:ea typeface="Aptos"/>
-                <a:cs typeface="Aptos"/>
-              </a:rPr>
-              <a:t>link to question</a:t>
-            </a:r>
-          </a:p>
-          <a:p xmlns:a="http://schemas.openxmlformats.org/drawingml/2006/main">
-            <a:pPr algn="ctr">
-              <a:defRPr sz="975" b="0">
-                <a:solidFill>
-                  <a:srgbClr val="697277"/>
-                </a:solidFill>
-                <a:latin typeface="Aptos"/>
-                <a:ea typeface="Aptos"/>
-                <a:cs typeface="Aptos"/>
-              </a:defRPr>
-            </a:pPr>
-            <a:r>
-              <a:rPr sz="975" b="0">
-                <a:solidFill>
-                  <a:srgbClr val="697277"/>
-                </a:solidFill>
-                <a:latin typeface="Aptos"/>
-                <a:ea typeface="Aptos"/>
-                <a:cs typeface="Aptos"/>
-              </a:rPr>
-              <a:t>link dataset</a:t>
-            </a:r>
-          </a:p>
-          <a:p xmlns:a="http://schemas.openxmlformats.org/drawingml/2006/main">
-            <a:pPr algn="ctr">
-              <a:defRPr sz="975" b="0">
-                <a:solidFill>
-                  <a:srgbClr val="697277"/>
-                </a:solidFill>
-                <a:latin typeface="Aptos"/>
-                <a:ea typeface="Aptos"/>
-                <a:cs typeface="Aptos"/>
-              </a:defRPr>
-            </a:pPr>
-            <a:r>
-              <a:rPr sz="975" b="0">
-                <a:solidFill>
-                  <a:srgbClr val="697277"/>
-                </a:solidFill>
-                <a:latin typeface="Aptos"/>
-                <a:ea typeface="Aptos"/>
-                <a:cs typeface="Aptos"/>
-              </a:rPr>
-              <a:t>attach evidence</a:t>
-            </a:r>
-          </a:p>
-        </p:txBody>
-      </p:sp>
+      <p:pic xmlns:a="http://schemas.openxmlformats.org/drawingml/2006/main" xmlns:r="http://schemas.openxmlformats.org/officeDocument/2006/relationships">
+        <p:nvPicPr>
+          <p:cNvPr id="7" name="Picture 6" descr="capture-draft-op-link.png"/>
+          <p:cNvPicPr>
+            <a:picLocks noChangeAspect="1"/>
+          </p:cNvPicPr>
+          <p:nvPr/>
+        </p:nvPicPr>
+        <p:blipFill>
+          <a:blip r:embed="rId3"/>
+          <a:stretch>
+            <a:fillRect/>
+          </a:stretch>
+        </p:blipFill>
+        <p:spPr>
+          <a:xfrm>
+            <a:off x="3727859" y="2240280"/>
+            <a:ext cx="4705801" cy="3886200"/>
+          </a:xfrm>
+          <a:prstGeom prst="rect">
+            <a:avLst/>
+          </a:prstGeom>
+        </p:spPr>
+      </p:pic>
     </p:spTree>
     <p:extLst>
       <p:ext uri="{BB962C8B-B14F-4D97-AF65-F5344CB8AC3E}">
@@ -11197,631 +10253,30 @@
           </a:p>
         </p:txBody>
       </p:sp>
-      <p:sp>
-        <p:nvSpPr>
-          <p:cNvPr id="7" name="box-raw note">
-            <a:extLst xmlns:a="http://schemas.openxmlformats.org/drawingml/2006/main">
-              <a:ext uri="{FF2B5EF4-FFF2-40B4-BE49-F238E27FC236}">
-                <a16:creationId xmlns:a16="http://schemas.microsoft.com/office/drawing/2014/main" id="{DC29B2F6-F097-43F9-A046-D637BA43843F}"/>
-              </a:ext>
-            </a:extLst>
-          </p:cNvPr>
-          <p:cNvSpPr>
-            <a:spLocks xmlns:a="http://schemas.openxmlformats.org/drawingml/2006/main" noGrp="1"/>
-          </p:cNvSpPr>
-          <p:nvPr/>
-        </p:nvSpPr>
-        <p:spPr>
-          <a:xfrm xmlns:a="http://schemas.openxmlformats.org/drawingml/2006/main">
-            <a:off x="1009650" y="3790950"/>
-            <a:ext cx="1905000" cy="590550"/>
-          </a:xfrm>
-          <a:prstGeom xmlns:a="http://schemas.openxmlformats.org/drawingml/2006/main" prst="rect">
-            <a:avLst/>
-          </a:prstGeom>
-          <a:solidFill xmlns:a="http://schemas.openxmlformats.org/drawingml/2006/main">
-            <a:srgbClr val="FFFFFF"/>
-          </a:solidFill>
-          <a:ln xmlns:a="http://schemas.openxmlformats.org/drawingml/2006/main" w="11430">
-            <a:solidFill>
-              <a:srgbClr val="20262A"/>
-            </a:solidFill>
-            <a:prstDash val="solid"/>
-          </a:ln>
-        </p:spPr>
-        <p:txBody xmlns:a="http://schemas.openxmlformats.org/drawingml/2006/main">
-          <a:bodyPr/>
-          <a:p/>
-        </p:txBody>
-      </p:sp>
-      <p:sp>
-        <p:nvSpPr>
-          <p:cNvPr id="8" name="label-raw note">
-            <a:extLst xmlns:a="http://schemas.openxmlformats.org/drawingml/2006/main">
-              <a:ext uri="{FF2B5EF4-FFF2-40B4-BE49-F238E27FC236}">
-                <a16:creationId xmlns:a16="http://schemas.microsoft.com/office/drawing/2014/main" id="{4EE1718F-6BFC-4896-BE80-D6909BF30BB6}"/>
-              </a:ext>
-            </a:extLst>
-          </p:cNvPr>
-          <p:cNvSpPr>
-            <a:spLocks xmlns:a="http://schemas.openxmlformats.org/drawingml/2006/main" noGrp="1"/>
-          </p:cNvSpPr>
-          <p:nvPr/>
-        </p:nvSpPr>
-        <p:spPr>
-          <a:xfrm xmlns:a="http://schemas.openxmlformats.org/drawingml/2006/main">
-            <a:off x="1143000" y="3905250"/>
-            <a:ext cx="1638300" cy="361950"/>
-          </a:xfrm>
-          <a:prstGeom xmlns:a="http://schemas.openxmlformats.org/drawingml/2006/main" prst="rect">
-            <a:avLst/>
-          </a:prstGeom>
-          <a:solidFill xmlns:a="http://schemas.openxmlformats.org/drawingml/2006/main">
-            <a:srgbClr val="000000">
-              <a:alpha val="0"/>
-            </a:srgbClr>
-          </a:solidFill>
-          <a:ln xmlns:a="http://schemas.openxmlformats.org/drawingml/2006/main" w="0">
-            <a:solidFill>
-              <a:srgbClr val="000000">
-                <a:alpha val="0"/>
-              </a:srgbClr>
-            </a:solidFill>
-            <a:prstDash val="solid"/>
-          </a:ln>
-        </p:spPr>
-        <p:txBody>
-          <a:bodyPr xmlns:a="http://schemas.openxmlformats.org/drawingml/2006/main" lIns="0" tIns="0" rIns="0" bIns="0" anchor="ctr"/>
-          <a:lstStyle xmlns:a="http://schemas.openxmlformats.org/drawingml/2006/main"/>
-          <a:p xmlns:a="http://schemas.openxmlformats.org/drawingml/2006/main">
-            <a:pPr algn="ctr">
-              <a:defRPr sz="1125" b="0">
-                <a:solidFill>
-                  <a:srgbClr val="20262A"/>
-                </a:solidFill>
-                <a:latin typeface="Aptos"/>
-                <a:ea typeface="Aptos"/>
-                <a:cs typeface="Aptos"/>
-              </a:defRPr>
-            </a:pPr>
-            <a:r>
-              <a:rPr sz="1125" b="0">
-                <a:solidFill>
-                  <a:srgbClr val="20262A"/>
-                </a:solidFill>
-                <a:latin typeface="Aptos"/>
-                <a:ea typeface="Aptos"/>
-                <a:cs typeface="Aptos"/>
-              </a:rPr>
-              <a:t>raw note</a:t>
-            </a:r>
-          </a:p>
-        </p:txBody>
-      </p:sp>
-      <p:sp>
-        <p:nvSpPr>
-          <p:cNvPr id="9" name="box-context packet">
-            <a:extLst xmlns:a="http://schemas.openxmlformats.org/drawingml/2006/main">
-              <a:ext uri="{FF2B5EF4-FFF2-40B4-BE49-F238E27FC236}">
-                <a16:creationId xmlns:a16="http://schemas.microsoft.com/office/drawing/2014/main" id="{6F23399E-6540-4539-BB15-4CC42CA9189A}"/>
-              </a:ext>
-            </a:extLst>
-          </p:cNvPr>
-          <p:cNvSpPr>
-            <a:spLocks xmlns:a="http://schemas.openxmlformats.org/drawingml/2006/main" noGrp="1"/>
-          </p:cNvSpPr>
-          <p:nvPr/>
-        </p:nvSpPr>
-        <p:spPr>
-          <a:xfrm xmlns:a="http://schemas.openxmlformats.org/drawingml/2006/main">
-            <a:off x="3676650" y="3790950"/>
-            <a:ext cx="2171700" cy="590550"/>
-          </a:xfrm>
-          <a:prstGeom xmlns:a="http://schemas.openxmlformats.org/drawingml/2006/main" prst="rect">
-            <a:avLst/>
-          </a:prstGeom>
-          <a:solidFill xmlns:a="http://schemas.openxmlformats.org/drawingml/2006/main">
-            <a:srgbClr val="FFFFFF"/>
-          </a:solidFill>
-          <a:ln xmlns:a="http://schemas.openxmlformats.org/drawingml/2006/main" w="11430">
-            <a:solidFill>
-              <a:srgbClr val="20262A"/>
-            </a:solidFill>
-            <a:prstDash val="solid"/>
-          </a:ln>
-        </p:spPr>
-        <p:txBody xmlns:a="http://schemas.openxmlformats.org/drawingml/2006/main">
-          <a:bodyPr/>
-          <a:p/>
-        </p:txBody>
-      </p:sp>
-      <p:sp>
-        <p:nvSpPr>
-          <p:cNvPr id="10" name="label-context packet">
-            <a:extLst xmlns:a="http://schemas.openxmlformats.org/drawingml/2006/main">
-              <a:ext uri="{FF2B5EF4-FFF2-40B4-BE49-F238E27FC236}">
-                <a16:creationId xmlns:a16="http://schemas.microsoft.com/office/drawing/2014/main" id="{2987A798-8517-40FC-8A51-2438493CF853}"/>
-              </a:ext>
-            </a:extLst>
-          </p:cNvPr>
-          <p:cNvSpPr>
-            <a:spLocks xmlns:a="http://schemas.openxmlformats.org/drawingml/2006/main" noGrp="1"/>
-          </p:cNvSpPr>
-          <p:nvPr/>
-        </p:nvSpPr>
-        <p:spPr>
-          <a:xfrm xmlns:a="http://schemas.openxmlformats.org/drawingml/2006/main">
-            <a:off x="3810000" y="3905250"/>
-            <a:ext cx="1905000" cy="361950"/>
-          </a:xfrm>
-          <a:prstGeom xmlns:a="http://schemas.openxmlformats.org/drawingml/2006/main" prst="rect">
-            <a:avLst/>
-          </a:prstGeom>
-          <a:solidFill xmlns:a="http://schemas.openxmlformats.org/drawingml/2006/main">
-            <a:srgbClr val="000000">
-              <a:alpha val="0"/>
-            </a:srgbClr>
-          </a:solidFill>
-          <a:ln xmlns:a="http://schemas.openxmlformats.org/drawingml/2006/main" w="0">
-            <a:solidFill>
-              <a:srgbClr val="000000">
-                <a:alpha val="0"/>
-              </a:srgbClr>
-            </a:solidFill>
-            <a:prstDash val="solid"/>
-          </a:ln>
-        </p:spPr>
-        <p:txBody>
-          <a:bodyPr xmlns:a="http://schemas.openxmlformats.org/drawingml/2006/main" lIns="0" tIns="0" rIns="0" bIns="0" anchor="ctr"/>
-          <a:lstStyle xmlns:a="http://schemas.openxmlformats.org/drawingml/2006/main"/>
-          <a:p xmlns:a="http://schemas.openxmlformats.org/drawingml/2006/main">
-            <a:pPr algn="ctr">
-              <a:defRPr sz="1125" b="0">
-                <a:solidFill>
-                  <a:srgbClr val="20262A"/>
-                </a:solidFill>
-                <a:latin typeface="Aptos"/>
-                <a:ea typeface="Aptos"/>
-                <a:cs typeface="Aptos"/>
-              </a:defRPr>
-            </a:pPr>
-            <a:r>
-              <a:rPr sz="1125" b="0">
-                <a:solidFill>
-                  <a:srgbClr val="20262A"/>
-                </a:solidFill>
-                <a:latin typeface="Aptos"/>
-                <a:ea typeface="Aptos"/>
-                <a:cs typeface="Aptos"/>
-              </a:rPr>
-              <a:t>context packet</a:t>
-            </a:r>
-          </a:p>
-        </p:txBody>
-      </p:sp>
-      <p:sp>
-        <p:nvSpPr>
-          <p:cNvPr id="11" name="line-h">
-            <a:extLst xmlns:a="http://schemas.openxmlformats.org/drawingml/2006/main">
-              <a:ext uri="{FF2B5EF4-FFF2-40B4-BE49-F238E27FC236}">
-                <a16:creationId xmlns:a16="http://schemas.microsoft.com/office/drawing/2014/main" id="{98BB1A91-FA55-4F80-8A9E-4F532E6730E6}"/>
-              </a:ext>
-            </a:extLst>
-          </p:cNvPr>
-          <p:cNvSpPr>
-            <a:spLocks xmlns:a="http://schemas.openxmlformats.org/drawingml/2006/main" noGrp="1"/>
-          </p:cNvSpPr>
-          <p:nvPr/>
-        </p:nvSpPr>
-        <p:spPr>
-          <a:xfrm xmlns:a="http://schemas.openxmlformats.org/drawingml/2006/main">
-            <a:off x="2914650" y="4086225"/>
-            <a:ext cx="762000" cy="19050"/>
-          </a:xfrm>
-          <a:prstGeom xmlns:a="http://schemas.openxmlformats.org/drawingml/2006/main" prst="rect">
-            <a:avLst/>
-          </a:prstGeom>
-          <a:solidFill xmlns:a="http://schemas.openxmlformats.org/drawingml/2006/main">
-            <a:srgbClr val="A8A198"/>
-          </a:solidFill>
-          <a:ln xmlns:a="http://schemas.openxmlformats.org/drawingml/2006/main" w="0">
-            <a:solidFill>
-              <a:srgbClr val="A8A198"/>
-            </a:solidFill>
-            <a:prstDash val="solid"/>
-          </a:ln>
-        </p:spPr>
-        <p:txBody xmlns:a="http://schemas.openxmlformats.org/drawingml/2006/main">
-          <a:bodyPr/>
-          <a:p/>
-        </p:txBody>
-      </p:sp>
-      <p:sp>
-        <p:nvSpPr>
-          <p:cNvPr id="12" name="box-proposed operations">
-            <a:extLst xmlns:a="http://schemas.openxmlformats.org/drawingml/2006/main">
-              <a:ext uri="{FF2B5EF4-FFF2-40B4-BE49-F238E27FC236}">
-                <a16:creationId xmlns:a16="http://schemas.microsoft.com/office/drawing/2014/main" id="{99935A6B-9F5E-4D65-928D-8BFF2CDC2CE7}"/>
-              </a:ext>
-            </a:extLst>
-          </p:cNvPr>
-          <p:cNvSpPr>
-            <a:spLocks xmlns:a="http://schemas.openxmlformats.org/drawingml/2006/main" noGrp="1"/>
-          </p:cNvSpPr>
-          <p:nvPr/>
-        </p:nvSpPr>
-        <p:spPr>
-          <a:xfrm xmlns:a="http://schemas.openxmlformats.org/drawingml/2006/main">
-            <a:off x="6610350" y="3790950"/>
-            <a:ext cx="2381250" cy="590550"/>
-          </a:xfrm>
-          <a:prstGeom xmlns:a="http://schemas.openxmlformats.org/drawingml/2006/main" prst="rect">
-            <a:avLst/>
-          </a:prstGeom>
-          <a:solidFill xmlns:a="http://schemas.openxmlformats.org/drawingml/2006/main">
-            <a:srgbClr val="FFFFFF"/>
-          </a:solidFill>
-          <a:ln xmlns:a="http://schemas.openxmlformats.org/drawingml/2006/main" w="11430">
-            <a:solidFill>
-              <a:srgbClr val="20262A"/>
-            </a:solidFill>
-            <a:prstDash val="solid"/>
-          </a:ln>
-        </p:spPr>
-        <p:txBody xmlns:a="http://schemas.openxmlformats.org/drawingml/2006/main">
-          <a:bodyPr/>
-          <a:p/>
-        </p:txBody>
-      </p:sp>
-      <p:sp>
-        <p:nvSpPr>
-          <p:cNvPr id="13" name="label-proposed operations">
-            <a:extLst xmlns:a="http://schemas.openxmlformats.org/drawingml/2006/main">
-              <a:ext uri="{FF2B5EF4-FFF2-40B4-BE49-F238E27FC236}">
-                <a16:creationId xmlns:a16="http://schemas.microsoft.com/office/drawing/2014/main" id="{AE5BAA01-79E6-4E99-B967-CCF2DFBE713C}"/>
-              </a:ext>
-            </a:extLst>
-          </p:cNvPr>
-          <p:cNvSpPr>
-            <a:spLocks xmlns:a="http://schemas.openxmlformats.org/drawingml/2006/main" noGrp="1"/>
-          </p:cNvSpPr>
-          <p:nvPr/>
-        </p:nvSpPr>
-        <p:spPr>
-          <a:xfrm xmlns:a="http://schemas.openxmlformats.org/drawingml/2006/main">
-            <a:off x="6743700" y="3905250"/>
-            <a:ext cx="2114550" cy="361950"/>
-          </a:xfrm>
-          <a:prstGeom xmlns:a="http://schemas.openxmlformats.org/drawingml/2006/main" prst="rect">
-            <a:avLst/>
-          </a:prstGeom>
-          <a:solidFill xmlns:a="http://schemas.openxmlformats.org/drawingml/2006/main">
-            <a:srgbClr val="000000">
-              <a:alpha val="0"/>
-            </a:srgbClr>
-          </a:solidFill>
-          <a:ln xmlns:a="http://schemas.openxmlformats.org/drawingml/2006/main" w="0">
-            <a:solidFill>
-              <a:srgbClr val="000000">
-                <a:alpha val="0"/>
-              </a:srgbClr>
-            </a:solidFill>
-            <a:prstDash val="solid"/>
-          </a:ln>
-        </p:spPr>
-        <p:txBody>
-          <a:bodyPr xmlns:a="http://schemas.openxmlformats.org/drawingml/2006/main" lIns="0" tIns="0" rIns="0" bIns="0" anchor="ctr"/>
-          <a:lstStyle xmlns:a="http://schemas.openxmlformats.org/drawingml/2006/main"/>
-          <a:p xmlns:a="http://schemas.openxmlformats.org/drawingml/2006/main">
-            <a:pPr algn="ctr">
-              <a:defRPr sz="1125" b="0">
-                <a:solidFill>
-                  <a:srgbClr val="20262A"/>
-                </a:solidFill>
-                <a:latin typeface="Aptos"/>
-                <a:ea typeface="Aptos"/>
-                <a:cs typeface="Aptos"/>
-              </a:defRPr>
-            </a:pPr>
-            <a:r>
-              <a:rPr sz="1125" b="0">
-                <a:solidFill>
-                  <a:srgbClr val="20262A"/>
-                </a:solidFill>
-                <a:latin typeface="Aptos"/>
-                <a:ea typeface="Aptos"/>
-                <a:cs typeface="Aptos"/>
-              </a:rPr>
-              <a:t>proposed operations</a:t>
-            </a:r>
-          </a:p>
-        </p:txBody>
-      </p:sp>
-      <p:sp>
-        <p:nvSpPr>
-          <p:cNvPr id="14" name="line-h">
-            <a:extLst xmlns:a="http://schemas.openxmlformats.org/drawingml/2006/main">
-              <a:ext uri="{FF2B5EF4-FFF2-40B4-BE49-F238E27FC236}">
-                <a16:creationId xmlns:a16="http://schemas.microsoft.com/office/drawing/2014/main" id="{D487D970-5EA9-4B37-B7A4-B9A937615715}"/>
-              </a:ext>
-            </a:extLst>
-          </p:cNvPr>
-          <p:cNvSpPr>
-            <a:spLocks xmlns:a="http://schemas.openxmlformats.org/drawingml/2006/main" noGrp="1"/>
-          </p:cNvSpPr>
-          <p:nvPr/>
-        </p:nvSpPr>
-        <p:spPr>
-          <a:xfrm xmlns:a="http://schemas.openxmlformats.org/drawingml/2006/main">
-            <a:off x="5848350" y="4086225"/>
-            <a:ext cx="762000" cy="19050"/>
-          </a:xfrm>
-          <a:prstGeom xmlns:a="http://schemas.openxmlformats.org/drawingml/2006/main" prst="rect">
-            <a:avLst/>
-          </a:prstGeom>
-          <a:solidFill xmlns:a="http://schemas.openxmlformats.org/drawingml/2006/main">
-            <a:srgbClr val="A8A198"/>
-          </a:solidFill>
-          <a:ln xmlns:a="http://schemas.openxmlformats.org/drawingml/2006/main" w="0">
-            <a:solidFill>
-              <a:srgbClr val="A8A198"/>
-            </a:solidFill>
-            <a:prstDash val="solid"/>
-          </a:ln>
-        </p:spPr>
-        <p:txBody xmlns:a="http://schemas.openxmlformats.org/drawingml/2006/main">
-          <a:bodyPr/>
-          <a:p/>
-        </p:txBody>
-      </p:sp>
-      <p:sp>
-        <p:nvSpPr>
-          <p:cNvPr id="15" name="box-reviewer decision">
-            <a:extLst xmlns:a="http://schemas.openxmlformats.org/drawingml/2006/main">
-              <a:ext uri="{FF2B5EF4-FFF2-40B4-BE49-F238E27FC236}">
-                <a16:creationId xmlns:a16="http://schemas.microsoft.com/office/drawing/2014/main" id="{02B6BCBE-EB64-4A0A-A61C-192A473B4082}"/>
-              </a:ext>
-            </a:extLst>
-          </p:cNvPr>
-          <p:cNvSpPr>
-            <a:spLocks xmlns:a="http://schemas.openxmlformats.org/drawingml/2006/main" noGrp="1"/>
-          </p:cNvSpPr>
-          <p:nvPr/>
-        </p:nvSpPr>
-        <p:spPr>
-          <a:xfrm xmlns:a="http://schemas.openxmlformats.org/drawingml/2006/main">
-            <a:off x="9734550" y="3790950"/>
-            <a:ext cx="2095500" cy="590550"/>
-          </a:xfrm>
-          <a:prstGeom xmlns:a="http://schemas.openxmlformats.org/drawingml/2006/main" prst="rect">
-            <a:avLst/>
-          </a:prstGeom>
-          <a:solidFill xmlns:a="http://schemas.openxmlformats.org/drawingml/2006/main">
-            <a:srgbClr val="DCE9EA"/>
-          </a:solidFill>
-          <a:ln xmlns:a="http://schemas.openxmlformats.org/drawingml/2006/main" w="11430">
-            <a:solidFill>
-              <a:srgbClr val="2F5F6F"/>
-            </a:solidFill>
-            <a:prstDash val="solid"/>
-          </a:ln>
-        </p:spPr>
-        <p:txBody xmlns:a="http://schemas.openxmlformats.org/drawingml/2006/main">
-          <a:bodyPr/>
-          <a:p/>
-        </p:txBody>
-      </p:sp>
-      <p:sp>
-        <p:nvSpPr>
-          <p:cNvPr id="16" name="label-reviewer decision">
-            <a:extLst xmlns:a="http://schemas.openxmlformats.org/drawingml/2006/main">
-              <a:ext uri="{FF2B5EF4-FFF2-40B4-BE49-F238E27FC236}">
-                <a16:creationId xmlns:a16="http://schemas.microsoft.com/office/drawing/2014/main" id="{F78A1A20-18D3-4E9E-A4A7-8EA9302CC4B0}"/>
-              </a:ext>
-            </a:extLst>
-          </p:cNvPr>
-          <p:cNvSpPr>
-            <a:spLocks xmlns:a="http://schemas.openxmlformats.org/drawingml/2006/main" noGrp="1"/>
-          </p:cNvSpPr>
-          <p:nvPr/>
-        </p:nvSpPr>
-        <p:spPr>
-          <a:xfrm xmlns:a="http://schemas.openxmlformats.org/drawingml/2006/main">
-            <a:off x="9867900" y="3905250"/>
-            <a:ext cx="1828800" cy="361950"/>
-          </a:xfrm>
-          <a:prstGeom xmlns:a="http://schemas.openxmlformats.org/drawingml/2006/main" prst="rect">
-            <a:avLst/>
-          </a:prstGeom>
-          <a:solidFill xmlns:a="http://schemas.openxmlformats.org/drawingml/2006/main">
-            <a:srgbClr val="000000">
-              <a:alpha val="0"/>
-            </a:srgbClr>
-          </a:solidFill>
-          <a:ln xmlns:a="http://schemas.openxmlformats.org/drawingml/2006/main" w="0">
-            <a:solidFill>
-              <a:srgbClr val="000000">
-                <a:alpha val="0"/>
-              </a:srgbClr>
-            </a:solidFill>
-            <a:prstDash val="solid"/>
-          </a:ln>
-        </p:spPr>
-        <p:txBody>
-          <a:bodyPr xmlns:a="http://schemas.openxmlformats.org/drawingml/2006/main" lIns="0" tIns="0" rIns="0" bIns="0" anchor="ctr"/>
-          <a:lstStyle xmlns:a="http://schemas.openxmlformats.org/drawingml/2006/main"/>
-          <a:p xmlns:a="http://schemas.openxmlformats.org/drawingml/2006/main">
-            <a:pPr algn="ctr">
-              <a:defRPr sz="1125" b="1">
-                <a:solidFill>
-                  <a:srgbClr val="20262A"/>
-                </a:solidFill>
-                <a:latin typeface="Aptos"/>
-                <a:ea typeface="Aptos"/>
-                <a:cs typeface="Aptos"/>
-              </a:defRPr>
-            </a:pPr>
-            <a:r>
-              <a:rPr sz="1125" b="1">
-                <a:solidFill>
-                  <a:srgbClr val="20262A"/>
-                </a:solidFill>
-                <a:latin typeface="Aptos"/>
-                <a:ea typeface="Aptos"/>
-                <a:cs typeface="Aptos"/>
-              </a:rPr>
-              <a:t>reviewer decision</a:t>
-            </a:r>
-          </a:p>
-        </p:txBody>
-      </p:sp>
-      <p:sp>
-        <p:nvSpPr>
-          <p:cNvPr id="17" name="line-h">
-            <a:extLst xmlns:a="http://schemas.openxmlformats.org/drawingml/2006/main">
-              <a:ext uri="{FF2B5EF4-FFF2-40B4-BE49-F238E27FC236}">
-                <a16:creationId xmlns:a16="http://schemas.microsoft.com/office/drawing/2014/main" id="{8DF49BBE-1A39-4CAF-872D-1C44A0A65239}"/>
-              </a:ext>
-            </a:extLst>
-          </p:cNvPr>
-          <p:cNvSpPr>
-            <a:spLocks xmlns:a="http://schemas.openxmlformats.org/drawingml/2006/main" noGrp="1"/>
-          </p:cNvSpPr>
-          <p:nvPr/>
-        </p:nvSpPr>
-        <p:spPr>
-          <a:xfrm xmlns:a="http://schemas.openxmlformats.org/drawingml/2006/main">
-            <a:off x="8991600" y="4086225"/>
-            <a:ext cx="742950" cy="19050"/>
-          </a:xfrm>
-          <a:prstGeom xmlns:a="http://schemas.openxmlformats.org/drawingml/2006/main" prst="rect">
-            <a:avLst/>
-          </a:prstGeom>
-          <a:solidFill xmlns:a="http://schemas.openxmlformats.org/drawingml/2006/main">
-            <a:srgbClr val="A8A198"/>
-          </a:solidFill>
-          <a:ln xmlns:a="http://schemas.openxmlformats.org/drawingml/2006/main" w="0">
-            <a:solidFill>
-              <a:srgbClr val="A8A198"/>
-            </a:solidFill>
-            <a:prstDash val="solid"/>
-          </a:ln>
-        </p:spPr>
-        <p:txBody xmlns:a="http://schemas.openxmlformats.org/drawingml/2006/main">
-          <a:bodyPr/>
-          <a:p/>
-        </p:txBody>
-      </p:sp>
-      <p:sp>
-        <p:nvSpPr>
-          <p:cNvPr id="18" name="">
-            <a:extLst xmlns:a="http://schemas.openxmlformats.org/drawingml/2006/main">
-              <a:ext uri="{FF2B5EF4-FFF2-40B4-BE49-F238E27FC236}">
-                <a16:creationId xmlns:a16="http://schemas.microsoft.com/office/drawing/2014/main" id="{7B6C8A8E-1BC9-4327-B2E0-163D455EBC71}"/>
-              </a:ext>
-            </a:extLst>
-          </p:cNvPr>
-          <p:cNvSpPr>
-            <a:spLocks xmlns:a="http://schemas.openxmlformats.org/drawingml/2006/main" noGrp="1"/>
-          </p:cNvSpPr>
-          <p:nvPr/>
-        </p:nvSpPr>
-        <p:spPr>
-          <a:xfrm xmlns:a="http://schemas.openxmlformats.org/drawingml/2006/main">
-            <a:off x="6667500" y="4610100"/>
-            <a:ext cx="2286000" cy="704850"/>
-          </a:xfrm>
-          <a:prstGeom xmlns:a="http://schemas.openxmlformats.org/drawingml/2006/main" prst="rect">
-            <a:avLst/>
-          </a:prstGeom>
-          <a:solidFill xmlns:a="http://schemas.openxmlformats.org/drawingml/2006/main">
-            <a:srgbClr val="000000">
-              <a:alpha val="0"/>
-            </a:srgbClr>
-          </a:solidFill>
-          <a:ln xmlns:a="http://schemas.openxmlformats.org/drawingml/2006/main" w="0">
-            <a:solidFill>
-              <a:srgbClr val="000000">
-                <a:alpha val="0"/>
-              </a:srgbClr>
-            </a:solidFill>
-            <a:prstDash val="solid"/>
-          </a:ln>
-        </p:spPr>
-        <p:txBody>
-          <a:bodyPr xmlns:a="http://schemas.openxmlformats.org/drawingml/2006/main" lIns="0" tIns="0" rIns="0" bIns="0" anchor="ctr"/>
-          <a:lstStyle xmlns:a="http://schemas.openxmlformats.org/drawingml/2006/main"/>
-          <a:p xmlns:a="http://schemas.openxmlformats.org/drawingml/2006/main">
-            <a:pPr algn="ctr">
-              <a:defRPr sz="975" b="0">
-                <a:solidFill>
-                  <a:srgbClr val="697277"/>
-                </a:solidFill>
-                <a:latin typeface="Aptos"/>
-                <a:ea typeface="Aptos"/>
-                <a:cs typeface="Aptos"/>
-              </a:defRPr>
-            </a:pPr>
-            <a:r>
-              <a:rPr sz="975" b="0">
-                <a:solidFill>
-                  <a:srgbClr val="697277"/>
-                </a:solidFill>
-                <a:latin typeface="Aptos"/>
-                <a:ea typeface="Aptos"/>
-                <a:cs typeface="Aptos"/>
-              </a:rPr>
-              <a:t>link to question</a:t>
-            </a:r>
-          </a:p>
-          <a:p xmlns:a="http://schemas.openxmlformats.org/drawingml/2006/main">
-            <a:pPr algn="ctr">
-              <a:defRPr sz="975" b="0">
-                <a:solidFill>
-                  <a:srgbClr val="697277"/>
-                </a:solidFill>
-                <a:latin typeface="Aptos"/>
-                <a:ea typeface="Aptos"/>
-                <a:cs typeface="Aptos"/>
-              </a:defRPr>
-            </a:pPr>
-            <a:r>
-              <a:rPr sz="975" b="0">
-                <a:solidFill>
-                  <a:srgbClr val="697277"/>
-                </a:solidFill>
-                <a:latin typeface="Aptos"/>
-                <a:ea typeface="Aptos"/>
-                <a:cs typeface="Aptos"/>
-              </a:rPr>
-              <a:t>link dataset</a:t>
-            </a:r>
-          </a:p>
-          <a:p xmlns:a="http://schemas.openxmlformats.org/drawingml/2006/main">
-            <a:pPr algn="ctr">
-              <a:defRPr sz="975" b="0">
-                <a:solidFill>
-                  <a:srgbClr val="697277"/>
-                </a:solidFill>
-                <a:latin typeface="Aptos"/>
-                <a:ea typeface="Aptos"/>
-                <a:cs typeface="Aptos"/>
-              </a:defRPr>
-            </a:pPr>
-            <a:r>
-              <a:rPr sz="975" b="0">
-                <a:solidFill>
-                  <a:srgbClr val="697277"/>
-                </a:solidFill>
-                <a:latin typeface="Aptos"/>
-                <a:ea typeface="Aptos"/>
-                <a:cs typeface="Aptos"/>
-              </a:rPr>
-              <a:t>attach evidence</a:t>
-            </a:r>
-          </a:p>
-        </p:txBody>
-      </p:sp>
+      <p:pic xmlns:a="http://schemas.openxmlformats.org/drawingml/2006/main" xmlns:r="http://schemas.openxmlformats.org/officeDocument/2006/relationships">
+        <p:nvPicPr>
+          <p:cNvPr id="7" name="Picture 6" descr="capture-draft-op-evidence.png"/>
+          <p:cNvPicPr>
+            <a:picLocks noChangeAspect="1"/>
+          </p:cNvPicPr>
+          <p:nvPr/>
+        </p:nvPicPr>
+        <p:blipFill>
+          <a:blip r:embed="rId3"/>
+          <a:stretch>
+            <a:fillRect/>
+          </a:stretch>
+        </p:blipFill>
+        <p:spPr>
+          <a:xfrm>
+            <a:off x="3411609" y="2240280"/>
+            <a:ext cx="5338301" cy="3886200"/>
+          </a:xfrm>
+          <a:prstGeom prst="rect">
+            <a:avLst/>
+          </a:prstGeom>
+        </p:spPr>
+      </p:pic>
     </p:spTree>
     <p:extLst>
       <p:ext uri="{BB962C8B-B14F-4D97-AF65-F5344CB8AC3E}">
@@ -12172,441 +10627,30 @@
           </a:p>
         </p:txBody>
       </p:sp>
-      <p:sp>
-        <p:nvSpPr>
-          <p:cNvPr id="7" name="box-one project">
-            <a:extLst xmlns:a="http://schemas.openxmlformats.org/drawingml/2006/main">
-              <a:ext uri="{FF2B5EF4-FFF2-40B4-BE49-F238E27FC236}">
-                <a16:creationId xmlns:a16="http://schemas.microsoft.com/office/drawing/2014/main" id="{AC3FB2D1-6BED-4EA3-A624-9C7654067886}"/>
-              </a:ext>
-            </a:extLst>
-          </p:cNvPr>
-          <p:cNvSpPr>
-            <a:spLocks xmlns:a="http://schemas.openxmlformats.org/drawingml/2006/main" noGrp="1"/>
-          </p:cNvSpPr>
-          <p:nvPr/>
-        </p:nvSpPr>
-        <p:spPr>
-          <a:xfrm xmlns:a="http://schemas.openxmlformats.org/drawingml/2006/main">
-            <a:off x="1676400" y="3543300"/>
-            <a:ext cx="2266950" cy="647700"/>
-          </a:xfrm>
-          <a:prstGeom xmlns:a="http://schemas.openxmlformats.org/drawingml/2006/main" prst="rect">
-            <a:avLst/>
-          </a:prstGeom>
-          <a:solidFill xmlns:a="http://schemas.openxmlformats.org/drawingml/2006/main">
-            <a:srgbClr val="FFFFFF"/>
-          </a:solidFill>
-          <a:ln xmlns:a="http://schemas.openxmlformats.org/drawingml/2006/main" w="11430">
-            <a:solidFill>
-              <a:srgbClr val="20262A"/>
-            </a:solidFill>
-            <a:prstDash val="solid"/>
-          </a:ln>
-        </p:spPr>
-        <p:txBody xmlns:a="http://schemas.openxmlformats.org/drawingml/2006/main">
-          <a:bodyPr/>
-          <a:p/>
-        </p:txBody>
-      </p:sp>
-      <p:sp>
-        <p:nvSpPr>
-          <p:cNvPr id="8" name="label-one project">
-            <a:extLst xmlns:a="http://schemas.openxmlformats.org/drawingml/2006/main">
-              <a:ext uri="{FF2B5EF4-FFF2-40B4-BE49-F238E27FC236}">
-                <a16:creationId xmlns:a16="http://schemas.microsoft.com/office/drawing/2014/main" id="{47D5E28D-33BB-4E85-BD66-A7834F7F5184}"/>
-              </a:ext>
-            </a:extLst>
-          </p:cNvPr>
-          <p:cNvSpPr>
-            <a:spLocks xmlns:a="http://schemas.openxmlformats.org/drawingml/2006/main" noGrp="1"/>
-          </p:cNvSpPr>
-          <p:nvPr/>
-        </p:nvSpPr>
-        <p:spPr>
-          <a:xfrm xmlns:a="http://schemas.openxmlformats.org/drawingml/2006/main">
-            <a:off x="1809750" y="3657600"/>
-            <a:ext cx="2000250" cy="419100"/>
-          </a:xfrm>
-          <a:prstGeom xmlns:a="http://schemas.openxmlformats.org/drawingml/2006/main" prst="rect">
-            <a:avLst/>
-          </a:prstGeom>
-          <a:solidFill xmlns:a="http://schemas.openxmlformats.org/drawingml/2006/main">
-            <a:srgbClr val="000000">
-              <a:alpha val="0"/>
-            </a:srgbClr>
-          </a:solidFill>
-          <a:ln xmlns:a="http://schemas.openxmlformats.org/drawingml/2006/main" w="0">
-            <a:solidFill>
-              <a:srgbClr val="000000">
-                <a:alpha val="0"/>
-              </a:srgbClr>
-            </a:solidFill>
-            <a:prstDash val="solid"/>
-          </a:ln>
-        </p:spPr>
-        <p:txBody>
-          <a:bodyPr xmlns:a="http://schemas.openxmlformats.org/drawingml/2006/main" lIns="0" tIns="0" rIns="0" bIns="0" anchor="ctr" wrap="square"/>
-          <a:lstStyle xmlns:a="http://schemas.openxmlformats.org/drawingml/2006/main"/>
-          <a:p xmlns:a="http://schemas.openxmlformats.org/drawingml/2006/main">
-            <a:pPr algn="ctr">
-              <a:defRPr sz="1050" b="0">
-                <a:solidFill>
-                  <a:srgbClr val="20262A"/>
-                </a:solidFill>
-                <a:latin typeface="Aptos"/>
-                <a:ea typeface="Aptos"/>
-                <a:cs typeface="Aptos"/>
-              </a:defRPr>
-            </a:pPr>
-            <a:r>
-              <a:rPr sz="1050" b="0">
-                <a:solidFill>
-                  <a:srgbClr val="20262A"/>
-                </a:solidFill>
-                <a:latin typeface="Aptos"/>
-              </a:rPr>
-              <a:t>AL-gain project</a:t>
-            </a:r>
-          </a:p>
-        </p:txBody>
-      </p:sp>
-      <p:sp>
-        <p:nvSpPr>
-          <p:cNvPr id="9" name="box-question hierarchy">
-            <a:extLst xmlns:a="http://schemas.openxmlformats.org/drawingml/2006/main">
-              <a:ext uri="{FF2B5EF4-FFF2-40B4-BE49-F238E27FC236}">
-                <a16:creationId xmlns:a16="http://schemas.microsoft.com/office/drawing/2014/main" id="{603BF524-4E71-4606-97C5-888D224414E2}"/>
-              </a:ext>
-            </a:extLst>
-          </p:cNvPr>
-          <p:cNvSpPr>
-            <a:spLocks xmlns:a="http://schemas.openxmlformats.org/drawingml/2006/main" noGrp="1"/>
-          </p:cNvSpPr>
-          <p:nvPr/>
-        </p:nvSpPr>
-        <p:spPr>
-          <a:xfrm xmlns:a="http://schemas.openxmlformats.org/drawingml/2006/main">
-            <a:off x="4667250" y="3543300"/>
-            <a:ext cx="2647950" cy="647700"/>
-          </a:xfrm>
-          <a:prstGeom xmlns:a="http://schemas.openxmlformats.org/drawingml/2006/main" prst="rect">
-            <a:avLst/>
-          </a:prstGeom>
-          <a:solidFill xmlns:a="http://schemas.openxmlformats.org/drawingml/2006/main">
-            <a:srgbClr val="DCE9EA"/>
-          </a:solidFill>
-          <a:ln xmlns:a="http://schemas.openxmlformats.org/drawingml/2006/main" w="11430">
-            <a:solidFill>
-              <a:srgbClr val="2F5F6F"/>
-            </a:solidFill>
-            <a:prstDash val="solid"/>
-          </a:ln>
-        </p:spPr>
-        <p:txBody xmlns:a="http://schemas.openxmlformats.org/drawingml/2006/main">
-          <a:bodyPr/>
-          <a:p/>
-        </p:txBody>
-      </p:sp>
-      <p:sp>
-        <p:nvSpPr>
-          <p:cNvPr id="10" name="label-question hierarchy">
-            <a:extLst xmlns:a="http://schemas.openxmlformats.org/drawingml/2006/main">
-              <a:ext uri="{FF2B5EF4-FFF2-40B4-BE49-F238E27FC236}">
-                <a16:creationId xmlns:a16="http://schemas.microsoft.com/office/drawing/2014/main" id="{9F636DD0-6B0C-4C7B-8049-40D5ABCFEE2F}"/>
-              </a:ext>
-            </a:extLst>
-          </p:cNvPr>
-          <p:cNvSpPr>
-            <a:spLocks xmlns:a="http://schemas.openxmlformats.org/drawingml/2006/main" noGrp="1"/>
-          </p:cNvSpPr>
-          <p:nvPr/>
-        </p:nvSpPr>
-        <p:spPr>
-          <a:xfrm xmlns:a="http://schemas.openxmlformats.org/drawingml/2006/main">
-            <a:off x="4800600" y="3657600"/>
-            <a:ext cx="2381250" cy="419100"/>
-          </a:xfrm>
-          <a:prstGeom xmlns:a="http://schemas.openxmlformats.org/drawingml/2006/main" prst="rect">
-            <a:avLst/>
-          </a:prstGeom>
-          <a:solidFill xmlns:a="http://schemas.openxmlformats.org/drawingml/2006/main">
-            <a:srgbClr val="000000">
-              <a:alpha val="0"/>
-            </a:srgbClr>
-          </a:solidFill>
-          <a:ln xmlns:a="http://schemas.openxmlformats.org/drawingml/2006/main" w="0">
-            <a:solidFill>
-              <a:srgbClr val="000000">
-                <a:alpha val="0"/>
-              </a:srgbClr>
-            </a:solidFill>
-            <a:prstDash val="solid"/>
-          </a:ln>
-        </p:spPr>
-        <p:txBody>
-          <a:bodyPr xmlns:a="http://schemas.openxmlformats.org/drawingml/2006/main" lIns="0" tIns="0" rIns="0" bIns="0" anchor="ctr" wrap="square"/>
-          <a:lstStyle xmlns:a="http://schemas.openxmlformats.org/drawingml/2006/main"/>
-          <a:p xmlns:a="http://schemas.openxmlformats.org/drawingml/2006/main">
-            <a:pPr algn="ctr">
-              <a:defRPr sz="1050" b="1">
-                <a:solidFill>
-                  <a:srgbClr val="20262A"/>
-                </a:solidFill>
-                <a:latin typeface="Aptos"/>
-                <a:ea typeface="Aptos"/>
-                <a:cs typeface="Aptos"/>
-              </a:defRPr>
-            </a:pPr>
-            <a:r>
-              <a:rPr sz="1050" b="1">
-                <a:solidFill>
-                  <a:srgbClr val="20262A"/>
-                </a:solidFill>
-                <a:latin typeface="Aptos"/>
-              </a:rPr>
-              <a:t>superseded → 2 sub-questions</a:t>
-            </a:r>
-          </a:p>
-        </p:txBody>
-      </p:sp>
-      <p:sp>
-        <p:nvSpPr>
-          <p:cNvPr id="11" name="box-one result">
-            <a:extLst xmlns:a="http://schemas.openxmlformats.org/drawingml/2006/main">
-              <a:ext uri="{FF2B5EF4-FFF2-40B4-BE49-F238E27FC236}">
-                <a16:creationId xmlns:a16="http://schemas.microsoft.com/office/drawing/2014/main" id="{E94C3B52-D86E-4012-947B-44A7372784C5}"/>
-              </a:ext>
-            </a:extLst>
-          </p:cNvPr>
-          <p:cNvSpPr>
-            <a:spLocks xmlns:a="http://schemas.openxmlformats.org/drawingml/2006/main" noGrp="1"/>
-          </p:cNvSpPr>
-          <p:nvPr/>
-        </p:nvSpPr>
-        <p:spPr>
-          <a:xfrm xmlns:a="http://schemas.openxmlformats.org/drawingml/2006/main">
-            <a:off x="8039100" y="3543300"/>
-            <a:ext cx="2190750" cy="647700"/>
-          </a:xfrm>
-          <a:prstGeom xmlns:a="http://schemas.openxmlformats.org/drawingml/2006/main" prst="rect">
-            <a:avLst/>
-          </a:prstGeom>
-          <a:solidFill xmlns:a="http://schemas.openxmlformats.org/drawingml/2006/main">
-            <a:srgbClr val="FFFFFF"/>
-          </a:solidFill>
-          <a:ln xmlns:a="http://schemas.openxmlformats.org/drawingml/2006/main" w="11430">
-            <a:solidFill>
-              <a:srgbClr val="20262A"/>
-            </a:solidFill>
-            <a:prstDash val="solid"/>
-          </a:ln>
-        </p:spPr>
-        <p:txBody xmlns:a="http://schemas.openxmlformats.org/drawingml/2006/main">
-          <a:bodyPr/>
-          <a:p/>
-        </p:txBody>
-      </p:sp>
-      <p:sp>
-        <p:nvSpPr>
-          <p:cNvPr id="12" name="label-one result">
-            <a:extLst xmlns:a="http://schemas.openxmlformats.org/drawingml/2006/main">
-              <a:ext uri="{FF2B5EF4-FFF2-40B4-BE49-F238E27FC236}">
-                <a16:creationId xmlns:a16="http://schemas.microsoft.com/office/drawing/2014/main" id="{32748925-9AFE-4CB6-B34D-63CB96B2524A}"/>
-              </a:ext>
-            </a:extLst>
-          </p:cNvPr>
-          <p:cNvSpPr>
-            <a:spLocks xmlns:a="http://schemas.openxmlformats.org/drawingml/2006/main" noGrp="1"/>
-          </p:cNvSpPr>
-          <p:nvPr/>
-        </p:nvSpPr>
-        <p:spPr>
-          <a:xfrm xmlns:a="http://schemas.openxmlformats.org/drawingml/2006/main">
-            <a:off x="8172450" y="3657600"/>
-            <a:ext cx="1924050" cy="419100"/>
-          </a:xfrm>
-          <a:prstGeom xmlns:a="http://schemas.openxmlformats.org/drawingml/2006/main" prst="rect">
-            <a:avLst/>
-          </a:prstGeom>
-          <a:solidFill xmlns:a="http://schemas.openxmlformats.org/drawingml/2006/main">
-            <a:srgbClr val="000000">
-              <a:alpha val="0"/>
-            </a:srgbClr>
-          </a:solidFill>
-          <a:ln xmlns:a="http://schemas.openxmlformats.org/drawingml/2006/main" w="0">
-            <a:solidFill>
-              <a:srgbClr val="000000">
-                <a:alpha val="0"/>
-              </a:srgbClr>
-            </a:solidFill>
-            <a:prstDash val="solid"/>
-          </a:ln>
-        </p:spPr>
-        <p:txBody>
-          <a:bodyPr xmlns:a="http://schemas.openxmlformats.org/drawingml/2006/main" lIns="0" tIns="0" rIns="0" bIns="0" anchor="ctr" wrap="square"/>
-          <a:lstStyle xmlns:a="http://schemas.openxmlformats.org/drawingml/2006/main"/>
-          <a:p xmlns:a="http://schemas.openxmlformats.org/drawingml/2006/main">
-            <a:pPr algn="ctr">
-              <a:defRPr sz="1050" b="0">
-                <a:solidFill>
-                  <a:srgbClr val="20262A"/>
-                </a:solidFill>
-                <a:latin typeface="Aptos"/>
-                <a:ea typeface="Aptos"/>
-                <a:cs typeface="Aptos"/>
-              </a:defRPr>
-            </a:pPr>
-            <a:r>
-              <a:rPr sz="1050" b="0">
-                <a:solidFill>
-                  <a:srgbClr val="20262A"/>
-                </a:solidFill>
-                <a:latin typeface="Aptos"/>
-              </a:rPr>
-              <a:t>Fig 3b</a:t>
-            </a:r>
-          </a:p>
-        </p:txBody>
-      </p:sp>
-      <p:sp>
-        <p:nvSpPr>
-          <p:cNvPr id="13" name="line-h">
-            <a:extLst xmlns:a="http://schemas.openxmlformats.org/drawingml/2006/main">
-              <a:ext uri="{FF2B5EF4-FFF2-40B4-BE49-F238E27FC236}">
-                <a16:creationId xmlns:a16="http://schemas.microsoft.com/office/drawing/2014/main" id="{D7118F78-65F1-47A4-AB74-B4931CADA2B0}"/>
-              </a:ext>
-            </a:extLst>
-          </p:cNvPr>
-          <p:cNvSpPr>
-            <a:spLocks xmlns:a="http://schemas.openxmlformats.org/drawingml/2006/main" noGrp="1"/>
-          </p:cNvSpPr>
-          <p:nvPr/>
-        </p:nvSpPr>
-        <p:spPr>
-          <a:xfrm xmlns:a="http://schemas.openxmlformats.org/drawingml/2006/main">
-            <a:off x="3943350" y="3867150"/>
-            <a:ext cx="723900" cy="19050"/>
-          </a:xfrm>
-          <a:prstGeom xmlns:a="http://schemas.openxmlformats.org/drawingml/2006/main" prst="rect">
-            <a:avLst/>
-          </a:prstGeom>
-          <a:solidFill xmlns:a="http://schemas.openxmlformats.org/drawingml/2006/main">
-            <a:srgbClr val="A8A198"/>
-          </a:solidFill>
-          <a:ln xmlns:a="http://schemas.openxmlformats.org/drawingml/2006/main" w="0">
-            <a:solidFill>
-              <a:srgbClr val="A8A198"/>
-            </a:solidFill>
-            <a:prstDash val="solid"/>
-          </a:ln>
-        </p:spPr>
-        <p:txBody xmlns:a="http://schemas.openxmlformats.org/drawingml/2006/main">
-          <a:bodyPr/>
-          <a:p/>
-        </p:txBody>
-      </p:sp>
-      <p:sp>
-        <p:nvSpPr>
-          <p:cNvPr id="14" name="line-h">
-            <a:extLst xmlns:a="http://schemas.openxmlformats.org/drawingml/2006/main">
-              <a:ext uri="{FF2B5EF4-FFF2-40B4-BE49-F238E27FC236}">
-                <a16:creationId xmlns:a16="http://schemas.microsoft.com/office/drawing/2014/main" id="{58AAAB16-242A-4112-85D8-1273784BF0E8}"/>
-              </a:ext>
-            </a:extLst>
-          </p:cNvPr>
-          <p:cNvSpPr>
-            <a:spLocks xmlns:a="http://schemas.openxmlformats.org/drawingml/2006/main" noGrp="1"/>
-          </p:cNvSpPr>
-          <p:nvPr/>
-        </p:nvSpPr>
-        <p:spPr>
-          <a:xfrm xmlns:a="http://schemas.openxmlformats.org/drawingml/2006/main">
-            <a:off x="7315200" y="3867150"/>
-            <a:ext cx="723900" cy="19050"/>
-          </a:xfrm>
-          <a:prstGeom xmlns:a="http://schemas.openxmlformats.org/drawingml/2006/main" prst="rect">
-            <a:avLst/>
-          </a:prstGeom>
-          <a:solidFill xmlns:a="http://schemas.openxmlformats.org/drawingml/2006/main">
-            <a:srgbClr val="A8A198"/>
-          </a:solidFill>
-          <a:ln xmlns:a="http://schemas.openxmlformats.org/drawingml/2006/main" w="0">
-            <a:solidFill>
-              <a:srgbClr val="A8A198"/>
-            </a:solidFill>
-            <a:prstDash val="solid"/>
-          </a:ln>
-        </p:spPr>
-        <p:txBody xmlns:a="http://schemas.openxmlformats.org/drawingml/2006/main">
-          <a:bodyPr/>
-          <a:p/>
-        </p:txBody>
-      </p:sp>
-      <p:sp>
-        <p:nvSpPr>
-          <p:cNvPr id="15" name="">
-            <a:extLst xmlns:a="http://schemas.openxmlformats.org/drawingml/2006/main">
-              <a:ext uri="{FF2B5EF4-FFF2-40B4-BE49-F238E27FC236}">
-                <a16:creationId xmlns:a16="http://schemas.microsoft.com/office/drawing/2014/main" id="{B566F625-C7D9-4257-A8D2-48DBEE610277}"/>
-              </a:ext>
-            </a:extLst>
-          </p:cNvPr>
-          <p:cNvSpPr>
-            <a:spLocks xmlns:a="http://schemas.openxmlformats.org/drawingml/2006/main" noGrp="1"/>
-          </p:cNvSpPr>
-          <p:nvPr/>
-        </p:nvSpPr>
-        <p:spPr>
-          <a:xfrm xmlns:a="http://schemas.openxmlformats.org/drawingml/2006/main">
-            <a:off x="1676400" y="4781550"/>
-            <a:ext cx="8572500" cy="323850"/>
-          </a:xfrm>
-          <a:prstGeom xmlns:a="http://schemas.openxmlformats.org/drawingml/2006/main" prst="rect">
-            <a:avLst/>
-          </a:prstGeom>
-          <a:solidFill xmlns:a="http://schemas.openxmlformats.org/drawingml/2006/main">
-            <a:srgbClr val="000000">
-              <a:alpha val="0"/>
-            </a:srgbClr>
-          </a:solidFill>
-          <a:ln xmlns:a="http://schemas.openxmlformats.org/drawingml/2006/main" w="0">
-            <a:solidFill>
-              <a:srgbClr val="000000">
-                <a:alpha val="0"/>
-              </a:srgbClr>
-            </a:solidFill>
-            <a:prstDash val="solid"/>
-          </a:ln>
-        </p:spPr>
-        <p:txBody>
-          <a:bodyPr xmlns:a="http://schemas.openxmlformats.org/drawingml/2006/main" lIns="0" tIns="0" rIns="0" bIns="0" anchor="ctr"/>
-          <a:lstStyle xmlns:a="http://schemas.openxmlformats.org/drawingml/2006/main"/>
-          <a:p xmlns:a="http://schemas.openxmlformats.org/drawingml/2006/main">
-            <a:pPr algn="ctr">
-              <a:defRPr sz="1125" b="0">
-                <a:solidFill>
-                  <a:srgbClr val="20262A"/>
-                </a:solidFill>
-                <a:latin typeface="Aptos"/>
-                <a:ea typeface="Aptos"/>
-                <a:cs typeface="Aptos"/>
-              </a:defRPr>
-            </a:pPr>
-            <a:r>
-              <a:rPr sz="1125" b="0">
-                <a:solidFill>
-                  <a:srgbClr val="20262A"/>
-                </a:solidFill>
-                <a:latin typeface="Aptos"/>
-                <a:ea typeface="Aptos"/>
-                <a:cs typeface="Aptos"/>
-              </a:rPr>
-              <a:t>Discussion: which project is suitable, what capture friction matters, and what context assistants need.</a:t>
-            </a:r>
-          </a:p>
-        </p:txBody>
-      </p:sp>
+      <p:pic xmlns:a="http://schemas.openxmlformats.org/drawingml/2006/main" xmlns:r="http://schemas.openxmlformats.org/officeDocument/2006/relationships">
+        <p:nvPicPr>
+          <p:cNvPr id="7" name="Picture 6" descr="project-graph-full.png"/>
+          <p:cNvPicPr>
+            <a:picLocks noChangeAspect="1"/>
+          </p:cNvPicPr>
+          <p:nvPr/>
+        </p:nvPicPr>
+        <p:blipFill>
+          <a:blip r:embed="rId3"/>
+          <a:stretch>
+            <a:fillRect/>
+          </a:stretch>
+        </p:blipFill>
+        <p:spPr>
+          <a:xfrm>
+            <a:off x="3692853" y="2240280"/>
+            <a:ext cx="4775812" cy="3886200"/>
+          </a:xfrm>
+          <a:prstGeom prst="rect">
+            <a:avLst/>
+          </a:prstGeom>
+        </p:spPr>
+      </p:pic>
     </p:spTree>
     <p:extLst>
       <p:ext uri="{BB962C8B-B14F-4D97-AF65-F5344CB8AC3E}">
